--- a/skills/presentation-template-library/skills/artifact-template-blueprint-lecture/assets/reference.pptx
+++ b/skills/presentation-template-library/skills/artifact-template-blueprint-lecture/assets/reference.pptx
@@ -400,8 +400,8 @@
           <p:nvPr/>
         </p:nvPicPr>
         <p:blipFill>
-          <a:blip xmlns:r="http://schemas.openxmlformats.org/officeDocument/2006/relationships" xmlns:a="http://schemas.openxmlformats.org/drawingml/2006/main" r:embed="rIdOfficeKitImage8bca39c9b7ba070f_1"/>
-          <a:srcRect xmlns:a="http://schemas.openxmlformats.org/drawingml/2006/main" l="0" t="34171" r="0" b="34171"/>
+          <a:blip xmlns:r="http://schemas.openxmlformats.org/officeDocument/2006/relationships" xmlns:a="http://schemas.openxmlformats.org/drawingml/2006/main" r:embed="rIdOfficeKitImaged71bfa074cda59bb_1"/>
+          <a:srcRect xmlns:a="http://schemas.openxmlformats.org/drawingml/2006/main" l="0" t="34180" r="0" b="34180"/>
           <a:stretch xmlns:a="http://schemas.openxmlformats.org/drawingml/2006/main">
             <a:fillRect/>
           </a:stretch>
@@ -1201,12 +1201,25 @@
           <a:chExt cx="0" cy="0"/>
         </a:xfrm>
       </p:grpSpPr>
-      <p:sp>
-        <p:nvSpPr>
-          <p:cNvPr id="2" name="background"/>
-          <p:cNvSpPr/>
-          <p:nvPr/>
-        </p:nvSpPr>
+      <p:pic>
+        <p:nvPicPr>
+          <p:cNvPr id="2" name="argument-visual-field">
+            <a:extLst xmlns:a="http://schemas.openxmlformats.org/drawingml/2006/main">
+              <a:ext uri="{C183D7F6-B498-43B3-948B-1728B52AA6E4}">
+                <adec:decorative xmlns:adec="http://schemas.microsoft.com/office/drawing/2017/decorative" val="1"/>
+              </a:ext>
+            </a:extLst>
+          </p:cNvPr>
+          <p:cNvPicPr/>
+          <p:nvPr/>
+        </p:nvPicPr>
+        <p:blipFill>
+          <a:blip xmlns:r="http://schemas.openxmlformats.org/officeDocument/2006/relationships" xmlns:a="http://schemas.openxmlformats.org/drawingml/2006/main" r:embed="rIdOfficeKitImage6af8c9b5dff6e3a3_1"/>
+          <a:srcRect xmlns:a="http://schemas.openxmlformats.org/drawingml/2006/main" l="0" t="34171" r="0" b="34171"/>
+          <a:stretch xmlns:a="http://schemas.openxmlformats.org/drawingml/2006/main">
+            <a:fillRect/>
+          </a:stretch>
+        </p:blipFill>
         <p:spPr>
           <a:xfrm xmlns:a="http://schemas.openxmlformats.org/drawingml/2006/main">
             <a:off x="0" y="0"/>
@@ -1215,8 +1228,26 @@
           <a:prstGeom xmlns:a="http://schemas.openxmlformats.org/drawingml/2006/main" prst="rect">
             <a:avLst/>
           </a:prstGeom>
+        </p:spPr>
+      </p:pic>
+      <p:sp>
+        <p:nvSpPr>
+          <p:cNvPr id="3" name="argument-paper-scrim"/>
+          <p:cNvSpPr/>
+          <p:nvPr/>
+        </p:nvSpPr>
+        <p:spPr>
+          <a:xfrm xmlns:a="http://schemas.openxmlformats.org/drawingml/2006/main">
+            <a:off x="0" y="0"/>
+            <a:ext cx="7429500" cy="8572500"/>
+          </a:xfrm>
+          <a:prstGeom xmlns:a="http://schemas.openxmlformats.org/drawingml/2006/main" prst="rect">
+            <a:avLst/>
+          </a:prstGeom>
           <a:solidFill xmlns:a="http://schemas.openxmlformats.org/drawingml/2006/main">
-            <a:srgbClr val="F8FAFC"/>
+            <a:srgbClr val="F8FAFC">
+              <a:alpha val="96000"/>
+            </a:srgbClr>
           </a:solidFill>
           <a:ln xmlns:a="http://schemas.openxmlformats.org/drawingml/2006/main" w="0">
             <a:solidFill>
@@ -1239,7 +1270,7 @@
       </p:sp>
       <p:sp>
         <p:nvSpPr>
-          <p:cNvPr id="3" name="argument-top-rule"/>
+          <p:cNvPr id="4" name="argument-top-rule"/>
           <p:cNvSpPr/>
           <p:nvPr/>
         </p:nvSpPr>
@@ -1273,7 +1304,7 @@
       </p:sp>
       <p:sp>
         <p:nvSpPr>
-          <p:cNvPr id="4" name="BLUEPRINT LECTURE · ARGUMENT"/>
+          <p:cNvPr id="5" name="BLUEPRINT LECTURE · ARGUMENT"/>
           <p:cNvSpPr txBox="1"/>
           <p:nvPr/>
         </p:nvSpPr>
@@ -1310,14 +1341,14 @@
       </p:sp>
       <p:sp>
         <p:nvSpPr>
-          <p:cNvPr id="5" name="argument-title"/>
+          <p:cNvPr id="6" name="argument-title"/>
           <p:cNvSpPr txBox="1"/>
           <p:nvPr/>
         </p:nvSpPr>
         <p:spPr>
           <a:xfrm xmlns:a="http://schemas.openxmlformats.org/drawingml/2006/main">
             <a:off x="914400" y="1314450"/>
-            <a:ext cx="11811000" cy="552450"/>
+            <a:ext cx="6286500" cy="552450"/>
           </a:xfrm>
           <a:prstGeom xmlns:a="http://schemas.openxmlformats.org/drawingml/2006/main" prst="rect">
             <a:avLst/>
@@ -1347,14 +1378,14 @@
       </p:sp>
       <p:sp>
         <p:nvSpPr>
-          <p:cNvPr id="6" name="argument-basis"/>
+          <p:cNvPr id="7" name="argument-basis"/>
           <p:cNvSpPr txBox="1"/>
           <p:nvPr/>
         </p:nvSpPr>
         <p:spPr>
           <a:xfrm xmlns:a="http://schemas.openxmlformats.org/drawingml/2006/main">
             <a:off x="952500" y="1981200"/>
-            <a:ext cx="10477500" cy="266700"/>
+            <a:ext cx="6096000" cy="266700"/>
           </a:xfrm>
           <a:prstGeom xmlns:a="http://schemas.openxmlformats.org/drawingml/2006/main" prst="rect">
             <a:avLst/>
@@ -1384,7 +1415,7 @@
       </p:sp>
       <p:sp>
         <p:nvSpPr>
-          <p:cNvPr id="7" name="argument-rule"/>
+          <p:cNvPr id="8" name="argument-rule"/>
           <p:cNvSpPr/>
           <p:nvPr/>
         </p:nvSpPr>
@@ -1418,7 +1449,7 @@
       </p:sp>
       <p:sp>
         <p:nvSpPr>
-          <p:cNvPr id="8" name="academic-number-0"/>
+          <p:cNvPr id="9" name="academic-number-0"/>
           <p:cNvSpPr txBox="1"/>
           <p:nvPr/>
         </p:nvSpPr>
@@ -1455,7 +1486,7 @@
       </p:sp>
       <p:sp>
         <p:nvSpPr>
-          <p:cNvPr id="9" name="academic-rule-0"/>
+          <p:cNvPr id="10" name="academic-rule-0"/>
           <p:cNvSpPr/>
           <p:nvPr/>
         </p:nvSpPr>
@@ -1489,7 +1520,7 @@
       </p:sp>
       <p:sp>
         <p:nvSpPr>
-          <p:cNvPr id="10" name="academic-label-0"/>
+          <p:cNvPr id="11" name="academic-label-0"/>
           <p:cNvSpPr txBox="1"/>
           <p:nvPr/>
         </p:nvSpPr>
@@ -1526,7 +1557,7 @@
       </p:sp>
       <p:sp>
         <p:nvSpPr>
-          <p:cNvPr id="11" name="academic-text-0"/>
+          <p:cNvPr id="12" name="academic-text-0"/>
           <p:cNvSpPr txBox="1"/>
           <p:nvPr/>
         </p:nvSpPr>
@@ -1563,7 +1594,7 @@
       </p:sp>
       <p:sp>
         <p:nvSpPr>
-          <p:cNvPr id="12" name="academic-number-1"/>
+          <p:cNvPr id="13" name="academic-number-1"/>
           <p:cNvSpPr txBox="1"/>
           <p:nvPr/>
         </p:nvSpPr>
@@ -1600,7 +1631,7 @@
       </p:sp>
       <p:sp>
         <p:nvSpPr>
-          <p:cNvPr id="13" name="academic-rule-1"/>
+          <p:cNvPr id="14" name="academic-rule-1"/>
           <p:cNvSpPr/>
           <p:nvPr/>
         </p:nvSpPr>
@@ -1634,7 +1665,7 @@
       </p:sp>
       <p:sp>
         <p:nvSpPr>
-          <p:cNvPr id="14" name="academic-label-1"/>
+          <p:cNvPr id="15" name="academic-label-1"/>
           <p:cNvSpPr txBox="1"/>
           <p:nvPr/>
         </p:nvSpPr>
@@ -1671,7 +1702,7 @@
       </p:sp>
       <p:sp>
         <p:nvSpPr>
-          <p:cNvPr id="15" name="academic-text-1"/>
+          <p:cNvPr id="16" name="academic-text-1"/>
           <p:cNvSpPr txBox="1"/>
           <p:nvPr/>
         </p:nvSpPr>
@@ -1708,7 +1739,7 @@
       </p:sp>
       <p:sp>
         <p:nvSpPr>
-          <p:cNvPr id="16" name="academic-number-2"/>
+          <p:cNvPr id="17" name="academic-number-2"/>
           <p:cNvSpPr txBox="1"/>
           <p:nvPr/>
         </p:nvSpPr>
@@ -1745,7 +1776,7 @@
       </p:sp>
       <p:sp>
         <p:nvSpPr>
-          <p:cNvPr id="17" name="academic-rule-2"/>
+          <p:cNvPr id="18" name="academic-rule-2"/>
           <p:cNvSpPr/>
           <p:nvPr/>
         </p:nvSpPr>
@@ -1779,7 +1810,7 @@
       </p:sp>
       <p:sp>
         <p:nvSpPr>
-          <p:cNvPr id="18" name="academic-label-2"/>
+          <p:cNvPr id="19" name="academic-label-2"/>
           <p:cNvSpPr txBox="1"/>
           <p:nvPr/>
         </p:nvSpPr>
@@ -1816,7 +1847,7 @@
       </p:sp>
       <p:sp>
         <p:nvSpPr>
-          <p:cNvPr id="19" name="academic-text-2"/>
+          <p:cNvPr id="20" name="academic-text-2"/>
           <p:cNvSpPr txBox="1"/>
           <p:nvPr/>
         </p:nvSpPr>
@@ -1853,7 +1884,7 @@
       </p:sp>
       <p:sp>
         <p:nvSpPr>
-          <p:cNvPr id="20" name="method-panel"/>
+          <p:cNvPr id="21" name="method-panel"/>
           <p:cNvSpPr/>
           <p:nvPr/>
         </p:nvSpPr>
@@ -1889,7 +1920,7 @@
       </p:sp>
       <p:sp>
         <p:nvSpPr>
-          <p:cNvPr id="21" name="method-label"/>
+          <p:cNvPr id="22" name="method-label"/>
           <p:cNvSpPr txBox="1"/>
           <p:nvPr/>
         </p:nvSpPr>
@@ -1926,7 +1957,7 @@
       </p:sp>
       <p:sp>
         <p:nvSpPr>
-          <p:cNvPr id="22" name="method-value"/>
+          <p:cNvPr id="23" name="method-value"/>
           <p:cNvSpPr txBox="1"/>
           <p:nvPr/>
         </p:nvSpPr>
@@ -1963,7 +1994,7 @@
       </p:sp>
       <p:sp>
         <p:nvSpPr>
-          <p:cNvPr id="23" name="method-foot"/>
+          <p:cNvPr id="24" name="method-foot"/>
           <p:cNvSpPr txBox="1"/>
           <p:nvPr/>
         </p:nvSpPr>
@@ -2000,7 +2031,7 @@
       </p:sp>
       <p:sp>
         <p:nvSpPr>
-          <p:cNvPr id="24" name="source"/>
+          <p:cNvPr id="25" name="source"/>
           <p:cNvSpPr txBox="1"/>
           <p:nvPr/>
         </p:nvSpPr>
@@ -2037,7 +2068,7 @@
       </p:sp>
       <p:sp>
         <p:nvSpPr>
-          <p:cNvPr id="25" name="page-number"/>
+          <p:cNvPr id="26" name="page-number"/>
           <p:cNvSpPr txBox="1"/>
           <p:nvPr/>
         </p:nvSpPr>
@@ -2098,12 +2129,25 @@
           <a:chExt cx="0" cy="0"/>
         </a:xfrm>
       </p:grpSpPr>
-      <p:sp>
-        <p:nvSpPr>
-          <p:cNvPr id="2" name="background"/>
-          <p:cNvSpPr/>
-          <p:nvPr/>
-        </p:nvSpPr>
+      <p:pic>
+        <p:nvPicPr>
+          <p:cNvPr id="2" name="evidence-visual-field">
+            <a:extLst xmlns:a="http://schemas.openxmlformats.org/drawingml/2006/main">
+              <a:ext uri="{C183D7F6-B498-43B3-948B-1728B52AA6E4}">
+                <adec:decorative xmlns:adec="http://schemas.microsoft.com/office/drawing/2017/decorative" val="1"/>
+              </a:ext>
+            </a:extLst>
+          </p:cNvPr>
+          <p:cNvPicPr/>
+          <p:nvPr/>
+        </p:nvPicPr>
+        <p:blipFill>
+          <a:blip xmlns:r="http://schemas.openxmlformats.org/officeDocument/2006/relationships" xmlns:a="http://schemas.openxmlformats.org/drawingml/2006/main" r:embed="rIdOfficeKitImage8bca39c9b7ba070f_1"/>
+          <a:srcRect xmlns:a="http://schemas.openxmlformats.org/drawingml/2006/main" l="0" t="34171" r="0" b="34171"/>
+          <a:stretch xmlns:a="http://schemas.openxmlformats.org/drawingml/2006/main">
+            <a:fillRect/>
+          </a:stretch>
+        </p:blipFill>
         <p:spPr>
           <a:xfrm xmlns:a="http://schemas.openxmlformats.org/drawingml/2006/main">
             <a:off x="0" y="0"/>
@@ -2112,8 +2156,26 @@
           <a:prstGeom xmlns:a="http://schemas.openxmlformats.org/drawingml/2006/main" prst="rect">
             <a:avLst/>
           </a:prstGeom>
+        </p:spPr>
+      </p:pic>
+      <p:sp>
+        <p:nvSpPr>
+          <p:cNvPr id="3" name="evidence-paper-scrim"/>
+          <p:cNvSpPr/>
+          <p:nvPr/>
+        </p:nvSpPr>
+        <p:spPr>
+          <a:xfrm xmlns:a="http://schemas.openxmlformats.org/drawingml/2006/main">
+            <a:off x="0" y="0"/>
+            <a:ext cx="7429500" cy="8572500"/>
+          </a:xfrm>
+          <a:prstGeom xmlns:a="http://schemas.openxmlformats.org/drawingml/2006/main" prst="rect">
+            <a:avLst/>
+          </a:prstGeom>
           <a:solidFill xmlns:a="http://schemas.openxmlformats.org/drawingml/2006/main">
-            <a:srgbClr val="F8FAFC"/>
+            <a:srgbClr val="F8FAFC">
+              <a:alpha val="96000"/>
+            </a:srgbClr>
           </a:solidFill>
           <a:ln xmlns:a="http://schemas.openxmlformats.org/drawingml/2006/main" w="0">
             <a:solidFill>
@@ -2136,7 +2198,7 @@
       </p:sp>
       <p:sp>
         <p:nvSpPr>
-          <p:cNvPr id="3" name="evidence-top-rule"/>
+          <p:cNvPr id="4" name="evidence-top-rule"/>
           <p:cNvSpPr/>
           <p:nvPr/>
         </p:nvSpPr>
@@ -2170,7 +2232,7 @@
       </p:sp>
       <p:sp>
         <p:nvSpPr>
-          <p:cNvPr id="4" name="BLUEPRINT LECTURE · EVIDENCE"/>
+          <p:cNvPr id="5" name="BLUEPRINT LECTURE · EVIDENCE"/>
           <p:cNvSpPr txBox="1"/>
           <p:nvPr/>
         </p:nvSpPr>
@@ -2207,14 +2269,14 @@
       </p:sp>
       <p:sp>
         <p:nvSpPr>
-          <p:cNvPr id="5" name="evidence-title"/>
+          <p:cNvPr id="6" name="evidence-title"/>
           <p:cNvSpPr txBox="1"/>
           <p:nvPr/>
         </p:nvSpPr>
         <p:spPr>
           <a:xfrm xmlns:a="http://schemas.openxmlformats.org/drawingml/2006/main">
             <a:off x="914400" y="1314450"/>
-            <a:ext cx="11811000" cy="552450"/>
+            <a:ext cx="6286500" cy="552450"/>
           </a:xfrm>
           <a:prstGeom xmlns:a="http://schemas.openxmlformats.org/drawingml/2006/main" prst="rect">
             <a:avLst/>
@@ -2244,14 +2306,14 @@
       </p:sp>
       <p:sp>
         <p:nvSpPr>
-          <p:cNvPr id="6" name="evidence-basis"/>
+          <p:cNvPr id="7" name="evidence-basis"/>
           <p:cNvSpPr txBox="1"/>
           <p:nvPr/>
         </p:nvSpPr>
         <p:spPr>
           <a:xfrm xmlns:a="http://schemas.openxmlformats.org/drawingml/2006/main">
             <a:off x="952500" y="1981200"/>
-            <a:ext cx="10477500" cy="266700"/>
+            <a:ext cx="6096000" cy="266700"/>
           </a:xfrm>
           <a:prstGeom xmlns:a="http://schemas.openxmlformats.org/drawingml/2006/main" prst="rect">
             <a:avLst/>
@@ -2281,7 +2343,7 @@
       </p:sp>
       <p:sp>
         <p:nvSpPr>
-          <p:cNvPr id="7" name="evidence-rule"/>
+          <p:cNvPr id="8" name="evidence-rule"/>
           <p:cNvSpPr/>
           <p:nvPr/>
         </p:nvSpPr>
@@ -2313,9 +2375,47 @@
           </a:p>
         </p:txBody>
       </p:sp>
+      <p:sp>
+        <p:nvSpPr>
+          <p:cNvPr id="9" name="evidence-read-scrim"/>
+          <p:cNvSpPr/>
+          <p:nvPr/>
+        </p:nvSpPr>
+        <p:spPr>
+          <a:xfrm xmlns:a="http://schemas.openxmlformats.org/drawingml/2006/main">
+            <a:off x="9525000" y="2857500"/>
+            <a:ext cx="4762500" cy="3429000"/>
+          </a:xfrm>
+          <a:prstGeom xmlns:a="http://schemas.openxmlformats.org/drawingml/2006/main" prst="rect">
+            <a:avLst/>
+          </a:prstGeom>
+          <a:solidFill xmlns:a="http://schemas.openxmlformats.org/drawingml/2006/main">
+            <a:srgbClr val="F8FAFC">
+              <a:alpha val="90000"/>
+            </a:srgbClr>
+          </a:solidFill>
+          <a:ln xmlns:a="http://schemas.openxmlformats.org/drawingml/2006/main" w="0">
+            <a:solidFill>
+              <a:srgbClr val="F8FAFC"/>
+            </a:solidFill>
+            <a:prstDash val="solid"/>
+          </a:ln>
+        </p:spPr>
+        <p:txBody>
+          <a:bodyPr xmlns:a="http://schemas.openxmlformats.org/drawingml/2006/main" wrap="square" lIns="0" tIns="0" rIns="0" bIns="0" anchor="t"/>
+          <a:lstStyle xmlns:a="http://schemas.openxmlformats.org/drawingml/2006/main"/>
+          <a:p xmlns:a="http://schemas.openxmlformats.org/drawingml/2006/main">
+            <a:r>
+              <a:rPr lang="en-US"/>
+              <a:t/>
+            </a:r>
+            <a:endParaRPr lang="en-US"/>
+          </a:p>
+        </p:txBody>
+      </p:sp>
       <p:graphicFrame>
         <p:nvGraphicFramePr>
-          <p:cNvPr id="8" name="evidence-chart"/>
+          <p:cNvPr id="10" name="evidence-chart"/>
           <p:cNvGraphicFramePr>
             <a:graphicFrameLocks xmlns:a="http://schemas.openxmlformats.org/drawingml/2006/main" noGrp="1"/>
           </p:cNvGraphicFramePr>
@@ -2327,13 +2427,13 @@
         </p:xfrm>
         <a:graphic xmlns:a="http://schemas.openxmlformats.org/drawingml/2006/main">
           <a:graphicData uri="http://schemas.openxmlformats.org/drawingml/2006/chart">
-            <c:chart xmlns:r="http://schemas.openxmlformats.org/officeDocument/2006/relationships" xmlns:c="http://schemas.openxmlformats.org/drawingml/2006/chart" r:id="Re64cdb3bd0be4918"/>
+            <c:chart xmlns:r="http://schemas.openxmlformats.org/officeDocument/2006/relationships" xmlns:c="http://schemas.openxmlformats.org/drawingml/2006/chart" r:id="Reb64185bdabf4896"/>
           </a:graphicData>
         </a:graphic>
       </p:graphicFrame>
       <p:sp>
         <p:nvSpPr>
-          <p:cNvPr id="9" name="metric"/>
+          <p:cNvPr id="11" name="metric"/>
           <p:cNvSpPr txBox="1"/>
           <p:nvPr/>
         </p:nvSpPr>
@@ -2370,7 +2470,7 @@
       </p:sp>
       <p:sp>
         <p:nvSpPr>
-          <p:cNvPr id="10" name="metric-label"/>
+          <p:cNvPr id="12" name="metric-label"/>
           <p:cNvSpPr txBox="1"/>
           <p:nvPr/>
         </p:nvSpPr>
@@ -2407,7 +2507,7 @@
       </p:sp>
       <p:sp>
         <p:nvSpPr>
-          <p:cNvPr id="11" name="rail-rule"/>
+          <p:cNvPr id="13" name="rail-rule"/>
           <p:cNvSpPr/>
           <p:nvPr/>
         </p:nvSpPr>
@@ -2441,7 +2541,7 @@
       </p:sp>
       <p:sp>
         <p:nvSpPr>
-          <p:cNvPr id="12" name="read-through"/>
+          <p:cNvPr id="14" name="read-through"/>
           <p:cNvSpPr txBox="1"/>
           <p:nvPr/>
         </p:nvSpPr>
@@ -2478,7 +2578,7 @@
       </p:sp>
       <p:sp>
         <p:nvSpPr>
-          <p:cNvPr id="13" name="evidence-band"/>
+          <p:cNvPr id="15" name="evidence-band"/>
           <p:cNvSpPr/>
           <p:nvPr/>
         </p:nvSpPr>
@@ -2514,7 +2614,7 @@
       </p:sp>
       <p:sp>
         <p:nvSpPr>
-          <p:cNvPr id="14" name="evidence-band-text"/>
+          <p:cNvPr id="16" name="evidence-band-text"/>
           <p:cNvSpPr txBox="1"/>
           <p:nvPr/>
         </p:nvSpPr>
@@ -2551,7 +2651,7 @@
       </p:sp>
       <p:sp>
         <p:nvSpPr>
-          <p:cNvPr id="15" name="source"/>
+          <p:cNvPr id="17" name="source"/>
           <p:cNvSpPr txBox="1"/>
           <p:nvPr/>
         </p:nvSpPr>
@@ -2588,7 +2688,7 @@
       </p:sp>
       <p:sp>
         <p:nvSpPr>
-          <p:cNvPr id="16" name="page-number"/>
+          <p:cNvPr id="18" name="page-number"/>
           <p:cNvSpPr txBox="1"/>
           <p:nvPr/>
         </p:nvSpPr>
@@ -2765,7 +2865,7 @@
         <p:spPr>
           <a:xfrm xmlns:a="http://schemas.openxmlformats.org/drawingml/2006/main">
             <a:off x="914400" y="1314450"/>
-            <a:ext cx="11811000" cy="552450"/>
+            <a:ext cx="6286500" cy="552450"/>
           </a:xfrm>
           <a:prstGeom xmlns:a="http://schemas.openxmlformats.org/drawingml/2006/main" prst="rect">
             <a:avLst/>
@@ -2802,7 +2902,7 @@
         <p:spPr>
           <a:xfrm xmlns:a="http://schemas.openxmlformats.org/drawingml/2006/main">
             <a:off x="952500" y="1981200"/>
-            <a:ext cx="10477500" cy="266700"/>
+            <a:ext cx="6096000" cy="266700"/>
           </a:xfrm>
           <a:prstGeom xmlns:a="http://schemas.openxmlformats.org/drawingml/2006/main" prst="rect">
             <a:avLst/>
@@ -3803,12 +3903,25 @@
           <a:chExt cx="0" cy="0"/>
         </a:xfrm>
       </p:grpSpPr>
-      <p:sp>
-        <p:nvSpPr>
-          <p:cNvPr id="2" name="background"/>
-          <p:cNvSpPr/>
-          <p:nvPr/>
-        </p:nvSpPr>
+      <p:pic>
+        <p:nvPicPr>
+          <p:cNvPr id="2" name="visual-field">
+            <a:extLst xmlns:a="http://schemas.openxmlformats.org/drawingml/2006/main">
+              <a:ext uri="{C183D7F6-B498-43B3-948B-1728B52AA6E4}">
+                <adec:decorative xmlns:adec="http://schemas.microsoft.com/office/drawing/2017/decorative" val="1"/>
+              </a:ext>
+            </a:extLst>
+          </p:cNvPr>
+          <p:cNvPicPr/>
+          <p:nvPr/>
+        </p:nvPicPr>
+        <p:blipFill>
+          <a:blip xmlns:r="http://schemas.openxmlformats.org/officeDocument/2006/relationships" xmlns:a="http://schemas.openxmlformats.org/drawingml/2006/main" r:embed="rIdOfficeKitImage8fbc298f8d1b7a3c_1"/>
+          <a:srcRect xmlns:a="http://schemas.openxmlformats.org/drawingml/2006/main" l="0" t="34180" r="0" b="34180"/>
+          <a:stretch xmlns:a="http://schemas.openxmlformats.org/drawingml/2006/main">
+            <a:fillRect/>
+          </a:stretch>
+        </p:blipFill>
         <p:spPr>
           <a:xfrm xmlns:a="http://schemas.openxmlformats.org/drawingml/2006/main">
             <a:off x="0" y="0"/>
@@ -3817,8 +3930,26 @@
           <a:prstGeom xmlns:a="http://schemas.openxmlformats.org/drawingml/2006/main" prst="rect">
             <a:avLst/>
           </a:prstGeom>
+        </p:spPr>
+      </p:pic>
+      <p:sp>
+        <p:nvSpPr>
+          <p:cNvPr id="3" name="visual-scrim"/>
+          <p:cNvSpPr/>
+          <p:nvPr/>
+        </p:nvSpPr>
+        <p:spPr>
+          <a:xfrm xmlns:a="http://schemas.openxmlformats.org/drawingml/2006/main">
+            <a:off x="0" y="0"/>
+            <a:ext cx="6858000" cy="8572500"/>
+          </a:xfrm>
+          <a:prstGeom xmlns:a="http://schemas.openxmlformats.org/drawingml/2006/main" prst="rect">
+            <a:avLst/>
+          </a:prstGeom>
           <a:solidFill xmlns:a="http://schemas.openxmlformats.org/drawingml/2006/main">
-            <a:srgbClr val="F8FAFC"/>
+            <a:srgbClr val="F8FAFC">
+              <a:alpha val="94000"/>
+            </a:srgbClr>
           </a:solidFill>
           <a:ln xmlns:a="http://schemas.openxmlformats.org/drawingml/2006/main" w="0">
             <a:solidFill>
@@ -3841,14 +3972,125 @@
       </p:sp>
       <p:sp>
         <p:nvSpPr>
-          <p:cNvPr id="3" name="visual-top-rule"/>
+          <p:cNvPr id="4" name="visual-eyebrow"/>
+          <p:cNvSpPr txBox="1"/>
+          <p:nvPr/>
+        </p:nvSpPr>
+        <p:spPr>
+          <a:xfrm xmlns:a="http://schemas.openxmlformats.org/drawingml/2006/main">
+            <a:off x="914400" y="895350"/>
+            <a:ext cx="6667500" cy="228600"/>
+          </a:xfrm>
+          <a:prstGeom xmlns:a="http://schemas.openxmlformats.org/drawingml/2006/main" prst="rect">
+            <a:avLst/>
+          </a:prstGeom>
+          <a:noFill xmlns:a="http://schemas.openxmlformats.org/drawingml/2006/main"/>
+          <a:ln xmlns:a="http://schemas.openxmlformats.org/drawingml/2006/main" w="0">
+            <a:noFill/>
+          </a:ln>
+        </p:spPr>
+        <p:txBody>
+          <a:bodyPr xmlns:a="http://schemas.openxmlformats.org/drawingml/2006/main" wrap="square" lIns="0" tIns="0" rIns="0" bIns="0" anchor="t"/>
+          <a:lstStyle xmlns:a="http://schemas.openxmlformats.org/drawingml/2006/main"/>
+          <a:p xmlns:a="http://schemas.openxmlformats.org/drawingml/2006/main">
+            <a:r>
+              <a:rPr lang="en-US" sz="1200" b="1">
+                <a:solidFill>
+                  <a:srgbClr val="1769D2"/>
+                </a:solidFill>
+                <a:latin typeface="Inter"/>
+                <a:ea typeface="Inter"/>
+              </a:rPr>
+              <a:t>BLUEPRINT LECTURE · VISUAL CARRIER</a:t>
+            </a:r>
+            <a:endParaRPr lang="en-US"/>
+          </a:p>
+        </p:txBody>
+      </p:sp>
+      <p:sp>
+        <p:nvSpPr>
+          <p:cNvPr id="5" name="visual-title"/>
+          <p:cNvSpPr txBox="1"/>
+          <p:nvPr/>
+        </p:nvSpPr>
+        <p:spPr>
+          <a:xfrm xmlns:a="http://schemas.openxmlformats.org/drawingml/2006/main">
+            <a:off x="914400" y="1638300"/>
+            <a:ext cx="5334000" cy="1143000"/>
+          </a:xfrm>
+          <a:prstGeom xmlns:a="http://schemas.openxmlformats.org/drawingml/2006/main" prst="rect">
+            <a:avLst/>
+          </a:prstGeom>
+          <a:noFill xmlns:a="http://schemas.openxmlformats.org/drawingml/2006/main"/>
+          <a:ln xmlns:a="http://schemas.openxmlformats.org/drawingml/2006/main" w="0">
+            <a:noFill/>
+          </a:ln>
+        </p:spPr>
+        <p:txBody>
+          <a:bodyPr xmlns:a="http://schemas.openxmlformats.org/drawingml/2006/main" wrap="square" lIns="0" tIns="0" rIns="0" bIns="0" anchor="t"/>
+          <a:lstStyle xmlns:a="http://schemas.openxmlformats.org/drawingml/2006/main"/>
+          <a:p xmlns:a="http://schemas.openxmlformats.org/drawingml/2006/main">
+            <a:r>
+              <a:rPr lang="en-US" sz="3300" b="1">
+                <a:solidFill>
+                  <a:srgbClr val="132A3A"/>
+                </a:solidFill>
+                <a:latin typeface="Inter"/>
+                <a:ea typeface="Inter"/>
+              </a:rPr>
+              <a:t>Evidence has a texture</a:t>
+            </a:r>
+            <a:endParaRPr lang="en-US"/>
+          </a:p>
+        </p:txBody>
+      </p:sp>
+      <p:sp>
+        <p:nvSpPr>
+          <p:cNvPr id="6" name="visual-body"/>
+          <p:cNvSpPr txBox="1"/>
+          <p:nvPr/>
+        </p:nvSpPr>
+        <p:spPr>
+          <a:xfrm xmlns:a="http://schemas.openxmlformats.org/drawingml/2006/main">
+            <a:off x="914400" y="3219450"/>
+            <a:ext cx="4762500" cy="685800"/>
+          </a:xfrm>
+          <a:prstGeom xmlns:a="http://schemas.openxmlformats.org/drawingml/2006/main" prst="rect">
+            <a:avLst/>
+          </a:prstGeom>
+          <a:noFill xmlns:a="http://schemas.openxmlformats.org/drawingml/2006/main"/>
+          <a:ln xmlns:a="http://schemas.openxmlformats.org/drawingml/2006/main" w="0">
+            <a:noFill/>
+          </a:ln>
+        </p:spPr>
+        <p:txBody>
+          <a:bodyPr xmlns:a="http://schemas.openxmlformats.org/drawingml/2006/main" wrap="square" lIns="0" tIns="0" rIns="0" bIns="0" anchor="t"/>
+          <a:lstStyle xmlns:a="http://schemas.openxmlformats.org/drawingml/2006/main"/>
+          <a:p xmlns:a="http://schemas.openxmlformats.org/drawingml/2006/main">
+            <a:r>
+              <a:rPr lang="en-US" sz="1800">
+                <a:solidFill>
+                  <a:srgbClr val="132A3A"/>
+                </a:solidFill>
+                <a:latin typeface="Inter"/>
+                <a:ea typeface="Inter"/>
+              </a:rPr>
+              <a:t>Use a visual carrier when the audience needs to see a pattern before reading the caveat.</a:t>
+            </a:r>
+            <a:endParaRPr lang="en-US"/>
+          </a:p>
+        </p:txBody>
+      </p:sp>
+      <p:sp>
+        <p:nvSpPr>
+          <p:cNvPr id="7" name="visual-rule"/>
           <p:cNvSpPr/>
           <p:nvPr/>
         </p:nvSpPr>
         <p:spPr>
           <a:xfrm xmlns:a="http://schemas.openxmlformats.org/drawingml/2006/main">
-            <a:off x="838200" y="666750"/>
-            <a:ext cx="13563600" cy="0"/>
+            <a:off x="914400" y="4476750"/>
+            <a:ext cx="4419600" cy="0"/>
           </a:xfrm>
           <a:prstGeom xmlns:a="http://schemas.openxmlformats.org/drawingml/2006/main" prst="line">
             <a:avLst/>
@@ -3875,14 +4117,14 @@
       </p:sp>
       <p:sp>
         <p:nvSpPr>
-          <p:cNvPr id="4" name="BLUEPRINT LECTURE · VISUAL CARRIER"/>
-          <p:cNvSpPr txBox="1"/>
-          <p:nvPr/>
-        </p:nvSpPr>
-        <p:spPr>
-          <a:xfrm xmlns:a="http://schemas.openxmlformats.org/drawingml/2006/main">
-            <a:off x="914400" y="895350"/>
-            <a:ext cx="7239000" cy="228600"/>
+          <p:cNvPr id="8" name="visual-label"/>
+          <p:cNvSpPr txBox="1"/>
+          <p:nvPr/>
+        </p:nvSpPr>
+        <p:spPr>
+          <a:xfrm xmlns:a="http://schemas.openxmlformats.org/drawingml/2006/main">
+            <a:off x="914400" y="4819650"/>
+            <a:ext cx="4953000" cy="228600"/>
           </a:xfrm>
           <a:prstGeom xmlns:a="http://schemas.openxmlformats.org/drawingml/2006/main" prst="rect">
             <a:avLst/>
@@ -3904,1041 +4146,15 @@
                 <a:latin typeface="Inter"/>
                 <a:ea typeface="Inter"/>
               </a:rPr>
-              <a:t>BLUEPRINT LECTURE · VISUAL CARRIER</a:t>
-            </a:r>
-            <a:endParaRPr lang="en-US"/>
-          </a:p>
-        </p:txBody>
-      </p:sp>
-      <p:sp>
-        <p:nvSpPr>
-          <p:cNvPr id="5" name="visual-title"/>
-          <p:cNvSpPr txBox="1"/>
-          <p:nvPr/>
-        </p:nvSpPr>
-        <p:spPr>
-          <a:xfrm xmlns:a="http://schemas.openxmlformats.org/drawingml/2006/main">
-            <a:off x="914400" y="1314450"/>
-            <a:ext cx="11811000" cy="552450"/>
-          </a:xfrm>
-          <a:prstGeom xmlns:a="http://schemas.openxmlformats.org/drawingml/2006/main" prst="rect">
-            <a:avLst/>
-          </a:prstGeom>
-          <a:noFill xmlns:a="http://schemas.openxmlformats.org/drawingml/2006/main"/>
-          <a:ln xmlns:a="http://schemas.openxmlformats.org/drawingml/2006/main" w="0">
-            <a:noFill/>
-          </a:ln>
-        </p:spPr>
-        <p:txBody>
-          <a:bodyPr xmlns:a="http://schemas.openxmlformats.org/drawingml/2006/main" wrap="square" lIns="0" tIns="0" rIns="0" bIns="0" anchor="t"/>
-          <a:lstStyle xmlns:a="http://schemas.openxmlformats.org/drawingml/2006/main"/>
-          <a:p xmlns:a="http://schemas.openxmlformats.org/drawingml/2006/main">
-            <a:r>
-              <a:rPr lang="en-US" sz="2850" b="1">
-                <a:solidFill>
-                  <a:srgbClr val="132A3A"/>
-                </a:solidFill>
-                <a:latin typeface="Inter"/>
-                <a:ea typeface="Inter"/>
-              </a:rPr>
-              <a:t>Evidence has a texture</a:t>
-            </a:r>
-            <a:endParaRPr lang="en-US"/>
-          </a:p>
-        </p:txBody>
-      </p:sp>
-      <p:sp>
-        <p:nvSpPr>
-          <p:cNvPr id="6" name="visual-body"/>
-          <p:cNvSpPr txBox="1"/>
-          <p:nvPr/>
-        </p:nvSpPr>
-        <p:spPr>
-          <a:xfrm xmlns:a="http://schemas.openxmlformats.org/drawingml/2006/main">
-            <a:off x="952500" y="1981200"/>
-            <a:ext cx="10477500" cy="266700"/>
-          </a:xfrm>
-          <a:prstGeom xmlns:a="http://schemas.openxmlformats.org/drawingml/2006/main" prst="rect">
-            <a:avLst/>
-          </a:prstGeom>
-          <a:noFill xmlns:a="http://schemas.openxmlformats.org/drawingml/2006/main"/>
-          <a:ln xmlns:a="http://schemas.openxmlformats.org/drawingml/2006/main" w="0">
-            <a:noFill/>
-          </a:ln>
-        </p:spPr>
-        <p:txBody>
-          <a:bodyPr xmlns:a="http://schemas.openxmlformats.org/drawingml/2006/main" wrap="square" lIns="0" tIns="0" rIns="0" bIns="0" anchor="t"/>
-          <a:lstStyle xmlns:a="http://schemas.openxmlformats.org/drawingml/2006/main"/>
-          <a:p xmlns:a="http://schemas.openxmlformats.org/drawingml/2006/main">
-            <a:r>
-              <a:rPr lang="en-US" sz="1350">
-                <a:solidFill>
-                  <a:srgbClr val="8A969F"/>
-                </a:solidFill>
-                <a:latin typeface="Inter"/>
-                <a:ea typeface="Inter"/>
-              </a:rPr>
-              <a:t>Use a visual carrier when the audience needs to see a pattern before reading the caveat.</a:t>
-            </a:r>
-            <a:endParaRPr lang="en-US"/>
-          </a:p>
-        </p:txBody>
-      </p:sp>
-      <p:sp>
-        <p:nvSpPr>
-          <p:cNvPr id="7" name="visual-rule"/>
-          <p:cNvSpPr/>
-          <p:nvPr/>
-        </p:nvSpPr>
-        <p:spPr>
-          <a:xfrm xmlns:a="http://schemas.openxmlformats.org/drawingml/2006/main">
-            <a:off x="914400" y="2457450"/>
-            <a:ext cx="13411200" cy="0"/>
-          </a:xfrm>
-          <a:prstGeom xmlns:a="http://schemas.openxmlformats.org/drawingml/2006/main" prst="line">
-            <a:avLst/>
-          </a:prstGeom>
-          <a:noFill xmlns:a="http://schemas.openxmlformats.org/drawingml/2006/main"/>
-          <a:ln xmlns:a="http://schemas.openxmlformats.org/drawingml/2006/main" w="25400">
-            <a:solidFill>
-              <a:srgbClr val="8A969F"/>
-            </a:solidFill>
-            <a:prstDash val="solid"/>
-          </a:ln>
-        </p:spPr>
-        <p:txBody>
-          <a:bodyPr xmlns:a="http://schemas.openxmlformats.org/drawingml/2006/main" wrap="square" lIns="0" tIns="0" rIns="0" bIns="0" anchor="t"/>
-          <a:lstStyle xmlns:a="http://schemas.openxmlformats.org/drawingml/2006/main"/>
-          <a:p xmlns:a="http://schemas.openxmlformats.org/drawingml/2006/main">
-            <a:r>
-              <a:rPr lang="en-US"/>
-              <a:t/>
-            </a:r>
-            <a:endParaRPr lang="en-US"/>
-          </a:p>
-        </p:txBody>
-      </p:sp>
-      <p:sp>
-        <p:nvSpPr>
-          <p:cNvPr id="8" name="visual-process-rail"/>
-          <p:cNvSpPr/>
-          <p:nvPr/>
-        </p:nvSpPr>
-        <p:spPr>
-          <a:xfrm xmlns:a="http://schemas.openxmlformats.org/drawingml/2006/main">
-            <a:off x="1447800" y="3524250"/>
-            <a:ext cx="0" cy="2647950"/>
-          </a:xfrm>
-          <a:prstGeom xmlns:a="http://schemas.openxmlformats.org/drawingml/2006/main" prst="line">
-            <a:avLst/>
-          </a:prstGeom>
-          <a:noFill xmlns:a="http://schemas.openxmlformats.org/drawingml/2006/main"/>
-          <a:ln xmlns:a="http://schemas.openxmlformats.org/drawingml/2006/main" w="25400">
-            <a:solidFill>
-              <a:srgbClr val="8A969F"/>
-            </a:solidFill>
-            <a:prstDash val="solid"/>
-          </a:ln>
-        </p:spPr>
-        <p:txBody>
-          <a:bodyPr xmlns:a="http://schemas.openxmlformats.org/drawingml/2006/main" wrap="square" lIns="0" tIns="0" rIns="0" bIns="0" anchor="t"/>
-          <a:lstStyle xmlns:a="http://schemas.openxmlformats.org/drawingml/2006/main"/>
-          <a:p xmlns:a="http://schemas.openxmlformats.org/drawingml/2006/main">
-            <a:r>
-              <a:rPr lang="en-US"/>
-              <a:t/>
-            </a:r>
-            <a:endParaRPr lang="en-US"/>
-          </a:p>
-        </p:txBody>
-      </p:sp>
-      <p:sp>
-        <p:nvSpPr>
-          <p:cNvPr id="9" name="visual-process-node-0"/>
-          <p:cNvSpPr/>
-          <p:nvPr/>
-        </p:nvSpPr>
-        <p:spPr>
-          <a:xfrm xmlns:a="http://schemas.openxmlformats.org/drawingml/2006/main">
-            <a:off x="1257300" y="3352800"/>
-            <a:ext cx="400050" cy="400050"/>
-          </a:xfrm>
-          <a:prstGeom xmlns:a="http://schemas.openxmlformats.org/drawingml/2006/main" prst="ellipse">
-            <a:avLst/>
-          </a:prstGeom>
-          <a:solidFill xmlns:a="http://schemas.openxmlformats.org/drawingml/2006/main">
-            <a:srgbClr val="F8FAFC"/>
-          </a:solidFill>
-          <a:ln xmlns:a="http://schemas.openxmlformats.org/drawingml/2006/main" w="38100">
-            <a:solidFill>
-              <a:srgbClr val="132A3A"/>
-            </a:solidFill>
-            <a:prstDash val="solid"/>
-          </a:ln>
-        </p:spPr>
-        <p:txBody>
-          <a:bodyPr xmlns:a="http://schemas.openxmlformats.org/drawingml/2006/main" wrap="square" lIns="0" tIns="0" rIns="0" bIns="0" anchor="t"/>
-          <a:lstStyle xmlns:a="http://schemas.openxmlformats.org/drawingml/2006/main"/>
-          <a:p xmlns:a="http://schemas.openxmlformats.org/drawingml/2006/main">
-            <a:r>
-              <a:rPr lang="en-US"/>
-              <a:t/>
-            </a:r>
-            <a:endParaRPr lang="en-US"/>
-          </a:p>
-        </p:txBody>
-      </p:sp>
-      <p:sp>
-        <p:nvSpPr>
-          <p:cNvPr id="10" name="visual-process-number-0"/>
-          <p:cNvSpPr txBox="1"/>
-          <p:nvPr/>
-        </p:nvSpPr>
-        <p:spPr>
-          <a:xfrm xmlns:a="http://schemas.openxmlformats.org/drawingml/2006/main">
-            <a:off x="1238250" y="3467100"/>
-            <a:ext cx="438150" cy="152400"/>
-          </a:xfrm>
-          <a:prstGeom xmlns:a="http://schemas.openxmlformats.org/drawingml/2006/main" prst="rect">
-            <a:avLst/>
-          </a:prstGeom>
-          <a:noFill xmlns:a="http://schemas.openxmlformats.org/drawingml/2006/main"/>
-          <a:ln xmlns:a="http://schemas.openxmlformats.org/drawingml/2006/main" w="0">
-            <a:noFill/>
-          </a:ln>
-        </p:spPr>
-        <p:txBody>
-          <a:bodyPr xmlns:a="http://schemas.openxmlformats.org/drawingml/2006/main" wrap="square" lIns="0" tIns="0" rIns="0" bIns="0" anchor="t"/>
-          <a:lstStyle xmlns:a="http://schemas.openxmlformats.org/drawingml/2006/main"/>
-          <a:p xmlns:a="http://schemas.openxmlformats.org/drawingml/2006/main">
-            <a:pPr algn="ctr"/>
-            <a:r>
-              <a:rPr lang="en-US" sz="900" b="1">
-                <a:solidFill>
-                  <a:srgbClr val="1769D2"/>
-                </a:solidFill>
-                <a:latin typeface="Inter"/>
-                <a:ea typeface="Inter"/>
-              </a:rPr>
-              <a:t>01</a:t>
-            </a:r>
-            <a:endParaRPr lang="en-US"/>
-          </a:p>
-        </p:txBody>
-      </p:sp>
-      <p:sp>
-        <p:nvSpPr>
-          <p:cNvPr id="11" name="visual-process-label-0"/>
-          <p:cNvSpPr txBox="1"/>
-          <p:nvPr/>
-        </p:nvSpPr>
-        <p:spPr>
-          <a:xfrm xmlns:a="http://schemas.openxmlformats.org/drawingml/2006/main">
-            <a:off x="1943100" y="3371850"/>
-            <a:ext cx="1714500" cy="228600"/>
-          </a:xfrm>
-          <a:prstGeom xmlns:a="http://schemas.openxmlformats.org/drawingml/2006/main" prst="rect">
-            <a:avLst/>
-          </a:prstGeom>
-          <a:noFill xmlns:a="http://schemas.openxmlformats.org/drawingml/2006/main"/>
-          <a:ln xmlns:a="http://schemas.openxmlformats.org/drawingml/2006/main" w="0">
-            <a:noFill/>
-          </a:ln>
-        </p:spPr>
-        <p:txBody>
-          <a:bodyPr xmlns:a="http://schemas.openxmlformats.org/drawingml/2006/main" wrap="square" lIns="0" tIns="0" rIns="0" bIns="0" anchor="t"/>
-          <a:lstStyle xmlns:a="http://schemas.openxmlformats.org/drawingml/2006/main"/>
-          <a:p xmlns:a="http://schemas.openxmlformats.org/drawingml/2006/main">
-            <a:r>
-              <a:rPr lang="en-US" sz="1650" b="1">
-                <a:solidFill>
-                  <a:srgbClr val="132A3A"/>
-                </a:solidFill>
-                <a:latin typeface="Inter"/>
-                <a:ea typeface="Inter"/>
-              </a:rPr>
-              <a:t>Observe</a:t>
-            </a:r>
-            <a:endParaRPr lang="en-US"/>
-          </a:p>
-        </p:txBody>
-      </p:sp>
-      <p:sp>
-        <p:nvSpPr>
-          <p:cNvPr id="12" name="visual-process-text-0"/>
-          <p:cNvSpPr txBox="1"/>
-          <p:nvPr/>
-        </p:nvSpPr>
-        <p:spPr>
-          <a:xfrm xmlns:a="http://schemas.openxmlformats.org/drawingml/2006/main">
-            <a:off x="3829050" y="3400425"/>
-            <a:ext cx="2476500" cy="228600"/>
-          </a:xfrm>
-          <a:prstGeom xmlns:a="http://schemas.openxmlformats.org/drawingml/2006/main" prst="rect">
-            <a:avLst/>
-          </a:prstGeom>
-          <a:noFill xmlns:a="http://schemas.openxmlformats.org/drawingml/2006/main"/>
-          <a:ln xmlns:a="http://schemas.openxmlformats.org/drawingml/2006/main" w="0">
-            <a:noFill/>
-          </a:ln>
-        </p:spPr>
-        <p:txBody>
-          <a:bodyPr xmlns:a="http://schemas.openxmlformats.org/drawingml/2006/main" wrap="square" lIns="0" tIns="0" rIns="0" bIns="0" anchor="t"/>
-          <a:lstStyle xmlns:a="http://schemas.openxmlformats.org/drawingml/2006/main"/>
-          <a:p xmlns:a="http://schemas.openxmlformats.org/drawingml/2006/main">
-            <a:r>
-              <a:rPr lang="en-US" sz="1275">
-                <a:solidFill>
-                  <a:srgbClr val="8A969F"/>
-                </a:solidFill>
-                <a:latin typeface="Inter"/>
-                <a:ea typeface="Inter"/>
-              </a:rPr>
-              <a:t>Find the signal</a:t>
-            </a:r>
-            <a:endParaRPr lang="en-US"/>
-          </a:p>
-        </p:txBody>
-      </p:sp>
-      <p:sp>
-        <p:nvSpPr>
-          <p:cNvPr id="13" name="visual-process-node-1"/>
-          <p:cNvSpPr/>
-          <p:nvPr/>
-        </p:nvSpPr>
-        <p:spPr>
-          <a:xfrm xmlns:a="http://schemas.openxmlformats.org/drawingml/2006/main">
-            <a:off x="1257300" y="4095750"/>
-            <a:ext cx="400050" cy="400050"/>
-          </a:xfrm>
-          <a:prstGeom xmlns:a="http://schemas.openxmlformats.org/drawingml/2006/main" prst="ellipse">
-            <a:avLst/>
-          </a:prstGeom>
-          <a:solidFill xmlns:a="http://schemas.openxmlformats.org/drawingml/2006/main">
-            <a:srgbClr val="F8FAFC"/>
-          </a:solidFill>
-          <a:ln xmlns:a="http://schemas.openxmlformats.org/drawingml/2006/main" w="38100">
-            <a:solidFill>
-              <a:srgbClr val="132A3A"/>
-            </a:solidFill>
-            <a:prstDash val="solid"/>
-          </a:ln>
-        </p:spPr>
-        <p:txBody>
-          <a:bodyPr xmlns:a="http://schemas.openxmlformats.org/drawingml/2006/main" wrap="square" lIns="0" tIns="0" rIns="0" bIns="0" anchor="t"/>
-          <a:lstStyle xmlns:a="http://schemas.openxmlformats.org/drawingml/2006/main"/>
-          <a:p xmlns:a="http://schemas.openxmlformats.org/drawingml/2006/main">
-            <a:r>
-              <a:rPr lang="en-US"/>
-              <a:t/>
-            </a:r>
-            <a:endParaRPr lang="en-US"/>
-          </a:p>
-        </p:txBody>
-      </p:sp>
-      <p:sp>
-        <p:nvSpPr>
-          <p:cNvPr id="14" name="visual-process-number-1"/>
-          <p:cNvSpPr txBox="1"/>
-          <p:nvPr/>
-        </p:nvSpPr>
-        <p:spPr>
-          <a:xfrm xmlns:a="http://schemas.openxmlformats.org/drawingml/2006/main">
-            <a:off x="1238250" y="4210050"/>
-            <a:ext cx="438150" cy="152400"/>
-          </a:xfrm>
-          <a:prstGeom xmlns:a="http://schemas.openxmlformats.org/drawingml/2006/main" prst="rect">
-            <a:avLst/>
-          </a:prstGeom>
-          <a:noFill xmlns:a="http://schemas.openxmlformats.org/drawingml/2006/main"/>
-          <a:ln xmlns:a="http://schemas.openxmlformats.org/drawingml/2006/main" w="0">
-            <a:noFill/>
-          </a:ln>
-        </p:spPr>
-        <p:txBody>
-          <a:bodyPr xmlns:a="http://schemas.openxmlformats.org/drawingml/2006/main" wrap="square" lIns="0" tIns="0" rIns="0" bIns="0" anchor="t"/>
-          <a:lstStyle xmlns:a="http://schemas.openxmlformats.org/drawingml/2006/main"/>
-          <a:p xmlns:a="http://schemas.openxmlformats.org/drawingml/2006/main">
-            <a:pPr algn="ctr"/>
-            <a:r>
-              <a:rPr lang="en-US" sz="900" b="1">
-                <a:solidFill>
-                  <a:srgbClr val="1769D2"/>
-                </a:solidFill>
-                <a:latin typeface="Inter"/>
-                <a:ea typeface="Inter"/>
-              </a:rPr>
-              <a:t>02</a:t>
-            </a:r>
-            <a:endParaRPr lang="en-US"/>
-          </a:p>
-        </p:txBody>
-      </p:sp>
-      <p:sp>
-        <p:nvSpPr>
-          <p:cNvPr id="15" name="visual-process-label-1"/>
-          <p:cNvSpPr txBox="1"/>
-          <p:nvPr/>
-        </p:nvSpPr>
-        <p:spPr>
-          <a:xfrm xmlns:a="http://schemas.openxmlformats.org/drawingml/2006/main">
-            <a:off x="1943100" y="4114800"/>
-            <a:ext cx="1714500" cy="228600"/>
-          </a:xfrm>
-          <a:prstGeom xmlns:a="http://schemas.openxmlformats.org/drawingml/2006/main" prst="rect">
-            <a:avLst/>
-          </a:prstGeom>
-          <a:noFill xmlns:a="http://schemas.openxmlformats.org/drawingml/2006/main"/>
-          <a:ln xmlns:a="http://schemas.openxmlformats.org/drawingml/2006/main" w="0">
-            <a:noFill/>
-          </a:ln>
-        </p:spPr>
-        <p:txBody>
-          <a:bodyPr xmlns:a="http://schemas.openxmlformats.org/drawingml/2006/main" wrap="square" lIns="0" tIns="0" rIns="0" bIns="0" anchor="t"/>
-          <a:lstStyle xmlns:a="http://schemas.openxmlformats.org/drawingml/2006/main"/>
-          <a:p xmlns:a="http://schemas.openxmlformats.org/drawingml/2006/main">
-            <a:r>
-              <a:rPr lang="en-US" sz="1650" b="1">
-                <a:solidFill>
-                  <a:srgbClr val="132A3A"/>
-                </a:solidFill>
-                <a:latin typeface="Inter"/>
-                <a:ea typeface="Inter"/>
-              </a:rPr>
-              <a:t>Explain</a:t>
-            </a:r>
-            <a:endParaRPr lang="en-US"/>
-          </a:p>
-        </p:txBody>
-      </p:sp>
-      <p:sp>
-        <p:nvSpPr>
-          <p:cNvPr id="16" name="visual-process-text-1"/>
-          <p:cNvSpPr txBox="1"/>
-          <p:nvPr/>
-        </p:nvSpPr>
-        <p:spPr>
-          <a:xfrm xmlns:a="http://schemas.openxmlformats.org/drawingml/2006/main">
-            <a:off x="3829050" y="4143375"/>
-            <a:ext cx="2476500" cy="228600"/>
-          </a:xfrm>
-          <a:prstGeom xmlns:a="http://schemas.openxmlformats.org/drawingml/2006/main" prst="rect">
-            <a:avLst/>
-          </a:prstGeom>
-          <a:noFill xmlns:a="http://schemas.openxmlformats.org/drawingml/2006/main"/>
-          <a:ln xmlns:a="http://schemas.openxmlformats.org/drawingml/2006/main" w="0">
-            <a:noFill/>
-          </a:ln>
-        </p:spPr>
-        <p:txBody>
-          <a:bodyPr xmlns:a="http://schemas.openxmlformats.org/drawingml/2006/main" wrap="square" lIns="0" tIns="0" rIns="0" bIns="0" anchor="t"/>
-          <a:lstStyle xmlns:a="http://schemas.openxmlformats.org/drawingml/2006/main"/>
-          <a:p xmlns:a="http://schemas.openxmlformats.org/drawingml/2006/main">
-            <a:r>
-              <a:rPr lang="en-US" sz="1275">
-                <a:solidFill>
-                  <a:srgbClr val="8A969F"/>
-                </a:solidFill>
-                <a:latin typeface="Inter"/>
-                <a:ea typeface="Inter"/>
-              </a:rPr>
-              <a:t>Name the mechanism</a:t>
-            </a:r>
-            <a:endParaRPr lang="en-US"/>
-          </a:p>
-        </p:txBody>
-      </p:sp>
-      <p:sp>
-        <p:nvSpPr>
-          <p:cNvPr id="17" name="visual-process-node-2"/>
-          <p:cNvSpPr/>
-          <p:nvPr/>
-        </p:nvSpPr>
-        <p:spPr>
-          <a:xfrm xmlns:a="http://schemas.openxmlformats.org/drawingml/2006/main">
-            <a:off x="1257300" y="4838700"/>
-            <a:ext cx="400050" cy="400050"/>
-          </a:xfrm>
-          <a:prstGeom xmlns:a="http://schemas.openxmlformats.org/drawingml/2006/main" prst="ellipse">
-            <a:avLst/>
-          </a:prstGeom>
-          <a:solidFill xmlns:a="http://schemas.openxmlformats.org/drawingml/2006/main">
-            <a:srgbClr val="F8FAFC"/>
-          </a:solidFill>
-          <a:ln xmlns:a="http://schemas.openxmlformats.org/drawingml/2006/main" w="38100">
-            <a:solidFill>
-              <a:srgbClr val="132A3A"/>
-            </a:solidFill>
-            <a:prstDash val="solid"/>
-          </a:ln>
-        </p:spPr>
-        <p:txBody>
-          <a:bodyPr xmlns:a="http://schemas.openxmlformats.org/drawingml/2006/main" wrap="square" lIns="0" tIns="0" rIns="0" bIns="0" anchor="t"/>
-          <a:lstStyle xmlns:a="http://schemas.openxmlformats.org/drawingml/2006/main"/>
-          <a:p xmlns:a="http://schemas.openxmlformats.org/drawingml/2006/main">
-            <a:r>
-              <a:rPr lang="en-US"/>
-              <a:t/>
-            </a:r>
-            <a:endParaRPr lang="en-US"/>
-          </a:p>
-        </p:txBody>
-      </p:sp>
-      <p:sp>
-        <p:nvSpPr>
-          <p:cNvPr id="18" name="visual-process-number-2"/>
-          <p:cNvSpPr txBox="1"/>
-          <p:nvPr/>
-        </p:nvSpPr>
-        <p:spPr>
-          <a:xfrm xmlns:a="http://schemas.openxmlformats.org/drawingml/2006/main">
-            <a:off x="1238250" y="4953000"/>
-            <a:ext cx="438150" cy="152400"/>
-          </a:xfrm>
-          <a:prstGeom xmlns:a="http://schemas.openxmlformats.org/drawingml/2006/main" prst="rect">
-            <a:avLst/>
-          </a:prstGeom>
-          <a:noFill xmlns:a="http://schemas.openxmlformats.org/drawingml/2006/main"/>
-          <a:ln xmlns:a="http://schemas.openxmlformats.org/drawingml/2006/main" w="0">
-            <a:noFill/>
-          </a:ln>
-        </p:spPr>
-        <p:txBody>
-          <a:bodyPr xmlns:a="http://schemas.openxmlformats.org/drawingml/2006/main" wrap="square" lIns="0" tIns="0" rIns="0" bIns="0" anchor="t"/>
-          <a:lstStyle xmlns:a="http://schemas.openxmlformats.org/drawingml/2006/main"/>
-          <a:p xmlns:a="http://schemas.openxmlformats.org/drawingml/2006/main">
-            <a:pPr algn="ctr"/>
-            <a:r>
-              <a:rPr lang="en-US" sz="900" b="1">
-                <a:solidFill>
-                  <a:srgbClr val="1769D2"/>
-                </a:solidFill>
-                <a:latin typeface="Inter"/>
-                <a:ea typeface="Inter"/>
-              </a:rPr>
-              <a:t>03</a:t>
-            </a:r>
-            <a:endParaRPr lang="en-US"/>
-          </a:p>
-        </p:txBody>
-      </p:sp>
-      <p:sp>
-        <p:nvSpPr>
-          <p:cNvPr id="19" name="visual-process-label-2"/>
-          <p:cNvSpPr txBox="1"/>
-          <p:nvPr/>
-        </p:nvSpPr>
-        <p:spPr>
-          <a:xfrm xmlns:a="http://schemas.openxmlformats.org/drawingml/2006/main">
-            <a:off x="1943100" y="4857750"/>
-            <a:ext cx="1714500" cy="228600"/>
-          </a:xfrm>
-          <a:prstGeom xmlns:a="http://schemas.openxmlformats.org/drawingml/2006/main" prst="rect">
-            <a:avLst/>
-          </a:prstGeom>
-          <a:noFill xmlns:a="http://schemas.openxmlformats.org/drawingml/2006/main"/>
-          <a:ln xmlns:a="http://schemas.openxmlformats.org/drawingml/2006/main" w="0">
-            <a:noFill/>
-          </a:ln>
-        </p:spPr>
-        <p:txBody>
-          <a:bodyPr xmlns:a="http://schemas.openxmlformats.org/drawingml/2006/main" wrap="square" lIns="0" tIns="0" rIns="0" bIns="0" anchor="t"/>
-          <a:lstStyle xmlns:a="http://schemas.openxmlformats.org/drawingml/2006/main"/>
-          <a:p xmlns:a="http://schemas.openxmlformats.org/drawingml/2006/main">
-            <a:r>
-              <a:rPr lang="en-US" sz="1650" b="1">
-                <a:solidFill>
-                  <a:srgbClr val="132A3A"/>
-                </a:solidFill>
-                <a:latin typeface="Inter"/>
-                <a:ea typeface="Inter"/>
-              </a:rPr>
-              <a:t>Choose</a:t>
-            </a:r>
-            <a:endParaRPr lang="en-US"/>
-          </a:p>
-        </p:txBody>
-      </p:sp>
-      <p:sp>
-        <p:nvSpPr>
-          <p:cNvPr id="20" name="visual-process-text-2"/>
-          <p:cNvSpPr txBox="1"/>
-          <p:nvPr/>
-        </p:nvSpPr>
-        <p:spPr>
-          <a:xfrm xmlns:a="http://schemas.openxmlformats.org/drawingml/2006/main">
-            <a:off x="3829050" y="4886325"/>
-            <a:ext cx="2476500" cy="228600"/>
-          </a:xfrm>
-          <a:prstGeom xmlns:a="http://schemas.openxmlformats.org/drawingml/2006/main" prst="rect">
-            <a:avLst/>
-          </a:prstGeom>
-          <a:noFill xmlns:a="http://schemas.openxmlformats.org/drawingml/2006/main"/>
-          <a:ln xmlns:a="http://schemas.openxmlformats.org/drawingml/2006/main" w="0">
-            <a:noFill/>
-          </a:ln>
-        </p:spPr>
-        <p:txBody>
-          <a:bodyPr xmlns:a="http://schemas.openxmlformats.org/drawingml/2006/main" wrap="square" lIns="0" tIns="0" rIns="0" bIns="0" anchor="t"/>
-          <a:lstStyle xmlns:a="http://schemas.openxmlformats.org/drawingml/2006/main"/>
-          <a:p xmlns:a="http://schemas.openxmlformats.org/drawingml/2006/main">
-            <a:r>
-              <a:rPr lang="en-US" sz="1275">
-                <a:solidFill>
-                  <a:srgbClr val="8A969F"/>
-                </a:solidFill>
-                <a:latin typeface="Inter"/>
-                <a:ea typeface="Inter"/>
-              </a:rPr>
-              <a:t>Set the condition</a:t>
-            </a:r>
-            <a:endParaRPr lang="en-US"/>
-          </a:p>
-        </p:txBody>
-      </p:sp>
-      <p:sp>
-        <p:nvSpPr>
-          <p:cNvPr id="21" name="visual-process-node-3"/>
-          <p:cNvSpPr/>
-          <p:nvPr/>
-        </p:nvSpPr>
-        <p:spPr>
-          <a:xfrm xmlns:a="http://schemas.openxmlformats.org/drawingml/2006/main">
-            <a:off x="1257300" y="5581650"/>
-            <a:ext cx="400050" cy="400050"/>
-          </a:xfrm>
-          <a:prstGeom xmlns:a="http://schemas.openxmlformats.org/drawingml/2006/main" prst="ellipse">
-            <a:avLst/>
-          </a:prstGeom>
-          <a:solidFill xmlns:a="http://schemas.openxmlformats.org/drawingml/2006/main">
-            <a:srgbClr val="1769D2"/>
-          </a:solidFill>
-          <a:ln xmlns:a="http://schemas.openxmlformats.org/drawingml/2006/main" w="38100">
-            <a:solidFill>
-              <a:srgbClr val="1769D2"/>
-            </a:solidFill>
-            <a:prstDash val="solid"/>
-          </a:ln>
-        </p:spPr>
-        <p:txBody>
-          <a:bodyPr xmlns:a="http://schemas.openxmlformats.org/drawingml/2006/main" wrap="square" lIns="0" tIns="0" rIns="0" bIns="0" anchor="t"/>
-          <a:lstStyle xmlns:a="http://schemas.openxmlformats.org/drawingml/2006/main"/>
-          <a:p xmlns:a="http://schemas.openxmlformats.org/drawingml/2006/main">
-            <a:r>
-              <a:rPr lang="en-US"/>
-              <a:t/>
-            </a:r>
-            <a:endParaRPr lang="en-US"/>
-          </a:p>
-        </p:txBody>
-      </p:sp>
-      <p:sp>
-        <p:nvSpPr>
-          <p:cNvPr id="22" name="visual-process-number-3"/>
-          <p:cNvSpPr txBox="1"/>
-          <p:nvPr/>
-        </p:nvSpPr>
-        <p:spPr>
-          <a:xfrm xmlns:a="http://schemas.openxmlformats.org/drawingml/2006/main">
-            <a:off x="1238250" y="5695950"/>
-            <a:ext cx="438150" cy="152400"/>
-          </a:xfrm>
-          <a:prstGeom xmlns:a="http://schemas.openxmlformats.org/drawingml/2006/main" prst="rect">
-            <a:avLst/>
-          </a:prstGeom>
-          <a:noFill xmlns:a="http://schemas.openxmlformats.org/drawingml/2006/main"/>
-          <a:ln xmlns:a="http://schemas.openxmlformats.org/drawingml/2006/main" w="0">
-            <a:noFill/>
-          </a:ln>
-        </p:spPr>
-        <p:txBody>
-          <a:bodyPr xmlns:a="http://schemas.openxmlformats.org/drawingml/2006/main" wrap="square" lIns="0" tIns="0" rIns="0" bIns="0" anchor="t"/>
-          <a:lstStyle xmlns:a="http://schemas.openxmlformats.org/drawingml/2006/main"/>
-          <a:p xmlns:a="http://schemas.openxmlformats.org/drawingml/2006/main">
-            <a:pPr algn="ctr"/>
-            <a:r>
-              <a:rPr lang="en-US" sz="900" b="1">
-                <a:solidFill>
-                  <a:srgbClr val="FFFFFF"/>
-                </a:solidFill>
-                <a:latin typeface="Inter"/>
-                <a:ea typeface="Inter"/>
-              </a:rPr>
-              <a:t>04</a:t>
-            </a:r>
-            <a:endParaRPr lang="en-US"/>
-          </a:p>
-        </p:txBody>
-      </p:sp>
-      <p:sp>
-        <p:nvSpPr>
-          <p:cNvPr id="23" name="visual-process-label-3"/>
-          <p:cNvSpPr txBox="1"/>
-          <p:nvPr/>
-        </p:nvSpPr>
-        <p:spPr>
-          <a:xfrm xmlns:a="http://schemas.openxmlformats.org/drawingml/2006/main">
-            <a:off x="1943100" y="5600700"/>
-            <a:ext cx="1714500" cy="228600"/>
-          </a:xfrm>
-          <a:prstGeom xmlns:a="http://schemas.openxmlformats.org/drawingml/2006/main" prst="rect">
-            <a:avLst/>
-          </a:prstGeom>
-          <a:noFill xmlns:a="http://schemas.openxmlformats.org/drawingml/2006/main"/>
-          <a:ln xmlns:a="http://schemas.openxmlformats.org/drawingml/2006/main" w="0">
-            <a:noFill/>
-          </a:ln>
-        </p:spPr>
-        <p:txBody>
-          <a:bodyPr xmlns:a="http://schemas.openxmlformats.org/drawingml/2006/main" wrap="square" lIns="0" tIns="0" rIns="0" bIns="0" anchor="t"/>
-          <a:lstStyle xmlns:a="http://schemas.openxmlformats.org/drawingml/2006/main"/>
-          <a:p xmlns:a="http://schemas.openxmlformats.org/drawingml/2006/main">
-            <a:r>
-              <a:rPr lang="en-US" sz="1650" b="1">
-                <a:solidFill>
-                  <a:srgbClr val="132A3A"/>
-                </a:solidFill>
-                <a:latin typeface="Inter"/>
-                <a:ea typeface="Inter"/>
-              </a:rPr>
-              <a:t>Act</a:t>
-            </a:r>
-            <a:endParaRPr lang="en-US"/>
-          </a:p>
-        </p:txBody>
-      </p:sp>
-      <p:sp>
-        <p:nvSpPr>
-          <p:cNvPr id="24" name="visual-process-text-3"/>
-          <p:cNvSpPr txBox="1"/>
-          <p:nvPr/>
-        </p:nvSpPr>
-        <p:spPr>
-          <a:xfrm xmlns:a="http://schemas.openxmlformats.org/drawingml/2006/main">
-            <a:off x="3829050" y="5629275"/>
-            <a:ext cx="2476500" cy="228600"/>
-          </a:xfrm>
-          <a:prstGeom xmlns:a="http://schemas.openxmlformats.org/drawingml/2006/main" prst="rect">
-            <a:avLst/>
-          </a:prstGeom>
-          <a:noFill xmlns:a="http://schemas.openxmlformats.org/drawingml/2006/main"/>
-          <a:ln xmlns:a="http://schemas.openxmlformats.org/drawingml/2006/main" w="0">
-            <a:noFill/>
-          </a:ln>
-        </p:spPr>
-        <p:txBody>
-          <a:bodyPr xmlns:a="http://schemas.openxmlformats.org/drawingml/2006/main" wrap="square" lIns="0" tIns="0" rIns="0" bIns="0" anchor="t"/>
-          <a:lstStyle xmlns:a="http://schemas.openxmlformats.org/drawingml/2006/main"/>
-          <a:p xmlns:a="http://schemas.openxmlformats.org/drawingml/2006/main">
-            <a:r>
-              <a:rPr lang="en-US" sz="1275">
-                <a:solidFill>
-                  <a:srgbClr val="8A969F"/>
-                </a:solidFill>
-                <a:latin typeface="Inter"/>
-                <a:ea typeface="Inter"/>
-              </a:rPr>
-              <a:t>Return with proof</a:t>
-            </a:r>
-            <a:endParaRPr lang="en-US"/>
-          </a:p>
-        </p:txBody>
-      </p:sp>
-      <p:sp>
-        <p:nvSpPr>
-          <p:cNvPr id="25" name="visual-process-rule"/>
-          <p:cNvSpPr/>
-          <p:nvPr/>
-        </p:nvSpPr>
-        <p:spPr>
-          <a:xfrm xmlns:a="http://schemas.openxmlformats.org/drawingml/2006/main">
-            <a:off x="7239000" y="3486150"/>
-            <a:ext cx="0" cy="2705100"/>
-          </a:xfrm>
-          <a:prstGeom xmlns:a="http://schemas.openxmlformats.org/drawingml/2006/main" prst="line">
-            <a:avLst/>
-          </a:prstGeom>
-          <a:noFill xmlns:a="http://schemas.openxmlformats.org/drawingml/2006/main"/>
-          <a:ln xmlns:a="http://schemas.openxmlformats.org/drawingml/2006/main" w="12700">
-            <a:solidFill>
-              <a:srgbClr val="8A969F"/>
-            </a:solidFill>
-            <a:prstDash val="solid"/>
-          </a:ln>
-        </p:spPr>
-        <p:txBody>
-          <a:bodyPr xmlns:a="http://schemas.openxmlformats.org/drawingml/2006/main" wrap="square" lIns="0" tIns="0" rIns="0" bIns="0" anchor="t"/>
-          <a:lstStyle xmlns:a="http://schemas.openxmlformats.org/drawingml/2006/main"/>
-          <a:p xmlns:a="http://schemas.openxmlformats.org/drawingml/2006/main">
-            <a:r>
-              <a:rPr lang="en-US"/>
-              <a:t/>
-            </a:r>
-            <a:endParaRPr lang="en-US"/>
-          </a:p>
-        </p:txBody>
-      </p:sp>
-      <p:sp>
-        <p:nvSpPr>
-          <p:cNvPr id="26" name="visual-process-note-label"/>
-          <p:cNvSpPr txBox="1"/>
-          <p:nvPr/>
-        </p:nvSpPr>
-        <p:spPr>
-          <a:xfrm xmlns:a="http://schemas.openxmlformats.org/drawingml/2006/main">
-            <a:off x="8001000" y="3562350"/>
-            <a:ext cx="3429000" cy="228600"/>
-          </a:xfrm>
-          <a:prstGeom xmlns:a="http://schemas.openxmlformats.org/drawingml/2006/main" prst="rect">
-            <a:avLst/>
-          </a:prstGeom>
-          <a:noFill xmlns:a="http://schemas.openxmlformats.org/drawingml/2006/main"/>
-          <a:ln xmlns:a="http://schemas.openxmlformats.org/drawingml/2006/main" w="0">
-            <a:noFill/>
-          </a:ln>
-        </p:spPr>
-        <p:txBody>
-          <a:bodyPr xmlns:a="http://schemas.openxmlformats.org/drawingml/2006/main" wrap="square" lIns="0" tIns="0" rIns="0" bIns="0" anchor="t"/>
-          <a:lstStyle xmlns:a="http://schemas.openxmlformats.org/drawingml/2006/main"/>
-          <a:p xmlns:a="http://schemas.openxmlformats.org/drawingml/2006/main">
-            <a:r>
-              <a:rPr lang="en-US" sz="1125" b="1">
-                <a:solidFill>
-                  <a:srgbClr val="1769D2"/>
-                </a:solidFill>
-                <a:latin typeface="Inter"/>
-                <a:ea typeface="Inter"/>
-              </a:rPr>
-              <a:t>PROCESS CARRIER</a:t>
-            </a:r>
-            <a:endParaRPr lang="en-US"/>
-          </a:p>
-        </p:txBody>
-      </p:sp>
-      <p:sp>
-        <p:nvSpPr>
-          <p:cNvPr id="27" name="visual-process-note-title"/>
-          <p:cNvSpPr txBox="1"/>
-          <p:nvPr/>
-        </p:nvSpPr>
-        <p:spPr>
-          <a:xfrm xmlns:a="http://schemas.openxmlformats.org/drawingml/2006/main">
-            <a:off x="8001000" y="4038600"/>
-            <a:ext cx="4381500" cy="685800"/>
-          </a:xfrm>
-          <a:prstGeom xmlns:a="http://schemas.openxmlformats.org/drawingml/2006/main" prst="rect">
-            <a:avLst/>
-          </a:prstGeom>
-          <a:noFill xmlns:a="http://schemas.openxmlformats.org/drawingml/2006/main"/>
-          <a:ln xmlns:a="http://schemas.openxmlformats.org/drawingml/2006/main" w="0">
-            <a:noFill/>
-          </a:ln>
-        </p:spPr>
-        <p:txBody>
-          <a:bodyPr xmlns:a="http://schemas.openxmlformats.org/drawingml/2006/main" wrap="square" lIns="0" tIns="0" rIns="0" bIns="0" anchor="t"/>
-          <a:lstStyle xmlns:a="http://schemas.openxmlformats.org/drawingml/2006/main"/>
-          <a:p xmlns:a="http://schemas.openxmlformats.org/drawingml/2006/main">
-            <a:r>
-              <a:rPr lang="en-US" sz="2250" b="1">
-                <a:solidFill>
-                  <a:srgbClr val="132A3A"/>
-                </a:solidFill>
-                <a:latin typeface="Inter"/>
-                <a:ea typeface="Inter"/>
-              </a:rPr>
-              <a:t>A relationship earns a line.</a:t>
-            </a:r>
-            <a:endParaRPr lang="en-US"/>
-          </a:p>
-        </p:txBody>
-      </p:sp>
-      <p:sp>
-        <p:nvSpPr>
-          <p:cNvPr id="28" name="visual-process-note-body"/>
-          <p:cNvSpPr txBox="1"/>
-          <p:nvPr/>
-        </p:nvSpPr>
-        <p:spPr>
-          <a:xfrm xmlns:a="http://schemas.openxmlformats.org/drawingml/2006/main">
-            <a:off x="8001000" y="5048250"/>
-            <a:ext cx="4572000" cy="685800"/>
-          </a:xfrm>
-          <a:prstGeom xmlns:a="http://schemas.openxmlformats.org/drawingml/2006/main" prst="rect">
-            <a:avLst/>
-          </a:prstGeom>
-          <a:noFill xmlns:a="http://schemas.openxmlformats.org/drawingml/2006/main"/>
-          <a:ln xmlns:a="http://schemas.openxmlformats.org/drawingml/2006/main" w="0">
-            <a:noFill/>
-          </a:ln>
-        </p:spPr>
-        <p:txBody>
-          <a:bodyPr xmlns:a="http://schemas.openxmlformats.org/drawingml/2006/main" wrap="square" lIns="0" tIns="0" rIns="0" bIns="0" anchor="t"/>
-          <a:lstStyle xmlns:a="http://schemas.openxmlformats.org/drawingml/2006/main"/>
-          <a:p xmlns:a="http://schemas.openxmlformats.org/drawingml/2006/main">
-            <a:r>
-              <a:rPr lang="en-US" sz="1275">
-                <a:solidFill>
-                  <a:srgbClr val="8A969F"/>
-                </a:solidFill>
-                <a:latin typeface="Inter"/>
-                <a:ea typeface="Inter"/>
-              </a:rPr>
-              <a:t>Use sequence, direction and conditions to make the mechanism visible. If the relationship is not real, remove the arrow.</a:t>
-            </a:r>
-            <a:endParaRPr lang="en-US"/>
-          </a:p>
-        </p:txBody>
-      </p:sp>
-      <p:sp>
-        <p:nvSpPr>
-          <p:cNvPr id="29" name="visual-note"/>
-          <p:cNvSpPr/>
-          <p:nvPr/>
-        </p:nvSpPr>
-        <p:spPr>
-          <a:xfrm xmlns:a="http://schemas.openxmlformats.org/drawingml/2006/main">
-            <a:off x="8858250" y="3333750"/>
-            <a:ext cx="4762500" cy="2381250"/>
-          </a:xfrm>
-          <a:prstGeom xmlns:a="http://schemas.openxmlformats.org/drawingml/2006/main" prst="rect">
-            <a:avLst/>
-          </a:prstGeom>
-          <a:solidFill xmlns:a="http://schemas.openxmlformats.org/drawingml/2006/main">
-            <a:srgbClr val="F3F5F8"/>
-          </a:solidFill>
-          <a:ln xmlns:a="http://schemas.openxmlformats.org/drawingml/2006/main" w="12700">
-            <a:solidFill>
-              <a:srgbClr val="8A969F"/>
-            </a:solidFill>
-            <a:prstDash val="solid"/>
-          </a:ln>
-        </p:spPr>
-        <p:txBody>
-          <a:bodyPr xmlns:a="http://schemas.openxmlformats.org/drawingml/2006/main" wrap="square" lIns="0" tIns="0" rIns="0" bIns="0" anchor="t"/>
-          <a:lstStyle xmlns:a="http://schemas.openxmlformats.org/drawingml/2006/main"/>
-          <a:p xmlns:a="http://schemas.openxmlformats.org/drawingml/2006/main">
-            <a:r>
-              <a:rPr lang="en-US"/>
-              <a:t/>
-            </a:r>
-            <a:endParaRPr lang="en-US"/>
-          </a:p>
-        </p:txBody>
-      </p:sp>
-      <p:sp>
-        <p:nvSpPr>
-          <p:cNvPr id="30" name="visual-note-label"/>
-          <p:cNvSpPr txBox="1"/>
-          <p:nvPr/>
-        </p:nvSpPr>
-        <p:spPr>
-          <a:xfrm xmlns:a="http://schemas.openxmlformats.org/drawingml/2006/main">
-            <a:off x="9239250" y="3695700"/>
-            <a:ext cx="4000500" cy="228600"/>
-          </a:xfrm>
-          <a:prstGeom xmlns:a="http://schemas.openxmlformats.org/drawingml/2006/main" prst="rect">
-            <a:avLst/>
-          </a:prstGeom>
-          <a:noFill xmlns:a="http://schemas.openxmlformats.org/drawingml/2006/main"/>
-          <a:ln xmlns:a="http://schemas.openxmlformats.org/drawingml/2006/main" w="0">
-            <a:noFill/>
-          </a:ln>
-        </p:spPr>
-        <p:txBody>
-          <a:bodyPr xmlns:a="http://schemas.openxmlformats.org/drawingml/2006/main" wrap="square" lIns="0" tIns="0" rIns="0" bIns="0" anchor="t"/>
-          <a:lstStyle xmlns:a="http://schemas.openxmlformats.org/drawingml/2006/main"/>
-          <a:p xmlns:a="http://schemas.openxmlformats.org/drawingml/2006/main">
-            <a:r>
-              <a:rPr lang="en-US" sz="1125" b="1">
-                <a:solidFill>
-                  <a:srgbClr val="1769D2"/>
-                </a:solidFill>
-                <a:latin typeface="Inter"/>
-                <a:ea typeface="Inter"/>
-              </a:rPr>
-              <a:t>CARRIER</a:t>
-            </a:r>
-            <a:endParaRPr lang="en-US"/>
-          </a:p>
-        </p:txBody>
-      </p:sp>
-      <p:sp>
-        <p:nvSpPr>
-          <p:cNvPr id="31" name="visual-note-text"/>
-          <p:cNvSpPr txBox="1"/>
-          <p:nvPr/>
-        </p:nvSpPr>
-        <p:spPr>
-          <a:xfrm xmlns:a="http://schemas.openxmlformats.org/drawingml/2006/main">
-            <a:off x="9239250" y="4171950"/>
-            <a:ext cx="4000500" cy="723900"/>
-          </a:xfrm>
-          <a:prstGeom xmlns:a="http://schemas.openxmlformats.org/drawingml/2006/main" prst="rect">
-            <a:avLst/>
-          </a:prstGeom>
-          <a:noFill xmlns:a="http://schemas.openxmlformats.org/drawingml/2006/main"/>
-          <a:ln xmlns:a="http://schemas.openxmlformats.org/drawingml/2006/main" w="0">
-            <a:noFill/>
-          </a:ln>
-        </p:spPr>
-        <p:txBody>
-          <a:bodyPr xmlns:a="http://schemas.openxmlformats.org/drawingml/2006/main" wrap="square" lIns="0" tIns="0" rIns="0" bIns="0" anchor="t"/>
-          <a:lstStyle xmlns:a="http://schemas.openxmlformats.org/drawingml/2006/main"/>
-          <a:p xmlns:a="http://schemas.openxmlformats.org/drawingml/2006/main">
-            <a:r>
-              <a:rPr lang="en-US" sz="2100" b="1">
-                <a:solidFill>
-                  <a:srgbClr val="132A3A"/>
-                </a:solidFill>
-                <a:latin typeface="Inter"/>
-                <a:ea typeface="Inter"/>
-              </a:rPr>
-              <a:t>Pattern before caveat</a:t>
-            </a:r>
-            <a:endParaRPr lang="en-US"/>
-          </a:p>
-        </p:txBody>
-      </p:sp>
-      <p:sp>
-        <p:nvSpPr>
-          <p:cNvPr id="32" name="visual-note-foot"/>
-          <p:cNvSpPr txBox="1"/>
-          <p:nvPr/>
-        </p:nvSpPr>
-        <p:spPr>
-          <a:xfrm xmlns:a="http://schemas.openxmlformats.org/drawingml/2006/main">
-            <a:off x="9239250" y="5219700"/>
-            <a:ext cx="4000500" cy="457200"/>
-          </a:xfrm>
-          <a:prstGeom xmlns:a="http://schemas.openxmlformats.org/drawingml/2006/main" prst="rect">
-            <a:avLst/>
-          </a:prstGeom>
-          <a:noFill xmlns:a="http://schemas.openxmlformats.org/drawingml/2006/main"/>
-          <a:ln xmlns:a="http://schemas.openxmlformats.org/drawingml/2006/main" w="0">
-            <a:noFill/>
-          </a:ln>
-        </p:spPr>
-        <p:txBody>
-          <a:bodyPr xmlns:a="http://schemas.openxmlformats.org/drawingml/2006/main" wrap="square" lIns="0" tIns="0" rIns="0" bIns="0" anchor="t"/>
-          <a:lstStyle xmlns:a="http://schemas.openxmlformats.org/drawingml/2006/main"/>
-          <a:p xmlns:a="http://schemas.openxmlformats.org/drawingml/2006/main">
-            <a:r>
-              <a:rPr lang="en-US" sz="1200">
-                <a:solidFill>
-                  <a:srgbClr val="8A969F"/>
-                </a:solidFill>
-                <a:latin typeface="Inter"/>
-                <a:ea typeface="Inter"/>
-              </a:rPr>
-              <a:t>Crop, contrast and source role are reviewed before delivery.</a:t>
-            </a:r>
-            <a:endParaRPr lang="en-US"/>
-          </a:p>
-        </p:txBody>
-      </p:sp>
-      <p:sp>
-        <p:nvSpPr>
-          <p:cNvPr id="33" name="source"/>
+              <a:t>THE IMAGE IS EVIDENCE, NOT FILL</a:t>
+            </a:r>
+            <a:endParaRPr lang="en-US"/>
+          </a:p>
+        </p:txBody>
+      </p:sp>
+      <p:sp>
+        <p:nvSpPr>
+          <p:cNvPr id="9" name="source"/>
           <p:cNvSpPr txBox="1"/>
           <p:nvPr/>
         </p:nvSpPr>
@@ -4975,7 +4191,7 @@
       </p:sp>
       <p:sp>
         <p:nvSpPr>
-          <p:cNvPr id="34" name="page-number"/>
+          <p:cNvPr id="10" name="page-number"/>
           <p:cNvSpPr txBox="1"/>
           <p:nvPr/>
         </p:nvSpPr>
@@ -5036,12 +4252,25 @@
           <a:chExt cx="0" cy="0"/>
         </a:xfrm>
       </p:grpSpPr>
-      <p:sp>
-        <p:nvSpPr>
-          <p:cNvPr id="2" name="background"/>
-          <p:cNvSpPr/>
-          <p:nvPr/>
-        </p:nvSpPr>
+      <p:pic>
+        <p:nvPicPr>
+          <p:cNvPr id="2" name="close-visual-field">
+            <a:extLst xmlns:a="http://schemas.openxmlformats.org/drawingml/2006/main">
+              <a:ext uri="{C183D7F6-B498-43B3-948B-1728B52AA6E4}">
+                <adec:decorative xmlns:adec="http://schemas.microsoft.com/office/drawing/2017/decorative" val="1"/>
+              </a:ext>
+            </a:extLst>
+          </p:cNvPr>
+          <p:cNvPicPr/>
+          <p:nvPr/>
+        </p:nvPicPr>
+        <p:blipFill>
+          <a:blip xmlns:r="http://schemas.openxmlformats.org/officeDocument/2006/relationships" xmlns:a="http://schemas.openxmlformats.org/drawingml/2006/main" r:embed="rIdOfficeKitImage6af8c9b5dff6e3a3_1"/>
+          <a:srcRect xmlns:a="http://schemas.openxmlformats.org/drawingml/2006/main" l="0" t="34171" r="0" b="34171"/>
+          <a:stretch xmlns:a="http://schemas.openxmlformats.org/drawingml/2006/main">
+            <a:fillRect/>
+          </a:stretch>
+        </p:blipFill>
         <p:spPr>
           <a:xfrm xmlns:a="http://schemas.openxmlformats.org/drawingml/2006/main">
             <a:off x="0" y="0"/>
@@ -5050,8 +4279,26 @@
           <a:prstGeom xmlns:a="http://schemas.openxmlformats.org/drawingml/2006/main" prst="rect">
             <a:avLst/>
           </a:prstGeom>
+        </p:spPr>
+      </p:pic>
+      <p:sp>
+        <p:nvSpPr>
+          <p:cNvPr id="3" name="close-paper-scrim"/>
+          <p:cNvSpPr/>
+          <p:nvPr/>
+        </p:nvSpPr>
+        <p:spPr>
+          <a:xfrm xmlns:a="http://schemas.openxmlformats.org/drawingml/2006/main">
+            <a:off x="0" y="0"/>
+            <a:ext cx="7429500" cy="8572500"/>
+          </a:xfrm>
+          <a:prstGeom xmlns:a="http://schemas.openxmlformats.org/drawingml/2006/main" prst="rect">
+            <a:avLst/>
+          </a:prstGeom>
           <a:solidFill xmlns:a="http://schemas.openxmlformats.org/drawingml/2006/main">
-            <a:srgbClr val="F8FAFC"/>
+            <a:srgbClr val="F8FAFC">
+              <a:alpha val="96000"/>
+            </a:srgbClr>
           </a:solidFill>
           <a:ln xmlns:a="http://schemas.openxmlformats.org/drawingml/2006/main" w="0">
             <a:solidFill>
@@ -5074,7 +4321,7 @@
       </p:sp>
       <p:sp>
         <p:nvSpPr>
-          <p:cNvPr id="3" name="close-top-rule"/>
+          <p:cNvPr id="4" name="close-top-rule"/>
           <p:cNvSpPr/>
           <p:nvPr/>
         </p:nvSpPr>
@@ -5108,7 +4355,7 @@
       </p:sp>
       <p:sp>
         <p:nvSpPr>
-          <p:cNvPr id="4" name="BLUEPRINT LECTURE · CLOSE"/>
+          <p:cNvPr id="5" name="BLUEPRINT LECTURE · CLOSE"/>
           <p:cNvSpPr txBox="1"/>
           <p:nvPr/>
         </p:nvSpPr>
@@ -5145,14 +4392,14 @@
       </p:sp>
       <p:sp>
         <p:nvSpPr>
-          <p:cNvPr id="5" name="close-title"/>
+          <p:cNvPr id="6" name="close-title"/>
           <p:cNvSpPr txBox="1"/>
           <p:nvPr/>
         </p:nvSpPr>
         <p:spPr>
           <a:xfrm xmlns:a="http://schemas.openxmlformats.org/drawingml/2006/main">
             <a:off x="914400" y="1314450"/>
-            <a:ext cx="11811000" cy="552450"/>
+            <a:ext cx="6286500" cy="552450"/>
           </a:xfrm>
           <a:prstGeom xmlns:a="http://schemas.openxmlformats.org/drawingml/2006/main" prst="rect">
             <a:avLst/>
@@ -5182,14 +4429,14 @@
       </p:sp>
       <p:sp>
         <p:nvSpPr>
-          <p:cNvPr id="6" name="close-basis"/>
+          <p:cNvPr id="7" name="close-basis"/>
           <p:cNvSpPr txBox="1"/>
           <p:nvPr/>
         </p:nvSpPr>
         <p:spPr>
           <a:xfrm xmlns:a="http://schemas.openxmlformats.org/drawingml/2006/main">
             <a:off x="952500" y="1981200"/>
-            <a:ext cx="10477500" cy="266700"/>
+            <a:ext cx="6096000" cy="266700"/>
           </a:xfrm>
           <a:prstGeom xmlns:a="http://schemas.openxmlformats.org/drawingml/2006/main" prst="rect">
             <a:avLst/>
@@ -5219,7 +4466,7 @@
       </p:sp>
       <p:sp>
         <p:nvSpPr>
-          <p:cNvPr id="7" name="close-rule"/>
+          <p:cNvPr id="8" name="close-rule"/>
           <p:cNvSpPr/>
           <p:nvPr/>
         </p:nvSpPr>
@@ -5253,7 +4500,7 @@
       </p:sp>
       <p:sp>
         <p:nvSpPr>
-          <p:cNvPr id="8" name="close-number-0"/>
+          <p:cNvPr id="9" name="close-number-0"/>
           <p:cNvSpPr txBox="1"/>
           <p:nvPr/>
         </p:nvSpPr>
@@ -5290,7 +4537,7 @@
       </p:sp>
       <p:sp>
         <p:nvSpPr>
-          <p:cNvPr id="9" name="close-row-rule-0"/>
+          <p:cNvPr id="10" name="close-row-rule-0"/>
           <p:cNvSpPr/>
           <p:nvPr/>
         </p:nvSpPr>
@@ -5324,7 +4571,7 @@
       </p:sp>
       <p:sp>
         <p:nvSpPr>
-          <p:cNvPr id="10" name="close-label-0"/>
+          <p:cNvPr id="11" name="close-label-0"/>
           <p:cNvSpPr txBox="1"/>
           <p:nvPr/>
         </p:nvSpPr>
@@ -5361,7 +4608,7 @@
       </p:sp>
       <p:sp>
         <p:nvSpPr>
-          <p:cNvPr id="11" name="close-text-0"/>
+          <p:cNvPr id="12" name="close-text-0"/>
           <p:cNvSpPr txBox="1"/>
           <p:nvPr/>
         </p:nvSpPr>
@@ -5398,7 +4645,7 @@
       </p:sp>
       <p:sp>
         <p:nvSpPr>
-          <p:cNvPr id="12" name="close-number-1"/>
+          <p:cNvPr id="13" name="close-number-1"/>
           <p:cNvSpPr txBox="1"/>
           <p:nvPr/>
         </p:nvSpPr>
@@ -5435,7 +4682,7 @@
       </p:sp>
       <p:sp>
         <p:nvSpPr>
-          <p:cNvPr id="13" name="close-row-rule-1"/>
+          <p:cNvPr id="14" name="close-row-rule-1"/>
           <p:cNvSpPr/>
           <p:nvPr/>
         </p:nvSpPr>
@@ -5469,7 +4716,7 @@
       </p:sp>
       <p:sp>
         <p:nvSpPr>
-          <p:cNvPr id="14" name="close-label-1"/>
+          <p:cNvPr id="15" name="close-label-1"/>
           <p:cNvSpPr txBox="1"/>
           <p:nvPr/>
         </p:nvSpPr>
@@ -5506,7 +4753,7 @@
       </p:sp>
       <p:sp>
         <p:nvSpPr>
-          <p:cNvPr id="15" name="close-text-1"/>
+          <p:cNvPr id="16" name="close-text-1"/>
           <p:cNvSpPr txBox="1"/>
           <p:nvPr/>
         </p:nvSpPr>
@@ -5543,7 +4790,7 @@
       </p:sp>
       <p:sp>
         <p:nvSpPr>
-          <p:cNvPr id="16" name="close-number-2"/>
+          <p:cNvPr id="17" name="close-number-2"/>
           <p:cNvSpPr txBox="1"/>
           <p:nvPr/>
         </p:nvSpPr>
@@ -5580,7 +4827,7 @@
       </p:sp>
       <p:sp>
         <p:nvSpPr>
-          <p:cNvPr id="17" name="close-row-rule-2"/>
+          <p:cNvPr id="18" name="close-row-rule-2"/>
           <p:cNvSpPr/>
           <p:nvPr/>
         </p:nvSpPr>
@@ -5614,7 +4861,7 @@
       </p:sp>
       <p:sp>
         <p:nvSpPr>
-          <p:cNvPr id="18" name="close-label-2"/>
+          <p:cNvPr id="19" name="close-label-2"/>
           <p:cNvSpPr txBox="1"/>
           <p:nvPr/>
         </p:nvSpPr>
@@ -5651,7 +4898,7 @@
       </p:sp>
       <p:sp>
         <p:nvSpPr>
-          <p:cNvPr id="19" name="close-text-2"/>
+          <p:cNvPr id="20" name="close-text-2"/>
           <p:cNvSpPr txBox="1"/>
           <p:nvPr/>
         </p:nvSpPr>
@@ -5688,7 +4935,7 @@
       </p:sp>
       <p:sp>
         <p:nvSpPr>
-          <p:cNvPr id="20" name="next-panel"/>
+          <p:cNvPr id="21" name="next-panel"/>
           <p:cNvSpPr/>
           <p:nvPr/>
         </p:nvSpPr>
@@ -5724,7 +4971,7 @@
       </p:sp>
       <p:sp>
         <p:nvSpPr>
-          <p:cNvPr id="21" name="next-label"/>
+          <p:cNvPr id="22" name="next-label"/>
           <p:cNvSpPr txBox="1"/>
           <p:nvPr/>
         </p:nvSpPr>
@@ -5761,7 +5008,7 @@
       </p:sp>
       <p:sp>
         <p:nvSpPr>
-          <p:cNvPr id="22" name="next-text"/>
+          <p:cNvPr id="23" name="next-text"/>
           <p:cNvSpPr txBox="1"/>
           <p:nvPr/>
         </p:nvSpPr>
@@ -5798,7 +5045,7 @@
       </p:sp>
       <p:sp>
         <p:nvSpPr>
-          <p:cNvPr id="23" name="next-foot"/>
+          <p:cNvPr id="24" name="next-foot"/>
           <p:cNvSpPr txBox="1"/>
           <p:nvPr/>
         </p:nvSpPr>
@@ -5835,7 +5082,7 @@
       </p:sp>
       <p:sp>
         <p:nvSpPr>
-          <p:cNvPr id="24" name="source"/>
+          <p:cNvPr id="25" name="source"/>
           <p:cNvSpPr txBox="1"/>
           <p:nvPr/>
         </p:nvSpPr>
@@ -5872,7 +5119,7 @@
       </p:sp>
       <p:sp>
         <p:nvSpPr>
-          <p:cNvPr id="25" name="page-number"/>
+          <p:cNvPr id="26" name="page-number"/>
           <p:cNvSpPr txBox="1"/>
           <p:nvPr/>
         </p:nvSpPr>

--- a/skills/presentation-template-library/skills/artifact-template-blueprint-lecture/assets/reference.pptx
+++ b/skills/presentation-template-library/skills/artifact-template-blueprint-lecture/assets/reference.pptx
@@ -400,8 +400,8 @@
           <p:nvPr/>
         </p:nvPicPr>
         <p:blipFill>
-          <a:blip xmlns:r="http://schemas.openxmlformats.org/officeDocument/2006/relationships" xmlns:a="http://schemas.openxmlformats.org/drawingml/2006/main" r:embed="rIdOfficeKitImaged71bfa074cda59bb_1"/>
-          <a:srcRect xmlns:a="http://schemas.openxmlformats.org/drawingml/2006/main" l="0" t="34180" r="0" b="34180"/>
+          <a:blip xmlns:r="http://schemas.openxmlformats.org/officeDocument/2006/relationships" xmlns:a="http://schemas.openxmlformats.org/drawingml/2006/main" r:embed="rIdOfficeKitImage8bca39c9b7ba070f_1"/>
+          <a:srcRect xmlns:a="http://schemas.openxmlformats.org/drawingml/2006/main" l="0" t="34171" r="0" b="34171"/>
           <a:stretch xmlns:a="http://schemas.openxmlformats.org/drawingml/2006/main">
             <a:fillRect/>
           </a:stretch>
@@ -1214,8 +1214,8 @@
           <p:nvPr/>
         </p:nvPicPr>
         <p:blipFill>
-          <a:blip xmlns:r="http://schemas.openxmlformats.org/officeDocument/2006/relationships" xmlns:a="http://schemas.openxmlformats.org/drawingml/2006/main" r:embed="rIdOfficeKitImage6af8c9b5dff6e3a3_1"/>
-          <a:srcRect xmlns:a="http://schemas.openxmlformats.org/drawingml/2006/main" l="0" t="34171" r="0" b="34171"/>
+          <a:blip xmlns:r="http://schemas.openxmlformats.org/officeDocument/2006/relationships" xmlns:a="http://schemas.openxmlformats.org/drawingml/2006/main" r:embed="rIdOfficeKitImage8fbc298f8d1b7a3c_1"/>
+          <a:srcRect xmlns:a="http://schemas.openxmlformats.org/drawingml/2006/main" l="0" t="34180" r="0" b="34180"/>
           <a:stretch xmlns:a="http://schemas.openxmlformats.org/drawingml/2006/main">
             <a:fillRect/>
           </a:stretch>
@@ -2142,8 +2142,8 @@
           <p:nvPr/>
         </p:nvPicPr>
         <p:blipFill>
-          <a:blip xmlns:r="http://schemas.openxmlformats.org/officeDocument/2006/relationships" xmlns:a="http://schemas.openxmlformats.org/drawingml/2006/main" r:embed="rIdOfficeKitImage8bca39c9b7ba070f_1"/>
-          <a:srcRect xmlns:a="http://schemas.openxmlformats.org/drawingml/2006/main" l="0" t="34171" r="0" b="34171"/>
+          <a:blip xmlns:r="http://schemas.openxmlformats.org/officeDocument/2006/relationships" xmlns:a="http://schemas.openxmlformats.org/drawingml/2006/main" r:embed="rIdOfficeKitImage45ba195e2a5649fb_1"/>
+          <a:srcRect xmlns:a="http://schemas.openxmlformats.org/drawingml/2006/main" l="0" t="34170" r="0" b="34170"/>
           <a:stretch xmlns:a="http://schemas.openxmlformats.org/drawingml/2006/main">
             <a:fillRect/>
           </a:stretch>
@@ -2427,7 +2427,7 @@
         </p:xfrm>
         <a:graphic xmlns:a="http://schemas.openxmlformats.org/drawingml/2006/main">
           <a:graphicData uri="http://schemas.openxmlformats.org/drawingml/2006/chart">
-            <c:chart xmlns:r="http://schemas.openxmlformats.org/officeDocument/2006/relationships" xmlns:c="http://schemas.openxmlformats.org/drawingml/2006/chart" r:id="Reb64185bdabf4896"/>
+            <c:chart xmlns:r="http://schemas.openxmlformats.org/officeDocument/2006/relationships" xmlns:c="http://schemas.openxmlformats.org/drawingml/2006/chart" r:id="R404542240efd4b3a"/>
           </a:graphicData>
         </a:graphic>
       </p:graphicFrame>
@@ -3916,7 +3916,7 @@
           <p:nvPr/>
         </p:nvPicPr>
         <p:blipFill>
-          <a:blip xmlns:r="http://schemas.openxmlformats.org/officeDocument/2006/relationships" xmlns:a="http://schemas.openxmlformats.org/drawingml/2006/main" r:embed="rIdOfficeKitImage8fbc298f8d1b7a3c_1"/>
+          <a:blip xmlns:r="http://schemas.openxmlformats.org/officeDocument/2006/relationships" xmlns:a="http://schemas.openxmlformats.org/drawingml/2006/main" r:embed="rIdOfficeKitImaged71bfa074cda59bb_1"/>
           <a:srcRect xmlns:a="http://schemas.openxmlformats.org/drawingml/2006/main" l="0" t="34180" r="0" b="34180"/>
           <a:stretch xmlns:a="http://schemas.openxmlformats.org/drawingml/2006/main">
             <a:fillRect/>
@@ -4265,7 +4265,7 @@
           <p:nvPr/>
         </p:nvPicPr>
         <p:blipFill>
-          <a:blip xmlns:r="http://schemas.openxmlformats.org/officeDocument/2006/relationships" xmlns:a="http://schemas.openxmlformats.org/drawingml/2006/main" r:embed="rIdOfficeKitImage6af8c9b5dff6e3a3_1"/>
+          <a:blip xmlns:r="http://schemas.openxmlformats.org/officeDocument/2006/relationships" xmlns:a="http://schemas.openxmlformats.org/drawingml/2006/main" r:embed="rIdOfficeKitImage8bca39c9b7ba070f_1"/>
           <a:srcRect xmlns:a="http://schemas.openxmlformats.org/drawingml/2006/main" l="0" t="34171" r="0" b="34171"/>
           <a:stretch xmlns:a="http://schemas.openxmlformats.org/drawingml/2006/main">
             <a:fillRect/>

--- a/skills/presentation-template-library/skills/artifact-template-blueprint-lecture/assets/reference.pptx
+++ b/skills/presentation-template-library/skills/artifact-template-blueprint-lecture/assets/reference.pptx
@@ -373,6 +373,16 @@
 <file path=ppt/slides/slide1.xml><?xml version="1.0" encoding="utf-8"?>
 <p:sld xmlns:p="http://schemas.openxmlformats.org/presentationml/2006/main">
   <p:cSld name="Opening claim">
+    <p:bg>
+      <p:bgPr>
+        <a:blipFill xmlns:a="http://schemas.openxmlformats.org/drawingml/2006/main">
+          <a:blip xmlns:r="http://schemas.openxmlformats.org/officeDocument/2006/relationships" r:embed="rIdOfficeKitImage8bca39c9b7ba070f_1"/>
+          <a:stretch>
+            <a:fillRect/>
+          </a:stretch>
+        </a:blipFill>
+      </p:bgPr>
+    </p:bg>
     <p:spTree>
       <p:nvGrpSpPr>
         <p:cNvPr id="1" name=""/>
@@ -387,38 +397,9 @@
           <a:chExt cx="0" cy="0"/>
         </a:xfrm>
       </p:grpSpPr>
-      <p:pic>
-        <p:nvPicPr>
-          <p:cNvPr id="2" name="artifact-template-blueprint-lecture-cover-field">
-            <a:extLst xmlns:a="http://schemas.openxmlformats.org/drawingml/2006/main">
-              <a:ext uri="{C183D7F6-B498-43B3-948B-1728B52AA6E4}">
-                <adec:decorative xmlns:adec="http://schemas.microsoft.com/office/drawing/2017/decorative" val="1"/>
-              </a:ext>
-            </a:extLst>
-          </p:cNvPr>
-          <p:cNvPicPr/>
-          <p:nvPr/>
-        </p:nvPicPr>
-        <p:blipFill>
-          <a:blip xmlns:r="http://schemas.openxmlformats.org/officeDocument/2006/relationships" xmlns:a="http://schemas.openxmlformats.org/drawingml/2006/main" r:embed="rIdOfficeKitImage8bca39c9b7ba070f_1"/>
-          <a:srcRect xmlns:a="http://schemas.openxmlformats.org/drawingml/2006/main" l="0" t="34171" r="0" b="34171"/>
-          <a:stretch xmlns:a="http://schemas.openxmlformats.org/drawingml/2006/main">
-            <a:fillRect/>
-          </a:stretch>
-        </p:blipFill>
-        <p:spPr>
-          <a:xfrm xmlns:a="http://schemas.openxmlformats.org/drawingml/2006/main">
-            <a:off x="0" y="0"/>
-            <a:ext cx="15240000" cy="8572500"/>
-          </a:xfrm>
-          <a:prstGeom xmlns:a="http://schemas.openxmlformats.org/drawingml/2006/main" prst="rect">
-            <a:avLst/>
-          </a:prstGeom>
-        </p:spPr>
-      </p:pic>
-      <p:sp>
-        <p:nvSpPr>
-          <p:cNvPr id="3" name="cover-paper-scrim"/>
+      <p:sp>
+        <p:nvSpPr>
+          <p:cNvPr id="2" name="cover-paper-scrim"/>
           <p:cNvSpPr/>
           <p:nvPr/>
         </p:nvSpPr>
@@ -456,7 +437,7 @@
       </p:sp>
       <p:sp>
         <p:nvSpPr>
-          <p:cNvPr id="4" name="top-rule"/>
+          <p:cNvPr id="3" name="top-rule"/>
           <p:cNvSpPr/>
           <p:nvPr/>
         </p:nvSpPr>
@@ -490,7 +471,7 @@
       </p:sp>
       <p:sp>
         <p:nvSpPr>
-          <p:cNvPr id="5" name="eyebrow"/>
+          <p:cNvPr id="4" name="eyebrow"/>
           <p:cNvSpPr txBox="1"/>
           <p:nvPr/>
         </p:nvSpPr>
@@ -527,7 +508,7 @@
       </p:sp>
       <p:sp>
         <p:nvSpPr>
-          <p:cNvPr id="6" name="cover-title"/>
+          <p:cNvPr id="5" name="cover-title"/>
           <p:cNvSpPr txBox="1"/>
           <p:nvPr/>
         </p:nvSpPr>
@@ -564,7 +545,7 @@
       </p:sp>
       <p:sp>
         <p:nvSpPr>
-          <p:cNvPr id="7" name="cover-subtitle"/>
+          <p:cNvPr id="6" name="cover-subtitle"/>
           <p:cNvSpPr txBox="1"/>
           <p:nvPr/>
         </p:nvSpPr>
@@ -601,7 +582,7 @@
       </p:sp>
       <p:sp>
         <p:nvSpPr>
-          <p:cNvPr id="8" name="cover-rule"/>
+          <p:cNvPr id="7" name="cover-rule"/>
           <p:cNvSpPr/>
           <p:nvPr/>
         </p:nvSpPr>
@@ -635,7 +616,7 @@
       </p:sp>
       <p:sp>
         <p:nvSpPr>
-          <p:cNvPr id="9" name="cover-basis"/>
+          <p:cNvPr id="8" name="cover-basis"/>
           <p:cNvSpPr txBox="1"/>
           <p:nvPr/>
         </p:nvSpPr>
@@ -672,7 +653,7 @@
       </p:sp>
       <p:sp>
         <p:nvSpPr>
-          <p:cNvPr id="10" name="cover-thesis"/>
+          <p:cNvPr id="9" name="cover-thesis"/>
           <p:cNvSpPr txBox="1"/>
           <p:nvPr/>
         </p:nvSpPr>
@@ -709,7 +690,7 @@
       </p:sp>
       <p:sp>
         <p:nvSpPr>
-          <p:cNvPr id="11" name="cover-source"/>
+          <p:cNvPr id="10" name="cover-source"/>
           <p:cNvSpPr txBox="1"/>
           <p:nvPr/>
         </p:nvSpPr>
@@ -746,7 +727,7 @@
       </p:sp>
       <p:sp>
         <p:nvSpPr>
-          <p:cNvPr id="12" name="page-number"/>
+          <p:cNvPr id="11" name="page-number"/>
           <p:cNvSpPr txBox="1"/>
           <p:nvPr/>
         </p:nvSpPr>
@@ -784,7 +765,7 @@
       </p:sp>
       <p:sp>
         <p:nvSpPr>
-          <p:cNvPr id="13" name="anchor-field"/>
+          <p:cNvPr id="12" name="anchor-field"/>
           <p:cNvSpPr/>
           <p:nvPr/>
         </p:nvSpPr>
@@ -820,7 +801,7 @@
       </p:sp>
       <p:sp>
         <p:nvSpPr>
-          <p:cNvPr id="14" name="anchor-grid-0-0"/>
+          <p:cNvPr id="13" name="anchor-grid-0-0"/>
           <p:cNvSpPr/>
           <p:nvPr/>
         </p:nvSpPr>
@@ -856,7 +837,7 @@
       </p:sp>
       <p:sp>
         <p:nvSpPr>
-          <p:cNvPr id="15" name="anchor-grid-0-1"/>
+          <p:cNvPr id="14" name="anchor-grid-0-1"/>
           <p:cNvSpPr/>
           <p:nvPr/>
         </p:nvSpPr>
@@ -892,7 +873,7 @@
       </p:sp>
       <p:sp>
         <p:nvSpPr>
-          <p:cNvPr id="16" name="anchor-grid-0-2"/>
+          <p:cNvPr id="15" name="anchor-grid-0-2"/>
           <p:cNvSpPr/>
           <p:nvPr/>
         </p:nvSpPr>
@@ -928,7 +909,7 @@
       </p:sp>
       <p:sp>
         <p:nvSpPr>
-          <p:cNvPr id="17" name="anchor-grid-1-0"/>
+          <p:cNvPr id="16" name="anchor-grid-1-0"/>
           <p:cNvSpPr/>
           <p:nvPr/>
         </p:nvSpPr>
@@ -964,7 +945,7 @@
       </p:sp>
       <p:sp>
         <p:nvSpPr>
-          <p:cNvPr id="18" name="anchor-grid-1-1"/>
+          <p:cNvPr id="17" name="anchor-grid-1-1"/>
           <p:cNvSpPr/>
           <p:nvPr/>
         </p:nvSpPr>
@@ -1000,7 +981,7 @@
       </p:sp>
       <p:sp>
         <p:nvSpPr>
-          <p:cNvPr id="19" name="anchor-grid-1-2"/>
+          <p:cNvPr id="18" name="anchor-grid-1-2"/>
           <p:cNvSpPr/>
           <p:nvPr/>
         </p:nvSpPr>
@@ -1036,7 +1017,7 @@
       </p:sp>
       <p:sp>
         <p:nvSpPr>
-          <p:cNvPr id="20" name="anchor-grid-2-0"/>
+          <p:cNvPr id="19" name="anchor-grid-2-0"/>
           <p:cNvSpPr/>
           <p:nvPr/>
         </p:nvSpPr>
@@ -1072,7 +1053,7 @@
       </p:sp>
       <p:sp>
         <p:nvSpPr>
-          <p:cNvPr id="21" name="anchor-grid-2-1"/>
+          <p:cNvPr id="20" name="anchor-grid-2-1"/>
           <p:cNvSpPr/>
           <p:nvPr/>
         </p:nvSpPr>
@@ -1108,7 +1089,7 @@
       </p:sp>
       <p:sp>
         <p:nvSpPr>
-          <p:cNvPr id="22" name="anchor-grid-2-2"/>
+          <p:cNvPr id="21" name="anchor-grid-2-2"/>
           <p:cNvSpPr/>
           <p:nvPr/>
         </p:nvSpPr>
@@ -1144,7 +1125,7 @@
       </p:sp>
       <p:sp>
         <p:nvSpPr>
-          <p:cNvPr id="23" name="anchor-axis"/>
+          <p:cNvPr id="22" name="anchor-axis"/>
           <p:cNvSpPr/>
           <p:nvPr/>
         </p:nvSpPr>
@@ -1187,6 +1168,16 @@
 <file path=ppt/slides/slide2.xml><?xml version="1.0" encoding="utf-8"?>
 <p:sld xmlns:p="http://schemas.openxmlformats.org/presentationml/2006/main">
   <p:cSld name="Argument">
+    <p:bg>
+      <p:bgPr>
+        <a:blipFill xmlns:a="http://schemas.openxmlformats.org/drawingml/2006/main">
+          <a:blip xmlns:r="http://schemas.openxmlformats.org/officeDocument/2006/relationships" r:embed="rIdOfficeKitImage8fbc298f8d1b7a3c_1"/>
+          <a:stretch>
+            <a:fillRect/>
+          </a:stretch>
+        </a:blipFill>
+      </p:bgPr>
+    </p:bg>
     <p:spTree>
       <p:nvGrpSpPr>
         <p:cNvPr id="1" name=""/>
@@ -1201,38 +1192,9 @@
           <a:chExt cx="0" cy="0"/>
         </a:xfrm>
       </p:grpSpPr>
-      <p:pic>
-        <p:nvPicPr>
-          <p:cNvPr id="2" name="argument-visual-field">
-            <a:extLst xmlns:a="http://schemas.openxmlformats.org/drawingml/2006/main">
-              <a:ext uri="{C183D7F6-B498-43B3-948B-1728B52AA6E4}">
-                <adec:decorative xmlns:adec="http://schemas.microsoft.com/office/drawing/2017/decorative" val="1"/>
-              </a:ext>
-            </a:extLst>
-          </p:cNvPr>
-          <p:cNvPicPr/>
-          <p:nvPr/>
-        </p:nvPicPr>
-        <p:blipFill>
-          <a:blip xmlns:r="http://schemas.openxmlformats.org/officeDocument/2006/relationships" xmlns:a="http://schemas.openxmlformats.org/drawingml/2006/main" r:embed="rIdOfficeKitImage8fbc298f8d1b7a3c_1"/>
-          <a:srcRect xmlns:a="http://schemas.openxmlformats.org/drawingml/2006/main" l="0" t="34180" r="0" b="34180"/>
-          <a:stretch xmlns:a="http://schemas.openxmlformats.org/drawingml/2006/main">
-            <a:fillRect/>
-          </a:stretch>
-        </p:blipFill>
-        <p:spPr>
-          <a:xfrm xmlns:a="http://schemas.openxmlformats.org/drawingml/2006/main">
-            <a:off x="0" y="0"/>
-            <a:ext cx="15240000" cy="8572500"/>
-          </a:xfrm>
-          <a:prstGeom xmlns:a="http://schemas.openxmlformats.org/drawingml/2006/main" prst="rect">
-            <a:avLst/>
-          </a:prstGeom>
-        </p:spPr>
-      </p:pic>
-      <p:sp>
-        <p:nvSpPr>
-          <p:cNvPr id="3" name="argument-paper-scrim"/>
+      <p:sp>
+        <p:nvSpPr>
+          <p:cNvPr id="2" name="argument-paper-scrim"/>
           <p:cNvSpPr/>
           <p:nvPr/>
         </p:nvSpPr>
@@ -1270,7 +1232,7 @@
       </p:sp>
       <p:sp>
         <p:nvSpPr>
-          <p:cNvPr id="4" name="argument-top-rule"/>
+          <p:cNvPr id="3" name="argument-top-rule"/>
           <p:cNvSpPr/>
           <p:nvPr/>
         </p:nvSpPr>
@@ -1304,7 +1266,7 @@
       </p:sp>
       <p:sp>
         <p:nvSpPr>
-          <p:cNvPr id="5" name="BLUEPRINT LECTURE · ARGUMENT"/>
+          <p:cNvPr id="4" name="BLUEPRINT LECTURE · ARGUMENT"/>
           <p:cNvSpPr txBox="1"/>
           <p:nvPr/>
         </p:nvSpPr>
@@ -1341,7 +1303,7 @@
       </p:sp>
       <p:sp>
         <p:nvSpPr>
-          <p:cNvPr id="6" name="argument-title"/>
+          <p:cNvPr id="5" name="argument-title"/>
           <p:cNvSpPr txBox="1"/>
           <p:nvPr/>
         </p:nvSpPr>
@@ -1378,7 +1340,7 @@
       </p:sp>
       <p:sp>
         <p:nvSpPr>
-          <p:cNvPr id="7" name="argument-basis"/>
+          <p:cNvPr id="6" name="argument-basis"/>
           <p:cNvSpPr txBox="1"/>
           <p:nvPr/>
         </p:nvSpPr>
@@ -1415,7 +1377,7 @@
       </p:sp>
       <p:sp>
         <p:nvSpPr>
-          <p:cNvPr id="8" name="argument-rule"/>
+          <p:cNvPr id="7" name="argument-rule"/>
           <p:cNvSpPr/>
           <p:nvPr/>
         </p:nvSpPr>
@@ -1449,7 +1411,7 @@
       </p:sp>
       <p:sp>
         <p:nvSpPr>
-          <p:cNvPr id="9" name="academic-number-0"/>
+          <p:cNvPr id="8" name="academic-number-0"/>
           <p:cNvSpPr txBox="1"/>
           <p:nvPr/>
         </p:nvSpPr>
@@ -1486,7 +1448,7 @@
       </p:sp>
       <p:sp>
         <p:nvSpPr>
-          <p:cNvPr id="10" name="academic-rule-0"/>
+          <p:cNvPr id="9" name="academic-rule-0"/>
           <p:cNvSpPr/>
           <p:nvPr/>
         </p:nvSpPr>
@@ -1520,7 +1482,7 @@
       </p:sp>
       <p:sp>
         <p:nvSpPr>
-          <p:cNvPr id="11" name="academic-label-0"/>
+          <p:cNvPr id="10" name="academic-label-0"/>
           <p:cNvSpPr txBox="1"/>
           <p:nvPr/>
         </p:nvSpPr>
@@ -1557,7 +1519,7 @@
       </p:sp>
       <p:sp>
         <p:nvSpPr>
-          <p:cNvPr id="12" name="academic-text-0"/>
+          <p:cNvPr id="11" name="academic-text-0"/>
           <p:cNvSpPr txBox="1"/>
           <p:nvPr/>
         </p:nvSpPr>
@@ -1594,7 +1556,7 @@
       </p:sp>
       <p:sp>
         <p:nvSpPr>
-          <p:cNvPr id="13" name="academic-number-1"/>
+          <p:cNvPr id="12" name="academic-number-1"/>
           <p:cNvSpPr txBox="1"/>
           <p:nvPr/>
         </p:nvSpPr>
@@ -1631,7 +1593,7 @@
       </p:sp>
       <p:sp>
         <p:nvSpPr>
-          <p:cNvPr id="14" name="academic-rule-1"/>
+          <p:cNvPr id="13" name="academic-rule-1"/>
           <p:cNvSpPr/>
           <p:nvPr/>
         </p:nvSpPr>
@@ -1665,7 +1627,7 @@
       </p:sp>
       <p:sp>
         <p:nvSpPr>
-          <p:cNvPr id="15" name="academic-label-1"/>
+          <p:cNvPr id="14" name="academic-label-1"/>
           <p:cNvSpPr txBox="1"/>
           <p:nvPr/>
         </p:nvSpPr>
@@ -1702,7 +1664,7 @@
       </p:sp>
       <p:sp>
         <p:nvSpPr>
-          <p:cNvPr id="16" name="academic-text-1"/>
+          <p:cNvPr id="15" name="academic-text-1"/>
           <p:cNvSpPr txBox="1"/>
           <p:nvPr/>
         </p:nvSpPr>
@@ -1739,7 +1701,7 @@
       </p:sp>
       <p:sp>
         <p:nvSpPr>
-          <p:cNvPr id="17" name="academic-number-2"/>
+          <p:cNvPr id="16" name="academic-number-2"/>
           <p:cNvSpPr txBox="1"/>
           <p:nvPr/>
         </p:nvSpPr>
@@ -1776,7 +1738,7 @@
       </p:sp>
       <p:sp>
         <p:nvSpPr>
-          <p:cNvPr id="18" name="academic-rule-2"/>
+          <p:cNvPr id="17" name="academic-rule-2"/>
           <p:cNvSpPr/>
           <p:nvPr/>
         </p:nvSpPr>
@@ -1810,7 +1772,7 @@
       </p:sp>
       <p:sp>
         <p:nvSpPr>
-          <p:cNvPr id="19" name="academic-label-2"/>
+          <p:cNvPr id="18" name="academic-label-2"/>
           <p:cNvSpPr txBox="1"/>
           <p:nvPr/>
         </p:nvSpPr>
@@ -1847,7 +1809,7 @@
       </p:sp>
       <p:sp>
         <p:nvSpPr>
-          <p:cNvPr id="20" name="academic-text-2"/>
+          <p:cNvPr id="19" name="academic-text-2"/>
           <p:cNvSpPr txBox="1"/>
           <p:nvPr/>
         </p:nvSpPr>
@@ -1884,7 +1846,7 @@
       </p:sp>
       <p:sp>
         <p:nvSpPr>
-          <p:cNvPr id="21" name="method-panel"/>
+          <p:cNvPr id="20" name="method-panel"/>
           <p:cNvSpPr/>
           <p:nvPr/>
         </p:nvSpPr>
@@ -1920,7 +1882,7 @@
       </p:sp>
       <p:sp>
         <p:nvSpPr>
-          <p:cNvPr id="22" name="method-label"/>
+          <p:cNvPr id="21" name="method-label"/>
           <p:cNvSpPr txBox="1"/>
           <p:nvPr/>
         </p:nvSpPr>
@@ -1957,7 +1919,7 @@
       </p:sp>
       <p:sp>
         <p:nvSpPr>
-          <p:cNvPr id="23" name="method-value"/>
+          <p:cNvPr id="22" name="method-value"/>
           <p:cNvSpPr txBox="1"/>
           <p:nvPr/>
         </p:nvSpPr>
@@ -1994,7 +1956,7 @@
       </p:sp>
       <p:sp>
         <p:nvSpPr>
-          <p:cNvPr id="24" name="method-foot"/>
+          <p:cNvPr id="23" name="method-foot"/>
           <p:cNvSpPr txBox="1"/>
           <p:nvPr/>
         </p:nvSpPr>
@@ -2031,7 +1993,7 @@
       </p:sp>
       <p:sp>
         <p:nvSpPr>
-          <p:cNvPr id="25" name="source"/>
+          <p:cNvPr id="24" name="source"/>
           <p:cNvSpPr txBox="1"/>
           <p:nvPr/>
         </p:nvSpPr>
@@ -2068,7 +2030,7 @@
       </p:sp>
       <p:sp>
         <p:nvSpPr>
-          <p:cNvPr id="26" name="page-number"/>
+          <p:cNvPr id="25" name="page-number"/>
           <p:cNvSpPr txBox="1"/>
           <p:nvPr/>
         </p:nvSpPr>
@@ -2115,6 +2077,16 @@
 <file path=ppt/slides/slide3.xml><?xml version="1.0" encoding="utf-8"?>
 <p:sld xmlns:p="http://schemas.openxmlformats.org/presentationml/2006/main">
   <p:cSld name="Evidence">
+    <p:bg>
+      <p:bgPr>
+        <a:blipFill xmlns:a="http://schemas.openxmlformats.org/drawingml/2006/main">
+          <a:blip xmlns:r="http://schemas.openxmlformats.org/officeDocument/2006/relationships" r:embed="rIdOfficeKitImage45ba195e2a5649fb_1"/>
+          <a:stretch>
+            <a:fillRect/>
+          </a:stretch>
+        </a:blipFill>
+      </p:bgPr>
+    </p:bg>
     <p:spTree>
       <p:nvGrpSpPr>
         <p:cNvPr id="1" name=""/>
@@ -2129,38 +2101,9 @@
           <a:chExt cx="0" cy="0"/>
         </a:xfrm>
       </p:grpSpPr>
-      <p:pic>
-        <p:nvPicPr>
-          <p:cNvPr id="2" name="evidence-visual-field">
-            <a:extLst xmlns:a="http://schemas.openxmlformats.org/drawingml/2006/main">
-              <a:ext uri="{C183D7F6-B498-43B3-948B-1728B52AA6E4}">
-                <adec:decorative xmlns:adec="http://schemas.microsoft.com/office/drawing/2017/decorative" val="1"/>
-              </a:ext>
-            </a:extLst>
-          </p:cNvPr>
-          <p:cNvPicPr/>
-          <p:nvPr/>
-        </p:nvPicPr>
-        <p:blipFill>
-          <a:blip xmlns:r="http://schemas.openxmlformats.org/officeDocument/2006/relationships" xmlns:a="http://schemas.openxmlformats.org/drawingml/2006/main" r:embed="rIdOfficeKitImage45ba195e2a5649fb_1"/>
-          <a:srcRect xmlns:a="http://schemas.openxmlformats.org/drawingml/2006/main" l="0" t="34170" r="0" b="34170"/>
-          <a:stretch xmlns:a="http://schemas.openxmlformats.org/drawingml/2006/main">
-            <a:fillRect/>
-          </a:stretch>
-        </p:blipFill>
-        <p:spPr>
-          <a:xfrm xmlns:a="http://schemas.openxmlformats.org/drawingml/2006/main">
-            <a:off x="0" y="0"/>
-            <a:ext cx="15240000" cy="8572500"/>
-          </a:xfrm>
-          <a:prstGeom xmlns:a="http://schemas.openxmlformats.org/drawingml/2006/main" prst="rect">
-            <a:avLst/>
-          </a:prstGeom>
-        </p:spPr>
-      </p:pic>
-      <p:sp>
-        <p:nvSpPr>
-          <p:cNvPr id="3" name="evidence-paper-scrim"/>
+      <p:sp>
+        <p:nvSpPr>
+          <p:cNvPr id="2" name="evidence-paper-scrim"/>
           <p:cNvSpPr/>
           <p:nvPr/>
         </p:nvSpPr>
@@ -2198,7 +2141,7 @@
       </p:sp>
       <p:sp>
         <p:nvSpPr>
-          <p:cNvPr id="4" name="evidence-top-rule"/>
+          <p:cNvPr id="3" name="evidence-top-rule"/>
           <p:cNvSpPr/>
           <p:nvPr/>
         </p:nvSpPr>
@@ -2232,7 +2175,7 @@
       </p:sp>
       <p:sp>
         <p:nvSpPr>
-          <p:cNvPr id="5" name="BLUEPRINT LECTURE · EVIDENCE"/>
+          <p:cNvPr id="4" name="BLUEPRINT LECTURE · EVIDENCE"/>
           <p:cNvSpPr txBox="1"/>
           <p:nvPr/>
         </p:nvSpPr>
@@ -2269,7 +2212,7 @@
       </p:sp>
       <p:sp>
         <p:nvSpPr>
-          <p:cNvPr id="6" name="evidence-title"/>
+          <p:cNvPr id="5" name="evidence-title"/>
           <p:cNvSpPr txBox="1"/>
           <p:nvPr/>
         </p:nvSpPr>
@@ -2306,7 +2249,7 @@
       </p:sp>
       <p:sp>
         <p:nvSpPr>
-          <p:cNvPr id="7" name="evidence-basis"/>
+          <p:cNvPr id="6" name="evidence-basis"/>
           <p:cNvSpPr txBox="1"/>
           <p:nvPr/>
         </p:nvSpPr>
@@ -2343,7 +2286,7 @@
       </p:sp>
       <p:sp>
         <p:nvSpPr>
-          <p:cNvPr id="8" name="evidence-rule"/>
+          <p:cNvPr id="7" name="evidence-rule"/>
           <p:cNvSpPr/>
           <p:nvPr/>
         </p:nvSpPr>
@@ -2377,7 +2320,7 @@
       </p:sp>
       <p:sp>
         <p:nvSpPr>
-          <p:cNvPr id="9" name="evidence-read-scrim"/>
+          <p:cNvPr id="8" name="evidence-read-scrim"/>
           <p:cNvSpPr/>
           <p:nvPr/>
         </p:nvSpPr>
@@ -2415,7 +2358,7 @@
       </p:sp>
       <p:graphicFrame>
         <p:nvGraphicFramePr>
-          <p:cNvPr id="10" name="evidence-chart"/>
+          <p:cNvPr id="9" name="evidence-chart"/>
           <p:cNvGraphicFramePr>
             <a:graphicFrameLocks xmlns:a="http://schemas.openxmlformats.org/drawingml/2006/main" noGrp="1"/>
           </p:cNvGraphicFramePr>
@@ -2427,13 +2370,13 @@
         </p:xfrm>
         <a:graphic xmlns:a="http://schemas.openxmlformats.org/drawingml/2006/main">
           <a:graphicData uri="http://schemas.openxmlformats.org/drawingml/2006/chart">
-            <c:chart xmlns:r="http://schemas.openxmlformats.org/officeDocument/2006/relationships" xmlns:c="http://schemas.openxmlformats.org/drawingml/2006/chart" r:id="R404542240efd4b3a"/>
+            <c:chart xmlns:r="http://schemas.openxmlformats.org/officeDocument/2006/relationships" xmlns:c="http://schemas.openxmlformats.org/drawingml/2006/chart" r:id="R909b0a2d2c5c4a6a"/>
           </a:graphicData>
         </a:graphic>
       </p:graphicFrame>
       <p:sp>
         <p:nvSpPr>
-          <p:cNvPr id="11" name="metric"/>
+          <p:cNvPr id="10" name="metric"/>
           <p:cNvSpPr txBox="1"/>
           <p:nvPr/>
         </p:nvSpPr>
@@ -2470,7 +2413,7 @@
       </p:sp>
       <p:sp>
         <p:nvSpPr>
-          <p:cNvPr id="12" name="metric-label"/>
+          <p:cNvPr id="11" name="metric-label"/>
           <p:cNvSpPr txBox="1"/>
           <p:nvPr/>
         </p:nvSpPr>
@@ -2507,7 +2450,7 @@
       </p:sp>
       <p:sp>
         <p:nvSpPr>
-          <p:cNvPr id="13" name="rail-rule"/>
+          <p:cNvPr id="12" name="rail-rule"/>
           <p:cNvSpPr/>
           <p:nvPr/>
         </p:nvSpPr>
@@ -2541,7 +2484,7 @@
       </p:sp>
       <p:sp>
         <p:nvSpPr>
-          <p:cNvPr id="14" name="read-through"/>
+          <p:cNvPr id="13" name="read-through"/>
           <p:cNvSpPr txBox="1"/>
           <p:nvPr/>
         </p:nvSpPr>
@@ -2578,7 +2521,7 @@
       </p:sp>
       <p:sp>
         <p:nvSpPr>
-          <p:cNvPr id="15" name="evidence-band"/>
+          <p:cNvPr id="14" name="evidence-band"/>
           <p:cNvSpPr/>
           <p:nvPr/>
         </p:nvSpPr>
@@ -2614,7 +2557,7 @@
       </p:sp>
       <p:sp>
         <p:nvSpPr>
-          <p:cNvPr id="16" name="evidence-band-text"/>
+          <p:cNvPr id="15" name="evidence-band-text"/>
           <p:cNvSpPr txBox="1"/>
           <p:nvPr/>
         </p:nvSpPr>
@@ -2651,7 +2594,7 @@
       </p:sp>
       <p:sp>
         <p:nvSpPr>
-          <p:cNvPr id="17" name="source"/>
+          <p:cNvPr id="16" name="source"/>
           <p:cNvSpPr txBox="1"/>
           <p:nvPr/>
         </p:nvSpPr>
@@ -2688,7 +2631,7 @@
       </p:sp>
       <p:sp>
         <p:nvSpPr>
-          <p:cNvPr id="18" name="page-number"/>
+          <p:cNvPr id="17" name="page-number"/>
           <p:cNvSpPr txBox="1"/>
           <p:nvPr/>
         </p:nvSpPr>
@@ -3889,6 +3832,16 @@
 <file path=ppt/slides/slide5.xml><?xml version="1.0" encoding="utf-8"?>
 <p:sld xmlns:p="http://schemas.openxmlformats.org/presentationml/2006/main">
   <p:cSld name="Visual carrier">
+    <p:bg>
+      <p:bgPr>
+        <a:blipFill xmlns:a="http://schemas.openxmlformats.org/drawingml/2006/main">
+          <a:blip xmlns:r="http://schemas.openxmlformats.org/officeDocument/2006/relationships" r:embed="rIdOfficeKitImaged71bfa074cda59bb_1"/>
+          <a:stretch>
+            <a:fillRect/>
+          </a:stretch>
+        </a:blipFill>
+      </p:bgPr>
+    </p:bg>
     <p:spTree>
       <p:nvGrpSpPr>
         <p:cNvPr id="1" name=""/>
@@ -3903,38 +3856,9 @@
           <a:chExt cx="0" cy="0"/>
         </a:xfrm>
       </p:grpSpPr>
-      <p:pic>
-        <p:nvPicPr>
-          <p:cNvPr id="2" name="visual-field">
-            <a:extLst xmlns:a="http://schemas.openxmlformats.org/drawingml/2006/main">
-              <a:ext uri="{C183D7F6-B498-43B3-948B-1728B52AA6E4}">
-                <adec:decorative xmlns:adec="http://schemas.microsoft.com/office/drawing/2017/decorative" val="1"/>
-              </a:ext>
-            </a:extLst>
-          </p:cNvPr>
-          <p:cNvPicPr/>
-          <p:nvPr/>
-        </p:nvPicPr>
-        <p:blipFill>
-          <a:blip xmlns:r="http://schemas.openxmlformats.org/officeDocument/2006/relationships" xmlns:a="http://schemas.openxmlformats.org/drawingml/2006/main" r:embed="rIdOfficeKitImaged71bfa074cda59bb_1"/>
-          <a:srcRect xmlns:a="http://schemas.openxmlformats.org/drawingml/2006/main" l="0" t="34180" r="0" b="34180"/>
-          <a:stretch xmlns:a="http://schemas.openxmlformats.org/drawingml/2006/main">
-            <a:fillRect/>
-          </a:stretch>
-        </p:blipFill>
-        <p:spPr>
-          <a:xfrm xmlns:a="http://schemas.openxmlformats.org/drawingml/2006/main">
-            <a:off x="0" y="0"/>
-            <a:ext cx="15240000" cy="8572500"/>
-          </a:xfrm>
-          <a:prstGeom xmlns:a="http://schemas.openxmlformats.org/drawingml/2006/main" prst="rect">
-            <a:avLst/>
-          </a:prstGeom>
-        </p:spPr>
-      </p:pic>
-      <p:sp>
-        <p:nvSpPr>
-          <p:cNvPr id="3" name="visual-scrim"/>
+      <p:sp>
+        <p:nvSpPr>
+          <p:cNvPr id="2" name="visual-scrim"/>
           <p:cNvSpPr/>
           <p:nvPr/>
         </p:nvSpPr>
@@ -3972,7 +3896,7 @@
       </p:sp>
       <p:sp>
         <p:nvSpPr>
-          <p:cNvPr id="4" name="visual-eyebrow"/>
+          <p:cNvPr id="3" name="visual-eyebrow"/>
           <p:cNvSpPr txBox="1"/>
           <p:nvPr/>
         </p:nvSpPr>
@@ -4009,7 +3933,7 @@
       </p:sp>
       <p:sp>
         <p:nvSpPr>
-          <p:cNvPr id="5" name="visual-title"/>
+          <p:cNvPr id="4" name="visual-title"/>
           <p:cNvSpPr txBox="1"/>
           <p:nvPr/>
         </p:nvSpPr>
@@ -4046,7 +3970,7 @@
       </p:sp>
       <p:sp>
         <p:nvSpPr>
-          <p:cNvPr id="6" name="visual-body"/>
+          <p:cNvPr id="5" name="visual-body"/>
           <p:cNvSpPr txBox="1"/>
           <p:nvPr/>
         </p:nvSpPr>
@@ -4083,7 +4007,7 @@
       </p:sp>
       <p:sp>
         <p:nvSpPr>
-          <p:cNvPr id="7" name="visual-rule"/>
+          <p:cNvPr id="6" name="visual-rule"/>
           <p:cNvSpPr/>
           <p:nvPr/>
         </p:nvSpPr>
@@ -4117,7 +4041,7 @@
       </p:sp>
       <p:sp>
         <p:nvSpPr>
-          <p:cNvPr id="8" name="visual-label"/>
+          <p:cNvPr id="7" name="visual-label"/>
           <p:cNvSpPr txBox="1"/>
           <p:nvPr/>
         </p:nvSpPr>
@@ -4154,7 +4078,7 @@
       </p:sp>
       <p:sp>
         <p:nvSpPr>
-          <p:cNvPr id="9" name="source"/>
+          <p:cNvPr id="8" name="source"/>
           <p:cNvSpPr txBox="1"/>
           <p:nvPr/>
         </p:nvSpPr>
@@ -4191,7 +4115,7 @@
       </p:sp>
       <p:sp>
         <p:nvSpPr>
-          <p:cNvPr id="10" name="page-number"/>
+          <p:cNvPr id="9" name="page-number"/>
           <p:cNvSpPr txBox="1"/>
           <p:nvPr/>
         </p:nvSpPr>
@@ -4238,6 +4162,16 @@
 <file path=ppt/slides/slide6.xml><?xml version="1.0" encoding="utf-8"?>
 <p:sld xmlns:p="http://schemas.openxmlformats.org/presentationml/2006/main">
   <p:cSld name="Decision close">
+    <p:bg>
+      <p:bgPr>
+        <a:blipFill xmlns:a="http://schemas.openxmlformats.org/drawingml/2006/main">
+          <a:blip xmlns:r="http://schemas.openxmlformats.org/officeDocument/2006/relationships" r:embed="rIdOfficeKitImage8bca39c9b7ba070f_1"/>
+          <a:stretch>
+            <a:fillRect/>
+          </a:stretch>
+        </a:blipFill>
+      </p:bgPr>
+    </p:bg>
     <p:spTree>
       <p:nvGrpSpPr>
         <p:cNvPr id="1" name=""/>
@@ -4252,38 +4186,9 @@
           <a:chExt cx="0" cy="0"/>
         </a:xfrm>
       </p:grpSpPr>
-      <p:pic>
-        <p:nvPicPr>
-          <p:cNvPr id="2" name="close-visual-field">
-            <a:extLst xmlns:a="http://schemas.openxmlformats.org/drawingml/2006/main">
-              <a:ext uri="{C183D7F6-B498-43B3-948B-1728B52AA6E4}">
-                <adec:decorative xmlns:adec="http://schemas.microsoft.com/office/drawing/2017/decorative" val="1"/>
-              </a:ext>
-            </a:extLst>
-          </p:cNvPr>
-          <p:cNvPicPr/>
-          <p:nvPr/>
-        </p:nvPicPr>
-        <p:blipFill>
-          <a:blip xmlns:r="http://schemas.openxmlformats.org/officeDocument/2006/relationships" xmlns:a="http://schemas.openxmlformats.org/drawingml/2006/main" r:embed="rIdOfficeKitImage8bca39c9b7ba070f_1"/>
-          <a:srcRect xmlns:a="http://schemas.openxmlformats.org/drawingml/2006/main" l="0" t="34171" r="0" b="34171"/>
-          <a:stretch xmlns:a="http://schemas.openxmlformats.org/drawingml/2006/main">
-            <a:fillRect/>
-          </a:stretch>
-        </p:blipFill>
-        <p:spPr>
-          <a:xfrm xmlns:a="http://schemas.openxmlformats.org/drawingml/2006/main">
-            <a:off x="0" y="0"/>
-            <a:ext cx="15240000" cy="8572500"/>
-          </a:xfrm>
-          <a:prstGeom xmlns:a="http://schemas.openxmlformats.org/drawingml/2006/main" prst="rect">
-            <a:avLst/>
-          </a:prstGeom>
-        </p:spPr>
-      </p:pic>
-      <p:sp>
-        <p:nvSpPr>
-          <p:cNvPr id="3" name="close-paper-scrim"/>
+      <p:sp>
+        <p:nvSpPr>
+          <p:cNvPr id="2" name="close-paper-scrim"/>
           <p:cNvSpPr/>
           <p:nvPr/>
         </p:nvSpPr>
@@ -4321,7 +4226,7 @@
       </p:sp>
       <p:sp>
         <p:nvSpPr>
-          <p:cNvPr id="4" name="close-top-rule"/>
+          <p:cNvPr id="3" name="close-top-rule"/>
           <p:cNvSpPr/>
           <p:nvPr/>
         </p:nvSpPr>
@@ -4355,7 +4260,7 @@
       </p:sp>
       <p:sp>
         <p:nvSpPr>
-          <p:cNvPr id="5" name="BLUEPRINT LECTURE · CLOSE"/>
+          <p:cNvPr id="4" name="BLUEPRINT LECTURE · CLOSE"/>
           <p:cNvSpPr txBox="1"/>
           <p:nvPr/>
         </p:nvSpPr>
@@ -4392,7 +4297,7 @@
       </p:sp>
       <p:sp>
         <p:nvSpPr>
-          <p:cNvPr id="6" name="close-title"/>
+          <p:cNvPr id="5" name="close-title"/>
           <p:cNvSpPr txBox="1"/>
           <p:nvPr/>
         </p:nvSpPr>
@@ -4429,7 +4334,7 @@
       </p:sp>
       <p:sp>
         <p:nvSpPr>
-          <p:cNvPr id="7" name="close-basis"/>
+          <p:cNvPr id="6" name="close-basis"/>
           <p:cNvSpPr txBox="1"/>
           <p:nvPr/>
         </p:nvSpPr>
@@ -4466,7 +4371,7 @@
       </p:sp>
       <p:sp>
         <p:nvSpPr>
-          <p:cNvPr id="8" name="close-rule"/>
+          <p:cNvPr id="7" name="close-rule"/>
           <p:cNvSpPr/>
           <p:nvPr/>
         </p:nvSpPr>
@@ -4500,7 +4405,7 @@
       </p:sp>
       <p:sp>
         <p:nvSpPr>
-          <p:cNvPr id="9" name="close-number-0"/>
+          <p:cNvPr id="8" name="close-number-0"/>
           <p:cNvSpPr txBox="1"/>
           <p:nvPr/>
         </p:nvSpPr>
@@ -4537,7 +4442,7 @@
       </p:sp>
       <p:sp>
         <p:nvSpPr>
-          <p:cNvPr id="10" name="close-row-rule-0"/>
+          <p:cNvPr id="9" name="close-row-rule-0"/>
           <p:cNvSpPr/>
           <p:nvPr/>
         </p:nvSpPr>
@@ -4571,7 +4476,7 @@
       </p:sp>
       <p:sp>
         <p:nvSpPr>
-          <p:cNvPr id="11" name="close-label-0"/>
+          <p:cNvPr id="10" name="close-label-0"/>
           <p:cNvSpPr txBox="1"/>
           <p:nvPr/>
         </p:nvSpPr>
@@ -4608,7 +4513,7 @@
       </p:sp>
       <p:sp>
         <p:nvSpPr>
-          <p:cNvPr id="12" name="close-text-0"/>
+          <p:cNvPr id="11" name="close-text-0"/>
           <p:cNvSpPr txBox="1"/>
           <p:nvPr/>
         </p:nvSpPr>
@@ -4645,7 +4550,7 @@
       </p:sp>
       <p:sp>
         <p:nvSpPr>
-          <p:cNvPr id="13" name="close-number-1"/>
+          <p:cNvPr id="12" name="close-number-1"/>
           <p:cNvSpPr txBox="1"/>
           <p:nvPr/>
         </p:nvSpPr>
@@ -4682,7 +4587,7 @@
       </p:sp>
       <p:sp>
         <p:nvSpPr>
-          <p:cNvPr id="14" name="close-row-rule-1"/>
+          <p:cNvPr id="13" name="close-row-rule-1"/>
           <p:cNvSpPr/>
           <p:nvPr/>
         </p:nvSpPr>
@@ -4716,7 +4621,7 @@
       </p:sp>
       <p:sp>
         <p:nvSpPr>
-          <p:cNvPr id="15" name="close-label-1"/>
+          <p:cNvPr id="14" name="close-label-1"/>
           <p:cNvSpPr txBox="1"/>
           <p:nvPr/>
         </p:nvSpPr>
@@ -4753,7 +4658,7 @@
       </p:sp>
       <p:sp>
         <p:nvSpPr>
-          <p:cNvPr id="16" name="close-text-1"/>
+          <p:cNvPr id="15" name="close-text-1"/>
           <p:cNvSpPr txBox="1"/>
           <p:nvPr/>
         </p:nvSpPr>
@@ -4790,7 +4695,7 @@
       </p:sp>
       <p:sp>
         <p:nvSpPr>
-          <p:cNvPr id="17" name="close-number-2"/>
+          <p:cNvPr id="16" name="close-number-2"/>
           <p:cNvSpPr txBox="1"/>
           <p:nvPr/>
         </p:nvSpPr>
@@ -4827,7 +4732,7 @@
       </p:sp>
       <p:sp>
         <p:nvSpPr>
-          <p:cNvPr id="18" name="close-row-rule-2"/>
+          <p:cNvPr id="17" name="close-row-rule-2"/>
           <p:cNvSpPr/>
           <p:nvPr/>
         </p:nvSpPr>
@@ -4861,7 +4766,7 @@
       </p:sp>
       <p:sp>
         <p:nvSpPr>
-          <p:cNvPr id="19" name="close-label-2"/>
+          <p:cNvPr id="18" name="close-label-2"/>
           <p:cNvSpPr txBox="1"/>
           <p:nvPr/>
         </p:nvSpPr>
@@ -4898,7 +4803,7 @@
       </p:sp>
       <p:sp>
         <p:nvSpPr>
-          <p:cNvPr id="20" name="close-text-2"/>
+          <p:cNvPr id="19" name="close-text-2"/>
           <p:cNvSpPr txBox="1"/>
           <p:nvPr/>
         </p:nvSpPr>
@@ -4935,7 +4840,7 @@
       </p:sp>
       <p:sp>
         <p:nvSpPr>
-          <p:cNvPr id="21" name="next-panel"/>
+          <p:cNvPr id="20" name="next-panel"/>
           <p:cNvSpPr/>
           <p:nvPr/>
         </p:nvSpPr>
@@ -4971,7 +4876,7 @@
       </p:sp>
       <p:sp>
         <p:nvSpPr>
-          <p:cNvPr id="22" name="next-label"/>
+          <p:cNvPr id="21" name="next-label"/>
           <p:cNvSpPr txBox="1"/>
           <p:nvPr/>
         </p:nvSpPr>
@@ -5008,7 +4913,7 @@
       </p:sp>
       <p:sp>
         <p:nvSpPr>
-          <p:cNvPr id="23" name="next-text"/>
+          <p:cNvPr id="22" name="next-text"/>
           <p:cNvSpPr txBox="1"/>
           <p:nvPr/>
         </p:nvSpPr>
@@ -5045,7 +4950,7 @@
       </p:sp>
       <p:sp>
         <p:nvSpPr>
-          <p:cNvPr id="24" name="next-foot"/>
+          <p:cNvPr id="23" name="next-foot"/>
           <p:cNvSpPr txBox="1"/>
           <p:nvPr/>
         </p:nvSpPr>
@@ -5082,7 +4987,7 @@
       </p:sp>
       <p:sp>
         <p:nvSpPr>
-          <p:cNvPr id="25" name="source"/>
+          <p:cNvPr id="24" name="source"/>
           <p:cNvSpPr txBox="1"/>
           <p:nvPr/>
         </p:nvSpPr>
@@ -5119,7 +5024,7 @@
       </p:sp>
       <p:sp>
         <p:nvSpPr>
-          <p:cNvPr id="26" name="page-number"/>
+          <p:cNvPr id="25" name="page-number"/>
           <p:cNvSpPr txBox="1"/>
           <p:nvPr/>
         </p:nvSpPr>

--- a/skills/presentation-template-library/skills/artifact-template-blueprint-lecture/assets/reference.pptx
+++ b/skills/presentation-template-library/skills/artifact-template-blueprint-lecture/assets/reference.pptx
@@ -376,1710 +376,6 @@
     <p:bg>
       <p:bgPr>
         <a:blipFill xmlns:a="http://schemas.openxmlformats.org/drawingml/2006/main">
-          <a:blip xmlns:r="http://schemas.openxmlformats.org/officeDocument/2006/relationships" r:embed="rIdOfficeKitImage8bca39c9b7ba070f_1"/>
-          <a:stretch>
-            <a:fillRect/>
-          </a:stretch>
-        </a:blipFill>
-      </p:bgPr>
-    </p:bg>
-    <p:spTree>
-      <p:nvGrpSpPr>
-        <p:cNvPr id="1" name=""/>
-        <p:cNvGrpSpPr/>
-        <p:nvPr/>
-      </p:nvGrpSpPr>
-      <p:grpSpPr>
-        <a:xfrm xmlns:a="http://schemas.openxmlformats.org/drawingml/2006/main">
-          <a:off x="0" y="0"/>
-          <a:ext cx="0" cy="0"/>
-          <a:chOff x="0" y="0"/>
-          <a:chExt cx="0" cy="0"/>
-        </a:xfrm>
-      </p:grpSpPr>
-      <p:sp>
-        <p:nvSpPr>
-          <p:cNvPr id="2" name="cover-paper-scrim"/>
-          <p:cNvSpPr/>
-          <p:nvPr/>
-        </p:nvSpPr>
-        <p:spPr>
-          <a:xfrm xmlns:a="http://schemas.openxmlformats.org/drawingml/2006/main">
-            <a:off x="0" y="0"/>
-            <a:ext cx="9525000" cy="8572500"/>
-          </a:xfrm>
-          <a:prstGeom xmlns:a="http://schemas.openxmlformats.org/drawingml/2006/main" prst="rect">
-            <a:avLst/>
-          </a:prstGeom>
-          <a:solidFill xmlns:a="http://schemas.openxmlformats.org/drawingml/2006/main">
-            <a:srgbClr val="F8FAFC">
-              <a:alpha val="100000"/>
-            </a:srgbClr>
-          </a:solidFill>
-          <a:ln xmlns:a="http://schemas.openxmlformats.org/drawingml/2006/main" w="0">
-            <a:solidFill>
-              <a:srgbClr val="F8FAFC"/>
-            </a:solidFill>
-            <a:prstDash val="solid"/>
-          </a:ln>
-        </p:spPr>
-        <p:txBody>
-          <a:bodyPr xmlns:a="http://schemas.openxmlformats.org/drawingml/2006/main" wrap="square" lIns="0" tIns="0" rIns="0" bIns="0" anchor="t"/>
-          <a:lstStyle xmlns:a="http://schemas.openxmlformats.org/drawingml/2006/main"/>
-          <a:p xmlns:a="http://schemas.openxmlformats.org/drawingml/2006/main">
-            <a:r>
-              <a:rPr lang="en-US"/>
-              <a:t/>
-            </a:r>
-            <a:endParaRPr lang="en-US"/>
-          </a:p>
-        </p:txBody>
-      </p:sp>
-      <p:sp>
-        <p:nvSpPr>
-          <p:cNvPr id="3" name="top-rule"/>
-          <p:cNvSpPr/>
-          <p:nvPr/>
-        </p:nvSpPr>
-        <p:spPr>
-          <a:xfrm xmlns:a="http://schemas.openxmlformats.org/drawingml/2006/main">
-            <a:off x="838200" y="666750"/>
-            <a:ext cx="13563600" cy="0"/>
-          </a:xfrm>
-          <a:prstGeom xmlns:a="http://schemas.openxmlformats.org/drawingml/2006/main" prst="line">
-            <a:avLst/>
-          </a:prstGeom>
-          <a:noFill xmlns:a="http://schemas.openxmlformats.org/drawingml/2006/main"/>
-          <a:ln xmlns:a="http://schemas.openxmlformats.org/drawingml/2006/main" w="38100">
-            <a:solidFill>
-              <a:srgbClr val="1769D2"/>
-            </a:solidFill>
-            <a:prstDash val="solid"/>
-          </a:ln>
-        </p:spPr>
-        <p:txBody>
-          <a:bodyPr xmlns:a="http://schemas.openxmlformats.org/drawingml/2006/main" wrap="square" lIns="0" tIns="0" rIns="0" bIns="0" anchor="t"/>
-          <a:lstStyle xmlns:a="http://schemas.openxmlformats.org/drawingml/2006/main"/>
-          <a:p xmlns:a="http://schemas.openxmlformats.org/drawingml/2006/main">
-            <a:r>
-              <a:rPr lang="en-US"/>
-              <a:t/>
-            </a:r>
-            <a:endParaRPr lang="en-US"/>
-          </a:p>
-        </p:txBody>
-      </p:sp>
-      <p:sp>
-        <p:nvSpPr>
-          <p:cNvPr id="4" name="eyebrow"/>
-          <p:cNvSpPr txBox="1"/>
-          <p:nvPr/>
-        </p:nvSpPr>
-        <p:spPr>
-          <a:xfrm xmlns:a="http://schemas.openxmlformats.org/drawingml/2006/main">
-            <a:off x="914400" y="895350"/>
-            <a:ext cx="7239000" cy="228600"/>
-          </a:xfrm>
-          <a:prstGeom xmlns:a="http://schemas.openxmlformats.org/drawingml/2006/main" prst="rect">
-            <a:avLst/>
-          </a:prstGeom>
-          <a:noFill xmlns:a="http://schemas.openxmlformats.org/drawingml/2006/main"/>
-          <a:ln xmlns:a="http://schemas.openxmlformats.org/drawingml/2006/main" w="0">
-            <a:noFill/>
-          </a:ln>
-        </p:spPr>
-        <p:txBody>
-          <a:bodyPr xmlns:a="http://schemas.openxmlformats.org/drawingml/2006/main" wrap="square" lIns="0" tIns="0" rIns="0" bIns="0" anchor="t"/>
-          <a:lstStyle xmlns:a="http://schemas.openxmlformats.org/drawingml/2006/main"/>
-          <a:p xmlns:a="http://schemas.openxmlformats.org/drawingml/2006/main">
-            <a:r>
-              <a:rPr lang="en-US" sz="1200" b="1">
-                <a:solidFill>
-                  <a:srgbClr val="1769D2"/>
-                </a:solidFill>
-                <a:latin typeface="Inter"/>
-                <a:ea typeface="Inter"/>
-              </a:rPr>
-              <a:t>ACADEMIC · OFFICEKIT CALIBRATION</a:t>
-            </a:r>
-            <a:endParaRPr lang="en-US"/>
-          </a:p>
-        </p:txBody>
-      </p:sp>
-      <p:sp>
-        <p:nvSpPr>
-          <p:cNvPr id="5" name="cover-title"/>
-          <p:cNvSpPr txBox="1"/>
-          <p:nvPr/>
-        </p:nvSpPr>
-        <p:spPr>
-          <a:xfrm xmlns:a="http://schemas.openxmlformats.org/drawingml/2006/main">
-            <a:off x="914400" y="1571625"/>
-            <a:ext cx="8382000" cy="1066800"/>
-          </a:xfrm>
-          <a:prstGeom xmlns:a="http://schemas.openxmlformats.org/drawingml/2006/main" prst="rect">
-            <a:avLst/>
-          </a:prstGeom>
-          <a:noFill xmlns:a="http://schemas.openxmlformats.org/drawingml/2006/main"/>
-          <a:ln xmlns:a="http://schemas.openxmlformats.org/drawingml/2006/main" w="0">
-            <a:noFill/>
-          </a:ln>
-        </p:spPr>
-        <p:txBody>
-          <a:bodyPr xmlns:a="http://schemas.openxmlformats.org/drawingml/2006/main" wrap="square" lIns="0" tIns="0" rIns="0" bIns="0" anchor="t"/>
-          <a:lstStyle xmlns:a="http://schemas.openxmlformats.org/drawingml/2006/main"/>
-          <a:p xmlns:a="http://schemas.openxmlformats.org/drawingml/2006/main">
-            <a:r>
-              <a:rPr lang="en-US" sz="3600" b="1">
-                <a:solidFill>
-                  <a:srgbClr val="132A3A"/>
-                </a:solidFill>
-                <a:latin typeface="Inter"/>
-                <a:ea typeface="Inter"/>
-              </a:rPr>
-              <a:t>Blueprint Lecture: a claim worth testing</a:t>
-            </a:r>
-            <a:endParaRPr lang="en-US"/>
-          </a:p>
-        </p:txBody>
-      </p:sp>
-      <p:sp>
-        <p:nvSpPr>
-          <p:cNvPr id="6" name="cover-subtitle"/>
-          <p:cNvSpPr txBox="1"/>
-          <p:nvPr/>
-        </p:nvSpPr>
-        <p:spPr>
-          <a:xfrm xmlns:a="http://schemas.openxmlformats.org/drawingml/2006/main">
-            <a:off x="952500" y="2857500"/>
-            <a:ext cx="6858000" cy="323850"/>
-          </a:xfrm>
-          <a:prstGeom xmlns:a="http://schemas.openxmlformats.org/drawingml/2006/main" prst="rect">
-            <a:avLst/>
-          </a:prstGeom>
-          <a:noFill xmlns:a="http://schemas.openxmlformats.org/drawingml/2006/main"/>
-          <a:ln xmlns:a="http://schemas.openxmlformats.org/drawingml/2006/main" w="0">
-            <a:noFill/>
-          </a:ln>
-        </p:spPr>
-        <p:txBody>
-          <a:bodyPr xmlns:a="http://schemas.openxmlformats.org/drawingml/2006/main" wrap="square" lIns="0" tIns="0" rIns="0" bIns="0" anchor="t"/>
-          <a:lstStyle xmlns:a="http://schemas.openxmlformats.org/drawingml/2006/main"/>
-          <a:p xmlns:a="http://schemas.openxmlformats.org/drawingml/2006/main">
-            <a:r>
-              <a:rPr lang="en-US" sz="1725">
-                <a:solidFill>
-                  <a:srgbClr val="1769D2"/>
-                </a:solidFill>
-                <a:latin typeface="Inter"/>
-                <a:ea typeface="Inter"/>
-              </a:rPr>
-              <a:t>A clean-room reference for evidence, direction, and a decision.</a:t>
-            </a:r>
-            <a:endParaRPr lang="en-US"/>
-          </a:p>
-        </p:txBody>
-      </p:sp>
-      <p:sp>
-        <p:nvSpPr>
-          <p:cNvPr id="7" name="cover-rule"/>
-          <p:cNvSpPr/>
-          <p:nvPr/>
-        </p:nvSpPr>
-        <p:spPr>
-          <a:xfrm xmlns:a="http://schemas.openxmlformats.org/drawingml/2006/main">
-            <a:off x="914400" y="3524250"/>
-            <a:ext cx="7658100" cy="0"/>
-          </a:xfrm>
-          <a:prstGeom xmlns:a="http://schemas.openxmlformats.org/drawingml/2006/main" prst="line">
-            <a:avLst/>
-          </a:prstGeom>
-          <a:noFill xmlns:a="http://schemas.openxmlformats.org/drawingml/2006/main"/>
-          <a:ln xmlns:a="http://schemas.openxmlformats.org/drawingml/2006/main" w="25400">
-            <a:solidFill>
-              <a:srgbClr val="8A969F"/>
-            </a:solidFill>
-            <a:prstDash val="solid"/>
-          </a:ln>
-        </p:spPr>
-        <p:txBody>
-          <a:bodyPr xmlns:a="http://schemas.openxmlformats.org/drawingml/2006/main" wrap="square" lIns="0" tIns="0" rIns="0" bIns="0" anchor="t"/>
-          <a:lstStyle xmlns:a="http://schemas.openxmlformats.org/drawingml/2006/main"/>
-          <a:p xmlns:a="http://schemas.openxmlformats.org/drawingml/2006/main">
-            <a:r>
-              <a:rPr lang="en-US"/>
-              <a:t/>
-            </a:r>
-            <a:endParaRPr lang="en-US"/>
-          </a:p>
-        </p:txBody>
-      </p:sp>
-      <p:sp>
-        <p:nvSpPr>
-          <p:cNvPr id="8" name="cover-basis"/>
-          <p:cNvSpPr txBox="1"/>
-          <p:nvPr/>
-        </p:nvSpPr>
-        <p:spPr>
-          <a:xfrm xmlns:a="http://schemas.openxmlformats.org/drawingml/2006/main">
-            <a:off x="952500" y="3762375"/>
-            <a:ext cx="7810500" cy="266700"/>
-          </a:xfrm>
-          <a:prstGeom xmlns:a="http://schemas.openxmlformats.org/drawingml/2006/main" prst="rect">
-            <a:avLst/>
-          </a:prstGeom>
-          <a:noFill xmlns:a="http://schemas.openxmlformats.org/drawingml/2006/main"/>
-          <a:ln xmlns:a="http://schemas.openxmlformats.org/drawingml/2006/main" w="0">
-            <a:noFill/>
-          </a:ln>
-        </p:spPr>
-        <p:txBody>
-          <a:bodyPr xmlns:a="http://schemas.openxmlformats.org/drawingml/2006/main" wrap="square" lIns="0" tIns="0" rIns="0" bIns="0" anchor="t"/>
-          <a:lstStyle xmlns:a="http://schemas.openxmlformats.org/drawingml/2006/main"/>
-          <a:p xmlns:a="http://schemas.openxmlformats.org/drawingml/2006/main">
-            <a:r>
-              <a:rPr lang="en-US" sz="1350">
-                <a:solidFill>
-                  <a:srgbClr val="132A3A"/>
-                </a:solidFill>
-                <a:latin typeface="Inter"/>
-                <a:ea typeface="Inter"/>
-              </a:rPr>
-              <a:t>One visual language · four page roles · native editable objects</a:t>
-            </a:r>
-            <a:endParaRPr lang="en-US"/>
-          </a:p>
-        </p:txBody>
-      </p:sp>
-      <p:sp>
-        <p:nvSpPr>
-          <p:cNvPr id="9" name="cover-thesis"/>
-          <p:cNvSpPr txBox="1"/>
-          <p:nvPr/>
-        </p:nvSpPr>
-        <p:spPr>
-          <a:xfrm xmlns:a="http://schemas.openxmlformats.org/drawingml/2006/main">
-            <a:off x="952500" y="4810125"/>
-            <a:ext cx="6667500" cy="628650"/>
-          </a:xfrm>
-          <a:prstGeom xmlns:a="http://schemas.openxmlformats.org/drawingml/2006/main" prst="rect">
-            <a:avLst/>
-          </a:prstGeom>
-          <a:noFill xmlns:a="http://schemas.openxmlformats.org/drawingml/2006/main"/>
-          <a:ln xmlns:a="http://schemas.openxmlformats.org/drawingml/2006/main" w="0">
-            <a:noFill/>
-          </a:ln>
-        </p:spPr>
-        <p:txBody>
-          <a:bodyPr xmlns:a="http://schemas.openxmlformats.org/drawingml/2006/main" wrap="square" lIns="0" tIns="0" rIns="0" bIns="0" anchor="t"/>
-          <a:lstStyle xmlns:a="http://schemas.openxmlformats.org/drawingml/2006/main"/>
-          <a:p xmlns:a="http://schemas.openxmlformats.org/drawingml/2006/main">
-            <a:r>
-              <a:rPr lang="en-US" sz="1875" b="1">
-                <a:solidFill>
-                  <a:srgbClr val="132A3A"/>
-                </a:solidFill>
-                <a:latin typeface="Inter"/>
-                <a:ea typeface="Inter"/>
-              </a:rPr>
-              <a:t>A falsifiable claim is a design decision.</a:t>
-            </a:r>
-            <a:endParaRPr lang="en-US"/>
-          </a:p>
-        </p:txBody>
-      </p:sp>
-      <p:sp>
-        <p:nvSpPr>
-          <p:cNvPr id="10" name="cover-source"/>
-          <p:cNvSpPr txBox="1"/>
-          <p:nvPr/>
-        </p:nvSpPr>
-        <p:spPr>
-          <a:xfrm xmlns:a="http://schemas.openxmlformats.org/drawingml/2006/main">
-            <a:off x="952500" y="7315200"/>
-            <a:ext cx="9048750" cy="228600"/>
-          </a:xfrm>
-          <a:prstGeom xmlns:a="http://schemas.openxmlformats.org/drawingml/2006/main" prst="rect">
-            <a:avLst/>
-          </a:prstGeom>
-          <a:noFill xmlns:a="http://schemas.openxmlformats.org/drawingml/2006/main"/>
-          <a:ln xmlns:a="http://schemas.openxmlformats.org/drawingml/2006/main" w="0">
-            <a:noFill/>
-          </a:ln>
-        </p:spPr>
-        <p:txBody>
-          <a:bodyPr xmlns:a="http://schemas.openxmlformats.org/drawingml/2006/main" wrap="square" lIns="0" tIns="0" rIns="0" bIns="0" anchor="t"/>
-          <a:lstStyle xmlns:a="http://schemas.openxmlformats.org/drawingml/2006/main"/>
-          <a:p xmlns:a="http://schemas.openxmlformats.org/drawingml/2006/main">
-            <a:r>
-              <a:rPr lang="en-US" sz="1050">
-                <a:solidFill>
-                  <a:srgbClr val="8A969F"/>
-                </a:solidFill>
-                <a:latin typeface="Inter"/>
-                <a:ea typeface="Inter"/>
-              </a:rPr>
-              <a:t>OfficeKit original clean-room calibration · fictional content · 2026-08-29</a:t>
-            </a:r>
-            <a:endParaRPr lang="en-US"/>
-          </a:p>
-        </p:txBody>
-      </p:sp>
-      <p:sp>
-        <p:nvSpPr>
-          <p:cNvPr id="11" name="page-number"/>
-          <p:cNvSpPr txBox="1"/>
-          <p:nvPr/>
-        </p:nvSpPr>
-        <p:spPr>
-          <a:xfrm xmlns:a="http://schemas.openxmlformats.org/drawingml/2006/main">
-            <a:off x="13335000" y="7810500"/>
-            <a:ext cx="952500" cy="209550"/>
-          </a:xfrm>
-          <a:prstGeom xmlns:a="http://schemas.openxmlformats.org/drawingml/2006/main" prst="rect">
-            <a:avLst/>
-          </a:prstGeom>
-          <a:noFill xmlns:a="http://schemas.openxmlformats.org/drawingml/2006/main"/>
-          <a:ln xmlns:a="http://schemas.openxmlformats.org/drawingml/2006/main" w="0">
-            <a:noFill/>
-          </a:ln>
-        </p:spPr>
-        <p:txBody>
-          <a:bodyPr xmlns:a="http://schemas.openxmlformats.org/drawingml/2006/main" wrap="square" lIns="0" tIns="0" rIns="0" bIns="0" anchor="t"/>
-          <a:lstStyle xmlns:a="http://schemas.openxmlformats.org/drawingml/2006/main"/>
-          <a:p xmlns:a="http://schemas.openxmlformats.org/drawingml/2006/main">
-            <a:pPr algn="r"/>
-            <a:r>
-              <a:rPr lang="en-US" sz="1050">
-                <a:solidFill>
-                  <a:srgbClr val="8A969F"/>
-                </a:solidFill>
-                <a:latin typeface="Inter"/>
-                <a:ea typeface="Inter"/>
-              </a:rPr>
-              <a:t>1 / 6</a:t>
-            </a:r>
-            <a:endParaRPr lang="en-US"/>
-          </a:p>
-        </p:txBody>
-      </p:sp>
-      <p:sp>
-        <p:nvSpPr>
-          <p:cNvPr id="12" name="anchor-field"/>
-          <p:cNvSpPr/>
-          <p:nvPr/>
-        </p:nvSpPr>
-        <p:spPr>
-          <a:xfrm xmlns:a="http://schemas.openxmlformats.org/drawingml/2006/main">
-            <a:off x="11620500" y="1790700"/>
-            <a:ext cx="2095500" cy="2286000"/>
-          </a:xfrm>
-          <a:prstGeom xmlns:a="http://schemas.openxmlformats.org/drawingml/2006/main" prst="rect">
-            <a:avLst/>
-          </a:prstGeom>
-          <a:solidFill xmlns:a="http://schemas.openxmlformats.org/drawingml/2006/main">
-            <a:srgbClr val="F3F5F8"/>
-          </a:solidFill>
-          <a:ln xmlns:a="http://schemas.openxmlformats.org/drawingml/2006/main" w="25400">
-            <a:solidFill>
-              <a:srgbClr val="1769D2"/>
-            </a:solidFill>
-            <a:prstDash val="solid"/>
-          </a:ln>
-        </p:spPr>
-        <p:txBody>
-          <a:bodyPr xmlns:a="http://schemas.openxmlformats.org/drawingml/2006/main" wrap="square" lIns="0" tIns="0" rIns="0" bIns="0" anchor="t"/>
-          <a:lstStyle xmlns:a="http://schemas.openxmlformats.org/drawingml/2006/main"/>
-          <a:p xmlns:a="http://schemas.openxmlformats.org/drawingml/2006/main">
-            <a:r>
-              <a:rPr lang="en-US"/>
-              <a:t/>
-            </a:r>
-            <a:endParaRPr lang="en-US"/>
-          </a:p>
-        </p:txBody>
-      </p:sp>
-      <p:sp>
-        <p:nvSpPr>
-          <p:cNvPr id="13" name="anchor-grid-0-0"/>
-          <p:cNvSpPr/>
-          <p:nvPr/>
-        </p:nvSpPr>
-        <p:spPr>
-          <a:xfrm xmlns:a="http://schemas.openxmlformats.org/drawingml/2006/main">
-            <a:off x="11925300" y="2152650"/>
-            <a:ext cx="266700" cy="285750"/>
-          </a:xfrm>
-          <a:prstGeom xmlns:a="http://schemas.openxmlformats.org/drawingml/2006/main" prst="rect">
-            <a:avLst/>
-          </a:prstGeom>
-          <a:solidFill xmlns:a="http://schemas.openxmlformats.org/drawingml/2006/main">
-            <a:srgbClr val="1769D2"/>
-          </a:solidFill>
-          <a:ln xmlns:a="http://schemas.openxmlformats.org/drawingml/2006/main" w="12700">
-            <a:solidFill>
-              <a:srgbClr val="1769D2"/>
-            </a:solidFill>
-            <a:prstDash val="solid"/>
-          </a:ln>
-        </p:spPr>
-        <p:txBody>
-          <a:bodyPr xmlns:a="http://schemas.openxmlformats.org/drawingml/2006/main" wrap="square" lIns="0" tIns="0" rIns="0" bIns="0" anchor="t"/>
-          <a:lstStyle xmlns:a="http://schemas.openxmlformats.org/drawingml/2006/main"/>
-          <a:p xmlns:a="http://schemas.openxmlformats.org/drawingml/2006/main">
-            <a:r>
-              <a:rPr lang="en-US"/>
-              <a:t/>
-            </a:r>
-            <a:endParaRPr lang="en-US"/>
-          </a:p>
-        </p:txBody>
-      </p:sp>
-      <p:sp>
-        <p:nvSpPr>
-          <p:cNvPr id="14" name="anchor-grid-0-1"/>
-          <p:cNvSpPr/>
-          <p:nvPr/>
-        </p:nvSpPr>
-        <p:spPr>
-          <a:xfrm xmlns:a="http://schemas.openxmlformats.org/drawingml/2006/main">
-            <a:off x="12420600" y="2152650"/>
-            <a:ext cx="266700" cy="285750"/>
-          </a:xfrm>
-          <a:prstGeom xmlns:a="http://schemas.openxmlformats.org/drawingml/2006/main" prst="rect">
-            <a:avLst/>
-          </a:prstGeom>
-          <a:solidFill xmlns:a="http://schemas.openxmlformats.org/drawingml/2006/main">
-            <a:srgbClr val="1769D2"/>
-          </a:solidFill>
-          <a:ln xmlns:a="http://schemas.openxmlformats.org/drawingml/2006/main" w="12700">
-            <a:solidFill>
-              <a:srgbClr val="1769D2"/>
-            </a:solidFill>
-            <a:prstDash val="solid"/>
-          </a:ln>
-        </p:spPr>
-        <p:txBody>
-          <a:bodyPr xmlns:a="http://schemas.openxmlformats.org/drawingml/2006/main" wrap="square" lIns="0" tIns="0" rIns="0" bIns="0" anchor="t"/>
-          <a:lstStyle xmlns:a="http://schemas.openxmlformats.org/drawingml/2006/main"/>
-          <a:p xmlns:a="http://schemas.openxmlformats.org/drawingml/2006/main">
-            <a:r>
-              <a:rPr lang="en-US"/>
-              <a:t/>
-            </a:r>
-            <a:endParaRPr lang="en-US"/>
-          </a:p>
-        </p:txBody>
-      </p:sp>
-      <p:sp>
-        <p:nvSpPr>
-          <p:cNvPr id="15" name="anchor-grid-0-2"/>
-          <p:cNvSpPr/>
-          <p:nvPr/>
-        </p:nvSpPr>
-        <p:spPr>
-          <a:xfrm xmlns:a="http://schemas.openxmlformats.org/drawingml/2006/main">
-            <a:off x="12915900" y="2152650"/>
-            <a:ext cx="266700" cy="285750"/>
-          </a:xfrm>
-          <a:prstGeom xmlns:a="http://schemas.openxmlformats.org/drawingml/2006/main" prst="rect">
-            <a:avLst/>
-          </a:prstGeom>
-          <a:solidFill xmlns:a="http://schemas.openxmlformats.org/drawingml/2006/main">
-            <a:srgbClr val="F8FAFC"/>
-          </a:solidFill>
-          <a:ln xmlns:a="http://schemas.openxmlformats.org/drawingml/2006/main" w="12700">
-            <a:solidFill>
-              <a:srgbClr val="1769D2"/>
-            </a:solidFill>
-            <a:prstDash val="solid"/>
-          </a:ln>
-        </p:spPr>
-        <p:txBody>
-          <a:bodyPr xmlns:a="http://schemas.openxmlformats.org/drawingml/2006/main" wrap="square" lIns="0" tIns="0" rIns="0" bIns="0" anchor="t"/>
-          <a:lstStyle xmlns:a="http://schemas.openxmlformats.org/drawingml/2006/main"/>
-          <a:p xmlns:a="http://schemas.openxmlformats.org/drawingml/2006/main">
-            <a:r>
-              <a:rPr lang="en-US"/>
-              <a:t/>
-            </a:r>
-            <a:endParaRPr lang="en-US"/>
-          </a:p>
-        </p:txBody>
-      </p:sp>
-      <p:sp>
-        <p:nvSpPr>
-          <p:cNvPr id="16" name="anchor-grid-1-0"/>
-          <p:cNvSpPr/>
-          <p:nvPr/>
-        </p:nvSpPr>
-        <p:spPr>
-          <a:xfrm xmlns:a="http://schemas.openxmlformats.org/drawingml/2006/main">
-            <a:off x="11925300" y="2686050"/>
-            <a:ext cx="266700" cy="285750"/>
-          </a:xfrm>
-          <a:prstGeom xmlns:a="http://schemas.openxmlformats.org/drawingml/2006/main" prst="rect">
-            <a:avLst/>
-          </a:prstGeom>
-          <a:solidFill xmlns:a="http://schemas.openxmlformats.org/drawingml/2006/main">
-            <a:srgbClr val="1769D2"/>
-          </a:solidFill>
-          <a:ln xmlns:a="http://schemas.openxmlformats.org/drawingml/2006/main" w="12700">
-            <a:solidFill>
-              <a:srgbClr val="1769D2"/>
-            </a:solidFill>
-            <a:prstDash val="solid"/>
-          </a:ln>
-        </p:spPr>
-        <p:txBody>
-          <a:bodyPr xmlns:a="http://schemas.openxmlformats.org/drawingml/2006/main" wrap="square" lIns="0" tIns="0" rIns="0" bIns="0" anchor="t"/>
-          <a:lstStyle xmlns:a="http://schemas.openxmlformats.org/drawingml/2006/main"/>
-          <a:p xmlns:a="http://schemas.openxmlformats.org/drawingml/2006/main">
-            <a:r>
-              <a:rPr lang="en-US"/>
-              <a:t/>
-            </a:r>
-            <a:endParaRPr lang="en-US"/>
-          </a:p>
-        </p:txBody>
-      </p:sp>
-      <p:sp>
-        <p:nvSpPr>
-          <p:cNvPr id="17" name="anchor-grid-1-1"/>
-          <p:cNvSpPr/>
-          <p:nvPr/>
-        </p:nvSpPr>
-        <p:spPr>
-          <a:xfrm xmlns:a="http://schemas.openxmlformats.org/drawingml/2006/main">
-            <a:off x="12420600" y="2686050"/>
-            <a:ext cx="266700" cy="285750"/>
-          </a:xfrm>
-          <a:prstGeom xmlns:a="http://schemas.openxmlformats.org/drawingml/2006/main" prst="rect">
-            <a:avLst/>
-          </a:prstGeom>
-          <a:solidFill xmlns:a="http://schemas.openxmlformats.org/drawingml/2006/main">
-            <a:srgbClr val="1769D2"/>
-          </a:solidFill>
-          <a:ln xmlns:a="http://schemas.openxmlformats.org/drawingml/2006/main" w="12700">
-            <a:solidFill>
-              <a:srgbClr val="1769D2"/>
-            </a:solidFill>
-            <a:prstDash val="solid"/>
-          </a:ln>
-        </p:spPr>
-        <p:txBody>
-          <a:bodyPr xmlns:a="http://schemas.openxmlformats.org/drawingml/2006/main" wrap="square" lIns="0" tIns="0" rIns="0" bIns="0" anchor="t"/>
-          <a:lstStyle xmlns:a="http://schemas.openxmlformats.org/drawingml/2006/main"/>
-          <a:p xmlns:a="http://schemas.openxmlformats.org/drawingml/2006/main">
-            <a:r>
-              <a:rPr lang="en-US"/>
-              <a:t/>
-            </a:r>
-            <a:endParaRPr lang="en-US"/>
-          </a:p>
-        </p:txBody>
-      </p:sp>
-      <p:sp>
-        <p:nvSpPr>
-          <p:cNvPr id="18" name="anchor-grid-1-2"/>
-          <p:cNvSpPr/>
-          <p:nvPr/>
-        </p:nvSpPr>
-        <p:spPr>
-          <a:xfrm xmlns:a="http://schemas.openxmlformats.org/drawingml/2006/main">
-            <a:off x="12915900" y="2686050"/>
-            <a:ext cx="266700" cy="285750"/>
-          </a:xfrm>
-          <a:prstGeom xmlns:a="http://schemas.openxmlformats.org/drawingml/2006/main" prst="rect">
-            <a:avLst/>
-          </a:prstGeom>
-          <a:solidFill xmlns:a="http://schemas.openxmlformats.org/drawingml/2006/main">
-            <a:srgbClr val="F8FAFC"/>
-          </a:solidFill>
-          <a:ln xmlns:a="http://schemas.openxmlformats.org/drawingml/2006/main" w="12700">
-            <a:solidFill>
-              <a:srgbClr val="1769D2"/>
-            </a:solidFill>
-            <a:prstDash val="solid"/>
-          </a:ln>
-        </p:spPr>
-        <p:txBody>
-          <a:bodyPr xmlns:a="http://schemas.openxmlformats.org/drawingml/2006/main" wrap="square" lIns="0" tIns="0" rIns="0" bIns="0" anchor="t"/>
-          <a:lstStyle xmlns:a="http://schemas.openxmlformats.org/drawingml/2006/main"/>
-          <a:p xmlns:a="http://schemas.openxmlformats.org/drawingml/2006/main">
-            <a:r>
-              <a:rPr lang="en-US"/>
-              <a:t/>
-            </a:r>
-            <a:endParaRPr lang="en-US"/>
-          </a:p>
-        </p:txBody>
-      </p:sp>
-      <p:sp>
-        <p:nvSpPr>
-          <p:cNvPr id="19" name="anchor-grid-2-0"/>
-          <p:cNvSpPr/>
-          <p:nvPr/>
-        </p:nvSpPr>
-        <p:spPr>
-          <a:xfrm xmlns:a="http://schemas.openxmlformats.org/drawingml/2006/main">
-            <a:off x="11925300" y="3219450"/>
-            <a:ext cx="266700" cy="285750"/>
-          </a:xfrm>
-          <a:prstGeom xmlns:a="http://schemas.openxmlformats.org/drawingml/2006/main" prst="rect">
-            <a:avLst/>
-          </a:prstGeom>
-          <a:solidFill xmlns:a="http://schemas.openxmlformats.org/drawingml/2006/main">
-            <a:srgbClr val="1769D2"/>
-          </a:solidFill>
-          <a:ln xmlns:a="http://schemas.openxmlformats.org/drawingml/2006/main" w="12700">
-            <a:solidFill>
-              <a:srgbClr val="1769D2"/>
-            </a:solidFill>
-            <a:prstDash val="solid"/>
-          </a:ln>
-        </p:spPr>
-        <p:txBody>
-          <a:bodyPr xmlns:a="http://schemas.openxmlformats.org/drawingml/2006/main" wrap="square" lIns="0" tIns="0" rIns="0" bIns="0" anchor="t"/>
-          <a:lstStyle xmlns:a="http://schemas.openxmlformats.org/drawingml/2006/main"/>
-          <a:p xmlns:a="http://schemas.openxmlformats.org/drawingml/2006/main">
-            <a:r>
-              <a:rPr lang="en-US"/>
-              <a:t/>
-            </a:r>
-            <a:endParaRPr lang="en-US"/>
-          </a:p>
-        </p:txBody>
-      </p:sp>
-      <p:sp>
-        <p:nvSpPr>
-          <p:cNvPr id="20" name="anchor-grid-2-1"/>
-          <p:cNvSpPr/>
-          <p:nvPr/>
-        </p:nvSpPr>
-        <p:spPr>
-          <a:xfrm xmlns:a="http://schemas.openxmlformats.org/drawingml/2006/main">
-            <a:off x="12420600" y="3219450"/>
-            <a:ext cx="266700" cy="285750"/>
-          </a:xfrm>
-          <a:prstGeom xmlns:a="http://schemas.openxmlformats.org/drawingml/2006/main" prst="rect">
-            <a:avLst/>
-          </a:prstGeom>
-          <a:solidFill xmlns:a="http://schemas.openxmlformats.org/drawingml/2006/main">
-            <a:srgbClr val="1769D2"/>
-          </a:solidFill>
-          <a:ln xmlns:a="http://schemas.openxmlformats.org/drawingml/2006/main" w="12700">
-            <a:solidFill>
-              <a:srgbClr val="1769D2"/>
-            </a:solidFill>
-            <a:prstDash val="solid"/>
-          </a:ln>
-        </p:spPr>
-        <p:txBody>
-          <a:bodyPr xmlns:a="http://schemas.openxmlformats.org/drawingml/2006/main" wrap="square" lIns="0" tIns="0" rIns="0" bIns="0" anchor="t"/>
-          <a:lstStyle xmlns:a="http://schemas.openxmlformats.org/drawingml/2006/main"/>
-          <a:p xmlns:a="http://schemas.openxmlformats.org/drawingml/2006/main">
-            <a:r>
-              <a:rPr lang="en-US"/>
-              <a:t/>
-            </a:r>
-            <a:endParaRPr lang="en-US"/>
-          </a:p>
-        </p:txBody>
-      </p:sp>
-      <p:sp>
-        <p:nvSpPr>
-          <p:cNvPr id="21" name="anchor-grid-2-2"/>
-          <p:cNvSpPr/>
-          <p:nvPr/>
-        </p:nvSpPr>
-        <p:spPr>
-          <a:xfrm xmlns:a="http://schemas.openxmlformats.org/drawingml/2006/main">
-            <a:off x="12915900" y="3219450"/>
-            <a:ext cx="266700" cy="285750"/>
-          </a:xfrm>
-          <a:prstGeom xmlns:a="http://schemas.openxmlformats.org/drawingml/2006/main" prst="rect">
-            <a:avLst/>
-          </a:prstGeom>
-          <a:solidFill xmlns:a="http://schemas.openxmlformats.org/drawingml/2006/main">
-            <a:srgbClr val="F8FAFC"/>
-          </a:solidFill>
-          <a:ln xmlns:a="http://schemas.openxmlformats.org/drawingml/2006/main" w="12700">
-            <a:solidFill>
-              <a:srgbClr val="1769D2"/>
-            </a:solidFill>
-            <a:prstDash val="solid"/>
-          </a:ln>
-        </p:spPr>
-        <p:txBody>
-          <a:bodyPr xmlns:a="http://schemas.openxmlformats.org/drawingml/2006/main" wrap="square" lIns="0" tIns="0" rIns="0" bIns="0" anchor="t"/>
-          <a:lstStyle xmlns:a="http://schemas.openxmlformats.org/drawingml/2006/main"/>
-          <a:p xmlns:a="http://schemas.openxmlformats.org/drawingml/2006/main">
-            <a:r>
-              <a:rPr lang="en-US"/>
-              <a:t/>
-            </a:r>
-            <a:endParaRPr lang="en-US"/>
-          </a:p>
-        </p:txBody>
-      </p:sp>
-      <p:sp>
-        <p:nvSpPr>
-          <p:cNvPr id="22" name="anchor-axis"/>
-          <p:cNvSpPr/>
-          <p:nvPr/>
-        </p:nvSpPr>
-        <p:spPr>
-          <a:xfrm xmlns:a="http://schemas.openxmlformats.org/drawingml/2006/main">
-            <a:off x="12668250" y="1638300"/>
-            <a:ext cx="0" cy="2743200"/>
-          </a:xfrm>
-          <a:prstGeom xmlns:a="http://schemas.openxmlformats.org/drawingml/2006/main" prst="line">
-            <a:avLst/>
-          </a:prstGeom>
-          <a:noFill xmlns:a="http://schemas.openxmlformats.org/drawingml/2006/main"/>
-          <a:ln xmlns:a="http://schemas.openxmlformats.org/drawingml/2006/main" w="50800">
-            <a:solidFill>
-              <a:srgbClr val="132A3A"/>
-            </a:solidFill>
-            <a:prstDash val="solid"/>
-          </a:ln>
-        </p:spPr>
-        <p:txBody>
-          <a:bodyPr xmlns:a="http://schemas.openxmlformats.org/drawingml/2006/main" wrap="square" lIns="0" tIns="0" rIns="0" bIns="0" anchor="t"/>
-          <a:lstStyle xmlns:a="http://schemas.openxmlformats.org/drawingml/2006/main"/>
-          <a:p xmlns:a="http://schemas.openxmlformats.org/drawingml/2006/main">
-            <a:r>
-              <a:rPr lang="en-US"/>
-              <a:t/>
-            </a:r>
-            <a:endParaRPr lang="en-US"/>
-          </a:p>
-        </p:txBody>
-      </p:sp>
-    </p:spTree>
-  </p:cSld>
-  <p:clrMapOvr>
-    <a:masterClrMapping xmlns:a="http://schemas.openxmlformats.org/drawingml/2006/main"/>
-  </p:clrMapOvr>
-</p:sld>
-</file>
-
-<file path=ppt/slides/slide2.xml><?xml version="1.0" encoding="utf-8"?>
-<p:sld xmlns:p="http://schemas.openxmlformats.org/presentationml/2006/main">
-  <p:cSld name="Argument">
-    <p:bg>
-      <p:bgPr>
-        <a:blipFill xmlns:a="http://schemas.openxmlformats.org/drawingml/2006/main">
-          <a:blip xmlns:r="http://schemas.openxmlformats.org/officeDocument/2006/relationships" r:embed="rIdOfficeKitImage8fbc298f8d1b7a3c_1"/>
-          <a:stretch>
-            <a:fillRect/>
-          </a:stretch>
-        </a:blipFill>
-      </p:bgPr>
-    </p:bg>
-    <p:spTree>
-      <p:nvGrpSpPr>
-        <p:cNvPr id="1" name=""/>
-        <p:cNvGrpSpPr/>
-        <p:nvPr/>
-      </p:nvGrpSpPr>
-      <p:grpSpPr>
-        <a:xfrm xmlns:a="http://schemas.openxmlformats.org/drawingml/2006/main">
-          <a:off x="0" y="0"/>
-          <a:ext cx="0" cy="0"/>
-          <a:chOff x="0" y="0"/>
-          <a:chExt cx="0" cy="0"/>
-        </a:xfrm>
-      </p:grpSpPr>
-      <p:sp>
-        <p:nvSpPr>
-          <p:cNvPr id="2" name="argument-paper-scrim"/>
-          <p:cNvSpPr/>
-          <p:nvPr/>
-        </p:nvSpPr>
-        <p:spPr>
-          <a:xfrm xmlns:a="http://schemas.openxmlformats.org/drawingml/2006/main">
-            <a:off x="0" y="0"/>
-            <a:ext cx="7429500" cy="8572500"/>
-          </a:xfrm>
-          <a:prstGeom xmlns:a="http://schemas.openxmlformats.org/drawingml/2006/main" prst="rect">
-            <a:avLst/>
-          </a:prstGeom>
-          <a:solidFill xmlns:a="http://schemas.openxmlformats.org/drawingml/2006/main">
-            <a:srgbClr val="F8FAFC">
-              <a:alpha val="96000"/>
-            </a:srgbClr>
-          </a:solidFill>
-          <a:ln xmlns:a="http://schemas.openxmlformats.org/drawingml/2006/main" w="0">
-            <a:solidFill>
-              <a:srgbClr val="F8FAFC"/>
-            </a:solidFill>
-            <a:prstDash val="solid"/>
-          </a:ln>
-        </p:spPr>
-        <p:txBody>
-          <a:bodyPr xmlns:a="http://schemas.openxmlformats.org/drawingml/2006/main" wrap="square" lIns="0" tIns="0" rIns="0" bIns="0" anchor="t"/>
-          <a:lstStyle xmlns:a="http://schemas.openxmlformats.org/drawingml/2006/main"/>
-          <a:p xmlns:a="http://schemas.openxmlformats.org/drawingml/2006/main">
-            <a:r>
-              <a:rPr lang="en-US"/>
-              <a:t/>
-            </a:r>
-            <a:endParaRPr lang="en-US"/>
-          </a:p>
-        </p:txBody>
-      </p:sp>
-      <p:sp>
-        <p:nvSpPr>
-          <p:cNvPr id="3" name="argument-top-rule"/>
-          <p:cNvSpPr/>
-          <p:nvPr/>
-        </p:nvSpPr>
-        <p:spPr>
-          <a:xfrm xmlns:a="http://schemas.openxmlformats.org/drawingml/2006/main">
-            <a:off x="838200" y="666750"/>
-            <a:ext cx="13563600" cy="0"/>
-          </a:xfrm>
-          <a:prstGeom xmlns:a="http://schemas.openxmlformats.org/drawingml/2006/main" prst="line">
-            <a:avLst/>
-          </a:prstGeom>
-          <a:noFill xmlns:a="http://schemas.openxmlformats.org/drawingml/2006/main"/>
-          <a:ln xmlns:a="http://schemas.openxmlformats.org/drawingml/2006/main" w="38100">
-            <a:solidFill>
-              <a:srgbClr val="1769D2"/>
-            </a:solidFill>
-            <a:prstDash val="solid"/>
-          </a:ln>
-        </p:spPr>
-        <p:txBody>
-          <a:bodyPr xmlns:a="http://schemas.openxmlformats.org/drawingml/2006/main" wrap="square" lIns="0" tIns="0" rIns="0" bIns="0" anchor="t"/>
-          <a:lstStyle xmlns:a="http://schemas.openxmlformats.org/drawingml/2006/main"/>
-          <a:p xmlns:a="http://schemas.openxmlformats.org/drawingml/2006/main">
-            <a:r>
-              <a:rPr lang="en-US"/>
-              <a:t/>
-            </a:r>
-            <a:endParaRPr lang="en-US"/>
-          </a:p>
-        </p:txBody>
-      </p:sp>
-      <p:sp>
-        <p:nvSpPr>
-          <p:cNvPr id="4" name="BLUEPRINT LECTURE · ARGUMENT"/>
-          <p:cNvSpPr txBox="1"/>
-          <p:nvPr/>
-        </p:nvSpPr>
-        <p:spPr>
-          <a:xfrm xmlns:a="http://schemas.openxmlformats.org/drawingml/2006/main">
-            <a:off x="914400" y="895350"/>
-            <a:ext cx="7239000" cy="228600"/>
-          </a:xfrm>
-          <a:prstGeom xmlns:a="http://schemas.openxmlformats.org/drawingml/2006/main" prst="rect">
-            <a:avLst/>
-          </a:prstGeom>
-          <a:noFill xmlns:a="http://schemas.openxmlformats.org/drawingml/2006/main"/>
-          <a:ln xmlns:a="http://schemas.openxmlformats.org/drawingml/2006/main" w="0">
-            <a:noFill/>
-          </a:ln>
-        </p:spPr>
-        <p:txBody>
-          <a:bodyPr xmlns:a="http://schemas.openxmlformats.org/drawingml/2006/main" wrap="square" lIns="0" tIns="0" rIns="0" bIns="0" anchor="t"/>
-          <a:lstStyle xmlns:a="http://schemas.openxmlformats.org/drawingml/2006/main"/>
-          <a:p xmlns:a="http://schemas.openxmlformats.org/drawingml/2006/main">
-            <a:r>
-              <a:rPr lang="en-US" sz="1200" b="1">
-                <a:solidFill>
-                  <a:srgbClr val="1769D2"/>
-                </a:solidFill>
-                <a:latin typeface="Inter"/>
-                <a:ea typeface="Inter"/>
-              </a:rPr>
-              <a:t>BLUEPRINT LECTURE · ARGUMENT</a:t>
-            </a:r>
-            <a:endParaRPr lang="en-US"/>
-          </a:p>
-        </p:txBody>
-      </p:sp>
-      <p:sp>
-        <p:nvSpPr>
-          <p:cNvPr id="5" name="argument-title"/>
-          <p:cNvSpPr txBox="1"/>
-          <p:nvPr/>
-        </p:nvSpPr>
-        <p:spPr>
-          <a:xfrm xmlns:a="http://schemas.openxmlformats.org/drawingml/2006/main">
-            <a:off x="914400" y="1314450"/>
-            <a:ext cx="6286500" cy="552450"/>
-          </a:xfrm>
-          <a:prstGeom xmlns:a="http://schemas.openxmlformats.org/drawingml/2006/main" prst="rect">
-            <a:avLst/>
-          </a:prstGeom>
-          <a:noFill xmlns:a="http://schemas.openxmlformats.org/drawingml/2006/main"/>
-          <a:ln xmlns:a="http://schemas.openxmlformats.org/drawingml/2006/main" w="0">
-            <a:noFill/>
-          </a:ln>
-        </p:spPr>
-        <p:txBody>
-          <a:bodyPr xmlns:a="http://schemas.openxmlformats.org/drawingml/2006/main" wrap="square" lIns="0" tIns="0" rIns="0" bIns="0" anchor="t"/>
-          <a:lstStyle xmlns:a="http://schemas.openxmlformats.org/drawingml/2006/main"/>
-          <a:p xmlns:a="http://schemas.openxmlformats.org/drawingml/2006/main">
-            <a:r>
-              <a:rPr lang="en-US" sz="2850" b="1">
-                <a:solidFill>
-                  <a:srgbClr val="132A3A"/>
-                </a:solidFill>
-                <a:latin typeface="Inter"/>
-                <a:ea typeface="Inter"/>
-              </a:rPr>
-              <a:t>The method keeps mechanism separate from drift</a:t>
-            </a:r>
-            <a:endParaRPr lang="en-US"/>
-          </a:p>
-        </p:txBody>
-      </p:sp>
-      <p:sp>
-        <p:nvSpPr>
-          <p:cNvPr id="6" name="argument-basis"/>
-          <p:cNvSpPr txBox="1"/>
-          <p:nvPr/>
-        </p:nvSpPr>
-        <p:spPr>
-          <a:xfrm xmlns:a="http://schemas.openxmlformats.org/drawingml/2006/main">
-            <a:off x="952500" y="1981200"/>
-            <a:ext cx="6096000" cy="266700"/>
-          </a:xfrm>
-          <a:prstGeom xmlns:a="http://schemas.openxmlformats.org/drawingml/2006/main" prst="rect">
-            <a:avLst/>
-          </a:prstGeom>
-          <a:noFill xmlns:a="http://schemas.openxmlformats.org/drawingml/2006/main"/>
-          <a:ln xmlns:a="http://schemas.openxmlformats.org/drawingml/2006/main" w="0">
-            <a:noFill/>
-          </a:ln>
-        </p:spPr>
-        <p:txBody>
-          <a:bodyPr xmlns:a="http://schemas.openxmlformats.org/drawingml/2006/main" wrap="square" lIns="0" tIns="0" rIns="0" bIns="0" anchor="t"/>
-          <a:lstStyle xmlns:a="http://schemas.openxmlformats.org/drawingml/2006/main"/>
-          <a:p xmlns:a="http://schemas.openxmlformats.org/drawingml/2006/main">
-            <a:r>
-              <a:rPr lang="en-US" sz="1350">
-                <a:solidFill>
-                  <a:srgbClr val="8A969F"/>
-                </a:solidFill>
-                <a:latin typeface="Inter"/>
-                <a:ea typeface="Inter"/>
-              </a:rPr>
-              <a:t>Question → method → result → limitation, without marketing language.</a:t>
-            </a:r>
-            <a:endParaRPr lang="en-US"/>
-          </a:p>
-        </p:txBody>
-      </p:sp>
-      <p:sp>
-        <p:nvSpPr>
-          <p:cNvPr id="7" name="argument-rule"/>
-          <p:cNvSpPr/>
-          <p:nvPr/>
-        </p:nvSpPr>
-        <p:spPr>
-          <a:xfrm xmlns:a="http://schemas.openxmlformats.org/drawingml/2006/main">
-            <a:off x="914400" y="2457450"/>
-            <a:ext cx="13411200" cy="0"/>
-          </a:xfrm>
-          <a:prstGeom xmlns:a="http://schemas.openxmlformats.org/drawingml/2006/main" prst="line">
-            <a:avLst/>
-          </a:prstGeom>
-          <a:noFill xmlns:a="http://schemas.openxmlformats.org/drawingml/2006/main"/>
-          <a:ln xmlns:a="http://schemas.openxmlformats.org/drawingml/2006/main" w="25400">
-            <a:solidFill>
-              <a:srgbClr val="8A969F"/>
-            </a:solidFill>
-            <a:prstDash val="solid"/>
-          </a:ln>
-        </p:spPr>
-        <p:txBody>
-          <a:bodyPr xmlns:a="http://schemas.openxmlformats.org/drawingml/2006/main" wrap="square" lIns="0" tIns="0" rIns="0" bIns="0" anchor="t"/>
-          <a:lstStyle xmlns:a="http://schemas.openxmlformats.org/drawingml/2006/main"/>
-          <a:p xmlns:a="http://schemas.openxmlformats.org/drawingml/2006/main">
-            <a:r>
-              <a:rPr lang="en-US"/>
-              <a:t/>
-            </a:r>
-            <a:endParaRPr lang="en-US"/>
-          </a:p>
-        </p:txBody>
-      </p:sp>
-      <p:sp>
-        <p:nvSpPr>
-          <p:cNvPr id="8" name="academic-number-0"/>
-          <p:cNvSpPr txBox="1"/>
-          <p:nvPr/>
-        </p:nvSpPr>
-        <p:spPr>
-          <a:xfrm xmlns:a="http://schemas.openxmlformats.org/drawingml/2006/main">
-            <a:off x="1104900" y="3238500"/>
-            <a:ext cx="685800" cy="304800"/>
-          </a:xfrm>
-          <a:prstGeom xmlns:a="http://schemas.openxmlformats.org/drawingml/2006/main" prst="rect">
-            <a:avLst/>
-          </a:prstGeom>
-          <a:noFill xmlns:a="http://schemas.openxmlformats.org/drawingml/2006/main"/>
-          <a:ln xmlns:a="http://schemas.openxmlformats.org/drawingml/2006/main" w="0">
-            <a:noFill/>
-          </a:ln>
-        </p:spPr>
-        <p:txBody>
-          <a:bodyPr xmlns:a="http://schemas.openxmlformats.org/drawingml/2006/main" wrap="square" lIns="0" tIns="0" rIns="0" bIns="0" anchor="t"/>
-          <a:lstStyle xmlns:a="http://schemas.openxmlformats.org/drawingml/2006/main"/>
-          <a:p xmlns:a="http://schemas.openxmlformats.org/drawingml/2006/main">
-            <a:r>
-              <a:rPr lang="en-US" sz="1800" b="1">
-                <a:solidFill>
-                  <a:srgbClr val="1769D2"/>
-                </a:solidFill>
-                <a:latin typeface="Inter"/>
-                <a:ea typeface="Inter"/>
-              </a:rPr>
-              <a:t>01</a:t>
-            </a:r>
-            <a:endParaRPr lang="en-US"/>
-          </a:p>
-        </p:txBody>
-      </p:sp>
-      <p:sp>
-        <p:nvSpPr>
-          <p:cNvPr id="9" name="academic-rule-0"/>
-          <p:cNvSpPr/>
-          <p:nvPr/>
-        </p:nvSpPr>
-        <p:spPr>
-          <a:xfrm xmlns:a="http://schemas.openxmlformats.org/drawingml/2006/main">
-            <a:off x="2000250" y="3390900"/>
-            <a:ext cx="5810250" cy="0"/>
-          </a:xfrm>
-          <a:prstGeom xmlns:a="http://schemas.openxmlformats.org/drawingml/2006/main" prst="line">
-            <a:avLst/>
-          </a:prstGeom>
-          <a:noFill xmlns:a="http://schemas.openxmlformats.org/drawingml/2006/main"/>
-          <a:ln xmlns:a="http://schemas.openxmlformats.org/drawingml/2006/main" w="12700">
-            <a:solidFill>
-              <a:srgbClr val="8A969F"/>
-            </a:solidFill>
-            <a:prstDash val="solid"/>
-          </a:ln>
-        </p:spPr>
-        <p:txBody>
-          <a:bodyPr xmlns:a="http://schemas.openxmlformats.org/drawingml/2006/main" wrap="square" lIns="0" tIns="0" rIns="0" bIns="0" anchor="t"/>
-          <a:lstStyle xmlns:a="http://schemas.openxmlformats.org/drawingml/2006/main"/>
-          <a:p xmlns:a="http://schemas.openxmlformats.org/drawingml/2006/main">
-            <a:r>
-              <a:rPr lang="en-US"/>
-              <a:t/>
-            </a:r>
-            <a:endParaRPr lang="en-US"/>
-          </a:p>
-        </p:txBody>
-      </p:sp>
-      <p:sp>
-        <p:nvSpPr>
-          <p:cNvPr id="10" name="academic-label-0"/>
-          <p:cNvSpPr txBox="1"/>
-          <p:nvPr/>
-        </p:nvSpPr>
-        <p:spPr>
-          <a:xfrm xmlns:a="http://schemas.openxmlformats.org/drawingml/2006/main">
-            <a:off x="2114550" y="3200400"/>
-            <a:ext cx="1809750" cy="285750"/>
-          </a:xfrm>
-          <a:prstGeom xmlns:a="http://schemas.openxmlformats.org/drawingml/2006/main" prst="rect">
-            <a:avLst/>
-          </a:prstGeom>
-          <a:noFill xmlns:a="http://schemas.openxmlformats.org/drawingml/2006/main"/>
-          <a:ln xmlns:a="http://schemas.openxmlformats.org/drawingml/2006/main" w="0">
-            <a:noFill/>
-          </a:ln>
-        </p:spPr>
-        <p:txBody>
-          <a:bodyPr xmlns:a="http://schemas.openxmlformats.org/drawingml/2006/main" wrap="square" lIns="0" tIns="0" rIns="0" bIns="0" anchor="t"/>
-          <a:lstStyle xmlns:a="http://schemas.openxmlformats.org/drawingml/2006/main"/>
-          <a:p xmlns:a="http://schemas.openxmlformats.org/drawingml/2006/main">
-            <a:r>
-              <a:rPr lang="en-US" sz="1650" b="1">
-                <a:solidFill>
-                  <a:srgbClr val="132A3A"/>
-                </a:solidFill>
-                <a:latin typeface="Inter"/>
-                <a:ea typeface="Inter"/>
-              </a:rPr>
-              <a:t>Question</a:t>
-            </a:r>
-            <a:endParaRPr lang="en-US"/>
-          </a:p>
-        </p:txBody>
-      </p:sp>
-      <p:sp>
-        <p:nvSpPr>
-          <p:cNvPr id="11" name="academic-text-0"/>
-          <p:cNvSpPr txBox="1"/>
-          <p:nvPr/>
-        </p:nvSpPr>
-        <p:spPr>
-          <a:xfrm xmlns:a="http://schemas.openxmlformats.org/drawingml/2006/main">
-            <a:off x="4095750" y="3238500"/>
-            <a:ext cx="5334000" cy="304800"/>
-          </a:xfrm>
-          <a:prstGeom xmlns:a="http://schemas.openxmlformats.org/drawingml/2006/main" prst="rect">
-            <a:avLst/>
-          </a:prstGeom>
-          <a:noFill xmlns:a="http://schemas.openxmlformats.org/drawingml/2006/main"/>
-          <a:ln xmlns:a="http://schemas.openxmlformats.org/drawingml/2006/main" w="0">
-            <a:noFill/>
-          </a:ln>
-        </p:spPr>
-        <p:txBody>
-          <a:bodyPr xmlns:a="http://schemas.openxmlformats.org/drawingml/2006/main" wrap="square" lIns="0" tIns="0" rIns="0" bIns="0" anchor="t"/>
-          <a:lstStyle xmlns:a="http://schemas.openxmlformats.org/drawingml/2006/main"/>
-          <a:p xmlns:a="http://schemas.openxmlformats.org/drawingml/2006/main">
-            <a:r>
-              <a:rPr lang="en-US" sz="1350">
-                <a:solidFill>
-                  <a:srgbClr val="132A3A"/>
-                </a:solidFill>
-                <a:latin typeface="Inter"/>
-                <a:ea typeface="Inter"/>
-              </a:rPr>
-              <a:t>Can the intervention move the outcome?</a:t>
-            </a:r>
-            <a:endParaRPr lang="en-US"/>
-          </a:p>
-        </p:txBody>
-      </p:sp>
-      <p:sp>
-        <p:nvSpPr>
-          <p:cNvPr id="12" name="academic-number-1"/>
-          <p:cNvSpPr txBox="1"/>
-          <p:nvPr/>
-        </p:nvSpPr>
-        <p:spPr>
-          <a:xfrm xmlns:a="http://schemas.openxmlformats.org/drawingml/2006/main">
-            <a:off x="1104900" y="4191000"/>
-            <a:ext cx="685800" cy="304800"/>
-          </a:xfrm>
-          <a:prstGeom xmlns:a="http://schemas.openxmlformats.org/drawingml/2006/main" prst="rect">
-            <a:avLst/>
-          </a:prstGeom>
-          <a:noFill xmlns:a="http://schemas.openxmlformats.org/drawingml/2006/main"/>
-          <a:ln xmlns:a="http://schemas.openxmlformats.org/drawingml/2006/main" w="0">
-            <a:noFill/>
-          </a:ln>
-        </p:spPr>
-        <p:txBody>
-          <a:bodyPr xmlns:a="http://schemas.openxmlformats.org/drawingml/2006/main" wrap="square" lIns="0" tIns="0" rIns="0" bIns="0" anchor="t"/>
-          <a:lstStyle xmlns:a="http://schemas.openxmlformats.org/drawingml/2006/main"/>
-          <a:p xmlns:a="http://schemas.openxmlformats.org/drawingml/2006/main">
-            <a:r>
-              <a:rPr lang="en-US" sz="1800" b="1">
-                <a:solidFill>
-                  <a:srgbClr val="1769D2"/>
-                </a:solidFill>
-                <a:latin typeface="Inter"/>
-                <a:ea typeface="Inter"/>
-              </a:rPr>
-              <a:t>02</a:t>
-            </a:r>
-            <a:endParaRPr lang="en-US"/>
-          </a:p>
-        </p:txBody>
-      </p:sp>
-      <p:sp>
-        <p:nvSpPr>
-          <p:cNvPr id="13" name="academic-rule-1"/>
-          <p:cNvSpPr/>
-          <p:nvPr/>
-        </p:nvSpPr>
-        <p:spPr>
-          <a:xfrm xmlns:a="http://schemas.openxmlformats.org/drawingml/2006/main">
-            <a:off x="2000250" y="4343400"/>
-            <a:ext cx="5810250" cy="0"/>
-          </a:xfrm>
-          <a:prstGeom xmlns:a="http://schemas.openxmlformats.org/drawingml/2006/main" prst="line">
-            <a:avLst/>
-          </a:prstGeom>
-          <a:noFill xmlns:a="http://schemas.openxmlformats.org/drawingml/2006/main"/>
-          <a:ln xmlns:a="http://schemas.openxmlformats.org/drawingml/2006/main" w="12700">
-            <a:solidFill>
-              <a:srgbClr val="8A969F"/>
-            </a:solidFill>
-            <a:prstDash val="solid"/>
-          </a:ln>
-        </p:spPr>
-        <p:txBody>
-          <a:bodyPr xmlns:a="http://schemas.openxmlformats.org/drawingml/2006/main" wrap="square" lIns="0" tIns="0" rIns="0" bIns="0" anchor="t"/>
-          <a:lstStyle xmlns:a="http://schemas.openxmlformats.org/drawingml/2006/main"/>
-          <a:p xmlns:a="http://schemas.openxmlformats.org/drawingml/2006/main">
-            <a:r>
-              <a:rPr lang="en-US"/>
-              <a:t/>
-            </a:r>
-            <a:endParaRPr lang="en-US"/>
-          </a:p>
-        </p:txBody>
-      </p:sp>
-      <p:sp>
-        <p:nvSpPr>
-          <p:cNvPr id="14" name="academic-label-1"/>
-          <p:cNvSpPr txBox="1"/>
-          <p:nvPr/>
-        </p:nvSpPr>
-        <p:spPr>
-          <a:xfrm xmlns:a="http://schemas.openxmlformats.org/drawingml/2006/main">
-            <a:off x="2114550" y="4152900"/>
-            <a:ext cx="1809750" cy="285750"/>
-          </a:xfrm>
-          <a:prstGeom xmlns:a="http://schemas.openxmlformats.org/drawingml/2006/main" prst="rect">
-            <a:avLst/>
-          </a:prstGeom>
-          <a:noFill xmlns:a="http://schemas.openxmlformats.org/drawingml/2006/main"/>
-          <a:ln xmlns:a="http://schemas.openxmlformats.org/drawingml/2006/main" w="0">
-            <a:noFill/>
-          </a:ln>
-        </p:spPr>
-        <p:txBody>
-          <a:bodyPr xmlns:a="http://schemas.openxmlformats.org/drawingml/2006/main" wrap="square" lIns="0" tIns="0" rIns="0" bIns="0" anchor="t"/>
-          <a:lstStyle xmlns:a="http://schemas.openxmlformats.org/drawingml/2006/main"/>
-          <a:p xmlns:a="http://schemas.openxmlformats.org/drawingml/2006/main">
-            <a:r>
-              <a:rPr lang="en-US" sz="1650" b="1">
-                <a:solidFill>
-                  <a:srgbClr val="132A3A"/>
-                </a:solidFill>
-                <a:latin typeface="Inter"/>
-                <a:ea typeface="Inter"/>
-              </a:rPr>
-              <a:t>Method</a:t>
-            </a:r>
-            <a:endParaRPr lang="en-US"/>
-          </a:p>
-        </p:txBody>
-      </p:sp>
-      <p:sp>
-        <p:nvSpPr>
-          <p:cNvPr id="15" name="academic-text-1"/>
-          <p:cNvSpPr txBox="1"/>
-          <p:nvPr/>
-        </p:nvSpPr>
-        <p:spPr>
-          <a:xfrm xmlns:a="http://schemas.openxmlformats.org/drawingml/2006/main">
-            <a:off x="4095750" y="4191000"/>
-            <a:ext cx="5334000" cy="304800"/>
-          </a:xfrm>
-          <a:prstGeom xmlns:a="http://schemas.openxmlformats.org/drawingml/2006/main" prst="rect">
-            <a:avLst/>
-          </a:prstGeom>
-          <a:noFill xmlns:a="http://schemas.openxmlformats.org/drawingml/2006/main"/>
-          <a:ln xmlns:a="http://schemas.openxmlformats.org/drawingml/2006/main" w="0">
-            <a:noFill/>
-          </a:ln>
-        </p:spPr>
-        <p:txBody>
-          <a:bodyPr xmlns:a="http://schemas.openxmlformats.org/drawingml/2006/main" wrap="square" lIns="0" tIns="0" rIns="0" bIns="0" anchor="t"/>
-          <a:lstStyle xmlns:a="http://schemas.openxmlformats.org/drawingml/2006/main"/>
-          <a:p xmlns:a="http://schemas.openxmlformats.org/drawingml/2006/main">
-            <a:r>
-              <a:rPr lang="en-US" sz="1350">
-                <a:solidFill>
-                  <a:srgbClr val="132A3A"/>
-                </a:solidFill>
-                <a:latin typeface="Inter"/>
-                <a:ea typeface="Inter"/>
-              </a:rPr>
-              <a:t>Two groups, one rule, registered before launch.</a:t>
-            </a:r>
-            <a:endParaRPr lang="en-US"/>
-          </a:p>
-        </p:txBody>
-      </p:sp>
-      <p:sp>
-        <p:nvSpPr>
-          <p:cNvPr id="16" name="academic-number-2"/>
-          <p:cNvSpPr txBox="1"/>
-          <p:nvPr/>
-        </p:nvSpPr>
-        <p:spPr>
-          <a:xfrm xmlns:a="http://schemas.openxmlformats.org/drawingml/2006/main">
-            <a:off x="1104900" y="5143500"/>
-            <a:ext cx="685800" cy="304800"/>
-          </a:xfrm>
-          <a:prstGeom xmlns:a="http://schemas.openxmlformats.org/drawingml/2006/main" prst="rect">
-            <a:avLst/>
-          </a:prstGeom>
-          <a:noFill xmlns:a="http://schemas.openxmlformats.org/drawingml/2006/main"/>
-          <a:ln xmlns:a="http://schemas.openxmlformats.org/drawingml/2006/main" w="0">
-            <a:noFill/>
-          </a:ln>
-        </p:spPr>
-        <p:txBody>
-          <a:bodyPr xmlns:a="http://schemas.openxmlformats.org/drawingml/2006/main" wrap="square" lIns="0" tIns="0" rIns="0" bIns="0" anchor="t"/>
-          <a:lstStyle xmlns:a="http://schemas.openxmlformats.org/drawingml/2006/main"/>
-          <a:p xmlns:a="http://schemas.openxmlformats.org/drawingml/2006/main">
-            <a:r>
-              <a:rPr lang="en-US" sz="1800" b="1">
-                <a:solidFill>
-                  <a:srgbClr val="1769D2"/>
-                </a:solidFill>
-                <a:latin typeface="Inter"/>
-                <a:ea typeface="Inter"/>
-              </a:rPr>
-              <a:t>03</a:t>
-            </a:r>
-            <a:endParaRPr lang="en-US"/>
-          </a:p>
-        </p:txBody>
-      </p:sp>
-      <p:sp>
-        <p:nvSpPr>
-          <p:cNvPr id="17" name="academic-rule-2"/>
-          <p:cNvSpPr/>
-          <p:nvPr/>
-        </p:nvSpPr>
-        <p:spPr>
-          <a:xfrm xmlns:a="http://schemas.openxmlformats.org/drawingml/2006/main">
-            <a:off x="2000250" y="5295900"/>
-            <a:ext cx="5810250" cy="0"/>
-          </a:xfrm>
-          <a:prstGeom xmlns:a="http://schemas.openxmlformats.org/drawingml/2006/main" prst="line">
-            <a:avLst/>
-          </a:prstGeom>
-          <a:noFill xmlns:a="http://schemas.openxmlformats.org/drawingml/2006/main"/>
-          <a:ln xmlns:a="http://schemas.openxmlformats.org/drawingml/2006/main" w="12700">
-            <a:solidFill>
-              <a:srgbClr val="8A969F"/>
-            </a:solidFill>
-            <a:prstDash val="solid"/>
-          </a:ln>
-        </p:spPr>
-        <p:txBody>
-          <a:bodyPr xmlns:a="http://schemas.openxmlformats.org/drawingml/2006/main" wrap="square" lIns="0" tIns="0" rIns="0" bIns="0" anchor="t"/>
-          <a:lstStyle xmlns:a="http://schemas.openxmlformats.org/drawingml/2006/main"/>
-          <a:p xmlns:a="http://schemas.openxmlformats.org/drawingml/2006/main">
-            <a:r>
-              <a:rPr lang="en-US"/>
-              <a:t/>
-            </a:r>
-            <a:endParaRPr lang="en-US"/>
-          </a:p>
-        </p:txBody>
-      </p:sp>
-      <p:sp>
-        <p:nvSpPr>
-          <p:cNvPr id="18" name="academic-label-2"/>
-          <p:cNvSpPr txBox="1"/>
-          <p:nvPr/>
-        </p:nvSpPr>
-        <p:spPr>
-          <a:xfrm xmlns:a="http://schemas.openxmlformats.org/drawingml/2006/main">
-            <a:off x="2114550" y="5105400"/>
-            <a:ext cx="1809750" cy="285750"/>
-          </a:xfrm>
-          <a:prstGeom xmlns:a="http://schemas.openxmlformats.org/drawingml/2006/main" prst="rect">
-            <a:avLst/>
-          </a:prstGeom>
-          <a:noFill xmlns:a="http://schemas.openxmlformats.org/drawingml/2006/main"/>
-          <a:ln xmlns:a="http://schemas.openxmlformats.org/drawingml/2006/main" w="0">
-            <a:noFill/>
-          </a:ln>
-        </p:spPr>
-        <p:txBody>
-          <a:bodyPr xmlns:a="http://schemas.openxmlformats.org/drawingml/2006/main" wrap="square" lIns="0" tIns="0" rIns="0" bIns="0" anchor="t"/>
-          <a:lstStyle xmlns:a="http://schemas.openxmlformats.org/drawingml/2006/main"/>
-          <a:p xmlns:a="http://schemas.openxmlformats.org/drawingml/2006/main">
-            <a:r>
-              <a:rPr lang="en-US" sz="1650" b="1">
-                <a:solidFill>
-                  <a:srgbClr val="132A3A"/>
-                </a:solidFill>
-                <a:latin typeface="Inter"/>
-                <a:ea typeface="Inter"/>
-              </a:rPr>
-              <a:t>Boundary</a:t>
-            </a:r>
-            <a:endParaRPr lang="en-US"/>
-          </a:p>
-        </p:txBody>
-      </p:sp>
-      <p:sp>
-        <p:nvSpPr>
-          <p:cNvPr id="19" name="academic-text-2"/>
-          <p:cNvSpPr txBox="1"/>
-          <p:nvPr/>
-        </p:nvSpPr>
-        <p:spPr>
-          <a:xfrm xmlns:a="http://schemas.openxmlformats.org/drawingml/2006/main">
-            <a:off x="4095750" y="5143500"/>
-            <a:ext cx="5334000" cy="304800"/>
-          </a:xfrm>
-          <a:prstGeom xmlns:a="http://schemas.openxmlformats.org/drawingml/2006/main" prst="rect">
-            <a:avLst/>
-          </a:prstGeom>
-          <a:noFill xmlns:a="http://schemas.openxmlformats.org/drawingml/2006/main"/>
-          <a:ln xmlns:a="http://schemas.openxmlformats.org/drawingml/2006/main" w="0">
-            <a:noFill/>
-          </a:ln>
-        </p:spPr>
-        <p:txBody>
-          <a:bodyPr xmlns:a="http://schemas.openxmlformats.org/drawingml/2006/main" wrap="square" lIns="0" tIns="0" rIns="0" bIns="0" anchor="t"/>
-          <a:lstStyle xmlns:a="http://schemas.openxmlformats.org/drawingml/2006/main"/>
-          <a:p xmlns:a="http://schemas.openxmlformats.org/drawingml/2006/main">
-            <a:r>
-              <a:rPr lang="en-US" sz="1350">
-                <a:solidFill>
-                  <a:srgbClr val="132A3A"/>
-                </a:solidFill>
-                <a:latin typeface="Inter"/>
-                <a:ea typeface="Inter"/>
-              </a:rPr>
-              <a:t>The result applies to this window and sample.</a:t>
-            </a:r>
-            <a:endParaRPr lang="en-US"/>
-          </a:p>
-        </p:txBody>
-      </p:sp>
-      <p:sp>
-        <p:nvSpPr>
-          <p:cNvPr id="20" name="method-panel"/>
-          <p:cNvSpPr/>
-          <p:nvPr/>
-        </p:nvSpPr>
-        <p:spPr>
-          <a:xfrm xmlns:a="http://schemas.openxmlformats.org/drawingml/2006/main">
-            <a:off x="10287000" y="3238500"/>
-            <a:ext cx="3619500" cy="2381250"/>
-          </a:xfrm>
-          <a:prstGeom xmlns:a="http://schemas.openxmlformats.org/drawingml/2006/main" prst="rect">
-            <a:avLst/>
-          </a:prstGeom>
-          <a:solidFill xmlns:a="http://schemas.openxmlformats.org/drawingml/2006/main">
-            <a:srgbClr val="F3F5F8"/>
-          </a:solidFill>
-          <a:ln xmlns:a="http://schemas.openxmlformats.org/drawingml/2006/main" w="12700">
-            <a:solidFill>
-              <a:srgbClr val="8A969F"/>
-            </a:solidFill>
-            <a:prstDash val="solid"/>
-          </a:ln>
-        </p:spPr>
-        <p:txBody>
-          <a:bodyPr xmlns:a="http://schemas.openxmlformats.org/drawingml/2006/main" wrap="square" lIns="0" tIns="0" rIns="0" bIns="0" anchor="t"/>
-          <a:lstStyle xmlns:a="http://schemas.openxmlformats.org/drawingml/2006/main"/>
-          <a:p xmlns:a="http://schemas.openxmlformats.org/drawingml/2006/main">
-            <a:r>
-              <a:rPr lang="en-US"/>
-              <a:t/>
-            </a:r>
-            <a:endParaRPr lang="en-US"/>
-          </a:p>
-        </p:txBody>
-      </p:sp>
-      <p:sp>
-        <p:nvSpPr>
-          <p:cNvPr id="21" name="method-label"/>
-          <p:cNvSpPr txBox="1"/>
-          <p:nvPr/>
-        </p:nvSpPr>
-        <p:spPr>
-          <a:xfrm xmlns:a="http://schemas.openxmlformats.org/drawingml/2006/main">
-            <a:off x="10668000" y="3571875"/>
-            <a:ext cx="2762250" cy="228600"/>
-          </a:xfrm>
-          <a:prstGeom xmlns:a="http://schemas.openxmlformats.org/drawingml/2006/main" prst="rect">
-            <a:avLst/>
-          </a:prstGeom>
-          <a:noFill xmlns:a="http://schemas.openxmlformats.org/drawingml/2006/main"/>
-          <a:ln xmlns:a="http://schemas.openxmlformats.org/drawingml/2006/main" w="0">
-            <a:noFill/>
-          </a:ln>
-        </p:spPr>
-        <p:txBody>
-          <a:bodyPr xmlns:a="http://schemas.openxmlformats.org/drawingml/2006/main" wrap="square" lIns="0" tIns="0" rIns="0" bIns="0" anchor="t"/>
-          <a:lstStyle xmlns:a="http://schemas.openxmlformats.org/drawingml/2006/main"/>
-          <a:p xmlns:a="http://schemas.openxmlformats.org/drawingml/2006/main">
-            <a:r>
-              <a:rPr lang="en-US" sz="1125" b="1">
-                <a:solidFill>
-                  <a:srgbClr val="1769D2"/>
-                </a:solidFill>
-                <a:latin typeface="Inter"/>
-                <a:ea typeface="Inter"/>
-              </a:rPr>
-              <a:t>REGISTERED RULE</a:t>
-            </a:r>
-            <a:endParaRPr lang="en-US"/>
-          </a:p>
-        </p:txBody>
-      </p:sp>
-      <p:sp>
-        <p:nvSpPr>
-          <p:cNvPr id="22" name="method-value"/>
-          <p:cNvSpPr txBox="1"/>
-          <p:nvPr/>
-        </p:nvSpPr>
-        <p:spPr>
-          <a:xfrm xmlns:a="http://schemas.openxmlformats.org/drawingml/2006/main">
-            <a:off x="10668000" y="4048125"/>
-            <a:ext cx="2571750" cy="609600"/>
-          </a:xfrm>
-          <a:prstGeom xmlns:a="http://schemas.openxmlformats.org/drawingml/2006/main" prst="rect">
-            <a:avLst/>
-          </a:prstGeom>
-          <a:noFill xmlns:a="http://schemas.openxmlformats.org/drawingml/2006/main"/>
-          <a:ln xmlns:a="http://schemas.openxmlformats.org/drawingml/2006/main" w="0">
-            <a:noFill/>
-          </a:ln>
-        </p:spPr>
-        <p:txBody>
-          <a:bodyPr xmlns:a="http://schemas.openxmlformats.org/drawingml/2006/main" wrap="square" lIns="0" tIns="0" rIns="0" bIns="0" anchor="t"/>
-          <a:lstStyle xmlns:a="http://schemas.openxmlformats.org/drawingml/2006/main"/>
-          <a:p xmlns:a="http://schemas.openxmlformats.org/drawingml/2006/main">
-            <a:r>
-              <a:rPr lang="en-US" sz="3750" b="1">
-                <a:solidFill>
-                  <a:srgbClr val="1769D2"/>
-                </a:solidFill>
-                <a:latin typeface="Inter"/>
-                <a:ea typeface="Inter"/>
-              </a:rPr>
-              <a:t>≥ 2 pp</a:t>
-            </a:r>
-            <a:endParaRPr lang="en-US"/>
-          </a:p>
-        </p:txBody>
-      </p:sp>
-      <p:sp>
-        <p:nvSpPr>
-          <p:cNvPr id="23" name="method-foot"/>
-          <p:cNvSpPr txBox="1"/>
-          <p:nvPr/>
-        </p:nvSpPr>
-        <p:spPr>
-          <a:xfrm xmlns:a="http://schemas.openxmlformats.org/drawingml/2006/main">
-            <a:off x="10668000" y="4762500"/>
-            <a:ext cx="2762250" cy="228600"/>
-          </a:xfrm>
-          <a:prstGeom xmlns:a="http://schemas.openxmlformats.org/drawingml/2006/main" prst="rect">
-            <a:avLst/>
-          </a:prstGeom>
-          <a:noFill xmlns:a="http://schemas.openxmlformats.org/drawingml/2006/main"/>
-          <a:ln xmlns:a="http://schemas.openxmlformats.org/drawingml/2006/main" w="0">
-            <a:noFill/>
-          </a:ln>
-        </p:spPr>
-        <p:txBody>
-          <a:bodyPr xmlns:a="http://schemas.openxmlformats.org/drawingml/2006/main" wrap="square" lIns="0" tIns="0" rIns="0" bIns="0" anchor="t"/>
-          <a:lstStyle xmlns:a="http://schemas.openxmlformats.org/drawingml/2006/main"/>
-          <a:p xmlns:a="http://schemas.openxmlformats.org/drawingml/2006/main">
-            <a:r>
-              <a:rPr lang="en-US" sz="1200">
-                <a:solidFill>
-                  <a:srgbClr val="8A969F"/>
-                </a:solidFill>
-                <a:latin typeface="Inter"/>
-                <a:ea typeface="Inter"/>
-              </a:rPr>
-              <a:t>confidence interval excludes zero</a:t>
-            </a:r>
-            <a:endParaRPr lang="en-US"/>
-          </a:p>
-        </p:txBody>
-      </p:sp>
-      <p:sp>
-        <p:nvSpPr>
-          <p:cNvPr id="24" name="source"/>
-          <p:cNvSpPr txBox="1"/>
-          <p:nvPr/>
-        </p:nvSpPr>
-        <p:spPr>
-          <a:xfrm xmlns:a="http://schemas.openxmlformats.org/drawingml/2006/main">
-            <a:off x="914400" y="7810500"/>
-            <a:ext cx="10953750" cy="209550"/>
-          </a:xfrm>
-          <a:prstGeom xmlns:a="http://schemas.openxmlformats.org/drawingml/2006/main" prst="rect">
-            <a:avLst/>
-          </a:prstGeom>
-          <a:noFill xmlns:a="http://schemas.openxmlformats.org/drawingml/2006/main"/>
-          <a:ln xmlns:a="http://schemas.openxmlformats.org/drawingml/2006/main" w="0">
-            <a:noFill/>
-          </a:ln>
-        </p:spPr>
-        <p:txBody>
-          <a:bodyPr xmlns:a="http://schemas.openxmlformats.org/drawingml/2006/main" wrap="square" lIns="0" tIns="0" rIns="0" bIns="0" anchor="t"/>
-          <a:lstStyle xmlns:a="http://schemas.openxmlformats.org/drawingml/2006/main"/>
-          <a:p xmlns:a="http://schemas.openxmlformats.org/drawingml/2006/main">
-            <a:r>
-              <a:rPr lang="en-US" sz="1050">
-                <a:solidFill>
-                  <a:srgbClr val="8A969F"/>
-                </a:solidFill>
-                <a:latin typeface="Inter"/>
-                <a:ea typeface="Inter"/>
-              </a:rPr>
-              <a:t>Source: illustrative calibration brief · every claim is fictional and bounded</a:t>
-            </a:r>
-            <a:endParaRPr lang="en-US"/>
-          </a:p>
-        </p:txBody>
-      </p:sp>
-      <p:sp>
-        <p:nvSpPr>
-          <p:cNvPr id="25" name="page-number"/>
-          <p:cNvSpPr txBox="1"/>
-          <p:nvPr/>
-        </p:nvSpPr>
-        <p:spPr>
-          <a:xfrm xmlns:a="http://schemas.openxmlformats.org/drawingml/2006/main">
-            <a:off x="13335000" y="7810500"/>
-            <a:ext cx="952500" cy="209550"/>
-          </a:xfrm>
-          <a:prstGeom xmlns:a="http://schemas.openxmlformats.org/drawingml/2006/main" prst="rect">
-            <a:avLst/>
-          </a:prstGeom>
-          <a:noFill xmlns:a="http://schemas.openxmlformats.org/drawingml/2006/main"/>
-          <a:ln xmlns:a="http://schemas.openxmlformats.org/drawingml/2006/main" w="0">
-            <a:noFill/>
-          </a:ln>
-        </p:spPr>
-        <p:txBody>
-          <a:bodyPr xmlns:a="http://schemas.openxmlformats.org/drawingml/2006/main" wrap="square" lIns="0" tIns="0" rIns="0" bIns="0" anchor="t"/>
-          <a:lstStyle xmlns:a="http://schemas.openxmlformats.org/drawingml/2006/main"/>
-          <a:p xmlns:a="http://schemas.openxmlformats.org/drawingml/2006/main">
-            <a:pPr algn="r"/>
-            <a:r>
-              <a:rPr lang="en-US" sz="1050">
-                <a:solidFill>
-                  <a:srgbClr val="8A969F"/>
-                </a:solidFill>
-                <a:latin typeface="Inter"/>
-                <a:ea typeface="Inter"/>
-              </a:rPr>
-              <a:t>2 / 6</a:t>
-            </a:r>
-            <a:endParaRPr lang="en-US"/>
-          </a:p>
-        </p:txBody>
-      </p:sp>
-    </p:spTree>
-  </p:cSld>
-  <p:clrMapOvr>
-    <a:masterClrMapping xmlns:a="http://schemas.openxmlformats.org/drawingml/2006/main"/>
-  </p:clrMapOvr>
-</p:sld>
-</file>
-
-<file path=ppt/slides/slide3.xml><?xml version="1.0" encoding="utf-8"?>
-<p:sld xmlns:p="http://schemas.openxmlformats.org/presentationml/2006/main">
-  <p:cSld name="Evidence">
-    <p:bg>
-      <p:bgPr>
-        <a:blipFill xmlns:a="http://schemas.openxmlformats.org/drawingml/2006/main">
           <a:blip xmlns:r="http://schemas.openxmlformats.org/officeDocument/2006/relationships" r:embed="rIdOfficeKitImage45ba195e2a5649fb_1"/>
           <a:stretch>
             <a:fillRect/>
@@ -2103,7 +399,802 @@
       </p:grpSpPr>
       <p:sp>
         <p:nvSpPr>
-          <p:cNvPr id="2" name="evidence-paper-scrim"/>
+          <p:cNvPr id="2" name="cover-paper-scrim"/>
+          <p:cNvSpPr/>
+          <p:nvPr/>
+        </p:nvSpPr>
+        <p:spPr>
+          <a:xfrm xmlns:a="http://schemas.openxmlformats.org/drawingml/2006/main">
+            <a:off x="0" y="0"/>
+            <a:ext cx="9525000" cy="8572500"/>
+          </a:xfrm>
+          <a:prstGeom xmlns:a="http://schemas.openxmlformats.org/drawingml/2006/main" prst="rect">
+            <a:avLst/>
+          </a:prstGeom>
+          <a:solidFill xmlns:a="http://schemas.openxmlformats.org/drawingml/2006/main">
+            <a:srgbClr val="F8FAFC">
+              <a:alpha val="100000"/>
+            </a:srgbClr>
+          </a:solidFill>
+          <a:ln xmlns:a="http://schemas.openxmlformats.org/drawingml/2006/main" w="0">
+            <a:solidFill>
+              <a:srgbClr val="F8FAFC"/>
+            </a:solidFill>
+            <a:prstDash val="solid"/>
+          </a:ln>
+        </p:spPr>
+        <p:txBody>
+          <a:bodyPr xmlns:a="http://schemas.openxmlformats.org/drawingml/2006/main" wrap="square" lIns="0" tIns="0" rIns="0" bIns="0" anchor="t"/>
+          <a:lstStyle xmlns:a="http://schemas.openxmlformats.org/drawingml/2006/main"/>
+          <a:p xmlns:a="http://schemas.openxmlformats.org/drawingml/2006/main">
+            <a:r>
+              <a:rPr lang="en-US"/>
+              <a:t/>
+            </a:r>
+            <a:endParaRPr lang="en-US"/>
+          </a:p>
+        </p:txBody>
+      </p:sp>
+      <p:sp>
+        <p:nvSpPr>
+          <p:cNvPr id="3" name="top-rule"/>
+          <p:cNvSpPr/>
+          <p:nvPr/>
+        </p:nvSpPr>
+        <p:spPr>
+          <a:xfrm xmlns:a="http://schemas.openxmlformats.org/drawingml/2006/main">
+            <a:off x="838200" y="666750"/>
+            <a:ext cx="13563600" cy="0"/>
+          </a:xfrm>
+          <a:prstGeom xmlns:a="http://schemas.openxmlformats.org/drawingml/2006/main" prst="line">
+            <a:avLst/>
+          </a:prstGeom>
+          <a:noFill xmlns:a="http://schemas.openxmlformats.org/drawingml/2006/main"/>
+          <a:ln xmlns:a="http://schemas.openxmlformats.org/drawingml/2006/main" w="38100">
+            <a:solidFill>
+              <a:srgbClr val="1769D2"/>
+            </a:solidFill>
+            <a:prstDash val="solid"/>
+          </a:ln>
+        </p:spPr>
+        <p:txBody>
+          <a:bodyPr xmlns:a="http://schemas.openxmlformats.org/drawingml/2006/main" wrap="square" lIns="0" tIns="0" rIns="0" bIns="0" anchor="t"/>
+          <a:lstStyle xmlns:a="http://schemas.openxmlformats.org/drawingml/2006/main"/>
+          <a:p xmlns:a="http://schemas.openxmlformats.org/drawingml/2006/main">
+            <a:r>
+              <a:rPr lang="en-US"/>
+              <a:t/>
+            </a:r>
+            <a:endParaRPr lang="en-US"/>
+          </a:p>
+        </p:txBody>
+      </p:sp>
+      <p:sp>
+        <p:nvSpPr>
+          <p:cNvPr id="4" name="eyebrow"/>
+          <p:cNvSpPr txBox="1"/>
+          <p:nvPr/>
+        </p:nvSpPr>
+        <p:spPr>
+          <a:xfrm xmlns:a="http://schemas.openxmlformats.org/drawingml/2006/main">
+            <a:off x="914400" y="895350"/>
+            <a:ext cx="7239000" cy="228600"/>
+          </a:xfrm>
+          <a:prstGeom xmlns:a="http://schemas.openxmlformats.org/drawingml/2006/main" prst="rect">
+            <a:avLst/>
+          </a:prstGeom>
+          <a:noFill xmlns:a="http://schemas.openxmlformats.org/drawingml/2006/main"/>
+          <a:ln xmlns:a="http://schemas.openxmlformats.org/drawingml/2006/main" w="0">
+            <a:noFill/>
+          </a:ln>
+        </p:spPr>
+        <p:txBody>
+          <a:bodyPr xmlns:a="http://schemas.openxmlformats.org/drawingml/2006/main" wrap="square" lIns="0" tIns="0" rIns="0" bIns="0" anchor="t"/>
+          <a:lstStyle xmlns:a="http://schemas.openxmlformats.org/drawingml/2006/main"/>
+          <a:p xmlns:a="http://schemas.openxmlformats.org/drawingml/2006/main">
+            <a:r>
+              <a:rPr lang="en-US" sz="1200" b="1">
+                <a:solidFill>
+                  <a:srgbClr val="1769D2"/>
+                </a:solidFill>
+                <a:latin typeface="Inter"/>
+                <a:ea typeface="Inter"/>
+              </a:rPr>
+              <a:t>ACADEMIC · OFFICEKIT CALIBRATION</a:t>
+            </a:r>
+            <a:endParaRPr lang="en-US"/>
+          </a:p>
+        </p:txBody>
+      </p:sp>
+      <p:sp>
+        <p:nvSpPr>
+          <p:cNvPr id="5" name="cover-title"/>
+          <p:cNvSpPr txBox="1"/>
+          <p:nvPr/>
+        </p:nvSpPr>
+        <p:spPr>
+          <a:xfrm xmlns:a="http://schemas.openxmlformats.org/drawingml/2006/main">
+            <a:off x="914400" y="1571625"/>
+            <a:ext cx="8382000" cy="1066800"/>
+          </a:xfrm>
+          <a:prstGeom xmlns:a="http://schemas.openxmlformats.org/drawingml/2006/main" prst="rect">
+            <a:avLst/>
+          </a:prstGeom>
+          <a:noFill xmlns:a="http://schemas.openxmlformats.org/drawingml/2006/main"/>
+          <a:ln xmlns:a="http://schemas.openxmlformats.org/drawingml/2006/main" w="0">
+            <a:noFill/>
+          </a:ln>
+        </p:spPr>
+        <p:txBody>
+          <a:bodyPr xmlns:a="http://schemas.openxmlformats.org/drawingml/2006/main" wrap="square" lIns="0" tIns="0" rIns="0" bIns="0" anchor="t"/>
+          <a:lstStyle xmlns:a="http://schemas.openxmlformats.org/drawingml/2006/main"/>
+          <a:p xmlns:a="http://schemas.openxmlformats.org/drawingml/2006/main">
+            <a:r>
+              <a:rPr lang="en-US" sz="3600" b="1">
+                <a:solidFill>
+                  <a:srgbClr val="132A3A"/>
+                </a:solidFill>
+                <a:latin typeface="Inter"/>
+                <a:ea typeface="Inter"/>
+              </a:rPr>
+              <a:t>Blueprint Lecture: a claim worth testing</a:t>
+            </a:r>
+            <a:endParaRPr lang="en-US"/>
+          </a:p>
+        </p:txBody>
+      </p:sp>
+      <p:sp>
+        <p:nvSpPr>
+          <p:cNvPr id="6" name="cover-subtitle"/>
+          <p:cNvSpPr txBox="1"/>
+          <p:nvPr/>
+        </p:nvSpPr>
+        <p:spPr>
+          <a:xfrm xmlns:a="http://schemas.openxmlformats.org/drawingml/2006/main">
+            <a:off x="952500" y="2857500"/>
+            <a:ext cx="6858000" cy="323850"/>
+          </a:xfrm>
+          <a:prstGeom xmlns:a="http://schemas.openxmlformats.org/drawingml/2006/main" prst="rect">
+            <a:avLst/>
+          </a:prstGeom>
+          <a:noFill xmlns:a="http://schemas.openxmlformats.org/drawingml/2006/main"/>
+          <a:ln xmlns:a="http://schemas.openxmlformats.org/drawingml/2006/main" w="0">
+            <a:noFill/>
+          </a:ln>
+        </p:spPr>
+        <p:txBody>
+          <a:bodyPr xmlns:a="http://schemas.openxmlformats.org/drawingml/2006/main" wrap="square" lIns="0" tIns="0" rIns="0" bIns="0" anchor="t"/>
+          <a:lstStyle xmlns:a="http://schemas.openxmlformats.org/drawingml/2006/main"/>
+          <a:p xmlns:a="http://schemas.openxmlformats.org/drawingml/2006/main">
+            <a:r>
+              <a:rPr lang="en-US" sz="1725">
+                <a:solidFill>
+                  <a:srgbClr val="1769D2"/>
+                </a:solidFill>
+                <a:latin typeface="Inter"/>
+                <a:ea typeface="Inter"/>
+              </a:rPr>
+              <a:t>A clean-room reference for evidence, direction, and a decision.</a:t>
+            </a:r>
+            <a:endParaRPr lang="en-US"/>
+          </a:p>
+        </p:txBody>
+      </p:sp>
+      <p:sp>
+        <p:nvSpPr>
+          <p:cNvPr id="7" name="cover-rule"/>
+          <p:cNvSpPr/>
+          <p:nvPr/>
+        </p:nvSpPr>
+        <p:spPr>
+          <a:xfrm xmlns:a="http://schemas.openxmlformats.org/drawingml/2006/main">
+            <a:off x="914400" y="3524250"/>
+            <a:ext cx="7658100" cy="0"/>
+          </a:xfrm>
+          <a:prstGeom xmlns:a="http://schemas.openxmlformats.org/drawingml/2006/main" prst="line">
+            <a:avLst/>
+          </a:prstGeom>
+          <a:noFill xmlns:a="http://schemas.openxmlformats.org/drawingml/2006/main"/>
+          <a:ln xmlns:a="http://schemas.openxmlformats.org/drawingml/2006/main" w="25400">
+            <a:solidFill>
+              <a:srgbClr val="8A969F"/>
+            </a:solidFill>
+            <a:prstDash val="solid"/>
+          </a:ln>
+        </p:spPr>
+        <p:txBody>
+          <a:bodyPr xmlns:a="http://schemas.openxmlformats.org/drawingml/2006/main" wrap="square" lIns="0" tIns="0" rIns="0" bIns="0" anchor="t"/>
+          <a:lstStyle xmlns:a="http://schemas.openxmlformats.org/drawingml/2006/main"/>
+          <a:p xmlns:a="http://schemas.openxmlformats.org/drawingml/2006/main">
+            <a:r>
+              <a:rPr lang="en-US"/>
+              <a:t/>
+            </a:r>
+            <a:endParaRPr lang="en-US"/>
+          </a:p>
+        </p:txBody>
+      </p:sp>
+      <p:sp>
+        <p:nvSpPr>
+          <p:cNvPr id="8" name="cover-basis"/>
+          <p:cNvSpPr txBox="1"/>
+          <p:nvPr/>
+        </p:nvSpPr>
+        <p:spPr>
+          <a:xfrm xmlns:a="http://schemas.openxmlformats.org/drawingml/2006/main">
+            <a:off x="952500" y="3762375"/>
+            <a:ext cx="7810500" cy="266700"/>
+          </a:xfrm>
+          <a:prstGeom xmlns:a="http://schemas.openxmlformats.org/drawingml/2006/main" prst="rect">
+            <a:avLst/>
+          </a:prstGeom>
+          <a:noFill xmlns:a="http://schemas.openxmlformats.org/drawingml/2006/main"/>
+          <a:ln xmlns:a="http://schemas.openxmlformats.org/drawingml/2006/main" w="0">
+            <a:noFill/>
+          </a:ln>
+        </p:spPr>
+        <p:txBody>
+          <a:bodyPr xmlns:a="http://schemas.openxmlformats.org/drawingml/2006/main" wrap="square" lIns="0" tIns="0" rIns="0" bIns="0" anchor="t"/>
+          <a:lstStyle xmlns:a="http://schemas.openxmlformats.org/drawingml/2006/main"/>
+          <a:p xmlns:a="http://schemas.openxmlformats.org/drawingml/2006/main">
+            <a:r>
+              <a:rPr lang="en-US" sz="1350">
+                <a:solidFill>
+                  <a:srgbClr val="132A3A"/>
+                </a:solidFill>
+                <a:latin typeface="Inter"/>
+                <a:ea typeface="Inter"/>
+              </a:rPr>
+              <a:t>One visual language · four page roles · native editable objects</a:t>
+            </a:r>
+            <a:endParaRPr lang="en-US"/>
+          </a:p>
+        </p:txBody>
+      </p:sp>
+      <p:sp>
+        <p:nvSpPr>
+          <p:cNvPr id="9" name="cover-thesis"/>
+          <p:cNvSpPr txBox="1"/>
+          <p:nvPr/>
+        </p:nvSpPr>
+        <p:spPr>
+          <a:xfrm xmlns:a="http://schemas.openxmlformats.org/drawingml/2006/main">
+            <a:off x="952500" y="4810125"/>
+            <a:ext cx="6667500" cy="628650"/>
+          </a:xfrm>
+          <a:prstGeom xmlns:a="http://schemas.openxmlformats.org/drawingml/2006/main" prst="rect">
+            <a:avLst/>
+          </a:prstGeom>
+          <a:noFill xmlns:a="http://schemas.openxmlformats.org/drawingml/2006/main"/>
+          <a:ln xmlns:a="http://schemas.openxmlformats.org/drawingml/2006/main" w="0">
+            <a:noFill/>
+          </a:ln>
+        </p:spPr>
+        <p:txBody>
+          <a:bodyPr xmlns:a="http://schemas.openxmlformats.org/drawingml/2006/main" wrap="square" lIns="0" tIns="0" rIns="0" bIns="0" anchor="t"/>
+          <a:lstStyle xmlns:a="http://schemas.openxmlformats.org/drawingml/2006/main"/>
+          <a:p xmlns:a="http://schemas.openxmlformats.org/drawingml/2006/main">
+            <a:r>
+              <a:rPr lang="en-US" sz="1875" b="1">
+                <a:solidFill>
+                  <a:srgbClr val="132A3A"/>
+                </a:solidFill>
+                <a:latin typeface="Inter"/>
+                <a:ea typeface="Inter"/>
+              </a:rPr>
+              <a:t>A falsifiable claim is a design decision.</a:t>
+            </a:r>
+            <a:endParaRPr lang="en-US"/>
+          </a:p>
+        </p:txBody>
+      </p:sp>
+      <p:sp>
+        <p:nvSpPr>
+          <p:cNvPr id="10" name="cover-source"/>
+          <p:cNvSpPr txBox="1"/>
+          <p:nvPr/>
+        </p:nvSpPr>
+        <p:spPr>
+          <a:xfrm xmlns:a="http://schemas.openxmlformats.org/drawingml/2006/main">
+            <a:off x="952500" y="7315200"/>
+            <a:ext cx="9048750" cy="228600"/>
+          </a:xfrm>
+          <a:prstGeom xmlns:a="http://schemas.openxmlformats.org/drawingml/2006/main" prst="rect">
+            <a:avLst/>
+          </a:prstGeom>
+          <a:noFill xmlns:a="http://schemas.openxmlformats.org/drawingml/2006/main"/>
+          <a:ln xmlns:a="http://schemas.openxmlformats.org/drawingml/2006/main" w="0">
+            <a:noFill/>
+          </a:ln>
+        </p:spPr>
+        <p:txBody>
+          <a:bodyPr xmlns:a="http://schemas.openxmlformats.org/drawingml/2006/main" wrap="square" lIns="0" tIns="0" rIns="0" bIns="0" anchor="t"/>
+          <a:lstStyle xmlns:a="http://schemas.openxmlformats.org/drawingml/2006/main"/>
+          <a:p xmlns:a="http://schemas.openxmlformats.org/drawingml/2006/main">
+            <a:r>
+              <a:rPr lang="en-US" sz="1050">
+                <a:solidFill>
+                  <a:srgbClr val="8A969F"/>
+                </a:solidFill>
+                <a:latin typeface="Inter"/>
+                <a:ea typeface="Inter"/>
+              </a:rPr>
+              <a:t>OfficeKit original clean-room calibration · fictional content · 2026-08-29</a:t>
+            </a:r>
+            <a:endParaRPr lang="en-US"/>
+          </a:p>
+        </p:txBody>
+      </p:sp>
+      <p:sp>
+        <p:nvSpPr>
+          <p:cNvPr id="11" name="page-number"/>
+          <p:cNvSpPr txBox="1"/>
+          <p:nvPr/>
+        </p:nvSpPr>
+        <p:spPr>
+          <a:xfrm xmlns:a="http://schemas.openxmlformats.org/drawingml/2006/main">
+            <a:off x="13335000" y="7810500"/>
+            <a:ext cx="952500" cy="209550"/>
+          </a:xfrm>
+          <a:prstGeom xmlns:a="http://schemas.openxmlformats.org/drawingml/2006/main" prst="rect">
+            <a:avLst/>
+          </a:prstGeom>
+          <a:noFill xmlns:a="http://schemas.openxmlformats.org/drawingml/2006/main"/>
+          <a:ln xmlns:a="http://schemas.openxmlformats.org/drawingml/2006/main" w="0">
+            <a:noFill/>
+          </a:ln>
+        </p:spPr>
+        <p:txBody>
+          <a:bodyPr xmlns:a="http://schemas.openxmlformats.org/drawingml/2006/main" wrap="square" lIns="0" tIns="0" rIns="0" bIns="0" anchor="t"/>
+          <a:lstStyle xmlns:a="http://schemas.openxmlformats.org/drawingml/2006/main"/>
+          <a:p xmlns:a="http://schemas.openxmlformats.org/drawingml/2006/main">
+            <a:pPr algn="r"/>
+            <a:r>
+              <a:rPr lang="en-US" sz="1050">
+                <a:solidFill>
+                  <a:srgbClr val="8A969F"/>
+                </a:solidFill>
+                <a:latin typeface="Inter"/>
+                <a:ea typeface="Inter"/>
+              </a:rPr>
+              <a:t>1 / 6</a:t>
+            </a:r>
+            <a:endParaRPr lang="en-US"/>
+          </a:p>
+        </p:txBody>
+      </p:sp>
+      <p:sp>
+        <p:nvSpPr>
+          <p:cNvPr id="12" name="anchor-field"/>
+          <p:cNvSpPr/>
+          <p:nvPr/>
+        </p:nvSpPr>
+        <p:spPr>
+          <a:xfrm xmlns:a="http://schemas.openxmlformats.org/drawingml/2006/main">
+            <a:off x="11620500" y="1790700"/>
+            <a:ext cx="2095500" cy="2286000"/>
+          </a:xfrm>
+          <a:prstGeom xmlns:a="http://schemas.openxmlformats.org/drawingml/2006/main" prst="rect">
+            <a:avLst/>
+          </a:prstGeom>
+          <a:solidFill xmlns:a="http://schemas.openxmlformats.org/drawingml/2006/main">
+            <a:srgbClr val="F3F5F8"/>
+          </a:solidFill>
+          <a:ln xmlns:a="http://schemas.openxmlformats.org/drawingml/2006/main" w="25400">
+            <a:solidFill>
+              <a:srgbClr val="1769D2"/>
+            </a:solidFill>
+            <a:prstDash val="solid"/>
+          </a:ln>
+        </p:spPr>
+        <p:txBody>
+          <a:bodyPr xmlns:a="http://schemas.openxmlformats.org/drawingml/2006/main" wrap="square" lIns="0" tIns="0" rIns="0" bIns="0" anchor="t"/>
+          <a:lstStyle xmlns:a="http://schemas.openxmlformats.org/drawingml/2006/main"/>
+          <a:p xmlns:a="http://schemas.openxmlformats.org/drawingml/2006/main">
+            <a:r>
+              <a:rPr lang="en-US"/>
+              <a:t/>
+            </a:r>
+            <a:endParaRPr lang="en-US"/>
+          </a:p>
+        </p:txBody>
+      </p:sp>
+      <p:sp>
+        <p:nvSpPr>
+          <p:cNvPr id="13" name="anchor-grid-0-0"/>
+          <p:cNvSpPr/>
+          <p:nvPr/>
+        </p:nvSpPr>
+        <p:spPr>
+          <a:xfrm xmlns:a="http://schemas.openxmlformats.org/drawingml/2006/main">
+            <a:off x="11925300" y="2152650"/>
+            <a:ext cx="266700" cy="285750"/>
+          </a:xfrm>
+          <a:prstGeom xmlns:a="http://schemas.openxmlformats.org/drawingml/2006/main" prst="rect">
+            <a:avLst/>
+          </a:prstGeom>
+          <a:solidFill xmlns:a="http://schemas.openxmlformats.org/drawingml/2006/main">
+            <a:srgbClr val="1769D2"/>
+          </a:solidFill>
+          <a:ln xmlns:a="http://schemas.openxmlformats.org/drawingml/2006/main" w="12700">
+            <a:solidFill>
+              <a:srgbClr val="1769D2"/>
+            </a:solidFill>
+            <a:prstDash val="solid"/>
+          </a:ln>
+        </p:spPr>
+        <p:txBody>
+          <a:bodyPr xmlns:a="http://schemas.openxmlformats.org/drawingml/2006/main" wrap="square" lIns="0" tIns="0" rIns="0" bIns="0" anchor="t"/>
+          <a:lstStyle xmlns:a="http://schemas.openxmlformats.org/drawingml/2006/main"/>
+          <a:p xmlns:a="http://schemas.openxmlformats.org/drawingml/2006/main">
+            <a:r>
+              <a:rPr lang="en-US"/>
+              <a:t/>
+            </a:r>
+            <a:endParaRPr lang="en-US"/>
+          </a:p>
+        </p:txBody>
+      </p:sp>
+      <p:sp>
+        <p:nvSpPr>
+          <p:cNvPr id="14" name="anchor-grid-0-1"/>
+          <p:cNvSpPr/>
+          <p:nvPr/>
+        </p:nvSpPr>
+        <p:spPr>
+          <a:xfrm xmlns:a="http://schemas.openxmlformats.org/drawingml/2006/main">
+            <a:off x="12420600" y="2152650"/>
+            <a:ext cx="266700" cy="285750"/>
+          </a:xfrm>
+          <a:prstGeom xmlns:a="http://schemas.openxmlformats.org/drawingml/2006/main" prst="rect">
+            <a:avLst/>
+          </a:prstGeom>
+          <a:solidFill xmlns:a="http://schemas.openxmlformats.org/drawingml/2006/main">
+            <a:srgbClr val="1769D2"/>
+          </a:solidFill>
+          <a:ln xmlns:a="http://schemas.openxmlformats.org/drawingml/2006/main" w="12700">
+            <a:solidFill>
+              <a:srgbClr val="1769D2"/>
+            </a:solidFill>
+            <a:prstDash val="solid"/>
+          </a:ln>
+        </p:spPr>
+        <p:txBody>
+          <a:bodyPr xmlns:a="http://schemas.openxmlformats.org/drawingml/2006/main" wrap="square" lIns="0" tIns="0" rIns="0" bIns="0" anchor="t"/>
+          <a:lstStyle xmlns:a="http://schemas.openxmlformats.org/drawingml/2006/main"/>
+          <a:p xmlns:a="http://schemas.openxmlformats.org/drawingml/2006/main">
+            <a:r>
+              <a:rPr lang="en-US"/>
+              <a:t/>
+            </a:r>
+            <a:endParaRPr lang="en-US"/>
+          </a:p>
+        </p:txBody>
+      </p:sp>
+      <p:sp>
+        <p:nvSpPr>
+          <p:cNvPr id="15" name="anchor-grid-0-2"/>
+          <p:cNvSpPr/>
+          <p:nvPr/>
+        </p:nvSpPr>
+        <p:spPr>
+          <a:xfrm xmlns:a="http://schemas.openxmlformats.org/drawingml/2006/main">
+            <a:off x="12915900" y="2152650"/>
+            <a:ext cx="266700" cy="285750"/>
+          </a:xfrm>
+          <a:prstGeom xmlns:a="http://schemas.openxmlformats.org/drawingml/2006/main" prst="rect">
+            <a:avLst/>
+          </a:prstGeom>
+          <a:solidFill xmlns:a="http://schemas.openxmlformats.org/drawingml/2006/main">
+            <a:srgbClr val="F8FAFC"/>
+          </a:solidFill>
+          <a:ln xmlns:a="http://schemas.openxmlformats.org/drawingml/2006/main" w="12700">
+            <a:solidFill>
+              <a:srgbClr val="1769D2"/>
+            </a:solidFill>
+            <a:prstDash val="solid"/>
+          </a:ln>
+        </p:spPr>
+        <p:txBody>
+          <a:bodyPr xmlns:a="http://schemas.openxmlformats.org/drawingml/2006/main" wrap="square" lIns="0" tIns="0" rIns="0" bIns="0" anchor="t"/>
+          <a:lstStyle xmlns:a="http://schemas.openxmlformats.org/drawingml/2006/main"/>
+          <a:p xmlns:a="http://schemas.openxmlformats.org/drawingml/2006/main">
+            <a:r>
+              <a:rPr lang="en-US"/>
+              <a:t/>
+            </a:r>
+            <a:endParaRPr lang="en-US"/>
+          </a:p>
+        </p:txBody>
+      </p:sp>
+      <p:sp>
+        <p:nvSpPr>
+          <p:cNvPr id="16" name="anchor-grid-1-0"/>
+          <p:cNvSpPr/>
+          <p:nvPr/>
+        </p:nvSpPr>
+        <p:spPr>
+          <a:xfrm xmlns:a="http://schemas.openxmlformats.org/drawingml/2006/main">
+            <a:off x="11925300" y="2686050"/>
+            <a:ext cx="266700" cy="285750"/>
+          </a:xfrm>
+          <a:prstGeom xmlns:a="http://schemas.openxmlformats.org/drawingml/2006/main" prst="rect">
+            <a:avLst/>
+          </a:prstGeom>
+          <a:solidFill xmlns:a="http://schemas.openxmlformats.org/drawingml/2006/main">
+            <a:srgbClr val="1769D2"/>
+          </a:solidFill>
+          <a:ln xmlns:a="http://schemas.openxmlformats.org/drawingml/2006/main" w="12700">
+            <a:solidFill>
+              <a:srgbClr val="1769D2"/>
+            </a:solidFill>
+            <a:prstDash val="solid"/>
+          </a:ln>
+        </p:spPr>
+        <p:txBody>
+          <a:bodyPr xmlns:a="http://schemas.openxmlformats.org/drawingml/2006/main" wrap="square" lIns="0" tIns="0" rIns="0" bIns="0" anchor="t"/>
+          <a:lstStyle xmlns:a="http://schemas.openxmlformats.org/drawingml/2006/main"/>
+          <a:p xmlns:a="http://schemas.openxmlformats.org/drawingml/2006/main">
+            <a:r>
+              <a:rPr lang="en-US"/>
+              <a:t/>
+            </a:r>
+            <a:endParaRPr lang="en-US"/>
+          </a:p>
+        </p:txBody>
+      </p:sp>
+      <p:sp>
+        <p:nvSpPr>
+          <p:cNvPr id="17" name="anchor-grid-1-1"/>
+          <p:cNvSpPr/>
+          <p:nvPr/>
+        </p:nvSpPr>
+        <p:spPr>
+          <a:xfrm xmlns:a="http://schemas.openxmlformats.org/drawingml/2006/main">
+            <a:off x="12420600" y="2686050"/>
+            <a:ext cx="266700" cy="285750"/>
+          </a:xfrm>
+          <a:prstGeom xmlns:a="http://schemas.openxmlformats.org/drawingml/2006/main" prst="rect">
+            <a:avLst/>
+          </a:prstGeom>
+          <a:solidFill xmlns:a="http://schemas.openxmlformats.org/drawingml/2006/main">
+            <a:srgbClr val="1769D2"/>
+          </a:solidFill>
+          <a:ln xmlns:a="http://schemas.openxmlformats.org/drawingml/2006/main" w="12700">
+            <a:solidFill>
+              <a:srgbClr val="1769D2"/>
+            </a:solidFill>
+            <a:prstDash val="solid"/>
+          </a:ln>
+        </p:spPr>
+        <p:txBody>
+          <a:bodyPr xmlns:a="http://schemas.openxmlformats.org/drawingml/2006/main" wrap="square" lIns="0" tIns="0" rIns="0" bIns="0" anchor="t"/>
+          <a:lstStyle xmlns:a="http://schemas.openxmlformats.org/drawingml/2006/main"/>
+          <a:p xmlns:a="http://schemas.openxmlformats.org/drawingml/2006/main">
+            <a:r>
+              <a:rPr lang="en-US"/>
+              <a:t/>
+            </a:r>
+            <a:endParaRPr lang="en-US"/>
+          </a:p>
+        </p:txBody>
+      </p:sp>
+      <p:sp>
+        <p:nvSpPr>
+          <p:cNvPr id="18" name="anchor-grid-1-2"/>
+          <p:cNvSpPr/>
+          <p:nvPr/>
+        </p:nvSpPr>
+        <p:spPr>
+          <a:xfrm xmlns:a="http://schemas.openxmlformats.org/drawingml/2006/main">
+            <a:off x="12915900" y="2686050"/>
+            <a:ext cx="266700" cy="285750"/>
+          </a:xfrm>
+          <a:prstGeom xmlns:a="http://schemas.openxmlformats.org/drawingml/2006/main" prst="rect">
+            <a:avLst/>
+          </a:prstGeom>
+          <a:solidFill xmlns:a="http://schemas.openxmlformats.org/drawingml/2006/main">
+            <a:srgbClr val="F8FAFC"/>
+          </a:solidFill>
+          <a:ln xmlns:a="http://schemas.openxmlformats.org/drawingml/2006/main" w="12700">
+            <a:solidFill>
+              <a:srgbClr val="1769D2"/>
+            </a:solidFill>
+            <a:prstDash val="solid"/>
+          </a:ln>
+        </p:spPr>
+        <p:txBody>
+          <a:bodyPr xmlns:a="http://schemas.openxmlformats.org/drawingml/2006/main" wrap="square" lIns="0" tIns="0" rIns="0" bIns="0" anchor="t"/>
+          <a:lstStyle xmlns:a="http://schemas.openxmlformats.org/drawingml/2006/main"/>
+          <a:p xmlns:a="http://schemas.openxmlformats.org/drawingml/2006/main">
+            <a:r>
+              <a:rPr lang="en-US"/>
+              <a:t/>
+            </a:r>
+            <a:endParaRPr lang="en-US"/>
+          </a:p>
+        </p:txBody>
+      </p:sp>
+      <p:sp>
+        <p:nvSpPr>
+          <p:cNvPr id="19" name="anchor-grid-2-0"/>
+          <p:cNvSpPr/>
+          <p:nvPr/>
+        </p:nvSpPr>
+        <p:spPr>
+          <a:xfrm xmlns:a="http://schemas.openxmlformats.org/drawingml/2006/main">
+            <a:off x="11925300" y="3219450"/>
+            <a:ext cx="266700" cy="285750"/>
+          </a:xfrm>
+          <a:prstGeom xmlns:a="http://schemas.openxmlformats.org/drawingml/2006/main" prst="rect">
+            <a:avLst/>
+          </a:prstGeom>
+          <a:solidFill xmlns:a="http://schemas.openxmlformats.org/drawingml/2006/main">
+            <a:srgbClr val="1769D2"/>
+          </a:solidFill>
+          <a:ln xmlns:a="http://schemas.openxmlformats.org/drawingml/2006/main" w="12700">
+            <a:solidFill>
+              <a:srgbClr val="1769D2"/>
+            </a:solidFill>
+            <a:prstDash val="solid"/>
+          </a:ln>
+        </p:spPr>
+        <p:txBody>
+          <a:bodyPr xmlns:a="http://schemas.openxmlformats.org/drawingml/2006/main" wrap="square" lIns="0" tIns="0" rIns="0" bIns="0" anchor="t"/>
+          <a:lstStyle xmlns:a="http://schemas.openxmlformats.org/drawingml/2006/main"/>
+          <a:p xmlns:a="http://schemas.openxmlformats.org/drawingml/2006/main">
+            <a:r>
+              <a:rPr lang="en-US"/>
+              <a:t/>
+            </a:r>
+            <a:endParaRPr lang="en-US"/>
+          </a:p>
+        </p:txBody>
+      </p:sp>
+      <p:sp>
+        <p:nvSpPr>
+          <p:cNvPr id="20" name="anchor-grid-2-1"/>
+          <p:cNvSpPr/>
+          <p:nvPr/>
+        </p:nvSpPr>
+        <p:spPr>
+          <a:xfrm xmlns:a="http://schemas.openxmlformats.org/drawingml/2006/main">
+            <a:off x="12420600" y="3219450"/>
+            <a:ext cx="266700" cy="285750"/>
+          </a:xfrm>
+          <a:prstGeom xmlns:a="http://schemas.openxmlformats.org/drawingml/2006/main" prst="rect">
+            <a:avLst/>
+          </a:prstGeom>
+          <a:solidFill xmlns:a="http://schemas.openxmlformats.org/drawingml/2006/main">
+            <a:srgbClr val="1769D2"/>
+          </a:solidFill>
+          <a:ln xmlns:a="http://schemas.openxmlformats.org/drawingml/2006/main" w="12700">
+            <a:solidFill>
+              <a:srgbClr val="1769D2"/>
+            </a:solidFill>
+            <a:prstDash val="solid"/>
+          </a:ln>
+        </p:spPr>
+        <p:txBody>
+          <a:bodyPr xmlns:a="http://schemas.openxmlformats.org/drawingml/2006/main" wrap="square" lIns="0" tIns="0" rIns="0" bIns="0" anchor="t"/>
+          <a:lstStyle xmlns:a="http://schemas.openxmlformats.org/drawingml/2006/main"/>
+          <a:p xmlns:a="http://schemas.openxmlformats.org/drawingml/2006/main">
+            <a:r>
+              <a:rPr lang="en-US"/>
+              <a:t/>
+            </a:r>
+            <a:endParaRPr lang="en-US"/>
+          </a:p>
+        </p:txBody>
+      </p:sp>
+      <p:sp>
+        <p:nvSpPr>
+          <p:cNvPr id="21" name="anchor-grid-2-2"/>
+          <p:cNvSpPr/>
+          <p:nvPr/>
+        </p:nvSpPr>
+        <p:spPr>
+          <a:xfrm xmlns:a="http://schemas.openxmlformats.org/drawingml/2006/main">
+            <a:off x="12915900" y="3219450"/>
+            <a:ext cx="266700" cy="285750"/>
+          </a:xfrm>
+          <a:prstGeom xmlns:a="http://schemas.openxmlformats.org/drawingml/2006/main" prst="rect">
+            <a:avLst/>
+          </a:prstGeom>
+          <a:solidFill xmlns:a="http://schemas.openxmlformats.org/drawingml/2006/main">
+            <a:srgbClr val="F8FAFC"/>
+          </a:solidFill>
+          <a:ln xmlns:a="http://schemas.openxmlformats.org/drawingml/2006/main" w="12700">
+            <a:solidFill>
+              <a:srgbClr val="1769D2"/>
+            </a:solidFill>
+            <a:prstDash val="solid"/>
+          </a:ln>
+        </p:spPr>
+        <p:txBody>
+          <a:bodyPr xmlns:a="http://schemas.openxmlformats.org/drawingml/2006/main" wrap="square" lIns="0" tIns="0" rIns="0" bIns="0" anchor="t"/>
+          <a:lstStyle xmlns:a="http://schemas.openxmlformats.org/drawingml/2006/main"/>
+          <a:p xmlns:a="http://schemas.openxmlformats.org/drawingml/2006/main">
+            <a:r>
+              <a:rPr lang="en-US"/>
+              <a:t/>
+            </a:r>
+            <a:endParaRPr lang="en-US"/>
+          </a:p>
+        </p:txBody>
+      </p:sp>
+      <p:sp>
+        <p:nvSpPr>
+          <p:cNvPr id="22" name="anchor-axis"/>
+          <p:cNvSpPr/>
+          <p:nvPr/>
+        </p:nvSpPr>
+        <p:spPr>
+          <a:xfrm xmlns:a="http://schemas.openxmlformats.org/drawingml/2006/main">
+            <a:off x="12668250" y="1638300"/>
+            <a:ext cx="0" cy="2743200"/>
+          </a:xfrm>
+          <a:prstGeom xmlns:a="http://schemas.openxmlformats.org/drawingml/2006/main" prst="line">
+            <a:avLst/>
+          </a:prstGeom>
+          <a:noFill xmlns:a="http://schemas.openxmlformats.org/drawingml/2006/main"/>
+          <a:ln xmlns:a="http://schemas.openxmlformats.org/drawingml/2006/main" w="50800">
+            <a:solidFill>
+              <a:srgbClr val="132A3A"/>
+            </a:solidFill>
+            <a:prstDash val="solid"/>
+          </a:ln>
+        </p:spPr>
+        <p:txBody>
+          <a:bodyPr xmlns:a="http://schemas.openxmlformats.org/drawingml/2006/main" wrap="square" lIns="0" tIns="0" rIns="0" bIns="0" anchor="t"/>
+          <a:lstStyle xmlns:a="http://schemas.openxmlformats.org/drawingml/2006/main"/>
+          <a:p xmlns:a="http://schemas.openxmlformats.org/drawingml/2006/main">
+            <a:r>
+              <a:rPr lang="en-US"/>
+              <a:t/>
+            </a:r>
+            <a:endParaRPr lang="en-US"/>
+          </a:p>
+        </p:txBody>
+      </p:sp>
+    </p:spTree>
+  </p:cSld>
+  <p:clrMapOvr>
+    <a:masterClrMapping xmlns:a="http://schemas.openxmlformats.org/drawingml/2006/main"/>
+  </p:clrMapOvr>
+</p:sld>
+</file>
+
+<file path=ppt/slides/slide2.xml><?xml version="1.0" encoding="utf-8"?>
+<p:sld xmlns:p="http://schemas.openxmlformats.org/presentationml/2006/main">
+  <p:cSld name="Argument">
+    <p:bg>
+      <p:bgPr>
+        <a:blipFill xmlns:a="http://schemas.openxmlformats.org/drawingml/2006/main">
+          <a:blip xmlns:r="http://schemas.openxmlformats.org/officeDocument/2006/relationships" r:embed="rIdOfficeKitImageaeb6f74d36d260d0_1"/>
+          <a:stretch>
+            <a:fillRect/>
+          </a:stretch>
+        </a:blipFill>
+      </p:bgPr>
+    </p:bg>
+    <p:spTree>
+      <p:nvGrpSpPr>
+        <p:cNvPr id="1" name=""/>
+        <p:cNvGrpSpPr/>
+        <p:nvPr/>
+      </p:nvGrpSpPr>
+      <p:grpSpPr>
+        <a:xfrm xmlns:a="http://schemas.openxmlformats.org/drawingml/2006/main">
+          <a:off x="0" y="0"/>
+          <a:ext cx="0" cy="0"/>
+          <a:chOff x="0" y="0"/>
+          <a:chExt cx="0" cy="0"/>
+        </a:xfrm>
+      </p:grpSpPr>
+      <p:sp>
+        <p:nvSpPr>
+          <p:cNvPr id="2" name="argument-paper-scrim"/>
           <p:cNvSpPr/>
           <p:nvPr/>
         </p:nvSpPr>
@@ -2141,7 +1232,7 @@
       </p:sp>
       <p:sp>
         <p:nvSpPr>
-          <p:cNvPr id="3" name="evidence-top-rule"/>
+          <p:cNvPr id="3" name="argument-top-rule"/>
           <p:cNvSpPr/>
           <p:nvPr/>
         </p:nvSpPr>
@@ -2175,7 +1266,7 @@
       </p:sp>
       <p:sp>
         <p:nvSpPr>
-          <p:cNvPr id="4" name="BLUEPRINT LECTURE · EVIDENCE"/>
+          <p:cNvPr id="4" name="BLUEPRINT LECTURE · ARGUMENT"/>
           <p:cNvSpPr txBox="1"/>
           <p:nvPr/>
         </p:nvSpPr>
@@ -2204,6 +1295,928 @@
                 <a:latin typeface="Inter"/>
                 <a:ea typeface="Inter"/>
               </a:rPr>
+              <a:t>BLUEPRINT LECTURE · ARGUMENT</a:t>
+            </a:r>
+            <a:endParaRPr lang="en-US"/>
+          </a:p>
+        </p:txBody>
+      </p:sp>
+      <p:sp>
+        <p:nvSpPr>
+          <p:cNvPr id="5" name="argument-title"/>
+          <p:cNvSpPr txBox="1"/>
+          <p:nvPr/>
+        </p:nvSpPr>
+        <p:spPr>
+          <a:xfrm xmlns:a="http://schemas.openxmlformats.org/drawingml/2006/main">
+            <a:off x="914400" y="1314450"/>
+            <a:ext cx="6286500" cy="914400"/>
+          </a:xfrm>
+          <a:prstGeom xmlns:a="http://schemas.openxmlformats.org/drawingml/2006/main" prst="rect">
+            <a:avLst/>
+          </a:prstGeom>
+          <a:noFill xmlns:a="http://schemas.openxmlformats.org/drawingml/2006/main"/>
+          <a:ln xmlns:a="http://schemas.openxmlformats.org/drawingml/2006/main" w="0">
+            <a:noFill/>
+          </a:ln>
+        </p:spPr>
+        <p:txBody>
+          <a:bodyPr xmlns:a="http://schemas.openxmlformats.org/drawingml/2006/main" wrap="square" lIns="0" tIns="0" rIns="0" bIns="0" anchor="t"/>
+          <a:lstStyle xmlns:a="http://schemas.openxmlformats.org/drawingml/2006/main"/>
+          <a:p xmlns:a="http://schemas.openxmlformats.org/drawingml/2006/main">
+            <a:r>
+              <a:rPr lang="en-US" sz="2550" b="1">
+                <a:solidFill>
+                  <a:srgbClr val="132A3A"/>
+                </a:solidFill>
+                <a:latin typeface="Inter"/>
+                <a:ea typeface="Inter"/>
+              </a:rPr>
+              <a:t>The method keeps mechanism separate</a:t>
+            </a:r>
+            <a:endParaRPr lang="en-US"/>
+          </a:p>
+          <a:p xmlns:a="http://schemas.openxmlformats.org/drawingml/2006/main">
+            <a:r>
+              <a:rPr lang="en-US" sz="2550" b="1">
+                <a:solidFill>
+                  <a:srgbClr val="132A3A"/>
+                </a:solidFill>
+                <a:latin typeface="Inter"/>
+                <a:ea typeface="Inter"/>
+              </a:rPr>
+              <a:t>from drift</a:t>
+            </a:r>
+            <a:endParaRPr lang="en-US"/>
+          </a:p>
+        </p:txBody>
+      </p:sp>
+      <p:sp>
+        <p:nvSpPr>
+          <p:cNvPr id="6" name="argument-basis"/>
+          <p:cNvSpPr txBox="1"/>
+          <p:nvPr/>
+        </p:nvSpPr>
+        <p:spPr>
+          <a:xfrm xmlns:a="http://schemas.openxmlformats.org/drawingml/2006/main">
+            <a:off x="952500" y="2190750"/>
+            <a:ext cx="6096000" cy="266700"/>
+          </a:xfrm>
+          <a:prstGeom xmlns:a="http://schemas.openxmlformats.org/drawingml/2006/main" prst="rect">
+            <a:avLst/>
+          </a:prstGeom>
+          <a:noFill xmlns:a="http://schemas.openxmlformats.org/drawingml/2006/main"/>
+          <a:ln xmlns:a="http://schemas.openxmlformats.org/drawingml/2006/main" w="0">
+            <a:noFill/>
+          </a:ln>
+        </p:spPr>
+        <p:txBody>
+          <a:bodyPr xmlns:a="http://schemas.openxmlformats.org/drawingml/2006/main" wrap="square" lIns="0" tIns="0" rIns="0" bIns="0" anchor="t"/>
+          <a:lstStyle xmlns:a="http://schemas.openxmlformats.org/drawingml/2006/main"/>
+          <a:p xmlns:a="http://schemas.openxmlformats.org/drawingml/2006/main">
+            <a:r>
+              <a:rPr lang="en-US" sz="1350">
+                <a:solidFill>
+                  <a:srgbClr val="8A969F"/>
+                </a:solidFill>
+                <a:latin typeface="Inter"/>
+                <a:ea typeface="Inter"/>
+              </a:rPr>
+              <a:t>Question → method → result → limitation, without marketing language.</a:t>
+            </a:r>
+            <a:endParaRPr lang="en-US"/>
+          </a:p>
+        </p:txBody>
+      </p:sp>
+      <p:sp>
+        <p:nvSpPr>
+          <p:cNvPr id="7" name="argument-rule"/>
+          <p:cNvSpPr/>
+          <p:nvPr/>
+        </p:nvSpPr>
+        <p:spPr>
+          <a:xfrm xmlns:a="http://schemas.openxmlformats.org/drawingml/2006/main">
+            <a:off x="914400" y="2457450"/>
+            <a:ext cx="13411200" cy="0"/>
+          </a:xfrm>
+          <a:prstGeom xmlns:a="http://schemas.openxmlformats.org/drawingml/2006/main" prst="line">
+            <a:avLst/>
+          </a:prstGeom>
+          <a:noFill xmlns:a="http://schemas.openxmlformats.org/drawingml/2006/main"/>
+          <a:ln xmlns:a="http://schemas.openxmlformats.org/drawingml/2006/main" w="25400">
+            <a:solidFill>
+              <a:srgbClr val="8A969F"/>
+            </a:solidFill>
+            <a:prstDash val="solid"/>
+          </a:ln>
+        </p:spPr>
+        <p:txBody>
+          <a:bodyPr xmlns:a="http://schemas.openxmlformats.org/drawingml/2006/main" wrap="square" lIns="0" tIns="0" rIns="0" bIns="0" anchor="t"/>
+          <a:lstStyle xmlns:a="http://schemas.openxmlformats.org/drawingml/2006/main"/>
+          <a:p xmlns:a="http://schemas.openxmlformats.org/drawingml/2006/main">
+            <a:r>
+              <a:rPr lang="en-US"/>
+              <a:t/>
+            </a:r>
+            <a:endParaRPr lang="en-US"/>
+          </a:p>
+        </p:txBody>
+      </p:sp>
+      <p:sp>
+        <p:nvSpPr>
+          <p:cNvPr id="8" name="academic-number-0"/>
+          <p:cNvSpPr txBox="1"/>
+          <p:nvPr/>
+        </p:nvSpPr>
+        <p:spPr>
+          <a:xfrm xmlns:a="http://schemas.openxmlformats.org/drawingml/2006/main">
+            <a:off x="1104900" y="3238500"/>
+            <a:ext cx="685800" cy="304800"/>
+          </a:xfrm>
+          <a:prstGeom xmlns:a="http://schemas.openxmlformats.org/drawingml/2006/main" prst="rect">
+            <a:avLst/>
+          </a:prstGeom>
+          <a:noFill xmlns:a="http://schemas.openxmlformats.org/drawingml/2006/main"/>
+          <a:ln xmlns:a="http://schemas.openxmlformats.org/drawingml/2006/main" w="0">
+            <a:noFill/>
+          </a:ln>
+        </p:spPr>
+        <p:txBody>
+          <a:bodyPr xmlns:a="http://schemas.openxmlformats.org/drawingml/2006/main" wrap="square" lIns="0" tIns="0" rIns="0" bIns="0" anchor="t"/>
+          <a:lstStyle xmlns:a="http://schemas.openxmlformats.org/drawingml/2006/main"/>
+          <a:p xmlns:a="http://schemas.openxmlformats.org/drawingml/2006/main">
+            <a:r>
+              <a:rPr lang="en-US" sz="1800" b="1">
+                <a:solidFill>
+                  <a:srgbClr val="1769D2"/>
+                </a:solidFill>
+                <a:latin typeface="Inter"/>
+                <a:ea typeface="Inter"/>
+              </a:rPr>
+              <a:t>01</a:t>
+            </a:r>
+            <a:endParaRPr lang="en-US"/>
+          </a:p>
+        </p:txBody>
+      </p:sp>
+      <p:sp>
+        <p:nvSpPr>
+          <p:cNvPr id="9" name="academic-rule-0"/>
+          <p:cNvSpPr/>
+          <p:nvPr/>
+        </p:nvSpPr>
+        <p:spPr>
+          <a:xfrm xmlns:a="http://schemas.openxmlformats.org/drawingml/2006/main">
+            <a:off x="2000250" y="3390900"/>
+            <a:ext cx="5810250" cy="0"/>
+          </a:xfrm>
+          <a:prstGeom xmlns:a="http://schemas.openxmlformats.org/drawingml/2006/main" prst="line">
+            <a:avLst/>
+          </a:prstGeom>
+          <a:noFill xmlns:a="http://schemas.openxmlformats.org/drawingml/2006/main"/>
+          <a:ln xmlns:a="http://schemas.openxmlformats.org/drawingml/2006/main" w="12700">
+            <a:solidFill>
+              <a:srgbClr val="8A969F"/>
+            </a:solidFill>
+            <a:prstDash val="solid"/>
+          </a:ln>
+        </p:spPr>
+        <p:txBody>
+          <a:bodyPr xmlns:a="http://schemas.openxmlformats.org/drawingml/2006/main" wrap="square" lIns="0" tIns="0" rIns="0" bIns="0" anchor="t"/>
+          <a:lstStyle xmlns:a="http://schemas.openxmlformats.org/drawingml/2006/main"/>
+          <a:p xmlns:a="http://schemas.openxmlformats.org/drawingml/2006/main">
+            <a:r>
+              <a:rPr lang="en-US"/>
+              <a:t/>
+            </a:r>
+            <a:endParaRPr lang="en-US"/>
+          </a:p>
+        </p:txBody>
+      </p:sp>
+      <p:sp>
+        <p:nvSpPr>
+          <p:cNvPr id="10" name="academic-label-0"/>
+          <p:cNvSpPr txBox="1"/>
+          <p:nvPr/>
+        </p:nvSpPr>
+        <p:spPr>
+          <a:xfrm xmlns:a="http://schemas.openxmlformats.org/drawingml/2006/main">
+            <a:off x="2114550" y="3200400"/>
+            <a:ext cx="1809750" cy="285750"/>
+          </a:xfrm>
+          <a:prstGeom xmlns:a="http://schemas.openxmlformats.org/drawingml/2006/main" prst="rect">
+            <a:avLst/>
+          </a:prstGeom>
+          <a:noFill xmlns:a="http://schemas.openxmlformats.org/drawingml/2006/main"/>
+          <a:ln xmlns:a="http://schemas.openxmlformats.org/drawingml/2006/main" w="0">
+            <a:noFill/>
+          </a:ln>
+        </p:spPr>
+        <p:txBody>
+          <a:bodyPr xmlns:a="http://schemas.openxmlformats.org/drawingml/2006/main" wrap="square" lIns="0" tIns="0" rIns="0" bIns="0" anchor="t"/>
+          <a:lstStyle xmlns:a="http://schemas.openxmlformats.org/drawingml/2006/main"/>
+          <a:p xmlns:a="http://schemas.openxmlformats.org/drawingml/2006/main">
+            <a:r>
+              <a:rPr lang="en-US" sz="1650" b="1">
+                <a:solidFill>
+                  <a:srgbClr val="132A3A"/>
+                </a:solidFill>
+                <a:latin typeface="Inter"/>
+                <a:ea typeface="Inter"/>
+              </a:rPr>
+              <a:t>Question</a:t>
+            </a:r>
+            <a:endParaRPr lang="en-US"/>
+          </a:p>
+        </p:txBody>
+      </p:sp>
+      <p:sp>
+        <p:nvSpPr>
+          <p:cNvPr id="11" name="academic-text-0"/>
+          <p:cNvSpPr txBox="1"/>
+          <p:nvPr/>
+        </p:nvSpPr>
+        <p:spPr>
+          <a:xfrm xmlns:a="http://schemas.openxmlformats.org/drawingml/2006/main">
+            <a:off x="4095750" y="3238500"/>
+            <a:ext cx="5334000" cy="304800"/>
+          </a:xfrm>
+          <a:prstGeom xmlns:a="http://schemas.openxmlformats.org/drawingml/2006/main" prst="rect">
+            <a:avLst/>
+          </a:prstGeom>
+          <a:noFill xmlns:a="http://schemas.openxmlformats.org/drawingml/2006/main"/>
+          <a:ln xmlns:a="http://schemas.openxmlformats.org/drawingml/2006/main" w="0">
+            <a:noFill/>
+          </a:ln>
+        </p:spPr>
+        <p:txBody>
+          <a:bodyPr xmlns:a="http://schemas.openxmlformats.org/drawingml/2006/main" wrap="square" lIns="0" tIns="0" rIns="0" bIns="0" anchor="t"/>
+          <a:lstStyle xmlns:a="http://schemas.openxmlformats.org/drawingml/2006/main"/>
+          <a:p xmlns:a="http://schemas.openxmlformats.org/drawingml/2006/main">
+            <a:r>
+              <a:rPr lang="en-US" sz="1350">
+                <a:solidFill>
+                  <a:srgbClr val="132A3A"/>
+                </a:solidFill>
+                <a:latin typeface="Inter"/>
+                <a:ea typeface="Inter"/>
+              </a:rPr>
+              <a:t>Can the intervention move the outcome?</a:t>
+            </a:r>
+            <a:endParaRPr lang="en-US"/>
+          </a:p>
+        </p:txBody>
+      </p:sp>
+      <p:sp>
+        <p:nvSpPr>
+          <p:cNvPr id="12" name="academic-number-1"/>
+          <p:cNvSpPr txBox="1"/>
+          <p:nvPr/>
+        </p:nvSpPr>
+        <p:spPr>
+          <a:xfrm xmlns:a="http://schemas.openxmlformats.org/drawingml/2006/main">
+            <a:off x="1104900" y="4191000"/>
+            <a:ext cx="685800" cy="304800"/>
+          </a:xfrm>
+          <a:prstGeom xmlns:a="http://schemas.openxmlformats.org/drawingml/2006/main" prst="rect">
+            <a:avLst/>
+          </a:prstGeom>
+          <a:noFill xmlns:a="http://schemas.openxmlformats.org/drawingml/2006/main"/>
+          <a:ln xmlns:a="http://schemas.openxmlformats.org/drawingml/2006/main" w="0">
+            <a:noFill/>
+          </a:ln>
+        </p:spPr>
+        <p:txBody>
+          <a:bodyPr xmlns:a="http://schemas.openxmlformats.org/drawingml/2006/main" wrap="square" lIns="0" tIns="0" rIns="0" bIns="0" anchor="t"/>
+          <a:lstStyle xmlns:a="http://schemas.openxmlformats.org/drawingml/2006/main"/>
+          <a:p xmlns:a="http://schemas.openxmlformats.org/drawingml/2006/main">
+            <a:r>
+              <a:rPr lang="en-US" sz="1800" b="1">
+                <a:solidFill>
+                  <a:srgbClr val="1769D2"/>
+                </a:solidFill>
+                <a:latin typeface="Inter"/>
+                <a:ea typeface="Inter"/>
+              </a:rPr>
+              <a:t>02</a:t>
+            </a:r>
+            <a:endParaRPr lang="en-US"/>
+          </a:p>
+        </p:txBody>
+      </p:sp>
+      <p:sp>
+        <p:nvSpPr>
+          <p:cNvPr id="13" name="academic-rule-1"/>
+          <p:cNvSpPr/>
+          <p:nvPr/>
+        </p:nvSpPr>
+        <p:spPr>
+          <a:xfrm xmlns:a="http://schemas.openxmlformats.org/drawingml/2006/main">
+            <a:off x="2000250" y="4343400"/>
+            <a:ext cx="5810250" cy="0"/>
+          </a:xfrm>
+          <a:prstGeom xmlns:a="http://schemas.openxmlformats.org/drawingml/2006/main" prst="line">
+            <a:avLst/>
+          </a:prstGeom>
+          <a:noFill xmlns:a="http://schemas.openxmlformats.org/drawingml/2006/main"/>
+          <a:ln xmlns:a="http://schemas.openxmlformats.org/drawingml/2006/main" w="12700">
+            <a:solidFill>
+              <a:srgbClr val="8A969F"/>
+            </a:solidFill>
+            <a:prstDash val="solid"/>
+          </a:ln>
+        </p:spPr>
+        <p:txBody>
+          <a:bodyPr xmlns:a="http://schemas.openxmlformats.org/drawingml/2006/main" wrap="square" lIns="0" tIns="0" rIns="0" bIns="0" anchor="t"/>
+          <a:lstStyle xmlns:a="http://schemas.openxmlformats.org/drawingml/2006/main"/>
+          <a:p xmlns:a="http://schemas.openxmlformats.org/drawingml/2006/main">
+            <a:r>
+              <a:rPr lang="en-US"/>
+              <a:t/>
+            </a:r>
+            <a:endParaRPr lang="en-US"/>
+          </a:p>
+        </p:txBody>
+      </p:sp>
+      <p:sp>
+        <p:nvSpPr>
+          <p:cNvPr id="14" name="academic-label-1"/>
+          <p:cNvSpPr txBox="1"/>
+          <p:nvPr/>
+        </p:nvSpPr>
+        <p:spPr>
+          <a:xfrm xmlns:a="http://schemas.openxmlformats.org/drawingml/2006/main">
+            <a:off x="2114550" y="4152900"/>
+            <a:ext cx="1809750" cy="285750"/>
+          </a:xfrm>
+          <a:prstGeom xmlns:a="http://schemas.openxmlformats.org/drawingml/2006/main" prst="rect">
+            <a:avLst/>
+          </a:prstGeom>
+          <a:noFill xmlns:a="http://schemas.openxmlformats.org/drawingml/2006/main"/>
+          <a:ln xmlns:a="http://schemas.openxmlformats.org/drawingml/2006/main" w="0">
+            <a:noFill/>
+          </a:ln>
+        </p:spPr>
+        <p:txBody>
+          <a:bodyPr xmlns:a="http://schemas.openxmlformats.org/drawingml/2006/main" wrap="square" lIns="0" tIns="0" rIns="0" bIns="0" anchor="t"/>
+          <a:lstStyle xmlns:a="http://schemas.openxmlformats.org/drawingml/2006/main"/>
+          <a:p xmlns:a="http://schemas.openxmlformats.org/drawingml/2006/main">
+            <a:r>
+              <a:rPr lang="en-US" sz="1650" b="1">
+                <a:solidFill>
+                  <a:srgbClr val="132A3A"/>
+                </a:solidFill>
+                <a:latin typeface="Inter"/>
+                <a:ea typeface="Inter"/>
+              </a:rPr>
+              <a:t>Method</a:t>
+            </a:r>
+            <a:endParaRPr lang="en-US"/>
+          </a:p>
+        </p:txBody>
+      </p:sp>
+      <p:sp>
+        <p:nvSpPr>
+          <p:cNvPr id="15" name="academic-text-1"/>
+          <p:cNvSpPr txBox="1"/>
+          <p:nvPr/>
+        </p:nvSpPr>
+        <p:spPr>
+          <a:xfrm xmlns:a="http://schemas.openxmlformats.org/drawingml/2006/main">
+            <a:off x="4095750" y="4191000"/>
+            <a:ext cx="5334000" cy="304800"/>
+          </a:xfrm>
+          <a:prstGeom xmlns:a="http://schemas.openxmlformats.org/drawingml/2006/main" prst="rect">
+            <a:avLst/>
+          </a:prstGeom>
+          <a:noFill xmlns:a="http://schemas.openxmlformats.org/drawingml/2006/main"/>
+          <a:ln xmlns:a="http://schemas.openxmlformats.org/drawingml/2006/main" w="0">
+            <a:noFill/>
+          </a:ln>
+        </p:spPr>
+        <p:txBody>
+          <a:bodyPr xmlns:a="http://schemas.openxmlformats.org/drawingml/2006/main" wrap="square" lIns="0" tIns="0" rIns="0" bIns="0" anchor="t"/>
+          <a:lstStyle xmlns:a="http://schemas.openxmlformats.org/drawingml/2006/main"/>
+          <a:p xmlns:a="http://schemas.openxmlformats.org/drawingml/2006/main">
+            <a:r>
+              <a:rPr lang="en-US" sz="1350">
+                <a:solidFill>
+                  <a:srgbClr val="132A3A"/>
+                </a:solidFill>
+                <a:latin typeface="Inter"/>
+                <a:ea typeface="Inter"/>
+              </a:rPr>
+              <a:t>Two groups, one rule, registered before launch.</a:t>
+            </a:r>
+            <a:endParaRPr lang="en-US"/>
+          </a:p>
+        </p:txBody>
+      </p:sp>
+      <p:sp>
+        <p:nvSpPr>
+          <p:cNvPr id="16" name="academic-number-2"/>
+          <p:cNvSpPr txBox="1"/>
+          <p:nvPr/>
+        </p:nvSpPr>
+        <p:spPr>
+          <a:xfrm xmlns:a="http://schemas.openxmlformats.org/drawingml/2006/main">
+            <a:off x="1104900" y="5143500"/>
+            <a:ext cx="685800" cy="304800"/>
+          </a:xfrm>
+          <a:prstGeom xmlns:a="http://schemas.openxmlformats.org/drawingml/2006/main" prst="rect">
+            <a:avLst/>
+          </a:prstGeom>
+          <a:noFill xmlns:a="http://schemas.openxmlformats.org/drawingml/2006/main"/>
+          <a:ln xmlns:a="http://schemas.openxmlformats.org/drawingml/2006/main" w="0">
+            <a:noFill/>
+          </a:ln>
+        </p:spPr>
+        <p:txBody>
+          <a:bodyPr xmlns:a="http://schemas.openxmlformats.org/drawingml/2006/main" wrap="square" lIns="0" tIns="0" rIns="0" bIns="0" anchor="t"/>
+          <a:lstStyle xmlns:a="http://schemas.openxmlformats.org/drawingml/2006/main"/>
+          <a:p xmlns:a="http://schemas.openxmlformats.org/drawingml/2006/main">
+            <a:r>
+              <a:rPr lang="en-US" sz="1800" b="1">
+                <a:solidFill>
+                  <a:srgbClr val="1769D2"/>
+                </a:solidFill>
+                <a:latin typeface="Inter"/>
+                <a:ea typeface="Inter"/>
+              </a:rPr>
+              <a:t>03</a:t>
+            </a:r>
+            <a:endParaRPr lang="en-US"/>
+          </a:p>
+        </p:txBody>
+      </p:sp>
+      <p:sp>
+        <p:nvSpPr>
+          <p:cNvPr id="17" name="academic-rule-2"/>
+          <p:cNvSpPr/>
+          <p:nvPr/>
+        </p:nvSpPr>
+        <p:spPr>
+          <a:xfrm xmlns:a="http://schemas.openxmlformats.org/drawingml/2006/main">
+            <a:off x="2000250" y="5295900"/>
+            <a:ext cx="5810250" cy="0"/>
+          </a:xfrm>
+          <a:prstGeom xmlns:a="http://schemas.openxmlformats.org/drawingml/2006/main" prst="line">
+            <a:avLst/>
+          </a:prstGeom>
+          <a:noFill xmlns:a="http://schemas.openxmlformats.org/drawingml/2006/main"/>
+          <a:ln xmlns:a="http://schemas.openxmlformats.org/drawingml/2006/main" w="12700">
+            <a:solidFill>
+              <a:srgbClr val="8A969F"/>
+            </a:solidFill>
+            <a:prstDash val="solid"/>
+          </a:ln>
+        </p:spPr>
+        <p:txBody>
+          <a:bodyPr xmlns:a="http://schemas.openxmlformats.org/drawingml/2006/main" wrap="square" lIns="0" tIns="0" rIns="0" bIns="0" anchor="t"/>
+          <a:lstStyle xmlns:a="http://schemas.openxmlformats.org/drawingml/2006/main"/>
+          <a:p xmlns:a="http://schemas.openxmlformats.org/drawingml/2006/main">
+            <a:r>
+              <a:rPr lang="en-US"/>
+              <a:t/>
+            </a:r>
+            <a:endParaRPr lang="en-US"/>
+          </a:p>
+        </p:txBody>
+      </p:sp>
+      <p:sp>
+        <p:nvSpPr>
+          <p:cNvPr id="18" name="academic-label-2"/>
+          <p:cNvSpPr txBox="1"/>
+          <p:nvPr/>
+        </p:nvSpPr>
+        <p:spPr>
+          <a:xfrm xmlns:a="http://schemas.openxmlformats.org/drawingml/2006/main">
+            <a:off x="2114550" y="5105400"/>
+            <a:ext cx="1809750" cy="285750"/>
+          </a:xfrm>
+          <a:prstGeom xmlns:a="http://schemas.openxmlformats.org/drawingml/2006/main" prst="rect">
+            <a:avLst/>
+          </a:prstGeom>
+          <a:noFill xmlns:a="http://schemas.openxmlformats.org/drawingml/2006/main"/>
+          <a:ln xmlns:a="http://schemas.openxmlformats.org/drawingml/2006/main" w="0">
+            <a:noFill/>
+          </a:ln>
+        </p:spPr>
+        <p:txBody>
+          <a:bodyPr xmlns:a="http://schemas.openxmlformats.org/drawingml/2006/main" wrap="square" lIns="0" tIns="0" rIns="0" bIns="0" anchor="t"/>
+          <a:lstStyle xmlns:a="http://schemas.openxmlformats.org/drawingml/2006/main"/>
+          <a:p xmlns:a="http://schemas.openxmlformats.org/drawingml/2006/main">
+            <a:r>
+              <a:rPr lang="en-US" sz="1650" b="1">
+                <a:solidFill>
+                  <a:srgbClr val="132A3A"/>
+                </a:solidFill>
+                <a:latin typeface="Inter"/>
+                <a:ea typeface="Inter"/>
+              </a:rPr>
+              <a:t>Boundary</a:t>
+            </a:r>
+            <a:endParaRPr lang="en-US"/>
+          </a:p>
+        </p:txBody>
+      </p:sp>
+      <p:sp>
+        <p:nvSpPr>
+          <p:cNvPr id="19" name="academic-text-2"/>
+          <p:cNvSpPr txBox="1"/>
+          <p:nvPr/>
+        </p:nvSpPr>
+        <p:spPr>
+          <a:xfrm xmlns:a="http://schemas.openxmlformats.org/drawingml/2006/main">
+            <a:off x="4095750" y="5143500"/>
+            <a:ext cx="5334000" cy="304800"/>
+          </a:xfrm>
+          <a:prstGeom xmlns:a="http://schemas.openxmlformats.org/drawingml/2006/main" prst="rect">
+            <a:avLst/>
+          </a:prstGeom>
+          <a:noFill xmlns:a="http://schemas.openxmlformats.org/drawingml/2006/main"/>
+          <a:ln xmlns:a="http://schemas.openxmlformats.org/drawingml/2006/main" w="0">
+            <a:noFill/>
+          </a:ln>
+        </p:spPr>
+        <p:txBody>
+          <a:bodyPr xmlns:a="http://schemas.openxmlformats.org/drawingml/2006/main" wrap="square" lIns="0" tIns="0" rIns="0" bIns="0" anchor="t"/>
+          <a:lstStyle xmlns:a="http://schemas.openxmlformats.org/drawingml/2006/main"/>
+          <a:p xmlns:a="http://schemas.openxmlformats.org/drawingml/2006/main">
+            <a:r>
+              <a:rPr lang="en-US" sz="1350">
+                <a:solidFill>
+                  <a:srgbClr val="132A3A"/>
+                </a:solidFill>
+                <a:latin typeface="Inter"/>
+                <a:ea typeface="Inter"/>
+              </a:rPr>
+              <a:t>The result applies to this window and sample.</a:t>
+            </a:r>
+            <a:endParaRPr lang="en-US"/>
+          </a:p>
+        </p:txBody>
+      </p:sp>
+      <p:sp>
+        <p:nvSpPr>
+          <p:cNvPr id="20" name="method-panel"/>
+          <p:cNvSpPr/>
+          <p:nvPr/>
+        </p:nvSpPr>
+        <p:spPr>
+          <a:xfrm xmlns:a="http://schemas.openxmlformats.org/drawingml/2006/main">
+            <a:off x="10287000" y="3238500"/>
+            <a:ext cx="3619500" cy="2381250"/>
+          </a:xfrm>
+          <a:prstGeom xmlns:a="http://schemas.openxmlformats.org/drawingml/2006/main" prst="rect">
+            <a:avLst/>
+          </a:prstGeom>
+          <a:solidFill xmlns:a="http://schemas.openxmlformats.org/drawingml/2006/main">
+            <a:srgbClr val="F3F5F8"/>
+          </a:solidFill>
+          <a:ln xmlns:a="http://schemas.openxmlformats.org/drawingml/2006/main" w="12700">
+            <a:solidFill>
+              <a:srgbClr val="8A969F"/>
+            </a:solidFill>
+            <a:prstDash val="solid"/>
+          </a:ln>
+        </p:spPr>
+        <p:txBody>
+          <a:bodyPr xmlns:a="http://schemas.openxmlformats.org/drawingml/2006/main" wrap="square" lIns="0" tIns="0" rIns="0" bIns="0" anchor="t"/>
+          <a:lstStyle xmlns:a="http://schemas.openxmlformats.org/drawingml/2006/main"/>
+          <a:p xmlns:a="http://schemas.openxmlformats.org/drawingml/2006/main">
+            <a:r>
+              <a:rPr lang="en-US"/>
+              <a:t/>
+            </a:r>
+            <a:endParaRPr lang="en-US"/>
+          </a:p>
+        </p:txBody>
+      </p:sp>
+      <p:sp>
+        <p:nvSpPr>
+          <p:cNvPr id="21" name="method-label"/>
+          <p:cNvSpPr txBox="1"/>
+          <p:nvPr/>
+        </p:nvSpPr>
+        <p:spPr>
+          <a:xfrm xmlns:a="http://schemas.openxmlformats.org/drawingml/2006/main">
+            <a:off x="10668000" y="3571875"/>
+            <a:ext cx="2762250" cy="228600"/>
+          </a:xfrm>
+          <a:prstGeom xmlns:a="http://schemas.openxmlformats.org/drawingml/2006/main" prst="rect">
+            <a:avLst/>
+          </a:prstGeom>
+          <a:noFill xmlns:a="http://schemas.openxmlformats.org/drawingml/2006/main"/>
+          <a:ln xmlns:a="http://schemas.openxmlformats.org/drawingml/2006/main" w="0">
+            <a:noFill/>
+          </a:ln>
+        </p:spPr>
+        <p:txBody>
+          <a:bodyPr xmlns:a="http://schemas.openxmlformats.org/drawingml/2006/main" wrap="square" lIns="0" tIns="0" rIns="0" bIns="0" anchor="t"/>
+          <a:lstStyle xmlns:a="http://schemas.openxmlformats.org/drawingml/2006/main"/>
+          <a:p xmlns:a="http://schemas.openxmlformats.org/drawingml/2006/main">
+            <a:r>
+              <a:rPr lang="en-US" sz="1125" b="1">
+                <a:solidFill>
+                  <a:srgbClr val="1769D2"/>
+                </a:solidFill>
+                <a:latin typeface="Inter"/>
+                <a:ea typeface="Inter"/>
+              </a:rPr>
+              <a:t>REGISTERED RULE</a:t>
+            </a:r>
+            <a:endParaRPr lang="en-US"/>
+          </a:p>
+        </p:txBody>
+      </p:sp>
+      <p:sp>
+        <p:nvSpPr>
+          <p:cNvPr id="22" name="method-value"/>
+          <p:cNvSpPr txBox="1"/>
+          <p:nvPr/>
+        </p:nvSpPr>
+        <p:spPr>
+          <a:xfrm xmlns:a="http://schemas.openxmlformats.org/drawingml/2006/main">
+            <a:off x="10668000" y="4048125"/>
+            <a:ext cx="2571750" cy="609600"/>
+          </a:xfrm>
+          <a:prstGeom xmlns:a="http://schemas.openxmlformats.org/drawingml/2006/main" prst="rect">
+            <a:avLst/>
+          </a:prstGeom>
+          <a:noFill xmlns:a="http://schemas.openxmlformats.org/drawingml/2006/main"/>
+          <a:ln xmlns:a="http://schemas.openxmlformats.org/drawingml/2006/main" w="0">
+            <a:noFill/>
+          </a:ln>
+        </p:spPr>
+        <p:txBody>
+          <a:bodyPr xmlns:a="http://schemas.openxmlformats.org/drawingml/2006/main" wrap="square" lIns="0" tIns="0" rIns="0" bIns="0" anchor="t"/>
+          <a:lstStyle xmlns:a="http://schemas.openxmlformats.org/drawingml/2006/main"/>
+          <a:p xmlns:a="http://schemas.openxmlformats.org/drawingml/2006/main">
+            <a:r>
+              <a:rPr lang="en-US" sz="3750" b="1">
+                <a:solidFill>
+                  <a:srgbClr val="1769D2"/>
+                </a:solidFill>
+                <a:latin typeface="Inter"/>
+                <a:ea typeface="Inter"/>
+              </a:rPr>
+              <a:t>≥ 2 pp</a:t>
+            </a:r>
+            <a:endParaRPr lang="en-US"/>
+          </a:p>
+        </p:txBody>
+      </p:sp>
+      <p:sp>
+        <p:nvSpPr>
+          <p:cNvPr id="23" name="method-foot"/>
+          <p:cNvSpPr txBox="1"/>
+          <p:nvPr/>
+        </p:nvSpPr>
+        <p:spPr>
+          <a:xfrm xmlns:a="http://schemas.openxmlformats.org/drawingml/2006/main">
+            <a:off x="10668000" y="4762500"/>
+            <a:ext cx="2762250" cy="228600"/>
+          </a:xfrm>
+          <a:prstGeom xmlns:a="http://schemas.openxmlformats.org/drawingml/2006/main" prst="rect">
+            <a:avLst/>
+          </a:prstGeom>
+          <a:noFill xmlns:a="http://schemas.openxmlformats.org/drawingml/2006/main"/>
+          <a:ln xmlns:a="http://schemas.openxmlformats.org/drawingml/2006/main" w="0">
+            <a:noFill/>
+          </a:ln>
+        </p:spPr>
+        <p:txBody>
+          <a:bodyPr xmlns:a="http://schemas.openxmlformats.org/drawingml/2006/main" wrap="square" lIns="0" tIns="0" rIns="0" bIns="0" anchor="t"/>
+          <a:lstStyle xmlns:a="http://schemas.openxmlformats.org/drawingml/2006/main"/>
+          <a:p xmlns:a="http://schemas.openxmlformats.org/drawingml/2006/main">
+            <a:r>
+              <a:rPr lang="en-US" sz="1200">
+                <a:solidFill>
+                  <a:srgbClr val="8A969F"/>
+                </a:solidFill>
+                <a:latin typeface="Inter"/>
+                <a:ea typeface="Inter"/>
+              </a:rPr>
+              <a:t>confidence interval excludes zero</a:t>
+            </a:r>
+            <a:endParaRPr lang="en-US"/>
+          </a:p>
+        </p:txBody>
+      </p:sp>
+      <p:sp>
+        <p:nvSpPr>
+          <p:cNvPr id="24" name="source"/>
+          <p:cNvSpPr txBox="1"/>
+          <p:nvPr/>
+        </p:nvSpPr>
+        <p:spPr>
+          <a:xfrm xmlns:a="http://schemas.openxmlformats.org/drawingml/2006/main">
+            <a:off x="914400" y="7810500"/>
+            <a:ext cx="10953750" cy="209550"/>
+          </a:xfrm>
+          <a:prstGeom xmlns:a="http://schemas.openxmlformats.org/drawingml/2006/main" prst="rect">
+            <a:avLst/>
+          </a:prstGeom>
+          <a:noFill xmlns:a="http://schemas.openxmlformats.org/drawingml/2006/main"/>
+          <a:ln xmlns:a="http://schemas.openxmlformats.org/drawingml/2006/main" w="0">
+            <a:noFill/>
+          </a:ln>
+        </p:spPr>
+        <p:txBody>
+          <a:bodyPr xmlns:a="http://schemas.openxmlformats.org/drawingml/2006/main" wrap="square" lIns="0" tIns="0" rIns="0" bIns="0" anchor="t"/>
+          <a:lstStyle xmlns:a="http://schemas.openxmlformats.org/drawingml/2006/main"/>
+          <a:p xmlns:a="http://schemas.openxmlformats.org/drawingml/2006/main">
+            <a:r>
+              <a:rPr lang="en-US" sz="1050">
+                <a:solidFill>
+                  <a:srgbClr val="8A969F"/>
+                </a:solidFill>
+                <a:latin typeface="Inter"/>
+                <a:ea typeface="Inter"/>
+              </a:rPr>
+              <a:t>Source: illustrative calibration brief · every claim is fictional and bounded</a:t>
+            </a:r>
+            <a:endParaRPr lang="en-US"/>
+          </a:p>
+        </p:txBody>
+      </p:sp>
+      <p:sp>
+        <p:nvSpPr>
+          <p:cNvPr id="25" name="page-number"/>
+          <p:cNvSpPr txBox="1"/>
+          <p:nvPr/>
+        </p:nvSpPr>
+        <p:spPr>
+          <a:xfrm xmlns:a="http://schemas.openxmlformats.org/drawingml/2006/main">
+            <a:off x="13335000" y="7810500"/>
+            <a:ext cx="952500" cy="209550"/>
+          </a:xfrm>
+          <a:prstGeom xmlns:a="http://schemas.openxmlformats.org/drawingml/2006/main" prst="rect">
+            <a:avLst/>
+          </a:prstGeom>
+          <a:noFill xmlns:a="http://schemas.openxmlformats.org/drawingml/2006/main"/>
+          <a:ln xmlns:a="http://schemas.openxmlformats.org/drawingml/2006/main" w="0">
+            <a:noFill/>
+          </a:ln>
+        </p:spPr>
+        <p:txBody>
+          <a:bodyPr xmlns:a="http://schemas.openxmlformats.org/drawingml/2006/main" wrap="square" lIns="0" tIns="0" rIns="0" bIns="0" anchor="t"/>
+          <a:lstStyle xmlns:a="http://schemas.openxmlformats.org/drawingml/2006/main"/>
+          <a:p xmlns:a="http://schemas.openxmlformats.org/drawingml/2006/main">
+            <a:pPr algn="r"/>
+            <a:r>
+              <a:rPr lang="en-US" sz="1050">
+                <a:solidFill>
+                  <a:srgbClr val="8A969F"/>
+                </a:solidFill>
+                <a:latin typeface="Inter"/>
+                <a:ea typeface="Inter"/>
+              </a:rPr>
+              <a:t>2 / 6</a:t>
+            </a:r>
+            <a:endParaRPr lang="en-US"/>
+          </a:p>
+        </p:txBody>
+      </p:sp>
+    </p:spTree>
+  </p:cSld>
+  <p:clrMapOvr>
+    <a:masterClrMapping xmlns:a="http://schemas.openxmlformats.org/drawingml/2006/main"/>
+  </p:clrMapOvr>
+</p:sld>
+</file>
+
+<file path=ppt/slides/slide3.xml><?xml version="1.0" encoding="utf-8"?>
+<p:sld xmlns:p="http://schemas.openxmlformats.org/presentationml/2006/main">
+  <p:cSld name="Evidence">
+    <p:bg>
+      <p:bgPr>
+        <a:blipFill xmlns:a="http://schemas.openxmlformats.org/drawingml/2006/main">
+          <a:blip xmlns:r="http://schemas.openxmlformats.org/officeDocument/2006/relationships" r:embed="rIdOfficeKitImage59ee3aa5202fd02f_1"/>
+          <a:stretch>
+            <a:fillRect/>
+          </a:stretch>
+        </a:blipFill>
+      </p:bgPr>
+    </p:bg>
+    <p:spTree>
+      <p:nvGrpSpPr>
+        <p:cNvPr id="1" name=""/>
+        <p:cNvGrpSpPr/>
+        <p:nvPr/>
+      </p:nvGrpSpPr>
+      <p:grpSpPr>
+        <a:xfrm xmlns:a="http://schemas.openxmlformats.org/drawingml/2006/main">
+          <a:off x="0" y="0"/>
+          <a:ext cx="0" cy="0"/>
+          <a:chOff x="0" y="0"/>
+          <a:chExt cx="0" cy="0"/>
+        </a:xfrm>
+      </p:grpSpPr>
+      <p:sp>
+        <p:nvSpPr>
+          <p:cNvPr id="2" name="evidence-paper-scrim"/>
+          <p:cNvSpPr/>
+          <p:nvPr/>
+        </p:nvSpPr>
+        <p:spPr>
+          <a:xfrm xmlns:a="http://schemas.openxmlformats.org/drawingml/2006/main">
+            <a:off x="0" y="0"/>
+            <a:ext cx="7429500" cy="8572500"/>
+          </a:xfrm>
+          <a:prstGeom xmlns:a="http://schemas.openxmlformats.org/drawingml/2006/main" prst="rect">
+            <a:avLst/>
+          </a:prstGeom>
+          <a:solidFill xmlns:a="http://schemas.openxmlformats.org/drawingml/2006/main">
+            <a:srgbClr val="F8FAFC">
+              <a:alpha val="96000"/>
+            </a:srgbClr>
+          </a:solidFill>
+          <a:ln xmlns:a="http://schemas.openxmlformats.org/drawingml/2006/main" w="0">
+            <a:solidFill>
+              <a:srgbClr val="F8FAFC"/>
+            </a:solidFill>
+            <a:prstDash val="solid"/>
+          </a:ln>
+        </p:spPr>
+        <p:txBody>
+          <a:bodyPr xmlns:a="http://schemas.openxmlformats.org/drawingml/2006/main" wrap="square" lIns="0" tIns="0" rIns="0" bIns="0" anchor="t"/>
+          <a:lstStyle xmlns:a="http://schemas.openxmlformats.org/drawingml/2006/main"/>
+          <a:p xmlns:a="http://schemas.openxmlformats.org/drawingml/2006/main">
+            <a:r>
+              <a:rPr lang="en-US"/>
+              <a:t/>
+            </a:r>
+            <a:endParaRPr lang="en-US"/>
+          </a:p>
+        </p:txBody>
+      </p:sp>
+      <p:sp>
+        <p:nvSpPr>
+          <p:cNvPr id="3" name="evidence-top-rule"/>
+          <p:cNvSpPr/>
+          <p:nvPr/>
+        </p:nvSpPr>
+        <p:spPr>
+          <a:xfrm xmlns:a="http://schemas.openxmlformats.org/drawingml/2006/main">
+            <a:off x="838200" y="666750"/>
+            <a:ext cx="13563600" cy="0"/>
+          </a:xfrm>
+          <a:prstGeom xmlns:a="http://schemas.openxmlformats.org/drawingml/2006/main" prst="line">
+            <a:avLst/>
+          </a:prstGeom>
+          <a:noFill xmlns:a="http://schemas.openxmlformats.org/drawingml/2006/main"/>
+          <a:ln xmlns:a="http://schemas.openxmlformats.org/drawingml/2006/main" w="38100">
+            <a:solidFill>
+              <a:srgbClr val="1769D2"/>
+            </a:solidFill>
+            <a:prstDash val="solid"/>
+          </a:ln>
+        </p:spPr>
+        <p:txBody>
+          <a:bodyPr xmlns:a="http://schemas.openxmlformats.org/drawingml/2006/main" wrap="square" lIns="0" tIns="0" rIns="0" bIns="0" anchor="t"/>
+          <a:lstStyle xmlns:a="http://schemas.openxmlformats.org/drawingml/2006/main"/>
+          <a:p xmlns:a="http://schemas.openxmlformats.org/drawingml/2006/main">
+            <a:r>
+              <a:rPr lang="en-US"/>
+              <a:t/>
+            </a:r>
+            <a:endParaRPr lang="en-US"/>
+          </a:p>
+        </p:txBody>
+      </p:sp>
+      <p:sp>
+        <p:nvSpPr>
+          <p:cNvPr id="4" name="BLUEPRINT LECTURE · EVIDENCE"/>
+          <p:cNvSpPr txBox="1"/>
+          <p:nvPr/>
+        </p:nvSpPr>
+        <p:spPr>
+          <a:xfrm xmlns:a="http://schemas.openxmlformats.org/drawingml/2006/main">
+            <a:off x="914400" y="895350"/>
+            <a:ext cx="7239000" cy="228600"/>
+          </a:xfrm>
+          <a:prstGeom xmlns:a="http://schemas.openxmlformats.org/drawingml/2006/main" prst="rect">
+            <a:avLst/>
+          </a:prstGeom>
+          <a:noFill xmlns:a="http://schemas.openxmlformats.org/drawingml/2006/main"/>
+          <a:ln xmlns:a="http://schemas.openxmlformats.org/drawingml/2006/main" w="0">
+            <a:noFill/>
+          </a:ln>
+        </p:spPr>
+        <p:txBody>
+          <a:bodyPr xmlns:a="http://schemas.openxmlformats.org/drawingml/2006/main" wrap="square" lIns="0" tIns="0" rIns="0" bIns="0" anchor="t"/>
+          <a:lstStyle xmlns:a="http://schemas.openxmlformats.org/drawingml/2006/main"/>
+          <a:p xmlns:a="http://schemas.openxmlformats.org/drawingml/2006/main">
+            <a:r>
+              <a:rPr lang="en-US" sz="1200" b="1">
+                <a:solidFill>
+                  <a:srgbClr val="1769D2"/>
+                </a:solidFill>
+                <a:latin typeface="Inter"/>
+                <a:ea typeface="Inter"/>
+              </a:rPr>
               <a:t>BLUEPRINT LECTURE · EVIDENCE</a:t>
             </a:r>
             <a:endParaRPr lang="en-US"/>
@@ -2219,29 +2232,42 @@
         <p:spPr>
           <a:xfrm xmlns:a="http://schemas.openxmlformats.org/drawingml/2006/main">
             <a:off x="914400" y="1314450"/>
-            <a:ext cx="6286500" cy="552450"/>
-          </a:xfrm>
-          <a:prstGeom xmlns:a="http://schemas.openxmlformats.org/drawingml/2006/main" prst="rect">
-            <a:avLst/>
-          </a:prstGeom>
-          <a:noFill xmlns:a="http://schemas.openxmlformats.org/drawingml/2006/main"/>
-          <a:ln xmlns:a="http://schemas.openxmlformats.org/drawingml/2006/main" w="0">
-            <a:noFill/>
-          </a:ln>
-        </p:spPr>
-        <p:txBody>
-          <a:bodyPr xmlns:a="http://schemas.openxmlformats.org/drawingml/2006/main" wrap="square" lIns="0" tIns="0" rIns="0" bIns="0" anchor="t"/>
-          <a:lstStyle xmlns:a="http://schemas.openxmlformats.org/drawingml/2006/main"/>
-          <a:p xmlns:a="http://schemas.openxmlformats.org/drawingml/2006/main">
-            <a:r>
-              <a:rPr lang="en-US" sz="2850" b="1">
+            <a:ext cx="6286500" cy="914400"/>
+          </a:xfrm>
+          <a:prstGeom xmlns:a="http://schemas.openxmlformats.org/drawingml/2006/main" prst="rect">
+            <a:avLst/>
+          </a:prstGeom>
+          <a:noFill xmlns:a="http://schemas.openxmlformats.org/drawingml/2006/main"/>
+          <a:ln xmlns:a="http://schemas.openxmlformats.org/drawingml/2006/main" w="0">
+            <a:noFill/>
+          </a:ln>
+        </p:spPr>
+        <p:txBody>
+          <a:bodyPr xmlns:a="http://schemas.openxmlformats.org/drawingml/2006/main" wrap="square" lIns="0" tIns="0" rIns="0" bIns="0" anchor="t"/>
+          <a:lstStyle xmlns:a="http://schemas.openxmlformats.org/drawingml/2006/main"/>
+          <a:p xmlns:a="http://schemas.openxmlformats.org/drawingml/2006/main">
+            <a:r>
+              <a:rPr lang="en-US" sz="2550" b="1">
                 <a:solidFill>
                   <a:srgbClr val="132A3A"/>
                 </a:solidFill>
                 <a:latin typeface="Inter"/>
                 <a:ea typeface="Inter"/>
               </a:rPr>
-              <a:t>The result clears the rule; uncertainty remains visible</a:t>
+              <a:t>The result clears the rule;</a:t>
+            </a:r>
+            <a:endParaRPr lang="en-US"/>
+          </a:p>
+          <a:p xmlns:a="http://schemas.openxmlformats.org/drawingml/2006/main">
+            <a:r>
+              <a:rPr lang="en-US" sz="2550" b="1">
+                <a:solidFill>
+                  <a:srgbClr val="132A3A"/>
+                </a:solidFill>
+                <a:latin typeface="Inter"/>
+                <a:ea typeface="Inter"/>
+              </a:rPr>
+              <a:t>uncertainty remains visible</a:t>
             </a:r>
             <a:endParaRPr lang="en-US"/>
           </a:p>
@@ -2255,7 +2281,7 @@
         </p:nvSpPr>
         <p:spPr>
           <a:xfrm xmlns:a="http://schemas.openxmlformats.org/drawingml/2006/main">
-            <a:off x="952500" y="1981200"/>
+            <a:off x="952500" y="2190750"/>
             <a:ext cx="6096000" cy="266700"/>
           </a:xfrm>
           <a:prstGeom xmlns:a="http://schemas.openxmlformats.org/drawingml/2006/main" prst="rect">
@@ -2370,7 +2396,7 @@
         </p:xfrm>
         <a:graphic xmlns:a="http://schemas.openxmlformats.org/drawingml/2006/main">
           <a:graphicData uri="http://schemas.openxmlformats.org/drawingml/2006/chart">
-            <c:chart xmlns:r="http://schemas.openxmlformats.org/officeDocument/2006/relationships" xmlns:c="http://schemas.openxmlformats.org/drawingml/2006/chart" r:id="R909b0a2d2c5c4a6a"/>
+            <c:chart xmlns:r="http://schemas.openxmlformats.org/officeDocument/2006/relationships" xmlns:c="http://schemas.openxmlformats.org/drawingml/2006/chart" r:id="R133bb7c8f99c4ad0"/>
           </a:graphicData>
         </a:graphic>
       </p:graphicFrame>
@@ -2506,14 +2532,53 @@
           <a:lstStyle xmlns:a="http://schemas.openxmlformats.org/drawingml/2006/main"/>
           <a:p xmlns:a="http://schemas.openxmlformats.org/drawingml/2006/main">
             <a:r>
-              <a:rPr lang="en-US" sz="1650" b="1">
+              <a:rPr lang="en-US" sz="1350" b="1">
                 <a:solidFill>
                   <a:srgbClr val="132A3A"/>
                 </a:solidFill>
                 <a:latin typeface="Inter"/>
                 <a:ea typeface="Inter"/>
               </a:rPr>
-              <a:t>The observed lift is compatible with the registered mechanism, not proof of generalization.</a:t>
+              <a:t>The observed lift is</a:t>
+            </a:r>
+            <a:endParaRPr lang="en-US"/>
+          </a:p>
+          <a:p xmlns:a="http://schemas.openxmlformats.org/drawingml/2006/main">
+            <a:r>
+              <a:rPr lang="en-US" sz="1350" b="1">
+                <a:solidFill>
+                  <a:srgbClr val="132A3A"/>
+                </a:solidFill>
+                <a:latin typeface="Inter"/>
+                <a:ea typeface="Inter"/>
+              </a:rPr>
+              <a:t>compatible with the registered</a:t>
+            </a:r>
+            <a:endParaRPr lang="en-US"/>
+          </a:p>
+          <a:p xmlns:a="http://schemas.openxmlformats.org/drawingml/2006/main">
+            <a:r>
+              <a:rPr lang="en-US" sz="1350" b="1">
+                <a:solidFill>
+                  <a:srgbClr val="132A3A"/>
+                </a:solidFill>
+                <a:latin typeface="Inter"/>
+                <a:ea typeface="Inter"/>
+              </a:rPr>
+              <a:t>mechanism, not proof of</a:t>
+            </a:r>
+            <a:endParaRPr lang="en-US"/>
+          </a:p>
+          <a:p xmlns:a="http://schemas.openxmlformats.org/drawingml/2006/main">
+            <a:r>
+              <a:rPr lang="en-US" sz="1350" b="1">
+                <a:solidFill>
+                  <a:srgbClr val="132A3A"/>
+                </a:solidFill>
+                <a:latin typeface="Inter"/>
+                <a:ea typeface="Inter"/>
+              </a:rPr>
+              <a:t>generalization.</a:t>
             </a:r>
             <a:endParaRPr lang="en-US"/>
           </a:p>
@@ -2823,7 +2888,7 @@
           <a:lstStyle xmlns:a="http://schemas.openxmlformats.org/drawingml/2006/main"/>
           <a:p xmlns:a="http://schemas.openxmlformats.org/drawingml/2006/main">
             <a:r>
-              <a:rPr lang="en-US" sz="2850" b="1">
+              <a:rPr lang="en-US" sz="2550" b="1">
                 <a:solidFill>
                   <a:srgbClr val="132A3A"/>
                 </a:solidFill>
@@ -3832,6 +3897,336 @@
 <file path=ppt/slides/slide5.xml><?xml version="1.0" encoding="utf-8"?>
 <p:sld xmlns:p="http://schemas.openxmlformats.org/presentationml/2006/main">
   <p:cSld name="Visual carrier">
+    <p:bg>
+      <p:bgPr>
+        <a:blipFill xmlns:a="http://schemas.openxmlformats.org/drawingml/2006/main">
+          <a:blip xmlns:r="http://schemas.openxmlformats.org/officeDocument/2006/relationships" r:embed="rIdOfficeKitImage2930549abca3ae00_1"/>
+          <a:stretch>
+            <a:fillRect/>
+          </a:stretch>
+        </a:blipFill>
+      </p:bgPr>
+    </p:bg>
+    <p:spTree>
+      <p:nvGrpSpPr>
+        <p:cNvPr id="1" name=""/>
+        <p:cNvGrpSpPr/>
+        <p:nvPr/>
+      </p:nvGrpSpPr>
+      <p:grpSpPr>
+        <a:xfrm xmlns:a="http://schemas.openxmlformats.org/drawingml/2006/main">
+          <a:off x="0" y="0"/>
+          <a:ext cx="0" cy="0"/>
+          <a:chOff x="0" y="0"/>
+          <a:chExt cx="0" cy="0"/>
+        </a:xfrm>
+      </p:grpSpPr>
+      <p:sp>
+        <p:nvSpPr>
+          <p:cNvPr id="2" name="visual-scrim"/>
+          <p:cNvSpPr/>
+          <p:nvPr/>
+        </p:nvSpPr>
+        <p:spPr>
+          <a:xfrm xmlns:a="http://schemas.openxmlformats.org/drawingml/2006/main">
+            <a:off x="0" y="0"/>
+            <a:ext cx="6858000" cy="8572500"/>
+          </a:xfrm>
+          <a:prstGeom xmlns:a="http://schemas.openxmlformats.org/drawingml/2006/main" prst="rect">
+            <a:avLst/>
+          </a:prstGeom>
+          <a:solidFill xmlns:a="http://schemas.openxmlformats.org/drawingml/2006/main">
+            <a:srgbClr val="F8FAFC">
+              <a:alpha val="94000"/>
+            </a:srgbClr>
+          </a:solidFill>
+          <a:ln xmlns:a="http://schemas.openxmlformats.org/drawingml/2006/main" w="0">
+            <a:solidFill>
+              <a:srgbClr val="F8FAFC"/>
+            </a:solidFill>
+            <a:prstDash val="solid"/>
+          </a:ln>
+        </p:spPr>
+        <p:txBody>
+          <a:bodyPr xmlns:a="http://schemas.openxmlformats.org/drawingml/2006/main" wrap="square" lIns="0" tIns="0" rIns="0" bIns="0" anchor="t"/>
+          <a:lstStyle xmlns:a="http://schemas.openxmlformats.org/drawingml/2006/main"/>
+          <a:p xmlns:a="http://schemas.openxmlformats.org/drawingml/2006/main">
+            <a:r>
+              <a:rPr lang="en-US"/>
+              <a:t/>
+            </a:r>
+            <a:endParaRPr lang="en-US"/>
+          </a:p>
+        </p:txBody>
+      </p:sp>
+      <p:sp>
+        <p:nvSpPr>
+          <p:cNvPr id="3" name="visual-eyebrow"/>
+          <p:cNvSpPr txBox="1"/>
+          <p:nvPr/>
+        </p:nvSpPr>
+        <p:spPr>
+          <a:xfrm xmlns:a="http://schemas.openxmlformats.org/drawingml/2006/main">
+            <a:off x="914400" y="895350"/>
+            <a:ext cx="6667500" cy="228600"/>
+          </a:xfrm>
+          <a:prstGeom xmlns:a="http://schemas.openxmlformats.org/drawingml/2006/main" prst="rect">
+            <a:avLst/>
+          </a:prstGeom>
+          <a:noFill xmlns:a="http://schemas.openxmlformats.org/drawingml/2006/main"/>
+          <a:ln xmlns:a="http://schemas.openxmlformats.org/drawingml/2006/main" w="0">
+            <a:noFill/>
+          </a:ln>
+        </p:spPr>
+        <p:txBody>
+          <a:bodyPr xmlns:a="http://schemas.openxmlformats.org/drawingml/2006/main" wrap="square" lIns="0" tIns="0" rIns="0" bIns="0" anchor="t"/>
+          <a:lstStyle xmlns:a="http://schemas.openxmlformats.org/drawingml/2006/main"/>
+          <a:p xmlns:a="http://schemas.openxmlformats.org/drawingml/2006/main">
+            <a:r>
+              <a:rPr lang="en-US" sz="1200" b="1">
+                <a:solidFill>
+                  <a:srgbClr val="1769D2"/>
+                </a:solidFill>
+                <a:latin typeface="Inter"/>
+                <a:ea typeface="Inter"/>
+              </a:rPr>
+              <a:t>BLUEPRINT LECTURE · VISUAL CARRIER</a:t>
+            </a:r>
+            <a:endParaRPr lang="en-US"/>
+          </a:p>
+        </p:txBody>
+      </p:sp>
+      <p:sp>
+        <p:nvSpPr>
+          <p:cNvPr id="4" name="visual-title"/>
+          <p:cNvSpPr txBox="1"/>
+          <p:nvPr/>
+        </p:nvSpPr>
+        <p:spPr>
+          <a:xfrm xmlns:a="http://schemas.openxmlformats.org/drawingml/2006/main">
+            <a:off x="914400" y="1638300"/>
+            <a:ext cx="5334000" cy="1143000"/>
+          </a:xfrm>
+          <a:prstGeom xmlns:a="http://schemas.openxmlformats.org/drawingml/2006/main" prst="rect">
+            <a:avLst/>
+          </a:prstGeom>
+          <a:noFill xmlns:a="http://schemas.openxmlformats.org/drawingml/2006/main"/>
+          <a:ln xmlns:a="http://schemas.openxmlformats.org/drawingml/2006/main" w="0">
+            <a:noFill/>
+          </a:ln>
+        </p:spPr>
+        <p:txBody>
+          <a:bodyPr xmlns:a="http://schemas.openxmlformats.org/drawingml/2006/main" wrap="square" lIns="0" tIns="0" rIns="0" bIns="0" anchor="t"/>
+          <a:lstStyle xmlns:a="http://schemas.openxmlformats.org/drawingml/2006/main"/>
+          <a:p xmlns:a="http://schemas.openxmlformats.org/drawingml/2006/main">
+            <a:r>
+              <a:rPr lang="en-US" sz="3300" b="1">
+                <a:solidFill>
+                  <a:srgbClr val="132A3A"/>
+                </a:solidFill>
+                <a:latin typeface="Inter"/>
+                <a:ea typeface="Inter"/>
+              </a:rPr>
+              <a:t>Evidence has a texture</a:t>
+            </a:r>
+            <a:endParaRPr lang="en-US"/>
+          </a:p>
+        </p:txBody>
+      </p:sp>
+      <p:sp>
+        <p:nvSpPr>
+          <p:cNvPr id="5" name="visual-body"/>
+          <p:cNvSpPr txBox="1"/>
+          <p:nvPr/>
+        </p:nvSpPr>
+        <p:spPr>
+          <a:xfrm xmlns:a="http://schemas.openxmlformats.org/drawingml/2006/main">
+            <a:off x="914400" y="3219450"/>
+            <a:ext cx="4762500" cy="685800"/>
+          </a:xfrm>
+          <a:prstGeom xmlns:a="http://schemas.openxmlformats.org/drawingml/2006/main" prst="rect">
+            <a:avLst/>
+          </a:prstGeom>
+          <a:noFill xmlns:a="http://schemas.openxmlformats.org/drawingml/2006/main"/>
+          <a:ln xmlns:a="http://schemas.openxmlformats.org/drawingml/2006/main" w="0">
+            <a:noFill/>
+          </a:ln>
+        </p:spPr>
+        <p:txBody>
+          <a:bodyPr xmlns:a="http://schemas.openxmlformats.org/drawingml/2006/main" wrap="square" lIns="0" tIns="0" rIns="0" bIns="0" anchor="t"/>
+          <a:lstStyle xmlns:a="http://schemas.openxmlformats.org/drawingml/2006/main"/>
+          <a:p xmlns:a="http://schemas.openxmlformats.org/drawingml/2006/main">
+            <a:r>
+              <a:rPr lang="en-US" sz="1800">
+                <a:solidFill>
+                  <a:srgbClr val="132A3A"/>
+                </a:solidFill>
+                <a:latin typeface="Inter"/>
+                <a:ea typeface="Inter"/>
+              </a:rPr>
+              <a:t>Use a visual carrier when the audience needs to see a pattern before reading the caveat.</a:t>
+            </a:r>
+            <a:endParaRPr lang="en-US"/>
+          </a:p>
+        </p:txBody>
+      </p:sp>
+      <p:sp>
+        <p:nvSpPr>
+          <p:cNvPr id="6" name="visual-rule"/>
+          <p:cNvSpPr/>
+          <p:nvPr/>
+        </p:nvSpPr>
+        <p:spPr>
+          <a:xfrm xmlns:a="http://schemas.openxmlformats.org/drawingml/2006/main">
+            <a:off x="914400" y="4476750"/>
+            <a:ext cx="4419600" cy="0"/>
+          </a:xfrm>
+          <a:prstGeom xmlns:a="http://schemas.openxmlformats.org/drawingml/2006/main" prst="line">
+            <a:avLst/>
+          </a:prstGeom>
+          <a:noFill xmlns:a="http://schemas.openxmlformats.org/drawingml/2006/main"/>
+          <a:ln xmlns:a="http://schemas.openxmlformats.org/drawingml/2006/main" w="38100">
+            <a:solidFill>
+              <a:srgbClr val="1769D2"/>
+            </a:solidFill>
+            <a:prstDash val="solid"/>
+          </a:ln>
+        </p:spPr>
+        <p:txBody>
+          <a:bodyPr xmlns:a="http://schemas.openxmlformats.org/drawingml/2006/main" wrap="square" lIns="0" tIns="0" rIns="0" bIns="0" anchor="t"/>
+          <a:lstStyle xmlns:a="http://schemas.openxmlformats.org/drawingml/2006/main"/>
+          <a:p xmlns:a="http://schemas.openxmlformats.org/drawingml/2006/main">
+            <a:r>
+              <a:rPr lang="en-US"/>
+              <a:t/>
+            </a:r>
+            <a:endParaRPr lang="en-US"/>
+          </a:p>
+        </p:txBody>
+      </p:sp>
+      <p:sp>
+        <p:nvSpPr>
+          <p:cNvPr id="7" name="visual-label"/>
+          <p:cNvSpPr txBox="1"/>
+          <p:nvPr/>
+        </p:nvSpPr>
+        <p:spPr>
+          <a:xfrm xmlns:a="http://schemas.openxmlformats.org/drawingml/2006/main">
+            <a:off x="914400" y="4819650"/>
+            <a:ext cx="4953000" cy="228600"/>
+          </a:xfrm>
+          <a:prstGeom xmlns:a="http://schemas.openxmlformats.org/drawingml/2006/main" prst="rect">
+            <a:avLst/>
+          </a:prstGeom>
+          <a:noFill xmlns:a="http://schemas.openxmlformats.org/drawingml/2006/main"/>
+          <a:ln xmlns:a="http://schemas.openxmlformats.org/drawingml/2006/main" w="0">
+            <a:noFill/>
+          </a:ln>
+        </p:spPr>
+        <p:txBody>
+          <a:bodyPr xmlns:a="http://schemas.openxmlformats.org/drawingml/2006/main" wrap="square" lIns="0" tIns="0" rIns="0" bIns="0" anchor="t"/>
+          <a:lstStyle xmlns:a="http://schemas.openxmlformats.org/drawingml/2006/main"/>
+          <a:p xmlns:a="http://schemas.openxmlformats.org/drawingml/2006/main">
+            <a:r>
+              <a:rPr lang="en-US" sz="1200" b="1">
+                <a:solidFill>
+                  <a:srgbClr val="1769D2"/>
+                </a:solidFill>
+                <a:latin typeface="Inter"/>
+                <a:ea typeface="Inter"/>
+              </a:rPr>
+              <a:t>THE IMAGE IS EVIDENCE, NOT FILL</a:t>
+            </a:r>
+            <a:endParaRPr lang="en-US"/>
+          </a:p>
+        </p:txBody>
+      </p:sp>
+      <p:sp>
+        <p:nvSpPr>
+          <p:cNvPr id="8" name="source"/>
+          <p:cNvSpPr txBox="1"/>
+          <p:nvPr/>
+        </p:nvSpPr>
+        <p:spPr>
+          <a:xfrm xmlns:a="http://schemas.openxmlformats.org/drawingml/2006/main">
+            <a:off x="914400" y="7829550"/>
+            <a:ext cx="10953750" cy="209550"/>
+          </a:xfrm>
+          <a:prstGeom xmlns:a="http://schemas.openxmlformats.org/drawingml/2006/main" prst="rect">
+            <a:avLst/>
+          </a:prstGeom>
+          <a:noFill xmlns:a="http://schemas.openxmlformats.org/drawingml/2006/main"/>
+          <a:ln xmlns:a="http://schemas.openxmlformats.org/drawingml/2006/main" w="0">
+            <a:noFill/>
+          </a:ln>
+        </p:spPr>
+        <p:txBody>
+          <a:bodyPr xmlns:a="http://schemas.openxmlformats.org/drawingml/2006/main" wrap="square" lIns="0" tIns="0" rIns="0" bIns="0" anchor="t"/>
+          <a:lstStyle xmlns:a="http://schemas.openxmlformats.org/drawingml/2006/main"/>
+          <a:p xmlns:a="http://schemas.openxmlformats.org/drawingml/2006/main">
+            <a:r>
+              <a:rPr lang="en-US" sz="1050">
+                <a:solidFill>
+                  <a:srgbClr val="8A969F"/>
+                </a:solidFill>
+                <a:latin typeface="Inter"/>
+                <a:ea typeface="Inter"/>
+              </a:rPr>
+              <a:t>OfficeKit original clean-room visual field · fictional content</a:t>
+            </a:r>
+            <a:endParaRPr lang="en-US"/>
+          </a:p>
+        </p:txBody>
+      </p:sp>
+      <p:sp>
+        <p:nvSpPr>
+          <p:cNvPr id="9" name="page-number"/>
+          <p:cNvSpPr txBox="1"/>
+          <p:nvPr/>
+        </p:nvSpPr>
+        <p:spPr>
+          <a:xfrm xmlns:a="http://schemas.openxmlformats.org/drawingml/2006/main">
+            <a:off x="13335000" y="7829550"/>
+            <a:ext cx="952500" cy="209550"/>
+          </a:xfrm>
+          <a:prstGeom xmlns:a="http://schemas.openxmlformats.org/drawingml/2006/main" prst="rect">
+            <a:avLst/>
+          </a:prstGeom>
+          <a:noFill xmlns:a="http://schemas.openxmlformats.org/drawingml/2006/main"/>
+          <a:ln xmlns:a="http://schemas.openxmlformats.org/drawingml/2006/main" w="0">
+            <a:noFill/>
+          </a:ln>
+        </p:spPr>
+        <p:txBody>
+          <a:bodyPr xmlns:a="http://schemas.openxmlformats.org/drawingml/2006/main" wrap="square" lIns="0" tIns="0" rIns="0" bIns="0" anchor="t"/>
+          <a:lstStyle xmlns:a="http://schemas.openxmlformats.org/drawingml/2006/main"/>
+          <a:p xmlns:a="http://schemas.openxmlformats.org/drawingml/2006/main">
+            <a:pPr algn="r"/>
+            <a:r>
+              <a:rPr lang="en-US" sz="1050">
+                <a:solidFill>
+                  <a:srgbClr val="8A969F"/>
+                </a:solidFill>
+                <a:latin typeface="Inter"/>
+                <a:ea typeface="Inter"/>
+              </a:rPr>
+              <a:t>5 / 6</a:t>
+            </a:r>
+            <a:endParaRPr lang="en-US"/>
+          </a:p>
+        </p:txBody>
+      </p:sp>
+    </p:spTree>
+  </p:cSld>
+  <p:clrMapOvr>
+    <a:masterClrMapping xmlns:a="http://schemas.openxmlformats.org/drawingml/2006/main"/>
+  </p:clrMapOvr>
+</p:sld>
+</file>
+
+<file path=ppt/slides/slide6.xml><?xml version="1.0" encoding="utf-8"?>
+<p:sld xmlns:p="http://schemas.openxmlformats.org/presentationml/2006/main">
+  <p:cSld name="Decision close">
     <p:bg>
       <p:bgPr>
         <a:blipFill xmlns:a="http://schemas.openxmlformats.org/drawingml/2006/main">
@@ -3858,21 +4253,21 @@
       </p:grpSpPr>
       <p:sp>
         <p:nvSpPr>
-          <p:cNvPr id="2" name="visual-scrim"/>
+          <p:cNvPr id="2" name="close-paper-scrim"/>
           <p:cNvSpPr/>
           <p:nvPr/>
         </p:nvSpPr>
         <p:spPr>
           <a:xfrm xmlns:a="http://schemas.openxmlformats.org/drawingml/2006/main">
             <a:off x="0" y="0"/>
-            <a:ext cx="6858000" cy="8572500"/>
+            <a:ext cx="7429500" cy="8572500"/>
           </a:xfrm>
           <a:prstGeom xmlns:a="http://schemas.openxmlformats.org/drawingml/2006/main" prst="rect">
             <a:avLst/>
           </a:prstGeom>
           <a:solidFill xmlns:a="http://schemas.openxmlformats.org/drawingml/2006/main">
             <a:srgbClr val="F8FAFC">
-              <a:alpha val="94000"/>
+              <a:alpha val="96000"/>
             </a:srgbClr>
           </a:solidFill>
           <a:ln xmlns:a="http://schemas.openxmlformats.org/drawingml/2006/main" w="0">
@@ -3896,125 +4291,14 @@
       </p:sp>
       <p:sp>
         <p:nvSpPr>
-          <p:cNvPr id="3" name="visual-eyebrow"/>
-          <p:cNvSpPr txBox="1"/>
-          <p:nvPr/>
-        </p:nvSpPr>
-        <p:spPr>
-          <a:xfrm xmlns:a="http://schemas.openxmlformats.org/drawingml/2006/main">
-            <a:off x="914400" y="895350"/>
-            <a:ext cx="6667500" cy="228600"/>
-          </a:xfrm>
-          <a:prstGeom xmlns:a="http://schemas.openxmlformats.org/drawingml/2006/main" prst="rect">
-            <a:avLst/>
-          </a:prstGeom>
-          <a:noFill xmlns:a="http://schemas.openxmlformats.org/drawingml/2006/main"/>
-          <a:ln xmlns:a="http://schemas.openxmlformats.org/drawingml/2006/main" w="0">
-            <a:noFill/>
-          </a:ln>
-        </p:spPr>
-        <p:txBody>
-          <a:bodyPr xmlns:a="http://schemas.openxmlformats.org/drawingml/2006/main" wrap="square" lIns="0" tIns="0" rIns="0" bIns="0" anchor="t"/>
-          <a:lstStyle xmlns:a="http://schemas.openxmlformats.org/drawingml/2006/main"/>
-          <a:p xmlns:a="http://schemas.openxmlformats.org/drawingml/2006/main">
-            <a:r>
-              <a:rPr lang="en-US" sz="1200" b="1">
-                <a:solidFill>
-                  <a:srgbClr val="1769D2"/>
-                </a:solidFill>
-                <a:latin typeface="Inter"/>
-                <a:ea typeface="Inter"/>
-              </a:rPr>
-              <a:t>BLUEPRINT LECTURE · VISUAL CARRIER</a:t>
-            </a:r>
-            <a:endParaRPr lang="en-US"/>
-          </a:p>
-        </p:txBody>
-      </p:sp>
-      <p:sp>
-        <p:nvSpPr>
-          <p:cNvPr id="4" name="visual-title"/>
-          <p:cNvSpPr txBox="1"/>
-          <p:nvPr/>
-        </p:nvSpPr>
-        <p:spPr>
-          <a:xfrm xmlns:a="http://schemas.openxmlformats.org/drawingml/2006/main">
-            <a:off x="914400" y="1638300"/>
-            <a:ext cx="5334000" cy="1143000"/>
-          </a:xfrm>
-          <a:prstGeom xmlns:a="http://schemas.openxmlformats.org/drawingml/2006/main" prst="rect">
-            <a:avLst/>
-          </a:prstGeom>
-          <a:noFill xmlns:a="http://schemas.openxmlformats.org/drawingml/2006/main"/>
-          <a:ln xmlns:a="http://schemas.openxmlformats.org/drawingml/2006/main" w="0">
-            <a:noFill/>
-          </a:ln>
-        </p:spPr>
-        <p:txBody>
-          <a:bodyPr xmlns:a="http://schemas.openxmlformats.org/drawingml/2006/main" wrap="square" lIns="0" tIns="0" rIns="0" bIns="0" anchor="t"/>
-          <a:lstStyle xmlns:a="http://schemas.openxmlformats.org/drawingml/2006/main"/>
-          <a:p xmlns:a="http://schemas.openxmlformats.org/drawingml/2006/main">
-            <a:r>
-              <a:rPr lang="en-US" sz="3300" b="1">
-                <a:solidFill>
-                  <a:srgbClr val="132A3A"/>
-                </a:solidFill>
-                <a:latin typeface="Inter"/>
-                <a:ea typeface="Inter"/>
-              </a:rPr>
-              <a:t>Evidence has a texture</a:t>
-            </a:r>
-            <a:endParaRPr lang="en-US"/>
-          </a:p>
-        </p:txBody>
-      </p:sp>
-      <p:sp>
-        <p:nvSpPr>
-          <p:cNvPr id="5" name="visual-body"/>
-          <p:cNvSpPr txBox="1"/>
-          <p:nvPr/>
-        </p:nvSpPr>
-        <p:spPr>
-          <a:xfrm xmlns:a="http://schemas.openxmlformats.org/drawingml/2006/main">
-            <a:off x="914400" y="3219450"/>
-            <a:ext cx="4762500" cy="685800"/>
-          </a:xfrm>
-          <a:prstGeom xmlns:a="http://schemas.openxmlformats.org/drawingml/2006/main" prst="rect">
-            <a:avLst/>
-          </a:prstGeom>
-          <a:noFill xmlns:a="http://schemas.openxmlformats.org/drawingml/2006/main"/>
-          <a:ln xmlns:a="http://schemas.openxmlformats.org/drawingml/2006/main" w="0">
-            <a:noFill/>
-          </a:ln>
-        </p:spPr>
-        <p:txBody>
-          <a:bodyPr xmlns:a="http://schemas.openxmlformats.org/drawingml/2006/main" wrap="square" lIns="0" tIns="0" rIns="0" bIns="0" anchor="t"/>
-          <a:lstStyle xmlns:a="http://schemas.openxmlformats.org/drawingml/2006/main"/>
-          <a:p xmlns:a="http://schemas.openxmlformats.org/drawingml/2006/main">
-            <a:r>
-              <a:rPr lang="en-US" sz="1800">
-                <a:solidFill>
-                  <a:srgbClr val="132A3A"/>
-                </a:solidFill>
-                <a:latin typeface="Inter"/>
-                <a:ea typeface="Inter"/>
-              </a:rPr>
-              <a:t>Use a visual carrier when the audience needs to see a pattern before reading the caveat.</a:t>
-            </a:r>
-            <a:endParaRPr lang="en-US"/>
-          </a:p>
-        </p:txBody>
-      </p:sp>
-      <p:sp>
-        <p:nvSpPr>
-          <p:cNvPr id="6" name="visual-rule"/>
+          <p:cNvPr id="3" name="close-top-rule"/>
           <p:cNvSpPr/>
           <p:nvPr/>
         </p:nvSpPr>
         <p:spPr>
           <a:xfrm xmlns:a="http://schemas.openxmlformats.org/drawingml/2006/main">
-            <a:off x="914400" y="4476750"/>
-            <a:ext cx="4419600" cy="0"/>
+            <a:off x="838200" y="666750"/>
+            <a:ext cx="13563600" cy="0"/>
           </a:xfrm>
           <a:prstGeom xmlns:a="http://schemas.openxmlformats.org/drawingml/2006/main" prst="line">
             <a:avLst/>
@@ -4041,225 +4325,6 @@
       </p:sp>
       <p:sp>
         <p:nvSpPr>
-          <p:cNvPr id="7" name="visual-label"/>
-          <p:cNvSpPr txBox="1"/>
-          <p:nvPr/>
-        </p:nvSpPr>
-        <p:spPr>
-          <a:xfrm xmlns:a="http://schemas.openxmlformats.org/drawingml/2006/main">
-            <a:off x="914400" y="4819650"/>
-            <a:ext cx="4953000" cy="228600"/>
-          </a:xfrm>
-          <a:prstGeom xmlns:a="http://schemas.openxmlformats.org/drawingml/2006/main" prst="rect">
-            <a:avLst/>
-          </a:prstGeom>
-          <a:noFill xmlns:a="http://schemas.openxmlformats.org/drawingml/2006/main"/>
-          <a:ln xmlns:a="http://schemas.openxmlformats.org/drawingml/2006/main" w="0">
-            <a:noFill/>
-          </a:ln>
-        </p:spPr>
-        <p:txBody>
-          <a:bodyPr xmlns:a="http://schemas.openxmlformats.org/drawingml/2006/main" wrap="square" lIns="0" tIns="0" rIns="0" bIns="0" anchor="t"/>
-          <a:lstStyle xmlns:a="http://schemas.openxmlformats.org/drawingml/2006/main"/>
-          <a:p xmlns:a="http://schemas.openxmlformats.org/drawingml/2006/main">
-            <a:r>
-              <a:rPr lang="en-US" sz="1200" b="1">
-                <a:solidFill>
-                  <a:srgbClr val="1769D2"/>
-                </a:solidFill>
-                <a:latin typeface="Inter"/>
-                <a:ea typeface="Inter"/>
-              </a:rPr>
-              <a:t>THE IMAGE IS EVIDENCE, NOT FILL</a:t>
-            </a:r>
-            <a:endParaRPr lang="en-US"/>
-          </a:p>
-        </p:txBody>
-      </p:sp>
-      <p:sp>
-        <p:nvSpPr>
-          <p:cNvPr id="8" name="source"/>
-          <p:cNvSpPr txBox="1"/>
-          <p:nvPr/>
-        </p:nvSpPr>
-        <p:spPr>
-          <a:xfrm xmlns:a="http://schemas.openxmlformats.org/drawingml/2006/main">
-            <a:off x="914400" y="7829550"/>
-            <a:ext cx="10953750" cy="209550"/>
-          </a:xfrm>
-          <a:prstGeom xmlns:a="http://schemas.openxmlformats.org/drawingml/2006/main" prst="rect">
-            <a:avLst/>
-          </a:prstGeom>
-          <a:noFill xmlns:a="http://schemas.openxmlformats.org/drawingml/2006/main"/>
-          <a:ln xmlns:a="http://schemas.openxmlformats.org/drawingml/2006/main" w="0">
-            <a:noFill/>
-          </a:ln>
-        </p:spPr>
-        <p:txBody>
-          <a:bodyPr xmlns:a="http://schemas.openxmlformats.org/drawingml/2006/main" wrap="square" lIns="0" tIns="0" rIns="0" bIns="0" anchor="t"/>
-          <a:lstStyle xmlns:a="http://schemas.openxmlformats.org/drawingml/2006/main"/>
-          <a:p xmlns:a="http://schemas.openxmlformats.org/drawingml/2006/main">
-            <a:r>
-              <a:rPr lang="en-US" sz="1050">
-                <a:solidFill>
-                  <a:srgbClr val="8A969F"/>
-                </a:solidFill>
-                <a:latin typeface="Inter"/>
-                <a:ea typeface="Inter"/>
-              </a:rPr>
-              <a:t>OfficeKit original clean-room visual field · fictional content</a:t>
-            </a:r>
-            <a:endParaRPr lang="en-US"/>
-          </a:p>
-        </p:txBody>
-      </p:sp>
-      <p:sp>
-        <p:nvSpPr>
-          <p:cNvPr id="9" name="page-number"/>
-          <p:cNvSpPr txBox="1"/>
-          <p:nvPr/>
-        </p:nvSpPr>
-        <p:spPr>
-          <a:xfrm xmlns:a="http://schemas.openxmlformats.org/drawingml/2006/main">
-            <a:off x="13335000" y="7829550"/>
-            <a:ext cx="952500" cy="209550"/>
-          </a:xfrm>
-          <a:prstGeom xmlns:a="http://schemas.openxmlformats.org/drawingml/2006/main" prst="rect">
-            <a:avLst/>
-          </a:prstGeom>
-          <a:noFill xmlns:a="http://schemas.openxmlformats.org/drawingml/2006/main"/>
-          <a:ln xmlns:a="http://schemas.openxmlformats.org/drawingml/2006/main" w="0">
-            <a:noFill/>
-          </a:ln>
-        </p:spPr>
-        <p:txBody>
-          <a:bodyPr xmlns:a="http://schemas.openxmlformats.org/drawingml/2006/main" wrap="square" lIns="0" tIns="0" rIns="0" bIns="0" anchor="t"/>
-          <a:lstStyle xmlns:a="http://schemas.openxmlformats.org/drawingml/2006/main"/>
-          <a:p xmlns:a="http://schemas.openxmlformats.org/drawingml/2006/main">
-            <a:pPr algn="r"/>
-            <a:r>
-              <a:rPr lang="en-US" sz="1050">
-                <a:solidFill>
-                  <a:srgbClr val="8A969F"/>
-                </a:solidFill>
-                <a:latin typeface="Inter"/>
-                <a:ea typeface="Inter"/>
-              </a:rPr>
-              <a:t>5 / 6</a:t>
-            </a:r>
-            <a:endParaRPr lang="en-US"/>
-          </a:p>
-        </p:txBody>
-      </p:sp>
-    </p:spTree>
-  </p:cSld>
-  <p:clrMapOvr>
-    <a:masterClrMapping xmlns:a="http://schemas.openxmlformats.org/drawingml/2006/main"/>
-  </p:clrMapOvr>
-</p:sld>
-</file>
-
-<file path=ppt/slides/slide6.xml><?xml version="1.0" encoding="utf-8"?>
-<p:sld xmlns:p="http://schemas.openxmlformats.org/presentationml/2006/main">
-  <p:cSld name="Decision close">
-    <p:bg>
-      <p:bgPr>
-        <a:blipFill xmlns:a="http://schemas.openxmlformats.org/drawingml/2006/main">
-          <a:blip xmlns:r="http://schemas.openxmlformats.org/officeDocument/2006/relationships" r:embed="rIdOfficeKitImage8bca39c9b7ba070f_1"/>
-          <a:stretch>
-            <a:fillRect/>
-          </a:stretch>
-        </a:blipFill>
-      </p:bgPr>
-    </p:bg>
-    <p:spTree>
-      <p:nvGrpSpPr>
-        <p:cNvPr id="1" name=""/>
-        <p:cNvGrpSpPr/>
-        <p:nvPr/>
-      </p:nvGrpSpPr>
-      <p:grpSpPr>
-        <a:xfrm xmlns:a="http://schemas.openxmlformats.org/drawingml/2006/main">
-          <a:off x="0" y="0"/>
-          <a:ext cx="0" cy="0"/>
-          <a:chOff x="0" y="0"/>
-          <a:chExt cx="0" cy="0"/>
-        </a:xfrm>
-      </p:grpSpPr>
-      <p:sp>
-        <p:nvSpPr>
-          <p:cNvPr id="2" name="close-paper-scrim"/>
-          <p:cNvSpPr/>
-          <p:nvPr/>
-        </p:nvSpPr>
-        <p:spPr>
-          <a:xfrm xmlns:a="http://schemas.openxmlformats.org/drawingml/2006/main">
-            <a:off x="0" y="0"/>
-            <a:ext cx="7429500" cy="8572500"/>
-          </a:xfrm>
-          <a:prstGeom xmlns:a="http://schemas.openxmlformats.org/drawingml/2006/main" prst="rect">
-            <a:avLst/>
-          </a:prstGeom>
-          <a:solidFill xmlns:a="http://schemas.openxmlformats.org/drawingml/2006/main">
-            <a:srgbClr val="F8FAFC">
-              <a:alpha val="96000"/>
-            </a:srgbClr>
-          </a:solidFill>
-          <a:ln xmlns:a="http://schemas.openxmlformats.org/drawingml/2006/main" w="0">
-            <a:solidFill>
-              <a:srgbClr val="F8FAFC"/>
-            </a:solidFill>
-            <a:prstDash val="solid"/>
-          </a:ln>
-        </p:spPr>
-        <p:txBody>
-          <a:bodyPr xmlns:a="http://schemas.openxmlformats.org/drawingml/2006/main" wrap="square" lIns="0" tIns="0" rIns="0" bIns="0" anchor="t"/>
-          <a:lstStyle xmlns:a="http://schemas.openxmlformats.org/drawingml/2006/main"/>
-          <a:p xmlns:a="http://schemas.openxmlformats.org/drawingml/2006/main">
-            <a:r>
-              <a:rPr lang="en-US"/>
-              <a:t/>
-            </a:r>
-            <a:endParaRPr lang="en-US"/>
-          </a:p>
-        </p:txBody>
-      </p:sp>
-      <p:sp>
-        <p:nvSpPr>
-          <p:cNvPr id="3" name="close-top-rule"/>
-          <p:cNvSpPr/>
-          <p:nvPr/>
-        </p:nvSpPr>
-        <p:spPr>
-          <a:xfrm xmlns:a="http://schemas.openxmlformats.org/drawingml/2006/main">
-            <a:off x="838200" y="666750"/>
-            <a:ext cx="13563600" cy="0"/>
-          </a:xfrm>
-          <a:prstGeom xmlns:a="http://schemas.openxmlformats.org/drawingml/2006/main" prst="line">
-            <a:avLst/>
-          </a:prstGeom>
-          <a:noFill xmlns:a="http://schemas.openxmlformats.org/drawingml/2006/main"/>
-          <a:ln xmlns:a="http://schemas.openxmlformats.org/drawingml/2006/main" w="38100">
-            <a:solidFill>
-              <a:srgbClr val="1769D2"/>
-            </a:solidFill>
-            <a:prstDash val="solid"/>
-          </a:ln>
-        </p:spPr>
-        <p:txBody>
-          <a:bodyPr xmlns:a="http://schemas.openxmlformats.org/drawingml/2006/main" wrap="square" lIns="0" tIns="0" rIns="0" bIns="0" anchor="t"/>
-          <a:lstStyle xmlns:a="http://schemas.openxmlformats.org/drawingml/2006/main"/>
-          <a:p xmlns:a="http://schemas.openxmlformats.org/drawingml/2006/main">
-            <a:r>
-              <a:rPr lang="en-US"/>
-              <a:t/>
-            </a:r>
-            <a:endParaRPr lang="en-US"/>
-          </a:p>
-        </p:txBody>
-      </p:sp>
-      <p:sp>
-        <p:nvSpPr>
           <p:cNvPr id="4" name="BLUEPRINT LECTURE · CLOSE"/>
           <p:cNvSpPr txBox="1"/>
           <p:nvPr/>
@@ -4304,29 +4369,42 @@
         <p:spPr>
           <a:xfrm xmlns:a="http://schemas.openxmlformats.org/drawingml/2006/main">
             <a:off x="914400" y="1314450"/>
-            <a:ext cx="6286500" cy="552450"/>
-          </a:xfrm>
-          <a:prstGeom xmlns:a="http://schemas.openxmlformats.org/drawingml/2006/main" prst="rect">
-            <a:avLst/>
-          </a:prstGeom>
-          <a:noFill xmlns:a="http://schemas.openxmlformats.org/drawingml/2006/main"/>
-          <a:ln xmlns:a="http://schemas.openxmlformats.org/drawingml/2006/main" w="0">
-            <a:noFill/>
-          </a:ln>
-        </p:spPr>
-        <p:txBody>
-          <a:bodyPr xmlns:a="http://schemas.openxmlformats.org/drawingml/2006/main" wrap="square" lIns="0" tIns="0" rIns="0" bIns="0" anchor="t"/>
-          <a:lstStyle xmlns:a="http://schemas.openxmlformats.org/drawingml/2006/main"/>
-          <a:p xmlns:a="http://schemas.openxmlformats.org/drawingml/2006/main">
-            <a:r>
-              <a:rPr lang="en-US" sz="2850" b="1">
+            <a:ext cx="6286500" cy="914400"/>
+          </a:xfrm>
+          <a:prstGeom xmlns:a="http://schemas.openxmlformats.org/drawingml/2006/main" prst="rect">
+            <a:avLst/>
+          </a:prstGeom>
+          <a:noFill xmlns:a="http://schemas.openxmlformats.org/drawingml/2006/main"/>
+          <a:ln xmlns:a="http://schemas.openxmlformats.org/drawingml/2006/main" w="0">
+            <a:noFill/>
+          </a:ln>
+        </p:spPr>
+        <p:txBody>
+          <a:bodyPr xmlns:a="http://schemas.openxmlformats.org/drawingml/2006/main" wrap="square" lIns="0" tIns="0" rIns="0" bIns="0" anchor="t"/>
+          <a:lstStyle xmlns:a="http://schemas.openxmlformats.org/drawingml/2006/main"/>
+          <a:p xmlns:a="http://schemas.openxmlformats.org/drawingml/2006/main">
+            <a:r>
+              <a:rPr lang="en-US" sz="2550" b="1">
                 <a:solidFill>
                   <a:srgbClr val="132A3A"/>
                 </a:solidFill>
                 <a:latin typeface="Inter"/>
                 <a:ea typeface="Inter"/>
               </a:rPr>
-              <a:t>A cleared gate is a decision, not a universal claim</a:t>
+              <a:t>A cleared gate is a decision, not a</a:t>
+            </a:r>
+            <a:endParaRPr lang="en-US"/>
+          </a:p>
+          <a:p xmlns:a="http://schemas.openxmlformats.org/drawingml/2006/main">
+            <a:r>
+              <a:rPr lang="en-US" sz="2550" b="1">
+                <a:solidFill>
+                  <a:srgbClr val="132A3A"/>
+                </a:solidFill>
+                <a:latin typeface="Inter"/>
+                <a:ea typeface="Inter"/>
+              </a:rPr>
+              <a:t>universal claim</a:t>
             </a:r>
             <a:endParaRPr lang="en-US"/>
           </a:p>
@@ -4340,7 +4418,7 @@
         </p:nvSpPr>
         <p:spPr>
           <a:xfrm xmlns:a="http://schemas.openxmlformats.org/drawingml/2006/main">
-            <a:off x="952500" y="1981200"/>
+            <a:off x="952500" y="2190750"/>
             <a:ext cx="6096000" cy="266700"/>
           </a:xfrm>
           <a:prstGeom xmlns:a="http://schemas.openxmlformats.org/drawingml/2006/main" prst="rect">

--- a/skills/presentation-template-library/skills/artifact-template-blueprint-lecture/assets/reference.pptx
+++ b/skills/presentation-template-library/skills/artifact-template-blueprint-lecture/assets/reference.pptx
@@ -376,7 +376,7 @@
     <p:bg>
       <p:bgPr>
         <a:blipFill xmlns:a="http://schemas.openxmlformats.org/drawingml/2006/main">
-          <a:blip xmlns:r="http://schemas.openxmlformats.org/officeDocument/2006/relationships" r:embed="rIdOfficeKitImage45ba195e2a5649fb_1"/>
+          <a:blip xmlns:r="http://schemas.openxmlformats.org/officeDocument/2006/relationships" r:embed="rIdOfficeKitImage092dd3ee80187530_1"/>
           <a:stretch>
             <a:fillRect/>
           </a:stretch>
@@ -1171,7 +1171,7 @@
     <p:bg>
       <p:bgPr>
         <a:blipFill xmlns:a="http://schemas.openxmlformats.org/drawingml/2006/main">
-          <a:blip xmlns:r="http://schemas.openxmlformats.org/officeDocument/2006/relationships" r:embed="rIdOfficeKitImageaeb6f74d36d260d0_1"/>
+          <a:blip xmlns:r="http://schemas.openxmlformats.org/officeDocument/2006/relationships" r:embed="rIdOfficeKitImaged71bfa074cda59bb_1"/>
           <a:stretch>
             <a:fillRect/>
           </a:stretch>
@@ -2093,7 +2093,7 @@
     <p:bg>
       <p:bgPr>
         <a:blipFill xmlns:a="http://schemas.openxmlformats.org/drawingml/2006/main">
-          <a:blip xmlns:r="http://schemas.openxmlformats.org/officeDocument/2006/relationships" r:embed="rIdOfficeKitImage59ee3aa5202fd02f_1"/>
+          <a:blip xmlns:r="http://schemas.openxmlformats.org/officeDocument/2006/relationships" r:embed="rIdOfficeKitImage6af8c9b5dff6e3a3_1"/>
           <a:stretch>
             <a:fillRect/>
           </a:stretch>
@@ -2396,7 +2396,7 @@
         </p:xfrm>
         <a:graphic xmlns:a="http://schemas.openxmlformats.org/drawingml/2006/main">
           <a:graphicData uri="http://schemas.openxmlformats.org/drawingml/2006/chart">
-            <c:chart xmlns:r="http://schemas.openxmlformats.org/officeDocument/2006/relationships" xmlns:c="http://schemas.openxmlformats.org/drawingml/2006/chart" r:id="R133bb7c8f99c4ad0"/>
+            <c:chart xmlns:r="http://schemas.openxmlformats.org/officeDocument/2006/relationships" xmlns:c="http://schemas.openxmlformats.org/drawingml/2006/chart" r:id="R14a5cadfdc29479d"/>
           </a:graphicData>
         </a:graphic>
       </p:graphicFrame>
@@ -3900,7 +3900,7 @@
     <p:bg>
       <p:bgPr>
         <a:blipFill xmlns:a="http://schemas.openxmlformats.org/drawingml/2006/main">
-          <a:blip xmlns:r="http://schemas.openxmlformats.org/officeDocument/2006/relationships" r:embed="rIdOfficeKitImage2930549abca3ae00_1"/>
+          <a:blip xmlns:r="http://schemas.openxmlformats.org/officeDocument/2006/relationships" r:embed="rIdOfficeKitImage56df3e49f11f0ff0_1"/>
           <a:stretch>
             <a:fillRect/>
           </a:stretch>
@@ -4230,7 +4230,7 @@
     <p:bg>
       <p:bgPr>
         <a:blipFill xmlns:a="http://schemas.openxmlformats.org/drawingml/2006/main">
-          <a:blip xmlns:r="http://schemas.openxmlformats.org/officeDocument/2006/relationships" r:embed="rIdOfficeKitImaged71bfa074cda59bb_1"/>
+          <a:blip xmlns:r="http://schemas.openxmlformats.org/officeDocument/2006/relationships" r:embed="rIdOfficeKitImagec2e9a9d799668dd3_1"/>
           <a:stretch>
             <a:fillRect/>
           </a:stretch>

--- a/skills/presentation-template-library/skills/artifact-template-blueprint-lecture/assets/reference.pptx
+++ b/skills/presentation-template-library/skills/artifact-template-blueprint-lecture/assets/reference.pptx
@@ -376,6 +376,1723 @@
     <p:bg>
       <p:bgPr>
         <a:blipFill xmlns:a="http://schemas.openxmlformats.org/drawingml/2006/main">
+          <a:blip xmlns:r="http://schemas.openxmlformats.org/officeDocument/2006/relationships" r:embed="rIdOfficeKitImage56df3e49f11f0ff0_1"/>
+          <a:stretch>
+            <a:fillRect/>
+          </a:stretch>
+        </a:blipFill>
+      </p:bgPr>
+    </p:bg>
+    <p:spTree>
+      <p:nvGrpSpPr>
+        <p:cNvPr id="1" name=""/>
+        <p:cNvGrpSpPr/>
+        <p:nvPr/>
+      </p:nvGrpSpPr>
+      <p:grpSpPr>
+        <a:xfrm xmlns:a="http://schemas.openxmlformats.org/drawingml/2006/main">
+          <a:off x="0" y="0"/>
+          <a:ext cx="0" cy="0"/>
+          <a:chOff x="0" y="0"/>
+          <a:chExt cx="0" cy="0"/>
+        </a:xfrm>
+      </p:grpSpPr>
+      <p:sp>
+        <p:nvSpPr>
+          <p:cNvPr id="2" name="cover-paper-scrim"/>
+          <p:cNvSpPr/>
+          <p:nvPr/>
+        </p:nvSpPr>
+        <p:spPr>
+          <a:xfrm xmlns:a="http://schemas.openxmlformats.org/drawingml/2006/main">
+            <a:off x="0" y="0"/>
+            <a:ext cx="9525000" cy="8572500"/>
+          </a:xfrm>
+          <a:prstGeom xmlns:a="http://schemas.openxmlformats.org/drawingml/2006/main" prst="rect">
+            <a:avLst/>
+          </a:prstGeom>
+          <a:solidFill xmlns:a="http://schemas.openxmlformats.org/drawingml/2006/main">
+            <a:srgbClr val="F8FAFC">
+              <a:alpha val="100000"/>
+            </a:srgbClr>
+          </a:solidFill>
+          <a:ln xmlns:a="http://schemas.openxmlformats.org/drawingml/2006/main" w="0">
+            <a:solidFill>
+              <a:srgbClr val="F8FAFC"/>
+            </a:solidFill>
+            <a:prstDash val="solid"/>
+          </a:ln>
+        </p:spPr>
+        <p:txBody>
+          <a:bodyPr xmlns:a="http://schemas.openxmlformats.org/drawingml/2006/main" wrap="square" lIns="0" tIns="0" rIns="0" bIns="0" anchor="t"/>
+          <a:lstStyle xmlns:a="http://schemas.openxmlformats.org/drawingml/2006/main"/>
+          <a:p xmlns:a="http://schemas.openxmlformats.org/drawingml/2006/main">
+            <a:r>
+              <a:rPr lang="en-US"/>
+              <a:t/>
+            </a:r>
+            <a:endParaRPr lang="en-US"/>
+          </a:p>
+        </p:txBody>
+      </p:sp>
+      <p:sp>
+        <p:nvSpPr>
+          <p:cNvPr id="3" name="top-rule"/>
+          <p:cNvSpPr/>
+          <p:nvPr/>
+        </p:nvSpPr>
+        <p:spPr>
+          <a:xfrm xmlns:a="http://schemas.openxmlformats.org/drawingml/2006/main">
+            <a:off x="838200" y="666750"/>
+            <a:ext cx="13563600" cy="0"/>
+          </a:xfrm>
+          <a:prstGeom xmlns:a="http://schemas.openxmlformats.org/drawingml/2006/main" prst="line">
+            <a:avLst/>
+          </a:prstGeom>
+          <a:noFill xmlns:a="http://schemas.openxmlformats.org/drawingml/2006/main"/>
+          <a:ln xmlns:a="http://schemas.openxmlformats.org/drawingml/2006/main" w="38100">
+            <a:solidFill>
+              <a:srgbClr val="1769D2"/>
+            </a:solidFill>
+            <a:prstDash val="solid"/>
+          </a:ln>
+        </p:spPr>
+        <p:txBody>
+          <a:bodyPr xmlns:a="http://schemas.openxmlformats.org/drawingml/2006/main" wrap="square" lIns="0" tIns="0" rIns="0" bIns="0" anchor="t"/>
+          <a:lstStyle xmlns:a="http://schemas.openxmlformats.org/drawingml/2006/main"/>
+          <a:p xmlns:a="http://schemas.openxmlformats.org/drawingml/2006/main">
+            <a:r>
+              <a:rPr lang="en-US"/>
+              <a:t/>
+            </a:r>
+            <a:endParaRPr lang="en-US"/>
+          </a:p>
+        </p:txBody>
+      </p:sp>
+      <p:sp>
+        <p:nvSpPr>
+          <p:cNvPr id="4" name="eyebrow"/>
+          <p:cNvSpPr txBox="1"/>
+          <p:nvPr/>
+        </p:nvSpPr>
+        <p:spPr>
+          <a:xfrm xmlns:a="http://schemas.openxmlformats.org/drawingml/2006/main">
+            <a:off x="914400" y="895350"/>
+            <a:ext cx="7239000" cy="228600"/>
+          </a:xfrm>
+          <a:prstGeom xmlns:a="http://schemas.openxmlformats.org/drawingml/2006/main" prst="rect">
+            <a:avLst/>
+          </a:prstGeom>
+          <a:noFill xmlns:a="http://schemas.openxmlformats.org/drawingml/2006/main"/>
+          <a:ln xmlns:a="http://schemas.openxmlformats.org/drawingml/2006/main" w="0">
+            <a:noFill/>
+          </a:ln>
+        </p:spPr>
+        <p:txBody>
+          <a:bodyPr xmlns:a="http://schemas.openxmlformats.org/drawingml/2006/main" wrap="square" lIns="0" tIns="0" rIns="0" bIns="0" anchor="t"/>
+          <a:lstStyle xmlns:a="http://schemas.openxmlformats.org/drawingml/2006/main"/>
+          <a:p xmlns:a="http://schemas.openxmlformats.org/drawingml/2006/main">
+            <a:r>
+              <a:rPr lang="en-US" sz="1200" b="1">
+                <a:solidFill>
+                  <a:srgbClr val="1769D2"/>
+                </a:solidFill>
+                <a:latin typeface="Inter"/>
+                <a:ea typeface="Inter"/>
+              </a:rPr>
+              <a:t>ACADEMIC · OFFICEKIT CALIBRATION</a:t>
+            </a:r>
+            <a:endParaRPr lang="en-US"/>
+          </a:p>
+        </p:txBody>
+      </p:sp>
+      <p:sp>
+        <p:nvSpPr>
+          <p:cNvPr id="5" name="cover-title"/>
+          <p:cNvSpPr txBox="1"/>
+          <p:nvPr/>
+        </p:nvSpPr>
+        <p:spPr>
+          <a:xfrm xmlns:a="http://schemas.openxmlformats.org/drawingml/2006/main">
+            <a:off x="914400" y="1571625"/>
+            <a:ext cx="8382000" cy="1066800"/>
+          </a:xfrm>
+          <a:prstGeom xmlns:a="http://schemas.openxmlformats.org/drawingml/2006/main" prst="rect">
+            <a:avLst/>
+          </a:prstGeom>
+          <a:noFill xmlns:a="http://schemas.openxmlformats.org/drawingml/2006/main"/>
+          <a:ln xmlns:a="http://schemas.openxmlformats.org/drawingml/2006/main" w="0">
+            <a:noFill/>
+          </a:ln>
+        </p:spPr>
+        <p:txBody>
+          <a:bodyPr xmlns:a="http://schemas.openxmlformats.org/drawingml/2006/main" wrap="square" lIns="0" tIns="0" rIns="0" bIns="0" anchor="t"/>
+          <a:lstStyle xmlns:a="http://schemas.openxmlformats.org/drawingml/2006/main"/>
+          <a:p xmlns:a="http://schemas.openxmlformats.org/drawingml/2006/main">
+            <a:r>
+              <a:rPr lang="en-US" sz="3600" b="1">
+                <a:solidFill>
+                  <a:srgbClr val="132A3A"/>
+                </a:solidFill>
+                <a:latin typeface="Inter"/>
+                <a:ea typeface="Inter"/>
+              </a:rPr>
+              <a:t>Blueprint Lecture: a claim worth testing</a:t>
+            </a:r>
+            <a:endParaRPr lang="en-US"/>
+          </a:p>
+        </p:txBody>
+      </p:sp>
+      <p:sp>
+        <p:nvSpPr>
+          <p:cNvPr id="6" name="cover-subtitle"/>
+          <p:cNvSpPr txBox="1"/>
+          <p:nvPr/>
+        </p:nvSpPr>
+        <p:spPr>
+          <a:xfrm xmlns:a="http://schemas.openxmlformats.org/drawingml/2006/main">
+            <a:off x="952500" y="2857500"/>
+            <a:ext cx="6858000" cy="323850"/>
+          </a:xfrm>
+          <a:prstGeom xmlns:a="http://schemas.openxmlformats.org/drawingml/2006/main" prst="rect">
+            <a:avLst/>
+          </a:prstGeom>
+          <a:noFill xmlns:a="http://schemas.openxmlformats.org/drawingml/2006/main"/>
+          <a:ln xmlns:a="http://schemas.openxmlformats.org/drawingml/2006/main" w="0">
+            <a:noFill/>
+          </a:ln>
+        </p:spPr>
+        <p:txBody>
+          <a:bodyPr xmlns:a="http://schemas.openxmlformats.org/drawingml/2006/main" wrap="square" lIns="0" tIns="0" rIns="0" bIns="0" anchor="t"/>
+          <a:lstStyle xmlns:a="http://schemas.openxmlformats.org/drawingml/2006/main"/>
+          <a:p xmlns:a="http://schemas.openxmlformats.org/drawingml/2006/main">
+            <a:r>
+              <a:rPr lang="en-US" sz="1725">
+                <a:solidFill>
+                  <a:srgbClr val="1769D2"/>
+                </a:solidFill>
+                <a:latin typeface="Inter"/>
+                <a:ea typeface="Inter"/>
+              </a:rPr>
+              <a:t>A clean-room reference for evidence, direction, and a decision.</a:t>
+            </a:r>
+            <a:endParaRPr lang="en-US"/>
+          </a:p>
+        </p:txBody>
+      </p:sp>
+      <p:sp>
+        <p:nvSpPr>
+          <p:cNvPr id="7" name="cover-rule"/>
+          <p:cNvSpPr/>
+          <p:nvPr/>
+        </p:nvSpPr>
+        <p:spPr>
+          <a:xfrm xmlns:a="http://schemas.openxmlformats.org/drawingml/2006/main">
+            <a:off x="914400" y="3524250"/>
+            <a:ext cx="7658100" cy="0"/>
+          </a:xfrm>
+          <a:prstGeom xmlns:a="http://schemas.openxmlformats.org/drawingml/2006/main" prst="line">
+            <a:avLst/>
+          </a:prstGeom>
+          <a:noFill xmlns:a="http://schemas.openxmlformats.org/drawingml/2006/main"/>
+          <a:ln xmlns:a="http://schemas.openxmlformats.org/drawingml/2006/main" w="25400">
+            <a:solidFill>
+              <a:srgbClr val="8A969F"/>
+            </a:solidFill>
+            <a:prstDash val="solid"/>
+          </a:ln>
+        </p:spPr>
+        <p:txBody>
+          <a:bodyPr xmlns:a="http://schemas.openxmlformats.org/drawingml/2006/main" wrap="square" lIns="0" tIns="0" rIns="0" bIns="0" anchor="t"/>
+          <a:lstStyle xmlns:a="http://schemas.openxmlformats.org/drawingml/2006/main"/>
+          <a:p xmlns:a="http://schemas.openxmlformats.org/drawingml/2006/main">
+            <a:r>
+              <a:rPr lang="en-US"/>
+              <a:t/>
+            </a:r>
+            <a:endParaRPr lang="en-US"/>
+          </a:p>
+        </p:txBody>
+      </p:sp>
+      <p:sp>
+        <p:nvSpPr>
+          <p:cNvPr id="8" name="cover-basis"/>
+          <p:cNvSpPr txBox="1"/>
+          <p:nvPr/>
+        </p:nvSpPr>
+        <p:spPr>
+          <a:xfrm xmlns:a="http://schemas.openxmlformats.org/drawingml/2006/main">
+            <a:off x="952500" y="3762375"/>
+            <a:ext cx="7810500" cy="266700"/>
+          </a:xfrm>
+          <a:prstGeom xmlns:a="http://schemas.openxmlformats.org/drawingml/2006/main" prst="rect">
+            <a:avLst/>
+          </a:prstGeom>
+          <a:noFill xmlns:a="http://schemas.openxmlformats.org/drawingml/2006/main"/>
+          <a:ln xmlns:a="http://schemas.openxmlformats.org/drawingml/2006/main" w="0">
+            <a:noFill/>
+          </a:ln>
+        </p:spPr>
+        <p:txBody>
+          <a:bodyPr xmlns:a="http://schemas.openxmlformats.org/drawingml/2006/main" wrap="square" lIns="0" tIns="0" rIns="0" bIns="0" anchor="t"/>
+          <a:lstStyle xmlns:a="http://schemas.openxmlformats.org/drawingml/2006/main"/>
+          <a:p xmlns:a="http://schemas.openxmlformats.org/drawingml/2006/main">
+            <a:r>
+              <a:rPr lang="en-US" sz="1350">
+                <a:solidFill>
+                  <a:srgbClr val="132A3A"/>
+                </a:solidFill>
+                <a:latin typeface="Inter"/>
+                <a:ea typeface="Inter"/>
+              </a:rPr>
+              <a:t>One visual language · four page roles · native editable objects</a:t>
+            </a:r>
+            <a:endParaRPr lang="en-US"/>
+          </a:p>
+        </p:txBody>
+      </p:sp>
+      <p:sp>
+        <p:nvSpPr>
+          <p:cNvPr id="9" name="cover-thesis"/>
+          <p:cNvSpPr txBox="1"/>
+          <p:nvPr/>
+        </p:nvSpPr>
+        <p:spPr>
+          <a:xfrm xmlns:a="http://schemas.openxmlformats.org/drawingml/2006/main">
+            <a:off x="952500" y="4810125"/>
+            <a:ext cx="6667500" cy="628650"/>
+          </a:xfrm>
+          <a:prstGeom xmlns:a="http://schemas.openxmlformats.org/drawingml/2006/main" prst="rect">
+            <a:avLst/>
+          </a:prstGeom>
+          <a:noFill xmlns:a="http://schemas.openxmlformats.org/drawingml/2006/main"/>
+          <a:ln xmlns:a="http://schemas.openxmlformats.org/drawingml/2006/main" w="0">
+            <a:noFill/>
+          </a:ln>
+        </p:spPr>
+        <p:txBody>
+          <a:bodyPr xmlns:a="http://schemas.openxmlformats.org/drawingml/2006/main" wrap="square" lIns="0" tIns="0" rIns="0" bIns="0" anchor="t"/>
+          <a:lstStyle xmlns:a="http://schemas.openxmlformats.org/drawingml/2006/main"/>
+          <a:p xmlns:a="http://schemas.openxmlformats.org/drawingml/2006/main">
+            <a:r>
+              <a:rPr lang="en-US" sz="1875" b="1">
+                <a:solidFill>
+                  <a:srgbClr val="132A3A"/>
+                </a:solidFill>
+                <a:latin typeface="Inter"/>
+                <a:ea typeface="Inter"/>
+              </a:rPr>
+              <a:t>A falsifiable claim is a design decision.</a:t>
+            </a:r>
+            <a:endParaRPr lang="en-US"/>
+          </a:p>
+        </p:txBody>
+      </p:sp>
+      <p:sp>
+        <p:nvSpPr>
+          <p:cNvPr id="10" name="cover-source"/>
+          <p:cNvSpPr txBox="1"/>
+          <p:nvPr/>
+        </p:nvSpPr>
+        <p:spPr>
+          <a:xfrm xmlns:a="http://schemas.openxmlformats.org/drawingml/2006/main">
+            <a:off x="952500" y="7315200"/>
+            <a:ext cx="9048750" cy="228600"/>
+          </a:xfrm>
+          <a:prstGeom xmlns:a="http://schemas.openxmlformats.org/drawingml/2006/main" prst="rect">
+            <a:avLst/>
+          </a:prstGeom>
+          <a:noFill xmlns:a="http://schemas.openxmlformats.org/drawingml/2006/main"/>
+          <a:ln xmlns:a="http://schemas.openxmlformats.org/drawingml/2006/main" w="0">
+            <a:noFill/>
+          </a:ln>
+        </p:spPr>
+        <p:txBody>
+          <a:bodyPr xmlns:a="http://schemas.openxmlformats.org/drawingml/2006/main" wrap="square" lIns="0" tIns="0" rIns="0" bIns="0" anchor="t"/>
+          <a:lstStyle xmlns:a="http://schemas.openxmlformats.org/drawingml/2006/main"/>
+          <a:p xmlns:a="http://schemas.openxmlformats.org/drawingml/2006/main">
+            <a:r>
+              <a:rPr lang="en-US" sz="1050">
+                <a:solidFill>
+                  <a:srgbClr val="8A969F"/>
+                </a:solidFill>
+                <a:latin typeface="Inter"/>
+                <a:ea typeface="Inter"/>
+              </a:rPr>
+              <a:t>OfficeKit original clean-room calibration · fictional content · 2026-08-29</a:t>
+            </a:r>
+            <a:endParaRPr lang="en-US"/>
+          </a:p>
+        </p:txBody>
+      </p:sp>
+      <p:sp>
+        <p:nvSpPr>
+          <p:cNvPr id="11" name="page-number"/>
+          <p:cNvSpPr txBox="1"/>
+          <p:nvPr/>
+        </p:nvSpPr>
+        <p:spPr>
+          <a:xfrm xmlns:a="http://schemas.openxmlformats.org/drawingml/2006/main">
+            <a:off x="13335000" y="7810500"/>
+            <a:ext cx="952500" cy="209550"/>
+          </a:xfrm>
+          <a:prstGeom xmlns:a="http://schemas.openxmlformats.org/drawingml/2006/main" prst="rect">
+            <a:avLst/>
+          </a:prstGeom>
+          <a:noFill xmlns:a="http://schemas.openxmlformats.org/drawingml/2006/main"/>
+          <a:ln xmlns:a="http://schemas.openxmlformats.org/drawingml/2006/main" w="0">
+            <a:noFill/>
+          </a:ln>
+        </p:spPr>
+        <p:txBody>
+          <a:bodyPr xmlns:a="http://schemas.openxmlformats.org/drawingml/2006/main" wrap="square" lIns="0" tIns="0" rIns="0" bIns="0" anchor="t"/>
+          <a:lstStyle xmlns:a="http://schemas.openxmlformats.org/drawingml/2006/main"/>
+          <a:p xmlns:a="http://schemas.openxmlformats.org/drawingml/2006/main">
+            <a:pPr algn="r"/>
+            <a:r>
+              <a:rPr lang="en-US" sz="1050">
+                <a:solidFill>
+                  <a:srgbClr val="8A969F"/>
+                </a:solidFill>
+                <a:latin typeface="Inter"/>
+                <a:ea typeface="Inter"/>
+              </a:rPr>
+              <a:t>1 / 6</a:t>
+            </a:r>
+            <a:endParaRPr lang="en-US"/>
+          </a:p>
+        </p:txBody>
+      </p:sp>
+      <p:sp>
+        <p:nvSpPr>
+          <p:cNvPr id="12" name="anchor-field"/>
+          <p:cNvSpPr/>
+          <p:nvPr/>
+        </p:nvSpPr>
+        <p:spPr>
+          <a:xfrm xmlns:a="http://schemas.openxmlformats.org/drawingml/2006/main">
+            <a:off x="11620500" y="1790700"/>
+            <a:ext cx="2095500" cy="2286000"/>
+          </a:xfrm>
+          <a:prstGeom xmlns:a="http://schemas.openxmlformats.org/drawingml/2006/main" prst="rect">
+            <a:avLst/>
+          </a:prstGeom>
+          <a:solidFill xmlns:a="http://schemas.openxmlformats.org/drawingml/2006/main">
+            <a:srgbClr val="F3F5F8"/>
+          </a:solidFill>
+          <a:ln xmlns:a="http://schemas.openxmlformats.org/drawingml/2006/main" w="25400">
+            <a:solidFill>
+              <a:srgbClr val="1769D2"/>
+            </a:solidFill>
+            <a:prstDash val="solid"/>
+          </a:ln>
+        </p:spPr>
+        <p:txBody>
+          <a:bodyPr xmlns:a="http://schemas.openxmlformats.org/drawingml/2006/main" wrap="square" lIns="0" tIns="0" rIns="0" bIns="0" anchor="t"/>
+          <a:lstStyle xmlns:a="http://schemas.openxmlformats.org/drawingml/2006/main"/>
+          <a:p xmlns:a="http://schemas.openxmlformats.org/drawingml/2006/main">
+            <a:r>
+              <a:rPr lang="en-US"/>
+              <a:t/>
+            </a:r>
+            <a:endParaRPr lang="en-US"/>
+          </a:p>
+        </p:txBody>
+      </p:sp>
+      <p:sp>
+        <p:nvSpPr>
+          <p:cNvPr id="13" name="anchor-grid-0-0"/>
+          <p:cNvSpPr/>
+          <p:nvPr/>
+        </p:nvSpPr>
+        <p:spPr>
+          <a:xfrm xmlns:a="http://schemas.openxmlformats.org/drawingml/2006/main">
+            <a:off x="11925300" y="2152650"/>
+            <a:ext cx="266700" cy="285750"/>
+          </a:xfrm>
+          <a:prstGeom xmlns:a="http://schemas.openxmlformats.org/drawingml/2006/main" prst="rect">
+            <a:avLst/>
+          </a:prstGeom>
+          <a:solidFill xmlns:a="http://schemas.openxmlformats.org/drawingml/2006/main">
+            <a:srgbClr val="1769D2"/>
+          </a:solidFill>
+          <a:ln xmlns:a="http://schemas.openxmlformats.org/drawingml/2006/main" w="12700">
+            <a:solidFill>
+              <a:srgbClr val="1769D2"/>
+            </a:solidFill>
+            <a:prstDash val="solid"/>
+          </a:ln>
+        </p:spPr>
+        <p:txBody>
+          <a:bodyPr xmlns:a="http://schemas.openxmlformats.org/drawingml/2006/main" wrap="square" lIns="0" tIns="0" rIns="0" bIns="0" anchor="t"/>
+          <a:lstStyle xmlns:a="http://schemas.openxmlformats.org/drawingml/2006/main"/>
+          <a:p xmlns:a="http://schemas.openxmlformats.org/drawingml/2006/main">
+            <a:r>
+              <a:rPr lang="en-US"/>
+              <a:t/>
+            </a:r>
+            <a:endParaRPr lang="en-US"/>
+          </a:p>
+        </p:txBody>
+      </p:sp>
+      <p:sp>
+        <p:nvSpPr>
+          <p:cNvPr id="14" name="anchor-grid-0-1"/>
+          <p:cNvSpPr/>
+          <p:nvPr/>
+        </p:nvSpPr>
+        <p:spPr>
+          <a:xfrm xmlns:a="http://schemas.openxmlformats.org/drawingml/2006/main">
+            <a:off x="12420600" y="2152650"/>
+            <a:ext cx="266700" cy="285750"/>
+          </a:xfrm>
+          <a:prstGeom xmlns:a="http://schemas.openxmlformats.org/drawingml/2006/main" prst="rect">
+            <a:avLst/>
+          </a:prstGeom>
+          <a:solidFill xmlns:a="http://schemas.openxmlformats.org/drawingml/2006/main">
+            <a:srgbClr val="1769D2"/>
+          </a:solidFill>
+          <a:ln xmlns:a="http://schemas.openxmlformats.org/drawingml/2006/main" w="12700">
+            <a:solidFill>
+              <a:srgbClr val="1769D2"/>
+            </a:solidFill>
+            <a:prstDash val="solid"/>
+          </a:ln>
+        </p:spPr>
+        <p:txBody>
+          <a:bodyPr xmlns:a="http://schemas.openxmlformats.org/drawingml/2006/main" wrap="square" lIns="0" tIns="0" rIns="0" bIns="0" anchor="t"/>
+          <a:lstStyle xmlns:a="http://schemas.openxmlformats.org/drawingml/2006/main"/>
+          <a:p xmlns:a="http://schemas.openxmlformats.org/drawingml/2006/main">
+            <a:r>
+              <a:rPr lang="en-US"/>
+              <a:t/>
+            </a:r>
+            <a:endParaRPr lang="en-US"/>
+          </a:p>
+        </p:txBody>
+      </p:sp>
+      <p:sp>
+        <p:nvSpPr>
+          <p:cNvPr id="15" name="anchor-grid-0-2"/>
+          <p:cNvSpPr/>
+          <p:nvPr/>
+        </p:nvSpPr>
+        <p:spPr>
+          <a:xfrm xmlns:a="http://schemas.openxmlformats.org/drawingml/2006/main">
+            <a:off x="12915900" y="2152650"/>
+            <a:ext cx="266700" cy="285750"/>
+          </a:xfrm>
+          <a:prstGeom xmlns:a="http://schemas.openxmlformats.org/drawingml/2006/main" prst="rect">
+            <a:avLst/>
+          </a:prstGeom>
+          <a:solidFill xmlns:a="http://schemas.openxmlformats.org/drawingml/2006/main">
+            <a:srgbClr val="F8FAFC"/>
+          </a:solidFill>
+          <a:ln xmlns:a="http://schemas.openxmlformats.org/drawingml/2006/main" w="12700">
+            <a:solidFill>
+              <a:srgbClr val="1769D2"/>
+            </a:solidFill>
+            <a:prstDash val="solid"/>
+          </a:ln>
+        </p:spPr>
+        <p:txBody>
+          <a:bodyPr xmlns:a="http://schemas.openxmlformats.org/drawingml/2006/main" wrap="square" lIns="0" tIns="0" rIns="0" bIns="0" anchor="t"/>
+          <a:lstStyle xmlns:a="http://schemas.openxmlformats.org/drawingml/2006/main"/>
+          <a:p xmlns:a="http://schemas.openxmlformats.org/drawingml/2006/main">
+            <a:r>
+              <a:rPr lang="en-US"/>
+              <a:t/>
+            </a:r>
+            <a:endParaRPr lang="en-US"/>
+          </a:p>
+        </p:txBody>
+      </p:sp>
+      <p:sp>
+        <p:nvSpPr>
+          <p:cNvPr id="16" name="anchor-grid-1-0"/>
+          <p:cNvSpPr/>
+          <p:nvPr/>
+        </p:nvSpPr>
+        <p:spPr>
+          <a:xfrm xmlns:a="http://schemas.openxmlformats.org/drawingml/2006/main">
+            <a:off x="11925300" y="2686050"/>
+            <a:ext cx="266700" cy="285750"/>
+          </a:xfrm>
+          <a:prstGeom xmlns:a="http://schemas.openxmlformats.org/drawingml/2006/main" prst="rect">
+            <a:avLst/>
+          </a:prstGeom>
+          <a:solidFill xmlns:a="http://schemas.openxmlformats.org/drawingml/2006/main">
+            <a:srgbClr val="1769D2"/>
+          </a:solidFill>
+          <a:ln xmlns:a="http://schemas.openxmlformats.org/drawingml/2006/main" w="12700">
+            <a:solidFill>
+              <a:srgbClr val="1769D2"/>
+            </a:solidFill>
+            <a:prstDash val="solid"/>
+          </a:ln>
+        </p:spPr>
+        <p:txBody>
+          <a:bodyPr xmlns:a="http://schemas.openxmlformats.org/drawingml/2006/main" wrap="square" lIns="0" tIns="0" rIns="0" bIns="0" anchor="t"/>
+          <a:lstStyle xmlns:a="http://schemas.openxmlformats.org/drawingml/2006/main"/>
+          <a:p xmlns:a="http://schemas.openxmlformats.org/drawingml/2006/main">
+            <a:r>
+              <a:rPr lang="en-US"/>
+              <a:t/>
+            </a:r>
+            <a:endParaRPr lang="en-US"/>
+          </a:p>
+        </p:txBody>
+      </p:sp>
+      <p:sp>
+        <p:nvSpPr>
+          <p:cNvPr id="17" name="anchor-grid-1-1"/>
+          <p:cNvSpPr/>
+          <p:nvPr/>
+        </p:nvSpPr>
+        <p:spPr>
+          <a:xfrm xmlns:a="http://schemas.openxmlformats.org/drawingml/2006/main">
+            <a:off x="12420600" y="2686050"/>
+            <a:ext cx="266700" cy="285750"/>
+          </a:xfrm>
+          <a:prstGeom xmlns:a="http://schemas.openxmlformats.org/drawingml/2006/main" prst="rect">
+            <a:avLst/>
+          </a:prstGeom>
+          <a:solidFill xmlns:a="http://schemas.openxmlformats.org/drawingml/2006/main">
+            <a:srgbClr val="1769D2"/>
+          </a:solidFill>
+          <a:ln xmlns:a="http://schemas.openxmlformats.org/drawingml/2006/main" w="12700">
+            <a:solidFill>
+              <a:srgbClr val="1769D2"/>
+            </a:solidFill>
+            <a:prstDash val="solid"/>
+          </a:ln>
+        </p:spPr>
+        <p:txBody>
+          <a:bodyPr xmlns:a="http://schemas.openxmlformats.org/drawingml/2006/main" wrap="square" lIns="0" tIns="0" rIns="0" bIns="0" anchor="t"/>
+          <a:lstStyle xmlns:a="http://schemas.openxmlformats.org/drawingml/2006/main"/>
+          <a:p xmlns:a="http://schemas.openxmlformats.org/drawingml/2006/main">
+            <a:r>
+              <a:rPr lang="en-US"/>
+              <a:t/>
+            </a:r>
+            <a:endParaRPr lang="en-US"/>
+          </a:p>
+        </p:txBody>
+      </p:sp>
+      <p:sp>
+        <p:nvSpPr>
+          <p:cNvPr id="18" name="anchor-grid-1-2"/>
+          <p:cNvSpPr/>
+          <p:nvPr/>
+        </p:nvSpPr>
+        <p:spPr>
+          <a:xfrm xmlns:a="http://schemas.openxmlformats.org/drawingml/2006/main">
+            <a:off x="12915900" y="2686050"/>
+            <a:ext cx="266700" cy="285750"/>
+          </a:xfrm>
+          <a:prstGeom xmlns:a="http://schemas.openxmlformats.org/drawingml/2006/main" prst="rect">
+            <a:avLst/>
+          </a:prstGeom>
+          <a:solidFill xmlns:a="http://schemas.openxmlformats.org/drawingml/2006/main">
+            <a:srgbClr val="F8FAFC"/>
+          </a:solidFill>
+          <a:ln xmlns:a="http://schemas.openxmlformats.org/drawingml/2006/main" w="12700">
+            <a:solidFill>
+              <a:srgbClr val="1769D2"/>
+            </a:solidFill>
+            <a:prstDash val="solid"/>
+          </a:ln>
+        </p:spPr>
+        <p:txBody>
+          <a:bodyPr xmlns:a="http://schemas.openxmlformats.org/drawingml/2006/main" wrap="square" lIns="0" tIns="0" rIns="0" bIns="0" anchor="t"/>
+          <a:lstStyle xmlns:a="http://schemas.openxmlformats.org/drawingml/2006/main"/>
+          <a:p xmlns:a="http://schemas.openxmlformats.org/drawingml/2006/main">
+            <a:r>
+              <a:rPr lang="en-US"/>
+              <a:t/>
+            </a:r>
+            <a:endParaRPr lang="en-US"/>
+          </a:p>
+        </p:txBody>
+      </p:sp>
+      <p:sp>
+        <p:nvSpPr>
+          <p:cNvPr id="19" name="anchor-grid-2-0"/>
+          <p:cNvSpPr/>
+          <p:nvPr/>
+        </p:nvSpPr>
+        <p:spPr>
+          <a:xfrm xmlns:a="http://schemas.openxmlformats.org/drawingml/2006/main">
+            <a:off x="11925300" y="3219450"/>
+            <a:ext cx="266700" cy="285750"/>
+          </a:xfrm>
+          <a:prstGeom xmlns:a="http://schemas.openxmlformats.org/drawingml/2006/main" prst="rect">
+            <a:avLst/>
+          </a:prstGeom>
+          <a:solidFill xmlns:a="http://schemas.openxmlformats.org/drawingml/2006/main">
+            <a:srgbClr val="1769D2"/>
+          </a:solidFill>
+          <a:ln xmlns:a="http://schemas.openxmlformats.org/drawingml/2006/main" w="12700">
+            <a:solidFill>
+              <a:srgbClr val="1769D2"/>
+            </a:solidFill>
+            <a:prstDash val="solid"/>
+          </a:ln>
+        </p:spPr>
+        <p:txBody>
+          <a:bodyPr xmlns:a="http://schemas.openxmlformats.org/drawingml/2006/main" wrap="square" lIns="0" tIns="0" rIns="0" bIns="0" anchor="t"/>
+          <a:lstStyle xmlns:a="http://schemas.openxmlformats.org/drawingml/2006/main"/>
+          <a:p xmlns:a="http://schemas.openxmlformats.org/drawingml/2006/main">
+            <a:r>
+              <a:rPr lang="en-US"/>
+              <a:t/>
+            </a:r>
+            <a:endParaRPr lang="en-US"/>
+          </a:p>
+        </p:txBody>
+      </p:sp>
+      <p:sp>
+        <p:nvSpPr>
+          <p:cNvPr id="20" name="anchor-grid-2-1"/>
+          <p:cNvSpPr/>
+          <p:nvPr/>
+        </p:nvSpPr>
+        <p:spPr>
+          <a:xfrm xmlns:a="http://schemas.openxmlformats.org/drawingml/2006/main">
+            <a:off x="12420600" y="3219450"/>
+            <a:ext cx="266700" cy="285750"/>
+          </a:xfrm>
+          <a:prstGeom xmlns:a="http://schemas.openxmlformats.org/drawingml/2006/main" prst="rect">
+            <a:avLst/>
+          </a:prstGeom>
+          <a:solidFill xmlns:a="http://schemas.openxmlformats.org/drawingml/2006/main">
+            <a:srgbClr val="1769D2"/>
+          </a:solidFill>
+          <a:ln xmlns:a="http://schemas.openxmlformats.org/drawingml/2006/main" w="12700">
+            <a:solidFill>
+              <a:srgbClr val="1769D2"/>
+            </a:solidFill>
+            <a:prstDash val="solid"/>
+          </a:ln>
+        </p:spPr>
+        <p:txBody>
+          <a:bodyPr xmlns:a="http://schemas.openxmlformats.org/drawingml/2006/main" wrap="square" lIns="0" tIns="0" rIns="0" bIns="0" anchor="t"/>
+          <a:lstStyle xmlns:a="http://schemas.openxmlformats.org/drawingml/2006/main"/>
+          <a:p xmlns:a="http://schemas.openxmlformats.org/drawingml/2006/main">
+            <a:r>
+              <a:rPr lang="en-US"/>
+              <a:t/>
+            </a:r>
+            <a:endParaRPr lang="en-US"/>
+          </a:p>
+        </p:txBody>
+      </p:sp>
+      <p:sp>
+        <p:nvSpPr>
+          <p:cNvPr id="21" name="anchor-grid-2-2"/>
+          <p:cNvSpPr/>
+          <p:nvPr/>
+        </p:nvSpPr>
+        <p:spPr>
+          <a:xfrm xmlns:a="http://schemas.openxmlformats.org/drawingml/2006/main">
+            <a:off x="12915900" y="3219450"/>
+            <a:ext cx="266700" cy="285750"/>
+          </a:xfrm>
+          <a:prstGeom xmlns:a="http://schemas.openxmlformats.org/drawingml/2006/main" prst="rect">
+            <a:avLst/>
+          </a:prstGeom>
+          <a:solidFill xmlns:a="http://schemas.openxmlformats.org/drawingml/2006/main">
+            <a:srgbClr val="F8FAFC"/>
+          </a:solidFill>
+          <a:ln xmlns:a="http://schemas.openxmlformats.org/drawingml/2006/main" w="12700">
+            <a:solidFill>
+              <a:srgbClr val="1769D2"/>
+            </a:solidFill>
+            <a:prstDash val="solid"/>
+          </a:ln>
+        </p:spPr>
+        <p:txBody>
+          <a:bodyPr xmlns:a="http://schemas.openxmlformats.org/drawingml/2006/main" wrap="square" lIns="0" tIns="0" rIns="0" bIns="0" anchor="t"/>
+          <a:lstStyle xmlns:a="http://schemas.openxmlformats.org/drawingml/2006/main"/>
+          <a:p xmlns:a="http://schemas.openxmlformats.org/drawingml/2006/main">
+            <a:r>
+              <a:rPr lang="en-US"/>
+              <a:t/>
+            </a:r>
+            <a:endParaRPr lang="en-US"/>
+          </a:p>
+        </p:txBody>
+      </p:sp>
+      <p:sp>
+        <p:nvSpPr>
+          <p:cNvPr id="22" name="anchor-axis"/>
+          <p:cNvSpPr/>
+          <p:nvPr/>
+        </p:nvSpPr>
+        <p:spPr>
+          <a:xfrm xmlns:a="http://schemas.openxmlformats.org/drawingml/2006/main">
+            <a:off x="12668250" y="1638300"/>
+            <a:ext cx="0" cy="2743200"/>
+          </a:xfrm>
+          <a:prstGeom xmlns:a="http://schemas.openxmlformats.org/drawingml/2006/main" prst="line">
+            <a:avLst/>
+          </a:prstGeom>
+          <a:noFill xmlns:a="http://schemas.openxmlformats.org/drawingml/2006/main"/>
+          <a:ln xmlns:a="http://schemas.openxmlformats.org/drawingml/2006/main" w="50800">
+            <a:solidFill>
+              <a:srgbClr val="132A3A"/>
+            </a:solidFill>
+            <a:prstDash val="solid"/>
+          </a:ln>
+        </p:spPr>
+        <p:txBody>
+          <a:bodyPr xmlns:a="http://schemas.openxmlformats.org/drawingml/2006/main" wrap="square" lIns="0" tIns="0" rIns="0" bIns="0" anchor="t"/>
+          <a:lstStyle xmlns:a="http://schemas.openxmlformats.org/drawingml/2006/main"/>
+          <a:p xmlns:a="http://schemas.openxmlformats.org/drawingml/2006/main">
+            <a:r>
+              <a:rPr lang="en-US"/>
+              <a:t/>
+            </a:r>
+            <a:endParaRPr lang="en-US"/>
+          </a:p>
+        </p:txBody>
+      </p:sp>
+    </p:spTree>
+  </p:cSld>
+  <p:clrMapOvr>
+    <a:masterClrMapping xmlns:a="http://schemas.openxmlformats.org/drawingml/2006/main"/>
+  </p:clrMapOvr>
+</p:sld>
+</file>
+
+<file path=ppt/slides/slide2.xml><?xml version="1.0" encoding="utf-8"?>
+<p:sld xmlns:p="http://schemas.openxmlformats.org/presentationml/2006/main">
+  <p:cSld name="Argument">
+    <p:bg>
+      <p:bgPr>
+        <a:blipFill xmlns:a="http://schemas.openxmlformats.org/drawingml/2006/main">
+          <a:blip xmlns:r="http://schemas.openxmlformats.org/officeDocument/2006/relationships" r:embed="rIdOfficeKitImagec2e9a9d799668dd3_1"/>
+          <a:stretch>
+            <a:fillRect/>
+          </a:stretch>
+        </a:blipFill>
+      </p:bgPr>
+    </p:bg>
+    <p:spTree>
+      <p:nvGrpSpPr>
+        <p:cNvPr id="1" name=""/>
+        <p:cNvGrpSpPr/>
+        <p:nvPr/>
+      </p:nvGrpSpPr>
+      <p:grpSpPr>
+        <a:xfrm xmlns:a="http://schemas.openxmlformats.org/drawingml/2006/main">
+          <a:off x="0" y="0"/>
+          <a:ext cx="0" cy="0"/>
+          <a:chOff x="0" y="0"/>
+          <a:chExt cx="0" cy="0"/>
+        </a:xfrm>
+      </p:grpSpPr>
+      <p:sp>
+        <p:nvSpPr>
+          <p:cNvPr id="2" name="argument-paper-scrim"/>
+          <p:cNvSpPr/>
+          <p:nvPr/>
+        </p:nvSpPr>
+        <p:spPr>
+          <a:xfrm xmlns:a="http://schemas.openxmlformats.org/drawingml/2006/main">
+            <a:off x="0" y="0"/>
+            <a:ext cx="7429500" cy="8572500"/>
+          </a:xfrm>
+          <a:prstGeom xmlns:a="http://schemas.openxmlformats.org/drawingml/2006/main" prst="rect">
+            <a:avLst/>
+          </a:prstGeom>
+          <a:solidFill xmlns:a="http://schemas.openxmlformats.org/drawingml/2006/main">
+            <a:srgbClr val="F8FAFC">
+              <a:alpha val="96000"/>
+            </a:srgbClr>
+          </a:solidFill>
+          <a:ln xmlns:a="http://schemas.openxmlformats.org/drawingml/2006/main" w="0">
+            <a:solidFill>
+              <a:srgbClr val="F8FAFC"/>
+            </a:solidFill>
+            <a:prstDash val="solid"/>
+          </a:ln>
+        </p:spPr>
+        <p:txBody>
+          <a:bodyPr xmlns:a="http://schemas.openxmlformats.org/drawingml/2006/main" wrap="square" lIns="0" tIns="0" rIns="0" bIns="0" anchor="t"/>
+          <a:lstStyle xmlns:a="http://schemas.openxmlformats.org/drawingml/2006/main"/>
+          <a:p xmlns:a="http://schemas.openxmlformats.org/drawingml/2006/main">
+            <a:r>
+              <a:rPr lang="en-US"/>
+              <a:t/>
+            </a:r>
+            <a:endParaRPr lang="en-US"/>
+          </a:p>
+        </p:txBody>
+      </p:sp>
+      <p:sp>
+        <p:nvSpPr>
+          <p:cNvPr id="3" name="argument-top-rule"/>
+          <p:cNvSpPr/>
+          <p:nvPr/>
+        </p:nvSpPr>
+        <p:spPr>
+          <a:xfrm xmlns:a="http://schemas.openxmlformats.org/drawingml/2006/main">
+            <a:off x="838200" y="666750"/>
+            <a:ext cx="13563600" cy="0"/>
+          </a:xfrm>
+          <a:prstGeom xmlns:a="http://schemas.openxmlformats.org/drawingml/2006/main" prst="line">
+            <a:avLst/>
+          </a:prstGeom>
+          <a:noFill xmlns:a="http://schemas.openxmlformats.org/drawingml/2006/main"/>
+          <a:ln xmlns:a="http://schemas.openxmlformats.org/drawingml/2006/main" w="38100">
+            <a:solidFill>
+              <a:srgbClr val="1769D2"/>
+            </a:solidFill>
+            <a:prstDash val="solid"/>
+          </a:ln>
+        </p:spPr>
+        <p:txBody>
+          <a:bodyPr xmlns:a="http://schemas.openxmlformats.org/drawingml/2006/main" wrap="square" lIns="0" tIns="0" rIns="0" bIns="0" anchor="t"/>
+          <a:lstStyle xmlns:a="http://schemas.openxmlformats.org/drawingml/2006/main"/>
+          <a:p xmlns:a="http://schemas.openxmlformats.org/drawingml/2006/main">
+            <a:r>
+              <a:rPr lang="en-US"/>
+              <a:t/>
+            </a:r>
+            <a:endParaRPr lang="en-US"/>
+          </a:p>
+        </p:txBody>
+      </p:sp>
+      <p:sp>
+        <p:nvSpPr>
+          <p:cNvPr id="4" name="BLUEPRINT LECTURE · ARGUMENT"/>
+          <p:cNvSpPr txBox="1"/>
+          <p:nvPr/>
+        </p:nvSpPr>
+        <p:spPr>
+          <a:xfrm xmlns:a="http://schemas.openxmlformats.org/drawingml/2006/main">
+            <a:off x="914400" y="895350"/>
+            <a:ext cx="7239000" cy="228600"/>
+          </a:xfrm>
+          <a:prstGeom xmlns:a="http://schemas.openxmlformats.org/drawingml/2006/main" prst="rect">
+            <a:avLst/>
+          </a:prstGeom>
+          <a:noFill xmlns:a="http://schemas.openxmlformats.org/drawingml/2006/main"/>
+          <a:ln xmlns:a="http://schemas.openxmlformats.org/drawingml/2006/main" w="0">
+            <a:noFill/>
+          </a:ln>
+        </p:spPr>
+        <p:txBody>
+          <a:bodyPr xmlns:a="http://schemas.openxmlformats.org/drawingml/2006/main" wrap="square" lIns="0" tIns="0" rIns="0" bIns="0" anchor="t"/>
+          <a:lstStyle xmlns:a="http://schemas.openxmlformats.org/drawingml/2006/main"/>
+          <a:p xmlns:a="http://schemas.openxmlformats.org/drawingml/2006/main">
+            <a:r>
+              <a:rPr lang="en-US" sz="1200" b="1">
+                <a:solidFill>
+                  <a:srgbClr val="1769D2"/>
+                </a:solidFill>
+                <a:latin typeface="Inter"/>
+                <a:ea typeface="Inter"/>
+              </a:rPr>
+              <a:t>BLUEPRINT LECTURE · ARGUMENT</a:t>
+            </a:r>
+            <a:endParaRPr lang="en-US"/>
+          </a:p>
+        </p:txBody>
+      </p:sp>
+      <p:sp>
+        <p:nvSpPr>
+          <p:cNvPr id="5" name="argument-title"/>
+          <p:cNvSpPr txBox="1"/>
+          <p:nvPr/>
+        </p:nvSpPr>
+        <p:spPr>
+          <a:xfrm xmlns:a="http://schemas.openxmlformats.org/drawingml/2006/main">
+            <a:off x="914400" y="1314450"/>
+            <a:ext cx="6286500" cy="914400"/>
+          </a:xfrm>
+          <a:prstGeom xmlns:a="http://schemas.openxmlformats.org/drawingml/2006/main" prst="rect">
+            <a:avLst/>
+          </a:prstGeom>
+          <a:noFill xmlns:a="http://schemas.openxmlformats.org/drawingml/2006/main"/>
+          <a:ln xmlns:a="http://schemas.openxmlformats.org/drawingml/2006/main" w="0">
+            <a:noFill/>
+          </a:ln>
+        </p:spPr>
+        <p:txBody>
+          <a:bodyPr xmlns:a="http://schemas.openxmlformats.org/drawingml/2006/main" wrap="square" lIns="0" tIns="0" rIns="0" bIns="0" anchor="t"/>
+          <a:lstStyle xmlns:a="http://schemas.openxmlformats.org/drawingml/2006/main"/>
+          <a:p xmlns:a="http://schemas.openxmlformats.org/drawingml/2006/main">
+            <a:r>
+              <a:rPr lang="en-US" sz="2550" b="1">
+                <a:solidFill>
+                  <a:srgbClr val="132A3A"/>
+                </a:solidFill>
+                <a:latin typeface="Inter"/>
+                <a:ea typeface="Inter"/>
+              </a:rPr>
+              <a:t>The method keeps mechanism separate</a:t>
+            </a:r>
+            <a:endParaRPr lang="en-US"/>
+          </a:p>
+          <a:p xmlns:a="http://schemas.openxmlformats.org/drawingml/2006/main">
+            <a:r>
+              <a:rPr lang="en-US" sz="2550" b="1">
+                <a:solidFill>
+                  <a:srgbClr val="132A3A"/>
+                </a:solidFill>
+                <a:latin typeface="Inter"/>
+                <a:ea typeface="Inter"/>
+              </a:rPr>
+              <a:t>from drift</a:t>
+            </a:r>
+            <a:endParaRPr lang="en-US"/>
+          </a:p>
+        </p:txBody>
+      </p:sp>
+      <p:sp>
+        <p:nvSpPr>
+          <p:cNvPr id="6" name="argument-basis"/>
+          <p:cNvSpPr txBox="1"/>
+          <p:nvPr/>
+        </p:nvSpPr>
+        <p:spPr>
+          <a:xfrm xmlns:a="http://schemas.openxmlformats.org/drawingml/2006/main">
+            <a:off x="952500" y="2190750"/>
+            <a:ext cx="6096000" cy="266700"/>
+          </a:xfrm>
+          <a:prstGeom xmlns:a="http://schemas.openxmlformats.org/drawingml/2006/main" prst="rect">
+            <a:avLst/>
+          </a:prstGeom>
+          <a:noFill xmlns:a="http://schemas.openxmlformats.org/drawingml/2006/main"/>
+          <a:ln xmlns:a="http://schemas.openxmlformats.org/drawingml/2006/main" w="0">
+            <a:noFill/>
+          </a:ln>
+        </p:spPr>
+        <p:txBody>
+          <a:bodyPr xmlns:a="http://schemas.openxmlformats.org/drawingml/2006/main" wrap="square" lIns="0" tIns="0" rIns="0" bIns="0" anchor="t"/>
+          <a:lstStyle xmlns:a="http://schemas.openxmlformats.org/drawingml/2006/main"/>
+          <a:p xmlns:a="http://schemas.openxmlformats.org/drawingml/2006/main">
+            <a:r>
+              <a:rPr lang="en-US" sz="1350">
+                <a:solidFill>
+                  <a:srgbClr val="8A969F"/>
+                </a:solidFill>
+                <a:latin typeface="Inter"/>
+                <a:ea typeface="Inter"/>
+              </a:rPr>
+              <a:t>Question → method → result → limitation, without marketing language.</a:t>
+            </a:r>
+            <a:endParaRPr lang="en-US"/>
+          </a:p>
+        </p:txBody>
+      </p:sp>
+      <p:sp>
+        <p:nvSpPr>
+          <p:cNvPr id="7" name="argument-rule"/>
+          <p:cNvSpPr/>
+          <p:nvPr/>
+        </p:nvSpPr>
+        <p:spPr>
+          <a:xfrm xmlns:a="http://schemas.openxmlformats.org/drawingml/2006/main">
+            <a:off x="914400" y="2457450"/>
+            <a:ext cx="13411200" cy="0"/>
+          </a:xfrm>
+          <a:prstGeom xmlns:a="http://schemas.openxmlformats.org/drawingml/2006/main" prst="line">
+            <a:avLst/>
+          </a:prstGeom>
+          <a:noFill xmlns:a="http://schemas.openxmlformats.org/drawingml/2006/main"/>
+          <a:ln xmlns:a="http://schemas.openxmlformats.org/drawingml/2006/main" w="25400">
+            <a:solidFill>
+              <a:srgbClr val="8A969F"/>
+            </a:solidFill>
+            <a:prstDash val="solid"/>
+          </a:ln>
+        </p:spPr>
+        <p:txBody>
+          <a:bodyPr xmlns:a="http://schemas.openxmlformats.org/drawingml/2006/main" wrap="square" lIns="0" tIns="0" rIns="0" bIns="0" anchor="t"/>
+          <a:lstStyle xmlns:a="http://schemas.openxmlformats.org/drawingml/2006/main"/>
+          <a:p xmlns:a="http://schemas.openxmlformats.org/drawingml/2006/main">
+            <a:r>
+              <a:rPr lang="en-US"/>
+              <a:t/>
+            </a:r>
+            <a:endParaRPr lang="en-US"/>
+          </a:p>
+        </p:txBody>
+      </p:sp>
+      <p:sp>
+        <p:nvSpPr>
+          <p:cNvPr id="8" name="academic-number-0"/>
+          <p:cNvSpPr txBox="1"/>
+          <p:nvPr/>
+        </p:nvSpPr>
+        <p:spPr>
+          <a:xfrm xmlns:a="http://schemas.openxmlformats.org/drawingml/2006/main">
+            <a:off x="1104900" y="3238500"/>
+            <a:ext cx="685800" cy="304800"/>
+          </a:xfrm>
+          <a:prstGeom xmlns:a="http://schemas.openxmlformats.org/drawingml/2006/main" prst="rect">
+            <a:avLst/>
+          </a:prstGeom>
+          <a:noFill xmlns:a="http://schemas.openxmlformats.org/drawingml/2006/main"/>
+          <a:ln xmlns:a="http://schemas.openxmlformats.org/drawingml/2006/main" w="0">
+            <a:noFill/>
+          </a:ln>
+        </p:spPr>
+        <p:txBody>
+          <a:bodyPr xmlns:a="http://schemas.openxmlformats.org/drawingml/2006/main" wrap="square" lIns="0" tIns="0" rIns="0" bIns="0" anchor="t"/>
+          <a:lstStyle xmlns:a="http://schemas.openxmlformats.org/drawingml/2006/main"/>
+          <a:p xmlns:a="http://schemas.openxmlformats.org/drawingml/2006/main">
+            <a:r>
+              <a:rPr lang="en-US" sz="1800" b="1">
+                <a:solidFill>
+                  <a:srgbClr val="1769D2"/>
+                </a:solidFill>
+                <a:latin typeface="Inter"/>
+                <a:ea typeface="Inter"/>
+              </a:rPr>
+              <a:t>01</a:t>
+            </a:r>
+            <a:endParaRPr lang="en-US"/>
+          </a:p>
+        </p:txBody>
+      </p:sp>
+      <p:sp>
+        <p:nvSpPr>
+          <p:cNvPr id="9" name="academic-rule-0"/>
+          <p:cNvSpPr/>
+          <p:nvPr/>
+        </p:nvSpPr>
+        <p:spPr>
+          <a:xfrm xmlns:a="http://schemas.openxmlformats.org/drawingml/2006/main">
+            <a:off x="2000250" y="3390900"/>
+            <a:ext cx="5810250" cy="0"/>
+          </a:xfrm>
+          <a:prstGeom xmlns:a="http://schemas.openxmlformats.org/drawingml/2006/main" prst="line">
+            <a:avLst/>
+          </a:prstGeom>
+          <a:noFill xmlns:a="http://schemas.openxmlformats.org/drawingml/2006/main"/>
+          <a:ln xmlns:a="http://schemas.openxmlformats.org/drawingml/2006/main" w="12700">
+            <a:solidFill>
+              <a:srgbClr val="8A969F"/>
+            </a:solidFill>
+            <a:prstDash val="solid"/>
+          </a:ln>
+        </p:spPr>
+        <p:txBody>
+          <a:bodyPr xmlns:a="http://schemas.openxmlformats.org/drawingml/2006/main" wrap="square" lIns="0" tIns="0" rIns="0" bIns="0" anchor="t"/>
+          <a:lstStyle xmlns:a="http://schemas.openxmlformats.org/drawingml/2006/main"/>
+          <a:p xmlns:a="http://schemas.openxmlformats.org/drawingml/2006/main">
+            <a:r>
+              <a:rPr lang="en-US"/>
+              <a:t/>
+            </a:r>
+            <a:endParaRPr lang="en-US"/>
+          </a:p>
+        </p:txBody>
+      </p:sp>
+      <p:sp>
+        <p:nvSpPr>
+          <p:cNvPr id="10" name="academic-label-0"/>
+          <p:cNvSpPr txBox="1"/>
+          <p:nvPr/>
+        </p:nvSpPr>
+        <p:spPr>
+          <a:xfrm xmlns:a="http://schemas.openxmlformats.org/drawingml/2006/main">
+            <a:off x="2114550" y="3200400"/>
+            <a:ext cx="1809750" cy="285750"/>
+          </a:xfrm>
+          <a:prstGeom xmlns:a="http://schemas.openxmlformats.org/drawingml/2006/main" prst="rect">
+            <a:avLst/>
+          </a:prstGeom>
+          <a:noFill xmlns:a="http://schemas.openxmlformats.org/drawingml/2006/main"/>
+          <a:ln xmlns:a="http://schemas.openxmlformats.org/drawingml/2006/main" w="0">
+            <a:noFill/>
+          </a:ln>
+        </p:spPr>
+        <p:txBody>
+          <a:bodyPr xmlns:a="http://schemas.openxmlformats.org/drawingml/2006/main" wrap="square" lIns="0" tIns="0" rIns="0" bIns="0" anchor="t"/>
+          <a:lstStyle xmlns:a="http://schemas.openxmlformats.org/drawingml/2006/main"/>
+          <a:p xmlns:a="http://schemas.openxmlformats.org/drawingml/2006/main">
+            <a:r>
+              <a:rPr lang="en-US" sz="1650" b="1">
+                <a:solidFill>
+                  <a:srgbClr val="132A3A"/>
+                </a:solidFill>
+                <a:latin typeface="Inter"/>
+                <a:ea typeface="Inter"/>
+              </a:rPr>
+              <a:t>Question</a:t>
+            </a:r>
+            <a:endParaRPr lang="en-US"/>
+          </a:p>
+        </p:txBody>
+      </p:sp>
+      <p:sp>
+        <p:nvSpPr>
+          <p:cNvPr id="11" name="academic-text-0"/>
+          <p:cNvSpPr txBox="1"/>
+          <p:nvPr/>
+        </p:nvSpPr>
+        <p:spPr>
+          <a:xfrm xmlns:a="http://schemas.openxmlformats.org/drawingml/2006/main">
+            <a:off x="4095750" y="3238500"/>
+            <a:ext cx="5334000" cy="304800"/>
+          </a:xfrm>
+          <a:prstGeom xmlns:a="http://schemas.openxmlformats.org/drawingml/2006/main" prst="rect">
+            <a:avLst/>
+          </a:prstGeom>
+          <a:noFill xmlns:a="http://schemas.openxmlformats.org/drawingml/2006/main"/>
+          <a:ln xmlns:a="http://schemas.openxmlformats.org/drawingml/2006/main" w="0">
+            <a:noFill/>
+          </a:ln>
+        </p:spPr>
+        <p:txBody>
+          <a:bodyPr xmlns:a="http://schemas.openxmlformats.org/drawingml/2006/main" wrap="square" lIns="0" tIns="0" rIns="0" bIns="0" anchor="t"/>
+          <a:lstStyle xmlns:a="http://schemas.openxmlformats.org/drawingml/2006/main"/>
+          <a:p xmlns:a="http://schemas.openxmlformats.org/drawingml/2006/main">
+            <a:r>
+              <a:rPr lang="en-US" sz="1350">
+                <a:solidFill>
+                  <a:srgbClr val="132A3A"/>
+                </a:solidFill>
+                <a:latin typeface="Inter"/>
+                <a:ea typeface="Inter"/>
+              </a:rPr>
+              <a:t>Can the intervention move the outcome?</a:t>
+            </a:r>
+            <a:endParaRPr lang="en-US"/>
+          </a:p>
+        </p:txBody>
+      </p:sp>
+      <p:sp>
+        <p:nvSpPr>
+          <p:cNvPr id="12" name="academic-number-1"/>
+          <p:cNvSpPr txBox="1"/>
+          <p:nvPr/>
+        </p:nvSpPr>
+        <p:spPr>
+          <a:xfrm xmlns:a="http://schemas.openxmlformats.org/drawingml/2006/main">
+            <a:off x="1104900" y="4191000"/>
+            <a:ext cx="685800" cy="304800"/>
+          </a:xfrm>
+          <a:prstGeom xmlns:a="http://schemas.openxmlformats.org/drawingml/2006/main" prst="rect">
+            <a:avLst/>
+          </a:prstGeom>
+          <a:noFill xmlns:a="http://schemas.openxmlformats.org/drawingml/2006/main"/>
+          <a:ln xmlns:a="http://schemas.openxmlformats.org/drawingml/2006/main" w="0">
+            <a:noFill/>
+          </a:ln>
+        </p:spPr>
+        <p:txBody>
+          <a:bodyPr xmlns:a="http://schemas.openxmlformats.org/drawingml/2006/main" wrap="square" lIns="0" tIns="0" rIns="0" bIns="0" anchor="t"/>
+          <a:lstStyle xmlns:a="http://schemas.openxmlformats.org/drawingml/2006/main"/>
+          <a:p xmlns:a="http://schemas.openxmlformats.org/drawingml/2006/main">
+            <a:r>
+              <a:rPr lang="en-US" sz="1800" b="1">
+                <a:solidFill>
+                  <a:srgbClr val="1769D2"/>
+                </a:solidFill>
+                <a:latin typeface="Inter"/>
+                <a:ea typeface="Inter"/>
+              </a:rPr>
+              <a:t>02</a:t>
+            </a:r>
+            <a:endParaRPr lang="en-US"/>
+          </a:p>
+        </p:txBody>
+      </p:sp>
+      <p:sp>
+        <p:nvSpPr>
+          <p:cNvPr id="13" name="academic-rule-1"/>
+          <p:cNvSpPr/>
+          <p:nvPr/>
+        </p:nvSpPr>
+        <p:spPr>
+          <a:xfrm xmlns:a="http://schemas.openxmlformats.org/drawingml/2006/main">
+            <a:off x="2000250" y="4343400"/>
+            <a:ext cx="5810250" cy="0"/>
+          </a:xfrm>
+          <a:prstGeom xmlns:a="http://schemas.openxmlformats.org/drawingml/2006/main" prst="line">
+            <a:avLst/>
+          </a:prstGeom>
+          <a:noFill xmlns:a="http://schemas.openxmlformats.org/drawingml/2006/main"/>
+          <a:ln xmlns:a="http://schemas.openxmlformats.org/drawingml/2006/main" w="12700">
+            <a:solidFill>
+              <a:srgbClr val="8A969F"/>
+            </a:solidFill>
+            <a:prstDash val="solid"/>
+          </a:ln>
+        </p:spPr>
+        <p:txBody>
+          <a:bodyPr xmlns:a="http://schemas.openxmlformats.org/drawingml/2006/main" wrap="square" lIns="0" tIns="0" rIns="0" bIns="0" anchor="t"/>
+          <a:lstStyle xmlns:a="http://schemas.openxmlformats.org/drawingml/2006/main"/>
+          <a:p xmlns:a="http://schemas.openxmlformats.org/drawingml/2006/main">
+            <a:r>
+              <a:rPr lang="en-US"/>
+              <a:t/>
+            </a:r>
+            <a:endParaRPr lang="en-US"/>
+          </a:p>
+        </p:txBody>
+      </p:sp>
+      <p:sp>
+        <p:nvSpPr>
+          <p:cNvPr id="14" name="academic-label-1"/>
+          <p:cNvSpPr txBox="1"/>
+          <p:nvPr/>
+        </p:nvSpPr>
+        <p:spPr>
+          <a:xfrm xmlns:a="http://schemas.openxmlformats.org/drawingml/2006/main">
+            <a:off x="2114550" y="4152900"/>
+            <a:ext cx="1809750" cy="285750"/>
+          </a:xfrm>
+          <a:prstGeom xmlns:a="http://schemas.openxmlformats.org/drawingml/2006/main" prst="rect">
+            <a:avLst/>
+          </a:prstGeom>
+          <a:noFill xmlns:a="http://schemas.openxmlformats.org/drawingml/2006/main"/>
+          <a:ln xmlns:a="http://schemas.openxmlformats.org/drawingml/2006/main" w="0">
+            <a:noFill/>
+          </a:ln>
+        </p:spPr>
+        <p:txBody>
+          <a:bodyPr xmlns:a="http://schemas.openxmlformats.org/drawingml/2006/main" wrap="square" lIns="0" tIns="0" rIns="0" bIns="0" anchor="t"/>
+          <a:lstStyle xmlns:a="http://schemas.openxmlformats.org/drawingml/2006/main"/>
+          <a:p xmlns:a="http://schemas.openxmlformats.org/drawingml/2006/main">
+            <a:r>
+              <a:rPr lang="en-US" sz="1650" b="1">
+                <a:solidFill>
+                  <a:srgbClr val="132A3A"/>
+                </a:solidFill>
+                <a:latin typeface="Inter"/>
+                <a:ea typeface="Inter"/>
+              </a:rPr>
+              <a:t>Method</a:t>
+            </a:r>
+            <a:endParaRPr lang="en-US"/>
+          </a:p>
+        </p:txBody>
+      </p:sp>
+      <p:sp>
+        <p:nvSpPr>
+          <p:cNvPr id="15" name="academic-text-1"/>
+          <p:cNvSpPr txBox="1"/>
+          <p:nvPr/>
+        </p:nvSpPr>
+        <p:spPr>
+          <a:xfrm xmlns:a="http://schemas.openxmlformats.org/drawingml/2006/main">
+            <a:off x="4095750" y="4191000"/>
+            <a:ext cx="5334000" cy="304800"/>
+          </a:xfrm>
+          <a:prstGeom xmlns:a="http://schemas.openxmlformats.org/drawingml/2006/main" prst="rect">
+            <a:avLst/>
+          </a:prstGeom>
+          <a:noFill xmlns:a="http://schemas.openxmlformats.org/drawingml/2006/main"/>
+          <a:ln xmlns:a="http://schemas.openxmlformats.org/drawingml/2006/main" w="0">
+            <a:noFill/>
+          </a:ln>
+        </p:spPr>
+        <p:txBody>
+          <a:bodyPr xmlns:a="http://schemas.openxmlformats.org/drawingml/2006/main" wrap="square" lIns="0" tIns="0" rIns="0" bIns="0" anchor="t"/>
+          <a:lstStyle xmlns:a="http://schemas.openxmlformats.org/drawingml/2006/main"/>
+          <a:p xmlns:a="http://schemas.openxmlformats.org/drawingml/2006/main">
+            <a:r>
+              <a:rPr lang="en-US" sz="1350">
+                <a:solidFill>
+                  <a:srgbClr val="132A3A"/>
+                </a:solidFill>
+                <a:latin typeface="Inter"/>
+                <a:ea typeface="Inter"/>
+              </a:rPr>
+              <a:t>Two groups, one rule, registered before launch.</a:t>
+            </a:r>
+            <a:endParaRPr lang="en-US"/>
+          </a:p>
+        </p:txBody>
+      </p:sp>
+      <p:sp>
+        <p:nvSpPr>
+          <p:cNvPr id="16" name="academic-number-2"/>
+          <p:cNvSpPr txBox="1"/>
+          <p:nvPr/>
+        </p:nvSpPr>
+        <p:spPr>
+          <a:xfrm xmlns:a="http://schemas.openxmlformats.org/drawingml/2006/main">
+            <a:off x="1104900" y="5143500"/>
+            <a:ext cx="685800" cy="304800"/>
+          </a:xfrm>
+          <a:prstGeom xmlns:a="http://schemas.openxmlformats.org/drawingml/2006/main" prst="rect">
+            <a:avLst/>
+          </a:prstGeom>
+          <a:noFill xmlns:a="http://schemas.openxmlformats.org/drawingml/2006/main"/>
+          <a:ln xmlns:a="http://schemas.openxmlformats.org/drawingml/2006/main" w="0">
+            <a:noFill/>
+          </a:ln>
+        </p:spPr>
+        <p:txBody>
+          <a:bodyPr xmlns:a="http://schemas.openxmlformats.org/drawingml/2006/main" wrap="square" lIns="0" tIns="0" rIns="0" bIns="0" anchor="t"/>
+          <a:lstStyle xmlns:a="http://schemas.openxmlformats.org/drawingml/2006/main"/>
+          <a:p xmlns:a="http://schemas.openxmlformats.org/drawingml/2006/main">
+            <a:r>
+              <a:rPr lang="en-US" sz="1800" b="1">
+                <a:solidFill>
+                  <a:srgbClr val="1769D2"/>
+                </a:solidFill>
+                <a:latin typeface="Inter"/>
+                <a:ea typeface="Inter"/>
+              </a:rPr>
+              <a:t>03</a:t>
+            </a:r>
+            <a:endParaRPr lang="en-US"/>
+          </a:p>
+        </p:txBody>
+      </p:sp>
+      <p:sp>
+        <p:nvSpPr>
+          <p:cNvPr id="17" name="academic-rule-2"/>
+          <p:cNvSpPr/>
+          <p:nvPr/>
+        </p:nvSpPr>
+        <p:spPr>
+          <a:xfrm xmlns:a="http://schemas.openxmlformats.org/drawingml/2006/main">
+            <a:off x="2000250" y="5295900"/>
+            <a:ext cx="5810250" cy="0"/>
+          </a:xfrm>
+          <a:prstGeom xmlns:a="http://schemas.openxmlformats.org/drawingml/2006/main" prst="line">
+            <a:avLst/>
+          </a:prstGeom>
+          <a:noFill xmlns:a="http://schemas.openxmlformats.org/drawingml/2006/main"/>
+          <a:ln xmlns:a="http://schemas.openxmlformats.org/drawingml/2006/main" w="12700">
+            <a:solidFill>
+              <a:srgbClr val="8A969F"/>
+            </a:solidFill>
+            <a:prstDash val="solid"/>
+          </a:ln>
+        </p:spPr>
+        <p:txBody>
+          <a:bodyPr xmlns:a="http://schemas.openxmlformats.org/drawingml/2006/main" wrap="square" lIns="0" tIns="0" rIns="0" bIns="0" anchor="t"/>
+          <a:lstStyle xmlns:a="http://schemas.openxmlformats.org/drawingml/2006/main"/>
+          <a:p xmlns:a="http://schemas.openxmlformats.org/drawingml/2006/main">
+            <a:r>
+              <a:rPr lang="en-US"/>
+              <a:t/>
+            </a:r>
+            <a:endParaRPr lang="en-US"/>
+          </a:p>
+        </p:txBody>
+      </p:sp>
+      <p:sp>
+        <p:nvSpPr>
+          <p:cNvPr id="18" name="academic-label-2"/>
+          <p:cNvSpPr txBox="1"/>
+          <p:nvPr/>
+        </p:nvSpPr>
+        <p:spPr>
+          <a:xfrm xmlns:a="http://schemas.openxmlformats.org/drawingml/2006/main">
+            <a:off x="2114550" y="5105400"/>
+            <a:ext cx="1809750" cy="285750"/>
+          </a:xfrm>
+          <a:prstGeom xmlns:a="http://schemas.openxmlformats.org/drawingml/2006/main" prst="rect">
+            <a:avLst/>
+          </a:prstGeom>
+          <a:noFill xmlns:a="http://schemas.openxmlformats.org/drawingml/2006/main"/>
+          <a:ln xmlns:a="http://schemas.openxmlformats.org/drawingml/2006/main" w="0">
+            <a:noFill/>
+          </a:ln>
+        </p:spPr>
+        <p:txBody>
+          <a:bodyPr xmlns:a="http://schemas.openxmlformats.org/drawingml/2006/main" wrap="square" lIns="0" tIns="0" rIns="0" bIns="0" anchor="t"/>
+          <a:lstStyle xmlns:a="http://schemas.openxmlformats.org/drawingml/2006/main"/>
+          <a:p xmlns:a="http://schemas.openxmlformats.org/drawingml/2006/main">
+            <a:r>
+              <a:rPr lang="en-US" sz="1650" b="1">
+                <a:solidFill>
+                  <a:srgbClr val="132A3A"/>
+                </a:solidFill>
+                <a:latin typeface="Inter"/>
+                <a:ea typeface="Inter"/>
+              </a:rPr>
+              <a:t>Boundary</a:t>
+            </a:r>
+            <a:endParaRPr lang="en-US"/>
+          </a:p>
+        </p:txBody>
+      </p:sp>
+      <p:sp>
+        <p:nvSpPr>
+          <p:cNvPr id="19" name="academic-text-2"/>
+          <p:cNvSpPr txBox="1"/>
+          <p:nvPr/>
+        </p:nvSpPr>
+        <p:spPr>
+          <a:xfrm xmlns:a="http://schemas.openxmlformats.org/drawingml/2006/main">
+            <a:off x="4095750" y="5143500"/>
+            <a:ext cx="5334000" cy="304800"/>
+          </a:xfrm>
+          <a:prstGeom xmlns:a="http://schemas.openxmlformats.org/drawingml/2006/main" prst="rect">
+            <a:avLst/>
+          </a:prstGeom>
+          <a:noFill xmlns:a="http://schemas.openxmlformats.org/drawingml/2006/main"/>
+          <a:ln xmlns:a="http://schemas.openxmlformats.org/drawingml/2006/main" w="0">
+            <a:noFill/>
+          </a:ln>
+        </p:spPr>
+        <p:txBody>
+          <a:bodyPr xmlns:a="http://schemas.openxmlformats.org/drawingml/2006/main" wrap="square" lIns="0" tIns="0" rIns="0" bIns="0" anchor="t"/>
+          <a:lstStyle xmlns:a="http://schemas.openxmlformats.org/drawingml/2006/main"/>
+          <a:p xmlns:a="http://schemas.openxmlformats.org/drawingml/2006/main">
+            <a:r>
+              <a:rPr lang="en-US" sz="1350">
+                <a:solidFill>
+                  <a:srgbClr val="132A3A"/>
+                </a:solidFill>
+                <a:latin typeface="Inter"/>
+                <a:ea typeface="Inter"/>
+              </a:rPr>
+              <a:t>The result applies to this window and sample.</a:t>
+            </a:r>
+            <a:endParaRPr lang="en-US"/>
+          </a:p>
+        </p:txBody>
+      </p:sp>
+      <p:sp>
+        <p:nvSpPr>
+          <p:cNvPr id="20" name="method-panel"/>
+          <p:cNvSpPr/>
+          <p:nvPr/>
+        </p:nvSpPr>
+        <p:spPr>
+          <a:xfrm xmlns:a="http://schemas.openxmlformats.org/drawingml/2006/main">
+            <a:off x="10287000" y="3238500"/>
+            <a:ext cx="3619500" cy="2381250"/>
+          </a:xfrm>
+          <a:prstGeom xmlns:a="http://schemas.openxmlformats.org/drawingml/2006/main" prst="rect">
+            <a:avLst/>
+          </a:prstGeom>
+          <a:solidFill xmlns:a="http://schemas.openxmlformats.org/drawingml/2006/main">
+            <a:srgbClr val="F3F5F8"/>
+          </a:solidFill>
+          <a:ln xmlns:a="http://schemas.openxmlformats.org/drawingml/2006/main" w="12700">
+            <a:solidFill>
+              <a:srgbClr val="8A969F"/>
+            </a:solidFill>
+            <a:prstDash val="solid"/>
+          </a:ln>
+        </p:spPr>
+        <p:txBody>
+          <a:bodyPr xmlns:a="http://schemas.openxmlformats.org/drawingml/2006/main" wrap="square" lIns="0" tIns="0" rIns="0" bIns="0" anchor="t"/>
+          <a:lstStyle xmlns:a="http://schemas.openxmlformats.org/drawingml/2006/main"/>
+          <a:p xmlns:a="http://schemas.openxmlformats.org/drawingml/2006/main">
+            <a:r>
+              <a:rPr lang="en-US"/>
+              <a:t/>
+            </a:r>
+            <a:endParaRPr lang="en-US"/>
+          </a:p>
+        </p:txBody>
+      </p:sp>
+      <p:sp>
+        <p:nvSpPr>
+          <p:cNvPr id="21" name="method-label"/>
+          <p:cNvSpPr txBox="1"/>
+          <p:nvPr/>
+        </p:nvSpPr>
+        <p:spPr>
+          <a:xfrm xmlns:a="http://schemas.openxmlformats.org/drawingml/2006/main">
+            <a:off x="10668000" y="3571875"/>
+            <a:ext cx="2762250" cy="228600"/>
+          </a:xfrm>
+          <a:prstGeom xmlns:a="http://schemas.openxmlformats.org/drawingml/2006/main" prst="rect">
+            <a:avLst/>
+          </a:prstGeom>
+          <a:noFill xmlns:a="http://schemas.openxmlformats.org/drawingml/2006/main"/>
+          <a:ln xmlns:a="http://schemas.openxmlformats.org/drawingml/2006/main" w="0">
+            <a:noFill/>
+          </a:ln>
+        </p:spPr>
+        <p:txBody>
+          <a:bodyPr xmlns:a="http://schemas.openxmlformats.org/drawingml/2006/main" wrap="square" lIns="0" tIns="0" rIns="0" bIns="0" anchor="t"/>
+          <a:lstStyle xmlns:a="http://schemas.openxmlformats.org/drawingml/2006/main"/>
+          <a:p xmlns:a="http://schemas.openxmlformats.org/drawingml/2006/main">
+            <a:r>
+              <a:rPr lang="en-US" sz="1125" b="1">
+                <a:solidFill>
+                  <a:srgbClr val="1769D2"/>
+                </a:solidFill>
+                <a:latin typeface="Inter"/>
+                <a:ea typeface="Inter"/>
+              </a:rPr>
+              <a:t>REGISTERED RULE</a:t>
+            </a:r>
+            <a:endParaRPr lang="en-US"/>
+          </a:p>
+        </p:txBody>
+      </p:sp>
+      <p:sp>
+        <p:nvSpPr>
+          <p:cNvPr id="22" name="method-value"/>
+          <p:cNvSpPr txBox="1"/>
+          <p:nvPr/>
+        </p:nvSpPr>
+        <p:spPr>
+          <a:xfrm xmlns:a="http://schemas.openxmlformats.org/drawingml/2006/main">
+            <a:off x="10668000" y="4048125"/>
+            <a:ext cx="2571750" cy="609600"/>
+          </a:xfrm>
+          <a:prstGeom xmlns:a="http://schemas.openxmlformats.org/drawingml/2006/main" prst="rect">
+            <a:avLst/>
+          </a:prstGeom>
+          <a:noFill xmlns:a="http://schemas.openxmlformats.org/drawingml/2006/main"/>
+          <a:ln xmlns:a="http://schemas.openxmlformats.org/drawingml/2006/main" w="0">
+            <a:noFill/>
+          </a:ln>
+        </p:spPr>
+        <p:txBody>
+          <a:bodyPr xmlns:a="http://schemas.openxmlformats.org/drawingml/2006/main" wrap="square" lIns="0" tIns="0" rIns="0" bIns="0" anchor="t"/>
+          <a:lstStyle xmlns:a="http://schemas.openxmlformats.org/drawingml/2006/main"/>
+          <a:p xmlns:a="http://schemas.openxmlformats.org/drawingml/2006/main">
+            <a:r>
+              <a:rPr lang="en-US" sz="3750" b="1">
+                <a:solidFill>
+                  <a:srgbClr val="1769D2"/>
+                </a:solidFill>
+                <a:latin typeface="Inter"/>
+                <a:ea typeface="Inter"/>
+              </a:rPr>
+              <a:t>≥ 2 pp</a:t>
+            </a:r>
+            <a:endParaRPr lang="en-US"/>
+          </a:p>
+        </p:txBody>
+      </p:sp>
+      <p:sp>
+        <p:nvSpPr>
+          <p:cNvPr id="23" name="method-foot"/>
+          <p:cNvSpPr txBox="1"/>
+          <p:nvPr/>
+        </p:nvSpPr>
+        <p:spPr>
+          <a:xfrm xmlns:a="http://schemas.openxmlformats.org/drawingml/2006/main">
+            <a:off x="10668000" y="4762500"/>
+            <a:ext cx="2762250" cy="228600"/>
+          </a:xfrm>
+          <a:prstGeom xmlns:a="http://schemas.openxmlformats.org/drawingml/2006/main" prst="rect">
+            <a:avLst/>
+          </a:prstGeom>
+          <a:noFill xmlns:a="http://schemas.openxmlformats.org/drawingml/2006/main"/>
+          <a:ln xmlns:a="http://schemas.openxmlformats.org/drawingml/2006/main" w="0">
+            <a:noFill/>
+          </a:ln>
+        </p:spPr>
+        <p:txBody>
+          <a:bodyPr xmlns:a="http://schemas.openxmlformats.org/drawingml/2006/main" wrap="square" lIns="0" tIns="0" rIns="0" bIns="0" anchor="t"/>
+          <a:lstStyle xmlns:a="http://schemas.openxmlformats.org/drawingml/2006/main"/>
+          <a:p xmlns:a="http://schemas.openxmlformats.org/drawingml/2006/main">
+            <a:r>
+              <a:rPr lang="en-US" sz="1200">
+                <a:solidFill>
+                  <a:srgbClr val="8A969F"/>
+                </a:solidFill>
+                <a:latin typeface="Inter"/>
+                <a:ea typeface="Inter"/>
+              </a:rPr>
+              <a:t>confidence interval excludes zero</a:t>
+            </a:r>
+            <a:endParaRPr lang="en-US"/>
+          </a:p>
+        </p:txBody>
+      </p:sp>
+      <p:sp>
+        <p:nvSpPr>
+          <p:cNvPr id="24" name="source"/>
+          <p:cNvSpPr txBox="1"/>
+          <p:nvPr/>
+        </p:nvSpPr>
+        <p:spPr>
+          <a:xfrm xmlns:a="http://schemas.openxmlformats.org/drawingml/2006/main">
+            <a:off x="914400" y="7810500"/>
+            <a:ext cx="10953750" cy="209550"/>
+          </a:xfrm>
+          <a:prstGeom xmlns:a="http://schemas.openxmlformats.org/drawingml/2006/main" prst="rect">
+            <a:avLst/>
+          </a:prstGeom>
+          <a:noFill xmlns:a="http://schemas.openxmlformats.org/drawingml/2006/main"/>
+          <a:ln xmlns:a="http://schemas.openxmlformats.org/drawingml/2006/main" w="0">
+            <a:noFill/>
+          </a:ln>
+        </p:spPr>
+        <p:txBody>
+          <a:bodyPr xmlns:a="http://schemas.openxmlformats.org/drawingml/2006/main" wrap="square" lIns="0" tIns="0" rIns="0" bIns="0" anchor="t"/>
+          <a:lstStyle xmlns:a="http://schemas.openxmlformats.org/drawingml/2006/main"/>
+          <a:p xmlns:a="http://schemas.openxmlformats.org/drawingml/2006/main">
+            <a:r>
+              <a:rPr lang="en-US" sz="1050">
+                <a:solidFill>
+                  <a:srgbClr val="8A969F"/>
+                </a:solidFill>
+                <a:latin typeface="Inter"/>
+                <a:ea typeface="Inter"/>
+              </a:rPr>
+              <a:t>Source: illustrative calibration brief · every claim is fictional and bounded</a:t>
+            </a:r>
+            <a:endParaRPr lang="en-US"/>
+          </a:p>
+        </p:txBody>
+      </p:sp>
+      <p:sp>
+        <p:nvSpPr>
+          <p:cNvPr id="25" name="page-number"/>
+          <p:cNvSpPr txBox="1"/>
+          <p:nvPr/>
+        </p:nvSpPr>
+        <p:spPr>
+          <a:xfrm xmlns:a="http://schemas.openxmlformats.org/drawingml/2006/main">
+            <a:off x="13335000" y="7810500"/>
+            <a:ext cx="952500" cy="209550"/>
+          </a:xfrm>
+          <a:prstGeom xmlns:a="http://schemas.openxmlformats.org/drawingml/2006/main" prst="rect">
+            <a:avLst/>
+          </a:prstGeom>
+          <a:noFill xmlns:a="http://schemas.openxmlformats.org/drawingml/2006/main"/>
+          <a:ln xmlns:a="http://schemas.openxmlformats.org/drawingml/2006/main" w="0">
+            <a:noFill/>
+          </a:ln>
+        </p:spPr>
+        <p:txBody>
+          <a:bodyPr xmlns:a="http://schemas.openxmlformats.org/drawingml/2006/main" wrap="square" lIns="0" tIns="0" rIns="0" bIns="0" anchor="t"/>
+          <a:lstStyle xmlns:a="http://schemas.openxmlformats.org/drawingml/2006/main"/>
+          <a:p xmlns:a="http://schemas.openxmlformats.org/drawingml/2006/main">
+            <a:pPr algn="r"/>
+            <a:r>
+              <a:rPr lang="en-US" sz="1050">
+                <a:solidFill>
+                  <a:srgbClr val="8A969F"/>
+                </a:solidFill>
+                <a:latin typeface="Inter"/>
+                <a:ea typeface="Inter"/>
+              </a:rPr>
+              <a:t>2 / 6</a:t>
+            </a:r>
+            <a:endParaRPr lang="en-US"/>
+          </a:p>
+        </p:txBody>
+      </p:sp>
+    </p:spTree>
+  </p:cSld>
+  <p:clrMapOvr>
+    <a:masterClrMapping xmlns:a="http://schemas.openxmlformats.org/drawingml/2006/main"/>
+  </p:clrMapOvr>
+</p:sld>
+</file>
+
+<file path=ppt/slides/slide3.xml><?xml version="1.0" encoding="utf-8"?>
+<p:sld xmlns:p="http://schemas.openxmlformats.org/presentationml/2006/main">
+  <p:cSld name="Evidence">
+    <p:bg>
+      <p:bgPr>
+        <a:blipFill xmlns:a="http://schemas.openxmlformats.org/drawingml/2006/main">
           <a:blip xmlns:r="http://schemas.openxmlformats.org/officeDocument/2006/relationships" r:embed="rIdOfficeKitImage092dd3ee80187530_1"/>
           <a:stretch>
             <a:fillRect/>
@@ -399,1723 +2116,6 @@
       </p:grpSpPr>
       <p:sp>
         <p:nvSpPr>
-          <p:cNvPr id="2" name="cover-paper-scrim"/>
-          <p:cNvSpPr/>
-          <p:nvPr/>
-        </p:nvSpPr>
-        <p:spPr>
-          <a:xfrm xmlns:a="http://schemas.openxmlformats.org/drawingml/2006/main">
-            <a:off x="0" y="0"/>
-            <a:ext cx="9525000" cy="8572500"/>
-          </a:xfrm>
-          <a:prstGeom xmlns:a="http://schemas.openxmlformats.org/drawingml/2006/main" prst="rect">
-            <a:avLst/>
-          </a:prstGeom>
-          <a:solidFill xmlns:a="http://schemas.openxmlformats.org/drawingml/2006/main">
-            <a:srgbClr val="F8FAFC">
-              <a:alpha val="100000"/>
-            </a:srgbClr>
-          </a:solidFill>
-          <a:ln xmlns:a="http://schemas.openxmlformats.org/drawingml/2006/main" w="0">
-            <a:solidFill>
-              <a:srgbClr val="F8FAFC"/>
-            </a:solidFill>
-            <a:prstDash val="solid"/>
-          </a:ln>
-        </p:spPr>
-        <p:txBody>
-          <a:bodyPr xmlns:a="http://schemas.openxmlformats.org/drawingml/2006/main" wrap="square" lIns="0" tIns="0" rIns="0" bIns="0" anchor="t"/>
-          <a:lstStyle xmlns:a="http://schemas.openxmlformats.org/drawingml/2006/main"/>
-          <a:p xmlns:a="http://schemas.openxmlformats.org/drawingml/2006/main">
-            <a:r>
-              <a:rPr lang="en-US"/>
-              <a:t/>
-            </a:r>
-            <a:endParaRPr lang="en-US"/>
-          </a:p>
-        </p:txBody>
-      </p:sp>
-      <p:sp>
-        <p:nvSpPr>
-          <p:cNvPr id="3" name="top-rule"/>
-          <p:cNvSpPr/>
-          <p:nvPr/>
-        </p:nvSpPr>
-        <p:spPr>
-          <a:xfrm xmlns:a="http://schemas.openxmlformats.org/drawingml/2006/main">
-            <a:off x="838200" y="666750"/>
-            <a:ext cx="13563600" cy="0"/>
-          </a:xfrm>
-          <a:prstGeom xmlns:a="http://schemas.openxmlformats.org/drawingml/2006/main" prst="line">
-            <a:avLst/>
-          </a:prstGeom>
-          <a:noFill xmlns:a="http://schemas.openxmlformats.org/drawingml/2006/main"/>
-          <a:ln xmlns:a="http://schemas.openxmlformats.org/drawingml/2006/main" w="38100">
-            <a:solidFill>
-              <a:srgbClr val="1769D2"/>
-            </a:solidFill>
-            <a:prstDash val="solid"/>
-          </a:ln>
-        </p:spPr>
-        <p:txBody>
-          <a:bodyPr xmlns:a="http://schemas.openxmlformats.org/drawingml/2006/main" wrap="square" lIns="0" tIns="0" rIns="0" bIns="0" anchor="t"/>
-          <a:lstStyle xmlns:a="http://schemas.openxmlformats.org/drawingml/2006/main"/>
-          <a:p xmlns:a="http://schemas.openxmlformats.org/drawingml/2006/main">
-            <a:r>
-              <a:rPr lang="en-US"/>
-              <a:t/>
-            </a:r>
-            <a:endParaRPr lang="en-US"/>
-          </a:p>
-        </p:txBody>
-      </p:sp>
-      <p:sp>
-        <p:nvSpPr>
-          <p:cNvPr id="4" name="eyebrow"/>
-          <p:cNvSpPr txBox="1"/>
-          <p:nvPr/>
-        </p:nvSpPr>
-        <p:spPr>
-          <a:xfrm xmlns:a="http://schemas.openxmlformats.org/drawingml/2006/main">
-            <a:off x="914400" y="895350"/>
-            <a:ext cx="7239000" cy="228600"/>
-          </a:xfrm>
-          <a:prstGeom xmlns:a="http://schemas.openxmlformats.org/drawingml/2006/main" prst="rect">
-            <a:avLst/>
-          </a:prstGeom>
-          <a:noFill xmlns:a="http://schemas.openxmlformats.org/drawingml/2006/main"/>
-          <a:ln xmlns:a="http://schemas.openxmlformats.org/drawingml/2006/main" w="0">
-            <a:noFill/>
-          </a:ln>
-        </p:spPr>
-        <p:txBody>
-          <a:bodyPr xmlns:a="http://schemas.openxmlformats.org/drawingml/2006/main" wrap="square" lIns="0" tIns="0" rIns="0" bIns="0" anchor="t"/>
-          <a:lstStyle xmlns:a="http://schemas.openxmlformats.org/drawingml/2006/main"/>
-          <a:p xmlns:a="http://schemas.openxmlformats.org/drawingml/2006/main">
-            <a:r>
-              <a:rPr lang="en-US" sz="1200" b="1">
-                <a:solidFill>
-                  <a:srgbClr val="1769D2"/>
-                </a:solidFill>
-                <a:latin typeface="Inter"/>
-                <a:ea typeface="Inter"/>
-              </a:rPr>
-              <a:t>ACADEMIC · OFFICEKIT CALIBRATION</a:t>
-            </a:r>
-            <a:endParaRPr lang="en-US"/>
-          </a:p>
-        </p:txBody>
-      </p:sp>
-      <p:sp>
-        <p:nvSpPr>
-          <p:cNvPr id="5" name="cover-title"/>
-          <p:cNvSpPr txBox="1"/>
-          <p:nvPr/>
-        </p:nvSpPr>
-        <p:spPr>
-          <a:xfrm xmlns:a="http://schemas.openxmlformats.org/drawingml/2006/main">
-            <a:off x="914400" y="1571625"/>
-            <a:ext cx="8382000" cy="1066800"/>
-          </a:xfrm>
-          <a:prstGeom xmlns:a="http://schemas.openxmlformats.org/drawingml/2006/main" prst="rect">
-            <a:avLst/>
-          </a:prstGeom>
-          <a:noFill xmlns:a="http://schemas.openxmlformats.org/drawingml/2006/main"/>
-          <a:ln xmlns:a="http://schemas.openxmlformats.org/drawingml/2006/main" w="0">
-            <a:noFill/>
-          </a:ln>
-        </p:spPr>
-        <p:txBody>
-          <a:bodyPr xmlns:a="http://schemas.openxmlformats.org/drawingml/2006/main" wrap="square" lIns="0" tIns="0" rIns="0" bIns="0" anchor="t"/>
-          <a:lstStyle xmlns:a="http://schemas.openxmlformats.org/drawingml/2006/main"/>
-          <a:p xmlns:a="http://schemas.openxmlformats.org/drawingml/2006/main">
-            <a:r>
-              <a:rPr lang="en-US" sz="3600" b="1">
-                <a:solidFill>
-                  <a:srgbClr val="132A3A"/>
-                </a:solidFill>
-                <a:latin typeface="Inter"/>
-                <a:ea typeface="Inter"/>
-              </a:rPr>
-              <a:t>Blueprint Lecture: a claim worth testing</a:t>
-            </a:r>
-            <a:endParaRPr lang="en-US"/>
-          </a:p>
-        </p:txBody>
-      </p:sp>
-      <p:sp>
-        <p:nvSpPr>
-          <p:cNvPr id="6" name="cover-subtitle"/>
-          <p:cNvSpPr txBox="1"/>
-          <p:nvPr/>
-        </p:nvSpPr>
-        <p:spPr>
-          <a:xfrm xmlns:a="http://schemas.openxmlformats.org/drawingml/2006/main">
-            <a:off x="952500" y="2857500"/>
-            <a:ext cx="6858000" cy="323850"/>
-          </a:xfrm>
-          <a:prstGeom xmlns:a="http://schemas.openxmlformats.org/drawingml/2006/main" prst="rect">
-            <a:avLst/>
-          </a:prstGeom>
-          <a:noFill xmlns:a="http://schemas.openxmlformats.org/drawingml/2006/main"/>
-          <a:ln xmlns:a="http://schemas.openxmlformats.org/drawingml/2006/main" w="0">
-            <a:noFill/>
-          </a:ln>
-        </p:spPr>
-        <p:txBody>
-          <a:bodyPr xmlns:a="http://schemas.openxmlformats.org/drawingml/2006/main" wrap="square" lIns="0" tIns="0" rIns="0" bIns="0" anchor="t"/>
-          <a:lstStyle xmlns:a="http://schemas.openxmlformats.org/drawingml/2006/main"/>
-          <a:p xmlns:a="http://schemas.openxmlformats.org/drawingml/2006/main">
-            <a:r>
-              <a:rPr lang="en-US" sz="1725">
-                <a:solidFill>
-                  <a:srgbClr val="1769D2"/>
-                </a:solidFill>
-                <a:latin typeface="Inter"/>
-                <a:ea typeface="Inter"/>
-              </a:rPr>
-              <a:t>A clean-room reference for evidence, direction, and a decision.</a:t>
-            </a:r>
-            <a:endParaRPr lang="en-US"/>
-          </a:p>
-        </p:txBody>
-      </p:sp>
-      <p:sp>
-        <p:nvSpPr>
-          <p:cNvPr id="7" name="cover-rule"/>
-          <p:cNvSpPr/>
-          <p:nvPr/>
-        </p:nvSpPr>
-        <p:spPr>
-          <a:xfrm xmlns:a="http://schemas.openxmlformats.org/drawingml/2006/main">
-            <a:off x="914400" y="3524250"/>
-            <a:ext cx="7658100" cy="0"/>
-          </a:xfrm>
-          <a:prstGeom xmlns:a="http://schemas.openxmlformats.org/drawingml/2006/main" prst="line">
-            <a:avLst/>
-          </a:prstGeom>
-          <a:noFill xmlns:a="http://schemas.openxmlformats.org/drawingml/2006/main"/>
-          <a:ln xmlns:a="http://schemas.openxmlformats.org/drawingml/2006/main" w="25400">
-            <a:solidFill>
-              <a:srgbClr val="8A969F"/>
-            </a:solidFill>
-            <a:prstDash val="solid"/>
-          </a:ln>
-        </p:spPr>
-        <p:txBody>
-          <a:bodyPr xmlns:a="http://schemas.openxmlformats.org/drawingml/2006/main" wrap="square" lIns="0" tIns="0" rIns="0" bIns="0" anchor="t"/>
-          <a:lstStyle xmlns:a="http://schemas.openxmlformats.org/drawingml/2006/main"/>
-          <a:p xmlns:a="http://schemas.openxmlformats.org/drawingml/2006/main">
-            <a:r>
-              <a:rPr lang="en-US"/>
-              <a:t/>
-            </a:r>
-            <a:endParaRPr lang="en-US"/>
-          </a:p>
-        </p:txBody>
-      </p:sp>
-      <p:sp>
-        <p:nvSpPr>
-          <p:cNvPr id="8" name="cover-basis"/>
-          <p:cNvSpPr txBox="1"/>
-          <p:nvPr/>
-        </p:nvSpPr>
-        <p:spPr>
-          <a:xfrm xmlns:a="http://schemas.openxmlformats.org/drawingml/2006/main">
-            <a:off x="952500" y="3762375"/>
-            <a:ext cx="7810500" cy="266700"/>
-          </a:xfrm>
-          <a:prstGeom xmlns:a="http://schemas.openxmlformats.org/drawingml/2006/main" prst="rect">
-            <a:avLst/>
-          </a:prstGeom>
-          <a:noFill xmlns:a="http://schemas.openxmlformats.org/drawingml/2006/main"/>
-          <a:ln xmlns:a="http://schemas.openxmlformats.org/drawingml/2006/main" w="0">
-            <a:noFill/>
-          </a:ln>
-        </p:spPr>
-        <p:txBody>
-          <a:bodyPr xmlns:a="http://schemas.openxmlformats.org/drawingml/2006/main" wrap="square" lIns="0" tIns="0" rIns="0" bIns="0" anchor="t"/>
-          <a:lstStyle xmlns:a="http://schemas.openxmlformats.org/drawingml/2006/main"/>
-          <a:p xmlns:a="http://schemas.openxmlformats.org/drawingml/2006/main">
-            <a:r>
-              <a:rPr lang="en-US" sz="1350">
-                <a:solidFill>
-                  <a:srgbClr val="132A3A"/>
-                </a:solidFill>
-                <a:latin typeface="Inter"/>
-                <a:ea typeface="Inter"/>
-              </a:rPr>
-              <a:t>One visual language · four page roles · native editable objects</a:t>
-            </a:r>
-            <a:endParaRPr lang="en-US"/>
-          </a:p>
-        </p:txBody>
-      </p:sp>
-      <p:sp>
-        <p:nvSpPr>
-          <p:cNvPr id="9" name="cover-thesis"/>
-          <p:cNvSpPr txBox="1"/>
-          <p:nvPr/>
-        </p:nvSpPr>
-        <p:spPr>
-          <a:xfrm xmlns:a="http://schemas.openxmlformats.org/drawingml/2006/main">
-            <a:off x="952500" y="4810125"/>
-            <a:ext cx="6667500" cy="628650"/>
-          </a:xfrm>
-          <a:prstGeom xmlns:a="http://schemas.openxmlformats.org/drawingml/2006/main" prst="rect">
-            <a:avLst/>
-          </a:prstGeom>
-          <a:noFill xmlns:a="http://schemas.openxmlformats.org/drawingml/2006/main"/>
-          <a:ln xmlns:a="http://schemas.openxmlformats.org/drawingml/2006/main" w="0">
-            <a:noFill/>
-          </a:ln>
-        </p:spPr>
-        <p:txBody>
-          <a:bodyPr xmlns:a="http://schemas.openxmlformats.org/drawingml/2006/main" wrap="square" lIns="0" tIns="0" rIns="0" bIns="0" anchor="t"/>
-          <a:lstStyle xmlns:a="http://schemas.openxmlformats.org/drawingml/2006/main"/>
-          <a:p xmlns:a="http://schemas.openxmlformats.org/drawingml/2006/main">
-            <a:r>
-              <a:rPr lang="en-US" sz="1875" b="1">
-                <a:solidFill>
-                  <a:srgbClr val="132A3A"/>
-                </a:solidFill>
-                <a:latin typeface="Inter"/>
-                <a:ea typeface="Inter"/>
-              </a:rPr>
-              <a:t>A falsifiable claim is a design decision.</a:t>
-            </a:r>
-            <a:endParaRPr lang="en-US"/>
-          </a:p>
-        </p:txBody>
-      </p:sp>
-      <p:sp>
-        <p:nvSpPr>
-          <p:cNvPr id="10" name="cover-source"/>
-          <p:cNvSpPr txBox="1"/>
-          <p:nvPr/>
-        </p:nvSpPr>
-        <p:spPr>
-          <a:xfrm xmlns:a="http://schemas.openxmlformats.org/drawingml/2006/main">
-            <a:off x="952500" y="7315200"/>
-            <a:ext cx="9048750" cy="228600"/>
-          </a:xfrm>
-          <a:prstGeom xmlns:a="http://schemas.openxmlformats.org/drawingml/2006/main" prst="rect">
-            <a:avLst/>
-          </a:prstGeom>
-          <a:noFill xmlns:a="http://schemas.openxmlformats.org/drawingml/2006/main"/>
-          <a:ln xmlns:a="http://schemas.openxmlformats.org/drawingml/2006/main" w="0">
-            <a:noFill/>
-          </a:ln>
-        </p:spPr>
-        <p:txBody>
-          <a:bodyPr xmlns:a="http://schemas.openxmlformats.org/drawingml/2006/main" wrap="square" lIns="0" tIns="0" rIns="0" bIns="0" anchor="t"/>
-          <a:lstStyle xmlns:a="http://schemas.openxmlformats.org/drawingml/2006/main"/>
-          <a:p xmlns:a="http://schemas.openxmlformats.org/drawingml/2006/main">
-            <a:r>
-              <a:rPr lang="en-US" sz="1050">
-                <a:solidFill>
-                  <a:srgbClr val="8A969F"/>
-                </a:solidFill>
-                <a:latin typeface="Inter"/>
-                <a:ea typeface="Inter"/>
-              </a:rPr>
-              <a:t>OfficeKit original clean-room calibration · fictional content · 2026-08-29</a:t>
-            </a:r>
-            <a:endParaRPr lang="en-US"/>
-          </a:p>
-        </p:txBody>
-      </p:sp>
-      <p:sp>
-        <p:nvSpPr>
-          <p:cNvPr id="11" name="page-number"/>
-          <p:cNvSpPr txBox="1"/>
-          <p:nvPr/>
-        </p:nvSpPr>
-        <p:spPr>
-          <a:xfrm xmlns:a="http://schemas.openxmlformats.org/drawingml/2006/main">
-            <a:off x="13335000" y="7810500"/>
-            <a:ext cx="952500" cy="209550"/>
-          </a:xfrm>
-          <a:prstGeom xmlns:a="http://schemas.openxmlformats.org/drawingml/2006/main" prst="rect">
-            <a:avLst/>
-          </a:prstGeom>
-          <a:noFill xmlns:a="http://schemas.openxmlformats.org/drawingml/2006/main"/>
-          <a:ln xmlns:a="http://schemas.openxmlformats.org/drawingml/2006/main" w="0">
-            <a:noFill/>
-          </a:ln>
-        </p:spPr>
-        <p:txBody>
-          <a:bodyPr xmlns:a="http://schemas.openxmlformats.org/drawingml/2006/main" wrap="square" lIns="0" tIns="0" rIns="0" bIns="0" anchor="t"/>
-          <a:lstStyle xmlns:a="http://schemas.openxmlformats.org/drawingml/2006/main"/>
-          <a:p xmlns:a="http://schemas.openxmlformats.org/drawingml/2006/main">
-            <a:pPr algn="r"/>
-            <a:r>
-              <a:rPr lang="en-US" sz="1050">
-                <a:solidFill>
-                  <a:srgbClr val="8A969F"/>
-                </a:solidFill>
-                <a:latin typeface="Inter"/>
-                <a:ea typeface="Inter"/>
-              </a:rPr>
-              <a:t>1 / 6</a:t>
-            </a:r>
-            <a:endParaRPr lang="en-US"/>
-          </a:p>
-        </p:txBody>
-      </p:sp>
-      <p:sp>
-        <p:nvSpPr>
-          <p:cNvPr id="12" name="anchor-field"/>
-          <p:cNvSpPr/>
-          <p:nvPr/>
-        </p:nvSpPr>
-        <p:spPr>
-          <a:xfrm xmlns:a="http://schemas.openxmlformats.org/drawingml/2006/main">
-            <a:off x="11620500" y="1790700"/>
-            <a:ext cx="2095500" cy="2286000"/>
-          </a:xfrm>
-          <a:prstGeom xmlns:a="http://schemas.openxmlformats.org/drawingml/2006/main" prst="rect">
-            <a:avLst/>
-          </a:prstGeom>
-          <a:solidFill xmlns:a="http://schemas.openxmlformats.org/drawingml/2006/main">
-            <a:srgbClr val="F3F5F8"/>
-          </a:solidFill>
-          <a:ln xmlns:a="http://schemas.openxmlformats.org/drawingml/2006/main" w="25400">
-            <a:solidFill>
-              <a:srgbClr val="1769D2"/>
-            </a:solidFill>
-            <a:prstDash val="solid"/>
-          </a:ln>
-        </p:spPr>
-        <p:txBody>
-          <a:bodyPr xmlns:a="http://schemas.openxmlformats.org/drawingml/2006/main" wrap="square" lIns="0" tIns="0" rIns="0" bIns="0" anchor="t"/>
-          <a:lstStyle xmlns:a="http://schemas.openxmlformats.org/drawingml/2006/main"/>
-          <a:p xmlns:a="http://schemas.openxmlformats.org/drawingml/2006/main">
-            <a:r>
-              <a:rPr lang="en-US"/>
-              <a:t/>
-            </a:r>
-            <a:endParaRPr lang="en-US"/>
-          </a:p>
-        </p:txBody>
-      </p:sp>
-      <p:sp>
-        <p:nvSpPr>
-          <p:cNvPr id="13" name="anchor-grid-0-0"/>
-          <p:cNvSpPr/>
-          <p:nvPr/>
-        </p:nvSpPr>
-        <p:spPr>
-          <a:xfrm xmlns:a="http://schemas.openxmlformats.org/drawingml/2006/main">
-            <a:off x="11925300" y="2152650"/>
-            <a:ext cx="266700" cy="285750"/>
-          </a:xfrm>
-          <a:prstGeom xmlns:a="http://schemas.openxmlformats.org/drawingml/2006/main" prst="rect">
-            <a:avLst/>
-          </a:prstGeom>
-          <a:solidFill xmlns:a="http://schemas.openxmlformats.org/drawingml/2006/main">
-            <a:srgbClr val="1769D2"/>
-          </a:solidFill>
-          <a:ln xmlns:a="http://schemas.openxmlformats.org/drawingml/2006/main" w="12700">
-            <a:solidFill>
-              <a:srgbClr val="1769D2"/>
-            </a:solidFill>
-            <a:prstDash val="solid"/>
-          </a:ln>
-        </p:spPr>
-        <p:txBody>
-          <a:bodyPr xmlns:a="http://schemas.openxmlformats.org/drawingml/2006/main" wrap="square" lIns="0" tIns="0" rIns="0" bIns="0" anchor="t"/>
-          <a:lstStyle xmlns:a="http://schemas.openxmlformats.org/drawingml/2006/main"/>
-          <a:p xmlns:a="http://schemas.openxmlformats.org/drawingml/2006/main">
-            <a:r>
-              <a:rPr lang="en-US"/>
-              <a:t/>
-            </a:r>
-            <a:endParaRPr lang="en-US"/>
-          </a:p>
-        </p:txBody>
-      </p:sp>
-      <p:sp>
-        <p:nvSpPr>
-          <p:cNvPr id="14" name="anchor-grid-0-1"/>
-          <p:cNvSpPr/>
-          <p:nvPr/>
-        </p:nvSpPr>
-        <p:spPr>
-          <a:xfrm xmlns:a="http://schemas.openxmlformats.org/drawingml/2006/main">
-            <a:off x="12420600" y="2152650"/>
-            <a:ext cx="266700" cy="285750"/>
-          </a:xfrm>
-          <a:prstGeom xmlns:a="http://schemas.openxmlformats.org/drawingml/2006/main" prst="rect">
-            <a:avLst/>
-          </a:prstGeom>
-          <a:solidFill xmlns:a="http://schemas.openxmlformats.org/drawingml/2006/main">
-            <a:srgbClr val="1769D2"/>
-          </a:solidFill>
-          <a:ln xmlns:a="http://schemas.openxmlformats.org/drawingml/2006/main" w="12700">
-            <a:solidFill>
-              <a:srgbClr val="1769D2"/>
-            </a:solidFill>
-            <a:prstDash val="solid"/>
-          </a:ln>
-        </p:spPr>
-        <p:txBody>
-          <a:bodyPr xmlns:a="http://schemas.openxmlformats.org/drawingml/2006/main" wrap="square" lIns="0" tIns="0" rIns="0" bIns="0" anchor="t"/>
-          <a:lstStyle xmlns:a="http://schemas.openxmlformats.org/drawingml/2006/main"/>
-          <a:p xmlns:a="http://schemas.openxmlformats.org/drawingml/2006/main">
-            <a:r>
-              <a:rPr lang="en-US"/>
-              <a:t/>
-            </a:r>
-            <a:endParaRPr lang="en-US"/>
-          </a:p>
-        </p:txBody>
-      </p:sp>
-      <p:sp>
-        <p:nvSpPr>
-          <p:cNvPr id="15" name="anchor-grid-0-2"/>
-          <p:cNvSpPr/>
-          <p:nvPr/>
-        </p:nvSpPr>
-        <p:spPr>
-          <a:xfrm xmlns:a="http://schemas.openxmlformats.org/drawingml/2006/main">
-            <a:off x="12915900" y="2152650"/>
-            <a:ext cx="266700" cy="285750"/>
-          </a:xfrm>
-          <a:prstGeom xmlns:a="http://schemas.openxmlformats.org/drawingml/2006/main" prst="rect">
-            <a:avLst/>
-          </a:prstGeom>
-          <a:solidFill xmlns:a="http://schemas.openxmlformats.org/drawingml/2006/main">
-            <a:srgbClr val="F8FAFC"/>
-          </a:solidFill>
-          <a:ln xmlns:a="http://schemas.openxmlformats.org/drawingml/2006/main" w="12700">
-            <a:solidFill>
-              <a:srgbClr val="1769D2"/>
-            </a:solidFill>
-            <a:prstDash val="solid"/>
-          </a:ln>
-        </p:spPr>
-        <p:txBody>
-          <a:bodyPr xmlns:a="http://schemas.openxmlformats.org/drawingml/2006/main" wrap="square" lIns="0" tIns="0" rIns="0" bIns="0" anchor="t"/>
-          <a:lstStyle xmlns:a="http://schemas.openxmlformats.org/drawingml/2006/main"/>
-          <a:p xmlns:a="http://schemas.openxmlformats.org/drawingml/2006/main">
-            <a:r>
-              <a:rPr lang="en-US"/>
-              <a:t/>
-            </a:r>
-            <a:endParaRPr lang="en-US"/>
-          </a:p>
-        </p:txBody>
-      </p:sp>
-      <p:sp>
-        <p:nvSpPr>
-          <p:cNvPr id="16" name="anchor-grid-1-0"/>
-          <p:cNvSpPr/>
-          <p:nvPr/>
-        </p:nvSpPr>
-        <p:spPr>
-          <a:xfrm xmlns:a="http://schemas.openxmlformats.org/drawingml/2006/main">
-            <a:off x="11925300" y="2686050"/>
-            <a:ext cx="266700" cy="285750"/>
-          </a:xfrm>
-          <a:prstGeom xmlns:a="http://schemas.openxmlformats.org/drawingml/2006/main" prst="rect">
-            <a:avLst/>
-          </a:prstGeom>
-          <a:solidFill xmlns:a="http://schemas.openxmlformats.org/drawingml/2006/main">
-            <a:srgbClr val="1769D2"/>
-          </a:solidFill>
-          <a:ln xmlns:a="http://schemas.openxmlformats.org/drawingml/2006/main" w="12700">
-            <a:solidFill>
-              <a:srgbClr val="1769D2"/>
-            </a:solidFill>
-            <a:prstDash val="solid"/>
-          </a:ln>
-        </p:spPr>
-        <p:txBody>
-          <a:bodyPr xmlns:a="http://schemas.openxmlformats.org/drawingml/2006/main" wrap="square" lIns="0" tIns="0" rIns="0" bIns="0" anchor="t"/>
-          <a:lstStyle xmlns:a="http://schemas.openxmlformats.org/drawingml/2006/main"/>
-          <a:p xmlns:a="http://schemas.openxmlformats.org/drawingml/2006/main">
-            <a:r>
-              <a:rPr lang="en-US"/>
-              <a:t/>
-            </a:r>
-            <a:endParaRPr lang="en-US"/>
-          </a:p>
-        </p:txBody>
-      </p:sp>
-      <p:sp>
-        <p:nvSpPr>
-          <p:cNvPr id="17" name="anchor-grid-1-1"/>
-          <p:cNvSpPr/>
-          <p:nvPr/>
-        </p:nvSpPr>
-        <p:spPr>
-          <a:xfrm xmlns:a="http://schemas.openxmlformats.org/drawingml/2006/main">
-            <a:off x="12420600" y="2686050"/>
-            <a:ext cx="266700" cy="285750"/>
-          </a:xfrm>
-          <a:prstGeom xmlns:a="http://schemas.openxmlformats.org/drawingml/2006/main" prst="rect">
-            <a:avLst/>
-          </a:prstGeom>
-          <a:solidFill xmlns:a="http://schemas.openxmlformats.org/drawingml/2006/main">
-            <a:srgbClr val="1769D2"/>
-          </a:solidFill>
-          <a:ln xmlns:a="http://schemas.openxmlformats.org/drawingml/2006/main" w="12700">
-            <a:solidFill>
-              <a:srgbClr val="1769D2"/>
-            </a:solidFill>
-            <a:prstDash val="solid"/>
-          </a:ln>
-        </p:spPr>
-        <p:txBody>
-          <a:bodyPr xmlns:a="http://schemas.openxmlformats.org/drawingml/2006/main" wrap="square" lIns="0" tIns="0" rIns="0" bIns="0" anchor="t"/>
-          <a:lstStyle xmlns:a="http://schemas.openxmlformats.org/drawingml/2006/main"/>
-          <a:p xmlns:a="http://schemas.openxmlformats.org/drawingml/2006/main">
-            <a:r>
-              <a:rPr lang="en-US"/>
-              <a:t/>
-            </a:r>
-            <a:endParaRPr lang="en-US"/>
-          </a:p>
-        </p:txBody>
-      </p:sp>
-      <p:sp>
-        <p:nvSpPr>
-          <p:cNvPr id="18" name="anchor-grid-1-2"/>
-          <p:cNvSpPr/>
-          <p:nvPr/>
-        </p:nvSpPr>
-        <p:spPr>
-          <a:xfrm xmlns:a="http://schemas.openxmlformats.org/drawingml/2006/main">
-            <a:off x="12915900" y="2686050"/>
-            <a:ext cx="266700" cy="285750"/>
-          </a:xfrm>
-          <a:prstGeom xmlns:a="http://schemas.openxmlformats.org/drawingml/2006/main" prst="rect">
-            <a:avLst/>
-          </a:prstGeom>
-          <a:solidFill xmlns:a="http://schemas.openxmlformats.org/drawingml/2006/main">
-            <a:srgbClr val="F8FAFC"/>
-          </a:solidFill>
-          <a:ln xmlns:a="http://schemas.openxmlformats.org/drawingml/2006/main" w="12700">
-            <a:solidFill>
-              <a:srgbClr val="1769D2"/>
-            </a:solidFill>
-            <a:prstDash val="solid"/>
-          </a:ln>
-        </p:spPr>
-        <p:txBody>
-          <a:bodyPr xmlns:a="http://schemas.openxmlformats.org/drawingml/2006/main" wrap="square" lIns="0" tIns="0" rIns="0" bIns="0" anchor="t"/>
-          <a:lstStyle xmlns:a="http://schemas.openxmlformats.org/drawingml/2006/main"/>
-          <a:p xmlns:a="http://schemas.openxmlformats.org/drawingml/2006/main">
-            <a:r>
-              <a:rPr lang="en-US"/>
-              <a:t/>
-            </a:r>
-            <a:endParaRPr lang="en-US"/>
-          </a:p>
-        </p:txBody>
-      </p:sp>
-      <p:sp>
-        <p:nvSpPr>
-          <p:cNvPr id="19" name="anchor-grid-2-0"/>
-          <p:cNvSpPr/>
-          <p:nvPr/>
-        </p:nvSpPr>
-        <p:spPr>
-          <a:xfrm xmlns:a="http://schemas.openxmlformats.org/drawingml/2006/main">
-            <a:off x="11925300" y="3219450"/>
-            <a:ext cx="266700" cy="285750"/>
-          </a:xfrm>
-          <a:prstGeom xmlns:a="http://schemas.openxmlformats.org/drawingml/2006/main" prst="rect">
-            <a:avLst/>
-          </a:prstGeom>
-          <a:solidFill xmlns:a="http://schemas.openxmlformats.org/drawingml/2006/main">
-            <a:srgbClr val="1769D2"/>
-          </a:solidFill>
-          <a:ln xmlns:a="http://schemas.openxmlformats.org/drawingml/2006/main" w="12700">
-            <a:solidFill>
-              <a:srgbClr val="1769D2"/>
-            </a:solidFill>
-            <a:prstDash val="solid"/>
-          </a:ln>
-        </p:spPr>
-        <p:txBody>
-          <a:bodyPr xmlns:a="http://schemas.openxmlformats.org/drawingml/2006/main" wrap="square" lIns="0" tIns="0" rIns="0" bIns="0" anchor="t"/>
-          <a:lstStyle xmlns:a="http://schemas.openxmlformats.org/drawingml/2006/main"/>
-          <a:p xmlns:a="http://schemas.openxmlformats.org/drawingml/2006/main">
-            <a:r>
-              <a:rPr lang="en-US"/>
-              <a:t/>
-            </a:r>
-            <a:endParaRPr lang="en-US"/>
-          </a:p>
-        </p:txBody>
-      </p:sp>
-      <p:sp>
-        <p:nvSpPr>
-          <p:cNvPr id="20" name="anchor-grid-2-1"/>
-          <p:cNvSpPr/>
-          <p:nvPr/>
-        </p:nvSpPr>
-        <p:spPr>
-          <a:xfrm xmlns:a="http://schemas.openxmlformats.org/drawingml/2006/main">
-            <a:off x="12420600" y="3219450"/>
-            <a:ext cx="266700" cy="285750"/>
-          </a:xfrm>
-          <a:prstGeom xmlns:a="http://schemas.openxmlformats.org/drawingml/2006/main" prst="rect">
-            <a:avLst/>
-          </a:prstGeom>
-          <a:solidFill xmlns:a="http://schemas.openxmlformats.org/drawingml/2006/main">
-            <a:srgbClr val="1769D2"/>
-          </a:solidFill>
-          <a:ln xmlns:a="http://schemas.openxmlformats.org/drawingml/2006/main" w="12700">
-            <a:solidFill>
-              <a:srgbClr val="1769D2"/>
-            </a:solidFill>
-            <a:prstDash val="solid"/>
-          </a:ln>
-        </p:spPr>
-        <p:txBody>
-          <a:bodyPr xmlns:a="http://schemas.openxmlformats.org/drawingml/2006/main" wrap="square" lIns="0" tIns="0" rIns="0" bIns="0" anchor="t"/>
-          <a:lstStyle xmlns:a="http://schemas.openxmlformats.org/drawingml/2006/main"/>
-          <a:p xmlns:a="http://schemas.openxmlformats.org/drawingml/2006/main">
-            <a:r>
-              <a:rPr lang="en-US"/>
-              <a:t/>
-            </a:r>
-            <a:endParaRPr lang="en-US"/>
-          </a:p>
-        </p:txBody>
-      </p:sp>
-      <p:sp>
-        <p:nvSpPr>
-          <p:cNvPr id="21" name="anchor-grid-2-2"/>
-          <p:cNvSpPr/>
-          <p:nvPr/>
-        </p:nvSpPr>
-        <p:spPr>
-          <a:xfrm xmlns:a="http://schemas.openxmlformats.org/drawingml/2006/main">
-            <a:off x="12915900" y="3219450"/>
-            <a:ext cx="266700" cy="285750"/>
-          </a:xfrm>
-          <a:prstGeom xmlns:a="http://schemas.openxmlformats.org/drawingml/2006/main" prst="rect">
-            <a:avLst/>
-          </a:prstGeom>
-          <a:solidFill xmlns:a="http://schemas.openxmlformats.org/drawingml/2006/main">
-            <a:srgbClr val="F8FAFC"/>
-          </a:solidFill>
-          <a:ln xmlns:a="http://schemas.openxmlformats.org/drawingml/2006/main" w="12700">
-            <a:solidFill>
-              <a:srgbClr val="1769D2"/>
-            </a:solidFill>
-            <a:prstDash val="solid"/>
-          </a:ln>
-        </p:spPr>
-        <p:txBody>
-          <a:bodyPr xmlns:a="http://schemas.openxmlformats.org/drawingml/2006/main" wrap="square" lIns="0" tIns="0" rIns="0" bIns="0" anchor="t"/>
-          <a:lstStyle xmlns:a="http://schemas.openxmlformats.org/drawingml/2006/main"/>
-          <a:p xmlns:a="http://schemas.openxmlformats.org/drawingml/2006/main">
-            <a:r>
-              <a:rPr lang="en-US"/>
-              <a:t/>
-            </a:r>
-            <a:endParaRPr lang="en-US"/>
-          </a:p>
-        </p:txBody>
-      </p:sp>
-      <p:sp>
-        <p:nvSpPr>
-          <p:cNvPr id="22" name="anchor-axis"/>
-          <p:cNvSpPr/>
-          <p:nvPr/>
-        </p:nvSpPr>
-        <p:spPr>
-          <a:xfrm xmlns:a="http://schemas.openxmlformats.org/drawingml/2006/main">
-            <a:off x="12668250" y="1638300"/>
-            <a:ext cx="0" cy="2743200"/>
-          </a:xfrm>
-          <a:prstGeom xmlns:a="http://schemas.openxmlformats.org/drawingml/2006/main" prst="line">
-            <a:avLst/>
-          </a:prstGeom>
-          <a:noFill xmlns:a="http://schemas.openxmlformats.org/drawingml/2006/main"/>
-          <a:ln xmlns:a="http://schemas.openxmlformats.org/drawingml/2006/main" w="50800">
-            <a:solidFill>
-              <a:srgbClr val="132A3A"/>
-            </a:solidFill>
-            <a:prstDash val="solid"/>
-          </a:ln>
-        </p:spPr>
-        <p:txBody>
-          <a:bodyPr xmlns:a="http://schemas.openxmlformats.org/drawingml/2006/main" wrap="square" lIns="0" tIns="0" rIns="0" bIns="0" anchor="t"/>
-          <a:lstStyle xmlns:a="http://schemas.openxmlformats.org/drawingml/2006/main"/>
-          <a:p xmlns:a="http://schemas.openxmlformats.org/drawingml/2006/main">
-            <a:r>
-              <a:rPr lang="en-US"/>
-              <a:t/>
-            </a:r>
-            <a:endParaRPr lang="en-US"/>
-          </a:p>
-        </p:txBody>
-      </p:sp>
-    </p:spTree>
-  </p:cSld>
-  <p:clrMapOvr>
-    <a:masterClrMapping xmlns:a="http://schemas.openxmlformats.org/drawingml/2006/main"/>
-  </p:clrMapOvr>
-</p:sld>
-</file>
-
-<file path=ppt/slides/slide2.xml><?xml version="1.0" encoding="utf-8"?>
-<p:sld xmlns:p="http://schemas.openxmlformats.org/presentationml/2006/main">
-  <p:cSld name="Argument">
-    <p:bg>
-      <p:bgPr>
-        <a:blipFill xmlns:a="http://schemas.openxmlformats.org/drawingml/2006/main">
-          <a:blip xmlns:r="http://schemas.openxmlformats.org/officeDocument/2006/relationships" r:embed="rIdOfficeKitImaged71bfa074cda59bb_1"/>
-          <a:stretch>
-            <a:fillRect/>
-          </a:stretch>
-        </a:blipFill>
-      </p:bgPr>
-    </p:bg>
-    <p:spTree>
-      <p:nvGrpSpPr>
-        <p:cNvPr id="1" name=""/>
-        <p:cNvGrpSpPr/>
-        <p:nvPr/>
-      </p:nvGrpSpPr>
-      <p:grpSpPr>
-        <a:xfrm xmlns:a="http://schemas.openxmlformats.org/drawingml/2006/main">
-          <a:off x="0" y="0"/>
-          <a:ext cx="0" cy="0"/>
-          <a:chOff x="0" y="0"/>
-          <a:chExt cx="0" cy="0"/>
-        </a:xfrm>
-      </p:grpSpPr>
-      <p:sp>
-        <p:nvSpPr>
-          <p:cNvPr id="2" name="argument-paper-scrim"/>
-          <p:cNvSpPr/>
-          <p:nvPr/>
-        </p:nvSpPr>
-        <p:spPr>
-          <a:xfrm xmlns:a="http://schemas.openxmlformats.org/drawingml/2006/main">
-            <a:off x="0" y="0"/>
-            <a:ext cx="7429500" cy="8572500"/>
-          </a:xfrm>
-          <a:prstGeom xmlns:a="http://schemas.openxmlformats.org/drawingml/2006/main" prst="rect">
-            <a:avLst/>
-          </a:prstGeom>
-          <a:solidFill xmlns:a="http://schemas.openxmlformats.org/drawingml/2006/main">
-            <a:srgbClr val="F8FAFC">
-              <a:alpha val="96000"/>
-            </a:srgbClr>
-          </a:solidFill>
-          <a:ln xmlns:a="http://schemas.openxmlformats.org/drawingml/2006/main" w="0">
-            <a:solidFill>
-              <a:srgbClr val="F8FAFC"/>
-            </a:solidFill>
-            <a:prstDash val="solid"/>
-          </a:ln>
-        </p:spPr>
-        <p:txBody>
-          <a:bodyPr xmlns:a="http://schemas.openxmlformats.org/drawingml/2006/main" wrap="square" lIns="0" tIns="0" rIns="0" bIns="0" anchor="t"/>
-          <a:lstStyle xmlns:a="http://schemas.openxmlformats.org/drawingml/2006/main"/>
-          <a:p xmlns:a="http://schemas.openxmlformats.org/drawingml/2006/main">
-            <a:r>
-              <a:rPr lang="en-US"/>
-              <a:t/>
-            </a:r>
-            <a:endParaRPr lang="en-US"/>
-          </a:p>
-        </p:txBody>
-      </p:sp>
-      <p:sp>
-        <p:nvSpPr>
-          <p:cNvPr id="3" name="argument-top-rule"/>
-          <p:cNvSpPr/>
-          <p:nvPr/>
-        </p:nvSpPr>
-        <p:spPr>
-          <a:xfrm xmlns:a="http://schemas.openxmlformats.org/drawingml/2006/main">
-            <a:off x="838200" y="666750"/>
-            <a:ext cx="13563600" cy="0"/>
-          </a:xfrm>
-          <a:prstGeom xmlns:a="http://schemas.openxmlformats.org/drawingml/2006/main" prst="line">
-            <a:avLst/>
-          </a:prstGeom>
-          <a:noFill xmlns:a="http://schemas.openxmlformats.org/drawingml/2006/main"/>
-          <a:ln xmlns:a="http://schemas.openxmlformats.org/drawingml/2006/main" w="38100">
-            <a:solidFill>
-              <a:srgbClr val="1769D2"/>
-            </a:solidFill>
-            <a:prstDash val="solid"/>
-          </a:ln>
-        </p:spPr>
-        <p:txBody>
-          <a:bodyPr xmlns:a="http://schemas.openxmlformats.org/drawingml/2006/main" wrap="square" lIns="0" tIns="0" rIns="0" bIns="0" anchor="t"/>
-          <a:lstStyle xmlns:a="http://schemas.openxmlformats.org/drawingml/2006/main"/>
-          <a:p xmlns:a="http://schemas.openxmlformats.org/drawingml/2006/main">
-            <a:r>
-              <a:rPr lang="en-US"/>
-              <a:t/>
-            </a:r>
-            <a:endParaRPr lang="en-US"/>
-          </a:p>
-        </p:txBody>
-      </p:sp>
-      <p:sp>
-        <p:nvSpPr>
-          <p:cNvPr id="4" name="BLUEPRINT LECTURE · ARGUMENT"/>
-          <p:cNvSpPr txBox="1"/>
-          <p:nvPr/>
-        </p:nvSpPr>
-        <p:spPr>
-          <a:xfrm xmlns:a="http://schemas.openxmlformats.org/drawingml/2006/main">
-            <a:off x="914400" y="895350"/>
-            <a:ext cx="7239000" cy="228600"/>
-          </a:xfrm>
-          <a:prstGeom xmlns:a="http://schemas.openxmlformats.org/drawingml/2006/main" prst="rect">
-            <a:avLst/>
-          </a:prstGeom>
-          <a:noFill xmlns:a="http://schemas.openxmlformats.org/drawingml/2006/main"/>
-          <a:ln xmlns:a="http://schemas.openxmlformats.org/drawingml/2006/main" w="0">
-            <a:noFill/>
-          </a:ln>
-        </p:spPr>
-        <p:txBody>
-          <a:bodyPr xmlns:a="http://schemas.openxmlformats.org/drawingml/2006/main" wrap="square" lIns="0" tIns="0" rIns="0" bIns="0" anchor="t"/>
-          <a:lstStyle xmlns:a="http://schemas.openxmlformats.org/drawingml/2006/main"/>
-          <a:p xmlns:a="http://schemas.openxmlformats.org/drawingml/2006/main">
-            <a:r>
-              <a:rPr lang="en-US" sz="1200" b="1">
-                <a:solidFill>
-                  <a:srgbClr val="1769D2"/>
-                </a:solidFill>
-                <a:latin typeface="Inter"/>
-                <a:ea typeface="Inter"/>
-              </a:rPr>
-              <a:t>BLUEPRINT LECTURE · ARGUMENT</a:t>
-            </a:r>
-            <a:endParaRPr lang="en-US"/>
-          </a:p>
-        </p:txBody>
-      </p:sp>
-      <p:sp>
-        <p:nvSpPr>
-          <p:cNvPr id="5" name="argument-title"/>
-          <p:cNvSpPr txBox="1"/>
-          <p:nvPr/>
-        </p:nvSpPr>
-        <p:spPr>
-          <a:xfrm xmlns:a="http://schemas.openxmlformats.org/drawingml/2006/main">
-            <a:off x="914400" y="1314450"/>
-            <a:ext cx="6286500" cy="914400"/>
-          </a:xfrm>
-          <a:prstGeom xmlns:a="http://schemas.openxmlformats.org/drawingml/2006/main" prst="rect">
-            <a:avLst/>
-          </a:prstGeom>
-          <a:noFill xmlns:a="http://schemas.openxmlformats.org/drawingml/2006/main"/>
-          <a:ln xmlns:a="http://schemas.openxmlformats.org/drawingml/2006/main" w="0">
-            <a:noFill/>
-          </a:ln>
-        </p:spPr>
-        <p:txBody>
-          <a:bodyPr xmlns:a="http://schemas.openxmlformats.org/drawingml/2006/main" wrap="square" lIns="0" tIns="0" rIns="0" bIns="0" anchor="t"/>
-          <a:lstStyle xmlns:a="http://schemas.openxmlformats.org/drawingml/2006/main"/>
-          <a:p xmlns:a="http://schemas.openxmlformats.org/drawingml/2006/main">
-            <a:r>
-              <a:rPr lang="en-US" sz="2550" b="1">
-                <a:solidFill>
-                  <a:srgbClr val="132A3A"/>
-                </a:solidFill>
-                <a:latin typeface="Inter"/>
-                <a:ea typeface="Inter"/>
-              </a:rPr>
-              <a:t>The method keeps mechanism separate</a:t>
-            </a:r>
-            <a:endParaRPr lang="en-US"/>
-          </a:p>
-          <a:p xmlns:a="http://schemas.openxmlformats.org/drawingml/2006/main">
-            <a:r>
-              <a:rPr lang="en-US" sz="2550" b="1">
-                <a:solidFill>
-                  <a:srgbClr val="132A3A"/>
-                </a:solidFill>
-                <a:latin typeface="Inter"/>
-                <a:ea typeface="Inter"/>
-              </a:rPr>
-              <a:t>from drift</a:t>
-            </a:r>
-            <a:endParaRPr lang="en-US"/>
-          </a:p>
-        </p:txBody>
-      </p:sp>
-      <p:sp>
-        <p:nvSpPr>
-          <p:cNvPr id="6" name="argument-basis"/>
-          <p:cNvSpPr txBox="1"/>
-          <p:nvPr/>
-        </p:nvSpPr>
-        <p:spPr>
-          <a:xfrm xmlns:a="http://schemas.openxmlformats.org/drawingml/2006/main">
-            <a:off x="952500" y="2190750"/>
-            <a:ext cx="6096000" cy="266700"/>
-          </a:xfrm>
-          <a:prstGeom xmlns:a="http://schemas.openxmlformats.org/drawingml/2006/main" prst="rect">
-            <a:avLst/>
-          </a:prstGeom>
-          <a:noFill xmlns:a="http://schemas.openxmlformats.org/drawingml/2006/main"/>
-          <a:ln xmlns:a="http://schemas.openxmlformats.org/drawingml/2006/main" w="0">
-            <a:noFill/>
-          </a:ln>
-        </p:spPr>
-        <p:txBody>
-          <a:bodyPr xmlns:a="http://schemas.openxmlformats.org/drawingml/2006/main" wrap="square" lIns="0" tIns="0" rIns="0" bIns="0" anchor="t"/>
-          <a:lstStyle xmlns:a="http://schemas.openxmlformats.org/drawingml/2006/main"/>
-          <a:p xmlns:a="http://schemas.openxmlformats.org/drawingml/2006/main">
-            <a:r>
-              <a:rPr lang="en-US" sz="1350">
-                <a:solidFill>
-                  <a:srgbClr val="8A969F"/>
-                </a:solidFill>
-                <a:latin typeface="Inter"/>
-                <a:ea typeface="Inter"/>
-              </a:rPr>
-              <a:t>Question → method → result → limitation, without marketing language.</a:t>
-            </a:r>
-            <a:endParaRPr lang="en-US"/>
-          </a:p>
-        </p:txBody>
-      </p:sp>
-      <p:sp>
-        <p:nvSpPr>
-          <p:cNvPr id="7" name="argument-rule"/>
-          <p:cNvSpPr/>
-          <p:nvPr/>
-        </p:nvSpPr>
-        <p:spPr>
-          <a:xfrm xmlns:a="http://schemas.openxmlformats.org/drawingml/2006/main">
-            <a:off x="914400" y="2457450"/>
-            <a:ext cx="13411200" cy="0"/>
-          </a:xfrm>
-          <a:prstGeom xmlns:a="http://schemas.openxmlformats.org/drawingml/2006/main" prst="line">
-            <a:avLst/>
-          </a:prstGeom>
-          <a:noFill xmlns:a="http://schemas.openxmlformats.org/drawingml/2006/main"/>
-          <a:ln xmlns:a="http://schemas.openxmlformats.org/drawingml/2006/main" w="25400">
-            <a:solidFill>
-              <a:srgbClr val="8A969F"/>
-            </a:solidFill>
-            <a:prstDash val="solid"/>
-          </a:ln>
-        </p:spPr>
-        <p:txBody>
-          <a:bodyPr xmlns:a="http://schemas.openxmlformats.org/drawingml/2006/main" wrap="square" lIns="0" tIns="0" rIns="0" bIns="0" anchor="t"/>
-          <a:lstStyle xmlns:a="http://schemas.openxmlformats.org/drawingml/2006/main"/>
-          <a:p xmlns:a="http://schemas.openxmlformats.org/drawingml/2006/main">
-            <a:r>
-              <a:rPr lang="en-US"/>
-              <a:t/>
-            </a:r>
-            <a:endParaRPr lang="en-US"/>
-          </a:p>
-        </p:txBody>
-      </p:sp>
-      <p:sp>
-        <p:nvSpPr>
-          <p:cNvPr id="8" name="academic-number-0"/>
-          <p:cNvSpPr txBox="1"/>
-          <p:nvPr/>
-        </p:nvSpPr>
-        <p:spPr>
-          <a:xfrm xmlns:a="http://schemas.openxmlformats.org/drawingml/2006/main">
-            <a:off x="1104900" y="3238500"/>
-            <a:ext cx="685800" cy="304800"/>
-          </a:xfrm>
-          <a:prstGeom xmlns:a="http://schemas.openxmlformats.org/drawingml/2006/main" prst="rect">
-            <a:avLst/>
-          </a:prstGeom>
-          <a:noFill xmlns:a="http://schemas.openxmlformats.org/drawingml/2006/main"/>
-          <a:ln xmlns:a="http://schemas.openxmlformats.org/drawingml/2006/main" w="0">
-            <a:noFill/>
-          </a:ln>
-        </p:spPr>
-        <p:txBody>
-          <a:bodyPr xmlns:a="http://schemas.openxmlformats.org/drawingml/2006/main" wrap="square" lIns="0" tIns="0" rIns="0" bIns="0" anchor="t"/>
-          <a:lstStyle xmlns:a="http://schemas.openxmlformats.org/drawingml/2006/main"/>
-          <a:p xmlns:a="http://schemas.openxmlformats.org/drawingml/2006/main">
-            <a:r>
-              <a:rPr lang="en-US" sz="1800" b="1">
-                <a:solidFill>
-                  <a:srgbClr val="1769D2"/>
-                </a:solidFill>
-                <a:latin typeface="Inter"/>
-                <a:ea typeface="Inter"/>
-              </a:rPr>
-              <a:t>01</a:t>
-            </a:r>
-            <a:endParaRPr lang="en-US"/>
-          </a:p>
-        </p:txBody>
-      </p:sp>
-      <p:sp>
-        <p:nvSpPr>
-          <p:cNvPr id="9" name="academic-rule-0"/>
-          <p:cNvSpPr/>
-          <p:nvPr/>
-        </p:nvSpPr>
-        <p:spPr>
-          <a:xfrm xmlns:a="http://schemas.openxmlformats.org/drawingml/2006/main">
-            <a:off x="2000250" y="3390900"/>
-            <a:ext cx="5810250" cy="0"/>
-          </a:xfrm>
-          <a:prstGeom xmlns:a="http://schemas.openxmlformats.org/drawingml/2006/main" prst="line">
-            <a:avLst/>
-          </a:prstGeom>
-          <a:noFill xmlns:a="http://schemas.openxmlformats.org/drawingml/2006/main"/>
-          <a:ln xmlns:a="http://schemas.openxmlformats.org/drawingml/2006/main" w="12700">
-            <a:solidFill>
-              <a:srgbClr val="8A969F"/>
-            </a:solidFill>
-            <a:prstDash val="solid"/>
-          </a:ln>
-        </p:spPr>
-        <p:txBody>
-          <a:bodyPr xmlns:a="http://schemas.openxmlformats.org/drawingml/2006/main" wrap="square" lIns="0" tIns="0" rIns="0" bIns="0" anchor="t"/>
-          <a:lstStyle xmlns:a="http://schemas.openxmlformats.org/drawingml/2006/main"/>
-          <a:p xmlns:a="http://schemas.openxmlformats.org/drawingml/2006/main">
-            <a:r>
-              <a:rPr lang="en-US"/>
-              <a:t/>
-            </a:r>
-            <a:endParaRPr lang="en-US"/>
-          </a:p>
-        </p:txBody>
-      </p:sp>
-      <p:sp>
-        <p:nvSpPr>
-          <p:cNvPr id="10" name="academic-label-0"/>
-          <p:cNvSpPr txBox="1"/>
-          <p:nvPr/>
-        </p:nvSpPr>
-        <p:spPr>
-          <a:xfrm xmlns:a="http://schemas.openxmlformats.org/drawingml/2006/main">
-            <a:off x="2114550" y="3200400"/>
-            <a:ext cx="1809750" cy="285750"/>
-          </a:xfrm>
-          <a:prstGeom xmlns:a="http://schemas.openxmlformats.org/drawingml/2006/main" prst="rect">
-            <a:avLst/>
-          </a:prstGeom>
-          <a:noFill xmlns:a="http://schemas.openxmlformats.org/drawingml/2006/main"/>
-          <a:ln xmlns:a="http://schemas.openxmlformats.org/drawingml/2006/main" w="0">
-            <a:noFill/>
-          </a:ln>
-        </p:spPr>
-        <p:txBody>
-          <a:bodyPr xmlns:a="http://schemas.openxmlformats.org/drawingml/2006/main" wrap="square" lIns="0" tIns="0" rIns="0" bIns="0" anchor="t"/>
-          <a:lstStyle xmlns:a="http://schemas.openxmlformats.org/drawingml/2006/main"/>
-          <a:p xmlns:a="http://schemas.openxmlformats.org/drawingml/2006/main">
-            <a:r>
-              <a:rPr lang="en-US" sz="1650" b="1">
-                <a:solidFill>
-                  <a:srgbClr val="132A3A"/>
-                </a:solidFill>
-                <a:latin typeface="Inter"/>
-                <a:ea typeface="Inter"/>
-              </a:rPr>
-              <a:t>Question</a:t>
-            </a:r>
-            <a:endParaRPr lang="en-US"/>
-          </a:p>
-        </p:txBody>
-      </p:sp>
-      <p:sp>
-        <p:nvSpPr>
-          <p:cNvPr id="11" name="academic-text-0"/>
-          <p:cNvSpPr txBox="1"/>
-          <p:nvPr/>
-        </p:nvSpPr>
-        <p:spPr>
-          <a:xfrm xmlns:a="http://schemas.openxmlformats.org/drawingml/2006/main">
-            <a:off x="4095750" y="3238500"/>
-            <a:ext cx="5334000" cy="304800"/>
-          </a:xfrm>
-          <a:prstGeom xmlns:a="http://schemas.openxmlformats.org/drawingml/2006/main" prst="rect">
-            <a:avLst/>
-          </a:prstGeom>
-          <a:noFill xmlns:a="http://schemas.openxmlformats.org/drawingml/2006/main"/>
-          <a:ln xmlns:a="http://schemas.openxmlformats.org/drawingml/2006/main" w="0">
-            <a:noFill/>
-          </a:ln>
-        </p:spPr>
-        <p:txBody>
-          <a:bodyPr xmlns:a="http://schemas.openxmlformats.org/drawingml/2006/main" wrap="square" lIns="0" tIns="0" rIns="0" bIns="0" anchor="t"/>
-          <a:lstStyle xmlns:a="http://schemas.openxmlformats.org/drawingml/2006/main"/>
-          <a:p xmlns:a="http://schemas.openxmlformats.org/drawingml/2006/main">
-            <a:r>
-              <a:rPr lang="en-US" sz="1350">
-                <a:solidFill>
-                  <a:srgbClr val="132A3A"/>
-                </a:solidFill>
-                <a:latin typeface="Inter"/>
-                <a:ea typeface="Inter"/>
-              </a:rPr>
-              <a:t>Can the intervention move the outcome?</a:t>
-            </a:r>
-            <a:endParaRPr lang="en-US"/>
-          </a:p>
-        </p:txBody>
-      </p:sp>
-      <p:sp>
-        <p:nvSpPr>
-          <p:cNvPr id="12" name="academic-number-1"/>
-          <p:cNvSpPr txBox="1"/>
-          <p:nvPr/>
-        </p:nvSpPr>
-        <p:spPr>
-          <a:xfrm xmlns:a="http://schemas.openxmlformats.org/drawingml/2006/main">
-            <a:off x="1104900" y="4191000"/>
-            <a:ext cx="685800" cy="304800"/>
-          </a:xfrm>
-          <a:prstGeom xmlns:a="http://schemas.openxmlformats.org/drawingml/2006/main" prst="rect">
-            <a:avLst/>
-          </a:prstGeom>
-          <a:noFill xmlns:a="http://schemas.openxmlformats.org/drawingml/2006/main"/>
-          <a:ln xmlns:a="http://schemas.openxmlformats.org/drawingml/2006/main" w="0">
-            <a:noFill/>
-          </a:ln>
-        </p:spPr>
-        <p:txBody>
-          <a:bodyPr xmlns:a="http://schemas.openxmlformats.org/drawingml/2006/main" wrap="square" lIns="0" tIns="0" rIns="0" bIns="0" anchor="t"/>
-          <a:lstStyle xmlns:a="http://schemas.openxmlformats.org/drawingml/2006/main"/>
-          <a:p xmlns:a="http://schemas.openxmlformats.org/drawingml/2006/main">
-            <a:r>
-              <a:rPr lang="en-US" sz="1800" b="1">
-                <a:solidFill>
-                  <a:srgbClr val="1769D2"/>
-                </a:solidFill>
-                <a:latin typeface="Inter"/>
-                <a:ea typeface="Inter"/>
-              </a:rPr>
-              <a:t>02</a:t>
-            </a:r>
-            <a:endParaRPr lang="en-US"/>
-          </a:p>
-        </p:txBody>
-      </p:sp>
-      <p:sp>
-        <p:nvSpPr>
-          <p:cNvPr id="13" name="academic-rule-1"/>
-          <p:cNvSpPr/>
-          <p:nvPr/>
-        </p:nvSpPr>
-        <p:spPr>
-          <a:xfrm xmlns:a="http://schemas.openxmlformats.org/drawingml/2006/main">
-            <a:off x="2000250" y="4343400"/>
-            <a:ext cx="5810250" cy="0"/>
-          </a:xfrm>
-          <a:prstGeom xmlns:a="http://schemas.openxmlformats.org/drawingml/2006/main" prst="line">
-            <a:avLst/>
-          </a:prstGeom>
-          <a:noFill xmlns:a="http://schemas.openxmlformats.org/drawingml/2006/main"/>
-          <a:ln xmlns:a="http://schemas.openxmlformats.org/drawingml/2006/main" w="12700">
-            <a:solidFill>
-              <a:srgbClr val="8A969F"/>
-            </a:solidFill>
-            <a:prstDash val="solid"/>
-          </a:ln>
-        </p:spPr>
-        <p:txBody>
-          <a:bodyPr xmlns:a="http://schemas.openxmlformats.org/drawingml/2006/main" wrap="square" lIns="0" tIns="0" rIns="0" bIns="0" anchor="t"/>
-          <a:lstStyle xmlns:a="http://schemas.openxmlformats.org/drawingml/2006/main"/>
-          <a:p xmlns:a="http://schemas.openxmlformats.org/drawingml/2006/main">
-            <a:r>
-              <a:rPr lang="en-US"/>
-              <a:t/>
-            </a:r>
-            <a:endParaRPr lang="en-US"/>
-          </a:p>
-        </p:txBody>
-      </p:sp>
-      <p:sp>
-        <p:nvSpPr>
-          <p:cNvPr id="14" name="academic-label-1"/>
-          <p:cNvSpPr txBox="1"/>
-          <p:nvPr/>
-        </p:nvSpPr>
-        <p:spPr>
-          <a:xfrm xmlns:a="http://schemas.openxmlformats.org/drawingml/2006/main">
-            <a:off x="2114550" y="4152900"/>
-            <a:ext cx="1809750" cy="285750"/>
-          </a:xfrm>
-          <a:prstGeom xmlns:a="http://schemas.openxmlformats.org/drawingml/2006/main" prst="rect">
-            <a:avLst/>
-          </a:prstGeom>
-          <a:noFill xmlns:a="http://schemas.openxmlformats.org/drawingml/2006/main"/>
-          <a:ln xmlns:a="http://schemas.openxmlformats.org/drawingml/2006/main" w="0">
-            <a:noFill/>
-          </a:ln>
-        </p:spPr>
-        <p:txBody>
-          <a:bodyPr xmlns:a="http://schemas.openxmlformats.org/drawingml/2006/main" wrap="square" lIns="0" tIns="0" rIns="0" bIns="0" anchor="t"/>
-          <a:lstStyle xmlns:a="http://schemas.openxmlformats.org/drawingml/2006/main"/>
-          <a:p xmlns:a="http://schemas.openxmlformats.org/drawingml/2006/main">
-            <a:r>
-              <a:rPr lang="en-US" sz="1650" b="1">
-                <a:solidFill>
-                  <a:srgbClr val="132A3A"/>
-                </a:solidFill>
-                <a:latin typeface="Inter"/>
-                <a:ea typeface="Inter"/>
-              </a:rPr>
-              <a:t>Method</a:t>
-            </a:r>
-            <a:endParaRPr lang="en-US"/>
-          </a:p>
-        </p:txBody>
-      </p:sp>
-      <p:sp>
-        <p:nvSpPr>
-          <p:cNvPr id="15" name="academic-text-1"/>
-          <p:cNvSpPr txBox="1"/>
-          <p:nvPr/>
-        </p:nvSpPr>
-        <p:spPr>
-          <a:xfrm xmlns:a="http://schemas.openxmlformats.org/drawingml/2006/main">
-            <a:off x="4095750" y="4191000"/>
-            <a:ext cx="5334000" cy="304800"/>
-          </a:xfrm>
-          <a:prstGeom xmlns:a="http://schemas.openxmlformats.org/drawingml/2006/main" prst="rect">
-            <a:avLst/>
-          </a:prstGeom>
-          <a:noFill xmlns:a="http://schemas.openxmlformats.org/drawingml/2006/main"/>
-          <a:ln xmlns:a="http://schemas.openxmlformats.org/drawingml/2006/main" w="0">
-            <a:noFill/>
-          </a:ln>
-        </p:spPr>
-        <p:txBody>
-          <a:bodyPr xmlns:a="http://schemas.openxmlformats.org/drawingml/2006/main" wrap="square" lIns="0" tIns="0" rIns="0" bIns="0" anchor="t"/>
-          <a:lstStyle xmlns:a="http://schemas.openxmlformats.org/drawingml/2006/main"/>
-          <a:p xmlns:a="http://schemas.openxmlformats.org/drawingml/2006/main">
-            <a:r>
-              <a:rPr lang="en-US" sz="1350">
-                <a:solidFill>
-                  <a:srgbClr val="132A3A"/>
-                </a:solidFill>
-                <a:latin typeface="Inter"/>
-                <a:ea typeface="Inter"/>
-              </a:rPr>
-              <a:t>Two groups, one rule, registered before launch.</a:t>
-            </a:r>
-            <a:endParaRPr lang="en-US"/>
-          </a:p>
-        </p:txBody>
-      </p:sp>
-      <p:sp>
-        <p:nvSpPr>
-          <p:cNvPr id="16" name="academic-number-2"/>
-          <p:cNvSpPr txBox="1"/>
-          <p:nvPr/>
-        </p:nvSpPr>
-        <p:spPr>
-          <a:xfrm xmlns:a="http://schemas.openxmlformats.org/drawingml/2006/main">
-            <a:off x="1104900" y="5143500"/>
-            <a:ext cx="685800" cy="304800"/>
-          </a:xfrm>
-          <a:prstGeom xmlns:a="http://schemas.openxmlformats.org/drawingml/2006/main" prst="rect">
-            <a:avLst/>
-          </a:prstGeom>
-          <a:noFill xmlns:a="http://schemas.openxmlformats.org/drawingml/2006/main"/>
-          <a:ln xmlns:a="http://schemas.openxmlformats.org/drawingml/2006/main" w="0">
-            <a:noFill/>
-          </a:ln>
-        </p:spPr>
-        <p:txBody>
-          <a:bodyPr xmlns:a="http://schemas.openxmlformats.org/drawingml/2006/main" wrap="square" lIns="0" tIns="0" rIns="0" bIns="0" anchor="t"/>
-          <a:lstStyle xmlns:a="http://schemas.openxmlformats.org/drawingml/2006/main"/>
-          <a:p xmlns:a="http://schemas.openxmlformats.org/drawingml/2006/main">
-            <a:r>
-              <a:rPr lang="en-US" sz="1800" b="1">
-                <a:solidFill>
-                  <a:srgbClr val="1769D2"/>
-                </a:solidFill>
-                <a:latin typeface="Inter"/>
-                <a:ea typeface="Inter"/>
-              </a:rPr>
-              <a:t>03</a:t>
-            </a:r>
-            <a:endParaRPr lang="en-US"/>
-          </a:p>
-        </p:txBody>
-      </p:sp>
-      <p:sp>
-        <p:nvSpPr>
-          <p:cNvPr id="17" name="academic-rule-2"/>
-          <p:cNvSpPr/>
-          <p:nvPr/>
-        </p:nvSpPr>
-        <p:spPr>
-          <a:xfrm xmlns:a="http://schemas.openxmlformats.org/drawingml/2006/main">
-            <a:off x="2000250" y="5295900"/>
-            <a:ext cx="5810250" cy="0"/>
-          </a:xfrm>
-          <a:prstGeom xmlns:a="http://schemas.openxmlformats.org/drawingml/2006/main" prst="line">
-            <a:avLst/>
-          </a:prstGeom>
-          <a:noFill xmlns:a="http://schemas.openxmlformats.org/drawingml/2006/main"/>
-          <a:ln xmlns:a="http://schemas.openxmlformats.org/drawingml/2006/main" w="12700">
-            <a:solidFill>
-              <a:srgbClr val="8A969F"/>
-            </a:solidFill>
-            <a:prstDash val="solid"/>
-          </a:ln>
-        </p:spPr>
-        <p:txBody>
-          <a:bodyPr xmlns:a="http://schemas.openxmlformats.org/drawingml/2006/main" wrap="square" lIns="0" tIns="0" rIns="0" bIns="0" anchor="t"/>
-          <a:lstStyle xmlns:a="http://schemas.openxmlformats.org/drawingml/2006/main"/>
-          <a:p xmlns:a="http://schemas.openxmlformats.org/drawingml/2006/main">
-            <a:r>
-              <a:rPr lang="en-US"/>
-              <a:t/>
-            </a:r>
-            <a:endParaRPr lang="en-US"/>
-          </a:p>
-        </p:txBody>
-      </p:sp>
-      <p:sp>
-        <p:nvSpPr>
-          <p:cNvPr id="18" name="academic-label-2"/>
-          <p:cNvSpPr txBox="1"/>
-          <p:nvPr/>
-        </p:nvSpPr>
-        <p:spPr>
-          <a:xfrm xmlns:a="http://schemas.openxmlformats.org/drawingml/2006/main">
-            <a:off x="2114550" y="5105400"/>
-            <a:ext cx="1809750" cy="285750"/>
-          </a:xfrm>
-          <a:prstGeom xmlns:a="http://schemas.openxmlformats.org/drawingml/2006/main" prst="rect">
-            <a:avLst/>
-          </a:prstGeom>
-          <a:noFill xmlns:a="http://schemas.openxmlformats.org/drawingml/2006/main"/>
-          <a:ln xmlns:a="http://schemas.openxmlformats.org/drawingml/2006/main" w="0">
-            <a:noFill/>
-          </a:ln>
-        </p:spPr>
-        <p:txBody>
-          <a:bodyPr xmlns:a="http://schemas.openxmlformats.org/drawingml/2006/main" wrap="square" lIns="0" tIns="0" rIns="0" bIns="0" anchor="t"/>
-          <a:lstStyle xmlns:a="http://schemas.openxmlformats.org/drawingml/2006/main"/>
-          <a:p xmlns:a="http://schemas.openxmlformats.org/drawingml/2006/main">
-            <a:r>
-              <a:rPr lang="en-US" sz="1650" b="1">
-                <a:solidFill>
-                  <a:srgbClr val="132A3A"/>
-                </a:solidFill>
-                <a:latin typeface="Inter"/>
-                <a:ea typeface="Inter"/>
-              </a:rPr>
-              <a:t>Boundary</a:t>
-            </a:r>
-            <a:endParaRPr lang="en-US"/>
-          </a:p>
-        </p:txBody>
-      </p:sp>
-      <p:sp>
-        <p:nvSpPr>
-          <p:cNvPr id="19" name="academic-text-2"/>
-          <p:cNvSpPr txBox="1"/>
-          <p:nvPr/>
-        </p:nvSpPr>
-        <p:spPr>
-          <a:xfrm xmlns:a="http://schemas.openxmlformats.org/drawingml/2006/main">
-            <a:off x="4095750" y="5143500"/>
-            <a:ext cx="5334000" cy="304800"/>
-          </a:xfrm>
-          <a:prstGeom xmlns:a="http://schemas.openxmlformats.org/drawingml/2006/main" prst="rect">
-            <a:avLst/>
-          </a:prstGeom>
-          <a:noFill xmlns:a="http://schemas.openxmlformats.org/drawingml/2006/main"/>
-          <a:ln xmlns:a="http://schemas.openxmlformats.org/drawingml/2006/main" w="0">
-            <a:noFill/>
-          </a:ln>
-        </p:spPr>
-        <p:txBody>
-          <a:bodyPr xmlns:a="http://schemas.openxmlformats.org/drawingml/2006/main" wrap="square" lIns="0" tIns="0" rIns="0" bIns="0" anchor="t"/>
-          <a:lstStyle xmlns:a="http://schemas.openxmlformats.org/drawingml/2006/main"/>
-          <a:p xmlns:a="http://schemas.openxmlformats.org/drawingml/2006/main">
-            <a:r>
-              <a:rPr lang="en-US" sz="1350">
-                <a:solidFill>
-                  <a:srgbClr val="132A3A"/>
-                </a:solidFill>
-                <a:latin typeface="Inter"/>
-                <a:ea typeface="Inter"/>
-              </a:rPr>
-              <a:t>The result applies to this window and sample.</a:t>
-            </a:r>
-            <a:endParaRPr lang="en-US"/>
-          </a:p>
-        </p:txBody>
-      </p:sp>
-      <p:sp>
-        <p:nvSpPr>
-          <p:cNvPr id="20" name="method-panel"/>
-          <p:cNvSpPr/>
-          <p:nvPr/>
-        </p:nvSpPr>
-        <p:spPr>
-          <a:xfrm xmlns:a="http://schemas.openxmlformats.org/drawingml/2006/main">
-            <a:off x="10287000" y="3238500"/>
-            <a:ext cx="3619500" cy="2381250"/>
-          </a:xfrm>
-          <a:prstGeom xmlns:a="http://schemas.openxmlformats.org/drawingml/2006/main" prst="rect">
-            <a:avLst/>
-          </a:prstGeom>
-          <a:solidFill xmlns:a="http://schemas.openxmlformats.org/drawingml/2006/main">
-            <a:srgbClr val="F3F5F8"/>
-          </a:solidFill>
-          <a:ln xmlns:a="http://schemas.openxmlformats.org/drawingml/2006/main" w="12700">
-            <a:solidFill>
-              <a:srgbClr val="8A969F"/>
-            </a:solidFill>
-            <a:prstDash val="solid"/>
-          </a:ln>
-        </p:spPr>
-        <p:txBody>
-          <a:bodyPr xmlns:a="http://schemas.openxmlformats.org/drawingml/2006/main" wrap="square" lIns="0" tIns="0" rIns="0" bIns="0" anchor="t"/>
-          <a:lstStyle xmlns:a="http://schemas.openxmlformats.org/drawingml/2006/main"/>
-          <a:p xmlns:a="http://schemas.openxmlformats.org/drawingml/2006/main">
-            <a:r>
-              <a:rPr lang="en-US"/>
-              <a:t/>
-            </a:r>
-            <a:endParaRPr lang="en-US"/>
-          </a:p>
-        </p:txBody>
-      </p:sp>
-      <p:sp>
-        <p:nvSpPr>
-          <p:cNvPr id="21" name="method-label"/>
-          <p:cNvSpPr txBox="1"/>
-          <p:nvPr/>
-        </p:nvSpPr>
-        <p:spPr>
-          <a:xfrm xmlns:a="http://schemas.openxmlformats.org/drawingml/2006/main">
-            <a:off x="10668000" y="3571875"/>
-            <a:ext cx="2762250" cy="228600"/>
-          </a:xfrm>
-          <a:prstGeom xmlns:a="http://schemas.openxmlformats.org/drawingml/2006/main" prst="rect">
-            <a:avLst/>
-          </a:prstGeom>
-          <a:noFill xmlns:a="http://schemas.openxmlformats.org/drawingml/2006/main"/>
-          <a:ln xmlns:a="http://schemas.openxmlformats.org/drawingml/2006/main" w="0">
-            <a:noFill/>
-          </a:ln>
-        </p:spPr>
-        <p:txBody>
-          <a:bodyPr xmlns:a="http://schemas.openxmlformats.org/drawingml/2006/main" wrap="square" lIns="0" tIns="0" rIns="0" bIns="0" anchor="t"/>
-          <a:lstStyle xmlns:a="http://schemas.openxmlformats.org/drawingml/2006/main"/>
-          <a:p xmlns:a="http://schemas.openxmlformats.org/drawingml/2006/main">
-            <a:r>
-              <a:rPr lang="en-US" sz="1125" b="1">
-                <a:solidFill>
-                  <a:srgbClr val="1769D2"/>
-                </a:solidFill>
-                <a:latin typeface="Inter"/>
-                <a:ea typeface="Inter"/>
-              </a:rPr>
-              <a:t>REGISTERED RULE</a:t>
-            </a:r>
-            <a:endParaRPr lang="en-US"/>
-          </a:p>
-        </p:txBody>
-      </p:sp>
-      <p:sp>
-        <p:nvSpPr>
-          <p:cNvPr id="22" name="method-value"/>
-          <p:cNvSpPr txBox="1"/>
-          <p:nvPr/>
-        </p:nvSpPr>
-        <p:spPr>
-          <a:xfrm xmlns:a="http://schemas.openxmlformats.org/drawingml/2006/main">
-            <a:off x="10668000" y="4048125"/>
-            <a:ext cx="2571750" cy="609600"/>
-          </a:xfrm>
-          <a:prstGeom xmlns:a="http://schemas.openxmlformats.org/drawingml/2006/main" prst="rect">
-            <a:avLst/>
-          </a:prstGeom>
-          <a:noFill xmlns:a="http://schemas.openxmlformats.org/drawingml/2006/main"/>
-          <a:ln xmlns:a="http://schemas.openxmlformats.org/drawingml/2006/main" w="0">
-            <a:noFill/>
-          </a:ln>
-        </p:spPr>
-        <p:txBody>
-          <a:bodyPr xmlns:a="http://schemas.openxmlformats.org/drawingml/2006/main" wrap="square" lIns="0" tIns="0" rIns="0" bIns="0" anchor="t"/>
-          <a:lstStyle xmlns:a="http://schemas.openxmlformats.org/drawingml/2006/main"/>
-          <a:p xmlns:a="http://schemas.openxmlformats.org/drawingml/2006/main">
-            <a:r>
-              <a:rPr lang="en-US" sz="3750" b="1">
-                <a:solidFill>
-                  <a:srgbClr val="1769D2"/>
-                </a:solidFill>
-                <a:latin typeface="Inter"/>
-                <a:ea typeface="Inter"/>
-              </a:rPr>
-              <a:t>≥ 2 pp</a:t>
-            </a:r>
-            <a:endParaRPr lang="en-US"/>
-          </a:p>
-        </p:txBody>
-      </p:sp>
-      <p:sp>
-        <p:nvSpPr>
-          <p:cNvPr id="23" name="method-foot"/>
-          <p:cNvSpPr txBox="1"/>
-          <p:nvPr/>
-        </p:nvSpPr>
-        <p:spPr>
-          <a:xfrm xmlns:a="http://schemas.openxmlformats.org/drawingml/2006/main">
-            <a:off x="10668000" y="4762500"/>
-            <a:ext cx="2762250" cy="228600"/>
-          </a:xfrm>
-          <a:prstGeom xmlns:a="http://schemas.openxmlformats.org/drawingml/2006/main" prst="rect">
-            <a:avLst/>
-          </a:prstGeom>
-          <a:noFill xmlns:a="http://schemas.openxmlformats.org/drawingml/2006/main"/>
-          <a:ln xmlns:a="http://schemas.openxmlformats.org/drawingml/2006/main" w="0">
-            <a:noFill/>
-          </a:ln>
-        </p:spPr>
-        <p:txBody>
-          <a:bodyPr xmlns:a="http://schemas.openxmlformats.org/drawingml/2006/main" wrap="square" lIns="0" tIns="0" rIns="0" bIns="0" anchor="t"/>
-          <a:lstStyle xmlns:a="http://schemas.openxmlformats.org/drawingml/2006/main"/>
-          <a:p xmlns:a="http://schemas.openxmlformats.org/drawingml/2006/main">
-            <a:r>
-              <a:rPr lang="en-US" sz="1200">
-                <a:solidFill>
-                  <a:srgbClr val="8A969F"/>
-                </a:solidFill>
-                <a:latin typeface="Inter"/>
-                <a:ea typeface="Inter"/>
-              </a:rPr>
-              <a:t>confidence interval excludes zero</a:t>
-            </a:r>
-            <a:endParaRPr lang="en-US"/>
-          </a:p>
-        </p:txBody>
-      </p:sp>
-      <p:sp>
-        <p:nvSpPr>
-          <p:cNvPr id="24" name="source"/>
-          <p:cNvSpPr txBox="1"/>
-          <p:nvPr/>
-        </p:nvSpPr>
-        <p:spPr>
-          <a:xfrm xmlns:a="http://schemas.openxmlformats.org/drawingml/2006/main">
-            <a:off x="914400" y="7810500"/>
-            <a:ext cx="10953750" cy="209550"/>
-          </a:xfrm>
-          <a:prstGeom xmlns:a="http://schemas.openxmlformats.org/drawingml/2006/main" prst="rect">
-            <a:avLst/>
-          </a:prstGeom>
-          <a:noFill xmlns:a="http://schemas.openxmlformats.org/drawingml/2006/main"/>
-          <a:ln xmlns:a="http://schemas.openxmlformats.org/drawingml/2006/main" w="0">
-            <a:noFill/>
-          </a:ln>
-        </p:spPr>
-        <p:txBody>
-          <a:bodyPr xmlns:a="http://schemas.openxmlformats.org/drawingml/2006/main" wrap="square" lIns="0" tIns="0" rIns="0" bIns="0" anchor="t"/>
-          <a:lstStyle xmlns:a="http://schemas.openxmlformats.org/drawingml/2006/main"/>
-          <a:p xmlns:a="http://schemas.openxmlformats.org/drawingml/2006/main">
-            <a:r>
-              <a:rPr lang="en-US" sz="1050">
-                <a:solidFill>
-                  <a:srgbClr val="8A969F"/>
-                </a:solidFill>
-                <a:latin typeface="Inter"/>
-                <a:ea typeface="Inter"/>
-              </a:rPr>
-              <a:t>Source: illustrative calibration brief · every claim is fictional and bounded</a:t>
-            </a:r>
-            <a:endParaRPr lang="en-US"/>
-          </a:p>
-        </p:txBody>
-      </p:sp>
-      <p:sp>
-        <p:nvSpPr>
-          <p:cNvPr id="25" name="page-number"/>
-          <p:cNvSpPr txBox="1"/>
-          <p:nvPr/>
-        </p:nvSpPr>
-        <p:spPr>
-          <a:xfrm xmlns:a="http://schemas.openxmlformats.org/drawingml/2006/main">
-            <a:off x="13335000" y="7810500"/>
-            <a:ext cx="952500" cy="209550"/>
-          </a:xfrm>
-          <a:prstGeom xmlns:a="http://schemas.openxmlformats.org/drawingml/2006/main" prst="rect">
-            <a:avLst/>
-          </a:prstGeom>
-          <a:noFill xmlns:a="http://schemas.openxmlformats.org/drawingml/2006/main"/>
-          <a:ln xmlns:a="http://schemas.openxmlformats.org/drawingml/2006/main" w="0">
-            <a:noFill/>
-          </a:ln>
-        </p:spPr>
-        <p:txBody>
-          <a:bodyPr xmlns:a="http://schemas.openxmlformats.org/drawingml/2006/main" wrap="square" lIns="0" tIns="0" rIns="0" bIns="0" anchor="t"/>
-          <a:lstStyle xmlns:a="http://schemas.openxmlformats.org/drawingml/2006/main"/>
-          <a:p xmlns:a="http://schemas.openxmlformats.org/drawingml/2006/main">
-            <a:pPr algn="r"/>
-            <a:r>
-              <a:rPr lang="en-US" sz="1050">
-                <a:solidFill>
-                  <a:srgbClr val="8A969F"/>
-                </a:solidFill>
-                <a:latin typeface="Inter"/>
-                <a:ea typeface="Inter"/>
-              </a:rPr>
-              <a:t>2 / 6</a:t>
-            </a:r>
-            <a:endParaRPr lang="en-US"/>
-          </a:p>
-        </p:txBody>
-      </p:sp>
-    </p:spTree>
-  </p:cSld>
-  <p:clrMapOvr>
-    <a:masterClrMapping xmlns:a="http://schemas.openxmlformats.org/drawingml/2006/main"/>
-  </p:clrMapOvr>
-</p:sld>
-</file>
-
-<file path=ppt/slides/slide3.xml><?xml version="1.0" encoding="utf-8"?>
-<p:sld xmlns:p="http://schemas.openxmlformats.org/presentationml/2006/main">
-  <p:cSld name="Evidence">
-    <p:bg>
-      <p:bgPr>
-        <a:blipFill xmlns:a="http://schemas.openxmlformats.org/drawingml/2006/main">
-          <a:blip xmlns:r="http://schemas.openxmlformats.org/officeDocument/2006/relationships" r:embed="rIdOfficeKitImage6af8c9b5dff6e3a3_1"/>
-          <a:stretch>
-            <a:fillRect/>
-          </a:stretch>
-        </a:blipFill>
-      </p:bgPr>
-    </p:bg>
-    <p:spTree>
-      <p:nvGrpSpPr>
-        <p:cNvPr id="1" name=""/>
-        <p:cNvGrpSpPr/>
-        <p:nvPr/>
-      </p:nvGrpSpPr>
-      <p:grpSpPr>
-        <a:xfrm xmlns:a="http://schemas.openxmlformats.org/drawingml/2006/main">
-          <a:off x="0" y="0"/>
-          <a:ext cx="0" cy="0"/>
-          <a:chOff x="0" y="0"/>
-          <a:chExt cx="0" cy="0"/>
-        </a:xfrm>
-      </p:grpSpPr>
-      <p:sp>
-        <p:nvSpPr>
           <p:cNvPr id="2" name="evidence-paper-scrim"/>
           <p:cNvSpPr/>
           <p:nvPr/>
@@ -2396,7 +2396,7 @@
         </p:xfrm>
         <a:graphic xmlns:a="http://schemas.openxmlformats.org/drawingml/2006/main">
           <a:graphicData uri="http://schemas.openxmlformats.org/drawingml/2006/chart">
-            <c:chart xmlns:r="http://schemas.openxmlformats.org/officeDocument/2006/relationships" xmlns:c="http://schemas.openxmlformats.org/drawingml/2006/chart" r:id="R14a5cadfdc29479d"/>
+            <c:chart xmlns:r="http://schemas.openxmlformats.org/officeDocument/2006/relationships" xmlns:c="http://schemas.openxmlformats.org/drawingml/2006/chart" r:id="R605d07e522c74cbc"/>
           </a:graphicData>
         </a:graphic>
       </p:graphicFrame>
@@ -3900,7 +3900,7 @@
     <p:bg>
       <p:bgPr>
         <a:blipFill xmlns:a="http://schemas.openxmlformats.org/drawingml/2006/main">
-          <a:blip xmlns:r="http://schemas.openxmlformats.org/officeDocument/2006/relationships" r:embed="rIdOfficeKitImage56df3e49f11f0ff0_1"/>
+          <a:blip xmlns:r="http://schemas.openxmlformats.org/officeDocument/2006/relationships" r:embed="rIdOfficeKitImaged71bfa074cda59bb_1"/>
           <a:stretch>
             <a:fillRect/>
           </a:stretch>
@@ -4230,7 +4230,7 @@
     <p:bg>
       <p:bgPr>
         <a:blipFill xmlns:a="http://schemas.openxmlformats.org/drawingml/2006/main">
-          <a:blip xmlns:r="http://schemas.openxmlformats.org/officeDocument/2006/relationships" r:embed="rIdOfficeKitImagec2e9a9d799668dd3_1"/>
+          <a:blip xmlns:r="http://schemas.openxmlformats.org/officeDocument/2006/relationships" r:embed="rIdOfficeKitImage6af8c9b5dff6e3a3_1"/>
           <a:stretch>
             <a:fillRect/>
           </a:stretch>

--- a/skills/presentation-template-library/skills/artifact-template-blueprint-lecture/assets/reference.pptx
+++ b/skills/presentation-template-library/skills/artifact-template-blueprint-lecture/assets/reference.pptx
@@ -2396,7 +2396,7 @@
         </p:xfrm>
         <a:graphic xmlns:a="http://schemas.openxmlformats.org/drawingml/2006/main">
           <a:graphicData uri="http://schemas.openxmlformats.org/drawingml/2006/chart">
-            <c:chart xmlns:r="http://schemas.openxmlformats.org/officeDocument/2006/relationships" xmlns:c="http://schemas.openxmlformats.org/drawingml/2006/chart" r:id="R605d07e522c74cbc"/>
+            <c:chart xmlns:r="http://schemas.openxmlformats.org/officeDocument/2006/relationships" xmlns:c="http://schemas.openxmlformats.org/drawingml/2006/chart" r:id="Radc1bc293dc04c8b"/>
           </a:graphicData>
         </a:graphic>
       </p:graphicFrame>

--- a/skills/presentation-template-library/skills/artifact-template-blueprint-lecture/assets/reference.pptx
+++ b/skills/presentation-template-library/skills/artifact-template-blueprint-lecture/assets/reference.pptx
@@ -194,189 +194,13 @@
 </a:theme>
 </file>
 
-<file path=ppt/slides/charts/chart1.xml><?xml version="1.0" encoding="utf-8"?>
-<c:chartSpace xmlns:c="http://schemas.openxmlformats.org/drawingml/2006/chart" xmlns:a="http://schemas.openxmlformats.org/drawingml/2006/main">
-  <c:chart>
-    <c:title>
-      <c:tx>
-        <c:rich>
-          <a:bodyPr/>
-          <a:lstStyle/>
-          <a:p>
-            <a:r>
-              <a:t>Observed signal over the study window</a:t>
-            </a:r>
-          </a:p>
-        </c:rich>
-      </c:tx>
-      <c:layout/>
-    </c:title>
-    <c:plotArea>
-      <c:layout/>
-      <c:lineChart>
-        <c:grouping val="standard"/>
-        <c:ser>
-          <c:idx val="0"/>
-          <c:order val="0"/>
-          <c:tx>
-            <c:v>Primary</c:v>
-          </c:tx>
-          <c:spPr>
-            <a:solidFill>
-              <a:srgbClr val="1769D2"/>
-            </a:solidFill>
-            <a:ln w="50800">
-              <a:solidFill>
-                <a:srgbClr val="1769D2"/>
-              </a:solidFill>
-              <a:prstDash val="solid"/>
-            </a:ln>
-          </c:spPr>
-          <c:marker>
-            <c:symbol val="circle"/>
-            <c:size val="8"/>
-          </c:marker>
-          <c:cat>
-            <c:strLit>
-              <c:ptCount val="5"/>
-              <c:pt idx="0">
-                <c:v>Baseline</c:v>
-              </c:pt>
-              <c:pt idx="1">
-                <c:v>Phase 1</c:v>
-              </c:pt>
-              <c:pt idx="2">
-                <c:v>Phase 2</c:v>
-              </c:pt>
-              <c:pt idx="3">
-                <c:v>Phase 3</c:v>
-              </c:pt>
-              <c:pt idx="4">
-                <c:v>Close</c:v>
-              </c:pt>
-            </c:strLit>
-          </c:cat>
-          <c:val>
-            <c:numLit>
-              <c:formatCode>General</c:formatCode>
-              <c:ptCount val="5"/>
-              <c:pt idx="0">
-                <c:v>42</c:v>
-              </c:pt>
-              <c:pt idx="1">
-                <c:v>48</c:v>
-              </c:pt>
-              <c:pt idx="2">
-                <c:v>54</c:v>
-              </c:pt>
-              <c:pt idx="3">
-                <c:v>61</c:v>
-              </c:pt>
-              <c:pt idx="4">
-                <c:v>68</c:v>
-              </c:pt>
-            </c:numLit>
-          </c:val>
-        </c:ser>
-        <c:ser>
-          <c:idx val="1"/>
-          <c:order val="1"/>
-          <c:tx>
-            <c:v>Reference</c:v>
-          </c:tx>
-          <c:spPr>
-            <a:solidFill>
-              <a:srgbClr val="8A969F"/>
-            </a:solidFill>
-            <a:ln w="38100">
-              <a:solidFill>
-                <a:srgbClr val="8A969F"/>
-              </a:solidFill>
-              <a:prstDash val="solid"/>
-            </a:ln>
-          </c:spPr>
-          <c:marker>
-            <c:symbol val="circle"/>
-            <c:size val="7"/>
-          </c:marker>
-          <c:cat>
-            <c:strLit>
-              <c:ptCount val="5"/>
-              <c:pt idx="0">
-                <c:v>Baseline</c:v>
-              </c:pt>
-              <c:pt idx="1">
-                <c:v>Phase 1</c:v>
-              </c:pt>
-              <c:pt idx="2">
-                <c:v>Phase 2</c:v>
-              </c:pt>
-              <c:pt idx="3">
-                <c:v>Phase 3</c:v>
-              </c:pt>
-              <c:pt idx="4">
-                <c:v>Close</c:v>
-              </c:pt>
-            </c:strLit>
-          </c:cat>
-          <c:val>
-            <c:numLit>
-              <c:formatCode>General</c:formatCode>
-              <c:ptCount val="5"/>
-              <c:pt idx="0">
-                <c:v>40</c:v>
-              </c:pt>
-              <c:pt idx="1">
-                <c:v>42</c:v>
-              </c:pt>
-              <c:pt idx="2">
-                <c:v>44</c:v>
-              </c:pt>
-              <c:pt idx="3">
-                <c:v>45</c:v>
-              </c:pt>
-              <c:pt idx="4">
-                <c:v>46</c:v>
-              </c:pt>
-            </c:numLit>
-          </c:val>
-        </c:ser>
-        <c:axId val="1"/>
-        <c:axId val="2"/>
-      </c:lineChart>
-      <c:catAx>
-        <c:axId val="1"/>
-        <c:scaling>
-          <c:orientation val="minMax"/>
-        </c:scaling>
-        <c:axPos val="b"/>
-        <c:crossAx val="2"/>
-      </c:catAx>
-      <c:valAx>
-        <c:axId val="2"/>
-        <c:scaling>
-          <c:orientation val="minMax"/>
-        </c:scaling>
-        <c:axPos val="l"/>
-        <c:crossAx val="1"/>
-      </c:valAx>
-    </c:plotArea>
-    <c:legend>
-      <c:legendPos val="r"/>
-      <c:layout/>
-    </c:legend>
-    <c:plotVisOnly val="1"/>
-  </c:chart>
-</c:chartSpace>
-</file>
-
 <file path=ppt/slides/slide1.xml><?xml version="1.0" encoding="utf-8"?>
 <p:sld xmlns:p="http://schemas.openxmlformats.org/presentationml/2006/main">
   <p:cSld name="Opening claim">
     <p:bg>
       <p:bgPr>
         <a:blipFill xmlns:a="http://schemas.openxmlformats.org/drawingml/2006/main">
-          <a:blip xmlns:r="http://schemas.openxmlformats.org/officeDocument/2006/relationships" r:embed="rIdOfficeKitImage56df3e49f11f0ff0_1"/>
+          <a:blip xmlns:r="http://schemas.openxmlformats.org/officeDocument/2006/relationships" r:embed="rIdOfficeKitImage8579b0a87ff097c1_1"/>
           <a:stretch>
             <a:fillRect/>
           </a:stretch>
@@ -1171,7 +995,7 @@
     <p:bg>
       <p:bgPr>
         <a:blipFill xmlns:a="http://schemas.openxmlformats.org/drawingml/2006/main">
-          <a:blip xmlns:r="http://schemas.openxmlformats.org/officeDocument/2006/relationships" r:embed="rIdOfficeKitImagec2e9a9d799668dd3_1"/>
+          <a:blip xmlns:r="http://schemas.openxmlformats.org/officeDocument/2006/relationships" r:embed="rIdOfficeKitImage260725ec97288f31_1"/>
           <a:stretch>
             <a:fillRect/>
           </a:stretch>
@@ -2093,7 +1917,7 @@
     <p:bg>
       <p:bgPr>
         <a:blipFill xmlns:a="http://schemas.openxmlformats.org/drawingml/2006/main">
-          <a:blip xmlns:r="http://schemas.openxmlformats.org/officeDocument/2006/relationships" r:embed="rIdOfficeKitImage092dd3ee80187530_1"/>
+          <a:blip xmlns:r="http://schemas.openxmlformats.org/officeDocument/2006/relationships" r:embed="rIdOfficeKitImage5e425a7c66b022d4_1"/>
           <a:stretch>
             <a:fillRect/>
           </a:stretch>
@@ -2382,114 +2206,59 @@
           </a:p>
         </p:txBody>
       </p:sp>
-      <p:graphicFrame>
-        <p:nvGraphicFramePr>
-          <p:cNvPr id="9" name="evidence-chart"/>
-          <p:cNvGraphicFramePr>
-            <a:graphicFrameLocks xmlns:a="http://schemas.openxmlformats.org/drawingml/2006/main" noGrp="1"/>
-          </p:cNvGraphicFramePr>
-          <p:nvPr/>
-        </p:nvGraphicFramePr>
-        <p:xfrm>
-          <a:off xmlns:a="http://schemas.openxmlformats.org/drawingml/2006/main" x="1047750" y="3048000"/>
-          <a:ext xmlns:a="http://schemas.openxmlformats.org/drawingml/2006/main" cx="7905750" cy="3000375"/>
-        </p:xfrm>
-        <a:graphic xmlns:a="http://schemas.openxmlformats.org/drawingml/2006/main">
-          <a:graphicData uri="http://schemas.openxmlformats.org/drawingml/2006/chart">
-            <c:chart xmlns:r="http://schemas.openxmlformats.org/officeDocument/2006/relationships" xmlns:c="http://schemas.openxmlformats.org/drawingml/2006/chart" r:id="Radc1bc293dc04c8b"/>
-          </a:graphicData>
-        </a:graphic>
-      </p:graphicFrame>
-      <p:sp>
-        <p:nvSpPr>
-          <p:cNvPr id="10" name="metric"/>
-          <p:cNvSpPr txBox="1"/>
-          <p:nvPr/>
-        </p:nvSpPr>
-        <p:spPr>
-          <a:xfrm xmlns:a="http://schemas.openxmlformats.org/drawingml/2006/main">
-            <a:off x="9906000" y="3333750"/>
-            <a:ext cx="2667000" cy="781050"/>
-          </a:xfrm>
-          <a:prstGeom xmlns:a="http://schemas.openxmlformats.org/drawingml/2006/main" prst="rect">
-            <a:avLst/>
-          </a:prstGeom>
-          <a:noFill xmlns:a="http://schemas.openxmlformats.org/drawingml/2006/main"/>
-          <a:ln xmlns:a="http://schemas.openxmlformats.org/drawingml/2006/main" w="0">
-            <a:noFill/>
-          </a:ln>
-        </p:spPr>
-        <p:txBody>
-          <a:bodyPr xmlns:a="http://schemas.openxmlformats.org/drawingml/2006/main" wrap="square" lIns="0" tIns="0" rIns="0" bIns="0" anchor="t"/>
-          <a:lstStyle xmlns:a="http://schemas.openxmlformats.org/drawingml/2006/main"/>
-          <a:p xmlns:a="http://schemas.openxmlformats.org/drawingml/2006/main">
-            <a:r>
-              <a:rPr lang="en-US" sz="4800" b="1">
+      <p:sp>
+        <p:nvSpPr>
+          <p:cNvPr id="9" name="timeline-label"/>
+          <p:cNvSpPr txBox="1"/>
+          <p:nvPr/>
+        </p:nvSpPr>
+        <p:spPr>
+          <a:xfrm xmlns:a="http://schemas.openxmlformats.org/drawingml/2006/main">
+            <a:off x="1066800" y="3238500"/>
+            <a:ext cx="4000500" cy="228600"/>
+          </a:xfrm>
+          <a:prstGeom xmlns:a="http://schemas.openxmlformats.org/drawingml/2006/main" prst="rect">
+            <a:avLst/>
+          </a:prstGeom>
+          <a:noFill xmlns:a="http://schemas.openxmlformats.org/drawingml/2006/main"/>
+          <a:ln xmlns:a="http://schemas.openxmlformats.org/drawingml/2006/main" w="0">
+            <a:noFill/>
+          </a:ln>
+        </p:spPr>
+        <p:txBody>
+          <a:bodyPr xmlns:a="http://schemas.openxmlformats.org/drawingml/2006/main" wrap="square" lIns="0" tIns="0" rIns="0" bIns="0" anchor="t"/>
+          <a:lstStyle xmlns:a="http://schemas.openxmlformats.org/drawingml/2006/main"/>
+          <a:p xmlns:a="http://schemas.openxmlformats.org/drawingml/2006/main">
+            <a:r>
+              <a:rPr lang="en-US" sz="1125" b="1">
                 <a:solidFill>
                   <a:srgbClr val="1769D2"/>
                 </a:solidFill>
                 <a:latin typeface="Inter"/>
                 <a:ea typeface="Inter"/>
               </a:rPr>
-              <a:t>68</a:t>
-            </a:r>
-            <a:endParaRPr lang="en-US"/>
-          </a:p>
-        </p:txBody>
-      </p:sp>
-      <p:sp>
-        <p:nvSpPr>
-          <p:cNvPr id="11" name="metric-label"/>
-          <p:cNvSpPr txBox="1"/>
-          <p:nvPr/>
-        </p:nvSpPr>
-        <p:spPr>
-          <a:xfrm xmlns:a="http://schemas.openxmlformats.org/drawingml/2006/main">
-            <a:off x="9906000" y="4143375"/>
-            <a:ext cx="3143250" cy="285750"/>
-          </a:xfrm>
-          <a:prstGeom xmlns:a="http://schemas.openxmlformats.org/drawingml/2006/main" prst="rect">
-            <a:avLst/>
-          </a:prstGeom>
-          <a:noFill xmlns:a="http://schemas.openxmlformats.org/drawingml/2006/main"/>
-          <a:ln xmlns:a="http://schemas.openxmlformats.org/drawingml/2006/main" w="0">
-            <a:noFill/>
-          </a:ln>
-        </p:spPr>
-        <p:txBody>
-          <a:bodyPr xmlns:a="http://schemas.openxmlformats.org/drawingml/2006/main" wrap="square" lIns="0" tIns="0" rIns="0" bIns="0" anchor="t"/>
-          <a:lstStyle xmlns:a="http://schemas.openxmlformats.org/drawingml/2006/main"/>
-          <a:p xmlns:a="http://schemas.openxmlformats.org/drawingml/2006/main">
-            <a:r>
-              <a:rPr lang="en-US" sz="1350">
-                <a:solidFill>
-                  <a:srgbClr val="8A969F"/>
-                </a:solidFill>
-                <a:latin typeface="Inter"/>
-                <a:ea typeface="Inter"/>
-              </a:rPr>
-              <a:t>participation index · week 4</a:t>
-            </a:r>
-            <a:endParaRPr lang="en-US"/>
-          </a:p>
-        </p:txBody>
-      </p:sp>
-      <p:sp>
-        <p:nvSpPr>
-          <p:cNvPr id="12" name="rail-rule"/>
+              <a:t>EVOLUTION / TRANSITION</a:t>
+            </a:r>
+            <a:endParaRPr lang="en-US"/>
+          </a:p>
+        </p:txBody>
+      </p:sp>
+      <p:sp>
+        <p:nvSpPr>
+          <p:cNvPr id="10" name="timeline-axis"/>
           <p:cNvSpPr/>
           <p:nvPr/>
         </p:nvSpPr>
         <p:spPr>
           <a:xfrm xmlns:a="http://schemas.openxmlformats.org/drawingml/2006/main">
-            <a:off x="9906000" y="4810125"/>
-            <a:ext cx="3762375" cy="0"/>
+            <a:off x="1219200" y="4762500"/>
+            <a:ext cx="10287000" cy="0"/>
           </a:xfrm>
           <a:prstGeom xmlns:a="http://schemas.openxmlformats.org/drawingml/2006/main" prst="line">
             <a:avLst/>
           </a:prstGeom>
           <a:noFill xmlns:a="http://schemas.openxmlformats.org/drawingml/2006/main"/>
-          <a:ln xmlns:a="http://schemas.openxmlformats.org/drawingml/2006/main" w="25400">
+          <a:ln xmlns:a="http://schemas.openxmlformats.org/drawingml/2006/main" w="38100">
             <a:solidFill>
               <a:srgbClr val="8A969F"/>
             </a:solidFill>
@@ -2510,27 +2279,102 @@
       </p:sp>
       <p:sp>
         <p:nvSpPr>
-          <p:cNvPr id="13" name="read-through"/>
-          <p:cNvSpPr txBox="1"/>
-          <p:nvPr/>
-        </p:nvSpPr>
-        <p:spPr>
-          <a:xfrm xmlns:a="http://schemas.openxmlformats.org/drawingml/2006/main">
-            <a:off x="9906000" y="5143500"/>
-            <a:ext cx="3429000" cy="742950"/>
-          </a:xfrm>
-          <a:prstGeom xmlns:a="http://schemas.openxmlformats.org/drawingml/2006/main" prst="rect">
-            <a:avLst/>
-          </a:prstGeom>
-          <a:noFill xmlns:a="http://schemas.openxmlformats.org/drawingml/2006/main"/>
-          <a:ln xmlns:a="http://schemas.openxmlformats.org/drawingml/2006/main" w="0">
-            <a:noFill/>
-          </a:ln>
-        </p:spPr>
-        <p:txBody>
-          <a:bodyPr xmlns:a="http://schemas.openxmlformats.org/drawingml/2006/main" wrap="square" lIns="0" tIns="0" rIns="0" bIns="0" anchor="t"/>
-          <a:lstStyle xmlns:a="http://schemas.openxmlformats.org/drawingml/2006/main"/>
-          <a:p xmlns:a="http://schemas.openxmlformats.org/drawingml/2006/main">
+          <p:cNvPr id="11" name="timeline-node-0"/>
+          <p:cNvSpPr/>
+          <p:nvPr/>
+        </p:nvSpPr>
+        <p:spPr>
+          <a:xfrm xmlns:a="http://schemas.openxmlformats.org/drawingml/2006/main">
+            <a:off x="1066800" y="4610100"/>
+            <a:ext cx="304800" cy="304800"/>
+          </a:xfrm>
+          <a:prstGeom xmlns:a="http://schemas.openxmlformats.org/drawingml/2006/main" prst="ellipse">
+            <a:avLst/>
+          </a:prstGeom>
+          <a:solidFill xmlns:a="http://schemas.openxmlformats.org/drawingml/2006/main">
+            <a:srgbClr val="F8FAFC"/>
+          </a:solidFill>
+          <a:ln xmlns:a="http://schemas.openxmlformats.org/drawingml/2006/main" w="25400">
+            <a:solidFill>
+              <a:srgbClr val="132A3A"/>
+            </a:solidFill>
+            <a:prstDash val="solid"/>
+          </a:ln>
+        </p:spPr>
+        <p:txBody>
+          <a:bodyPr xmlns:a="http://schemas.openxmlformats.org/drawingml/2006/main" wrap="square" lIns="0" tIns="0" rIns="0" bIns="0" anchor="t"/>
+          <a:lstStyle xmlns:a="http://schemas.openxmlformats.org/drawingml/2006/main"/>
+          <a:p xmlns:a="http://schemas.openxmlformats.org/drawingml/2006/main">
+            <a:r>
+              <a:rPr lang="en-US"/>
+              <a:t/>
+            </a:r>
+            <a:endParaRPr lang="en-US"/>
+          </a:p>
+        </p:txBody>
+      </p:sp>
+      <p:sp>
+        <p:nvSpPr>
+          <p:cNvPr id="12" name="timeline-number-0"/>
+          <p:cNvSpPr txBox="1"/>
+          <p:nvPr/>
+        </p:nvSpPr>
+        <p:spPr>
+          <a:xfrm xmlns:a="http://schemas.openxmlformats.org/drawingml/2006/main">
+            <a:off x="952500" y="4076700"/>
+            <a:ext cx="533400" cy="190500"/>
+          </a:xfrm>
+          <a:prstGeom xmlns:a="http://schemas.openxmlformats.org/drawingml/2006/main" prst="rect">
+            <a:avLst/>
+          </a:prstGeom>
+          <a:noFill xmlns:a="http://schemas.openxmlformats.org/drawingml/2006/main"/>
+          <a:ln xmlns:a="http://schemas.openxmlformats.org/drawingml/2006/main" w="0">
+            <a:noFill/>
+          </a:ln>
+        </p:spPr>
+        <p:txBody>
+          <a:bodyPr xmlns:a="http://schemas.openxmlformats.org/drawingml/2006/main" wrap="square" lIns="0" tIns="0" rIns="0" bIns="0" anchor="t"/>
+          <a:lstStyle xmlns:a="http://schemas.openxmlformats.org/drawingml/2006/main"/>
+          <a:p xmlns:a="http://schemas.openxmlformats.org/drawingml/2006/main">
+            <a:pPr algn="ctr"/>
+            <a:r>
+              <a:rPr lang="en-US" sz="975" b="1">
+                <a:solidFill>
+                  <a:srgbClr val="1769D2"/>
+                </a:solidFill>
+                <a:latin typeface="Inter"/>
+                <a:ea typeface="Inter"/>
+              </a:rPr>
+              <a:t>01</a:t>
+            </a:r>
+            <a:endParaRPr lang="en-US"/>
+          </a:p>
+        </p:txBody>
+      </p:sp>
+      <p:sp>
+        <p:nvSpPr>
+          <p:cNvPr id="13" name="timeline-label-0"/>
+          <p:cNvSpPr txBox="1"/>
+          <p:nvPr/>
+        </p:nvSpPr>
+        <p:spPr>
+          <a:xfrm xmlns:a="http://schemas.openxmlformats.org/drawingml/2006/main">
+            <a:off x="533400" y="5086350"/>
+            <a:ext cx="1371600" cy="228600"/>
+          </a:xfrm>
+          <a:prstGeom xmlns:a="http://schemas.openxmlformats.org/drawingml/2006/main" prst="rect">
+            <a:avLst/>
+          </a:prstGeom>
+          <a:noFill xmlns:a="http://schemas.openxmlformats.org/drawingml/2006/main"/>
+          <a:ln xmlns:a="http://schemas.openxmlformats.org/drawingml/2006/main" w="0">
+            <a:noFill/>
+          </a:ln>
+        </p:spPr>
+        <p:txBody>
+          <a:bodyPr xmlns:a="http://schemas.openxmlformats.org/drawingml/2006/main" wrap="square" lIns="0" tIns="0" rIns="0" bIns="0" anchor="t"/>
+          <a:lstStyle xmlns:a="http://schemas.openxmlformats.org/drawingml/2006/main"/>
+          <a:p xmlns:a="http://schemas.openxmlformats.org/drawingml/2006/main">
+            <a:pPr algn="ctr"/>
             <a:r>
               <a:rPr lang="en-US" sz="1350" b="1">
                 <a:solidFill>
@@ -2539,11 +2383,148 @@
                 <a:latin typeface="Inter"/>
                 <a:ea typeface="Inter"/>
               </a:rPr>
-              <a:t>The observed lift is</a:t>
-            </a:r>
-            <a:endParaRPr lang="en-US"/>
-          </a:p>
-          <a:p xmlns:a="http://schemas.openxmlformats.org/drawingml/2006/main">
+              <a:t>Frame</a:t>
+            </a:r>
+            <a:endParaRPr lang="en-US"/>
+          </a:p>
+        </p:txBody>
+      </p:sp>
+      <p:sp>
+        <p:nvSpPr>
+          <p:cNvPr id="14" name="timeline-text-0"/>
+          <p:cNvSpPr txBox="1"/>
+          <p:nvPr/>
+        </p:nvSpPr>
+        <p:spPr>
+          <a:xfrm xmlns:a="http://schemas.openxmlformats.org/drawingml/2006/main">
+            <a:off x="323850" y="5391150"/>
+            <a:ext cx="1790700" cy="361950"/>
+          </a:xfrm>
+          <a:prstGeom xmlns:a="http://schemas.openxmlformats.org/drawingml/2006/main" prst="rect">
+            <a:avLst/>
+          </a:prstGeom>
+          <a:noFill xmlns:a="http://schemas.openxmlformats.org/drawingml/2006/main"/>
+          <a:ln xmlns:a="http://schemas.openxmlformats.org/drawingml/2006/main" w="0">
+            <a:noFill/>
+          </a:ln>
+        </p:spPr>
+        <p:txBody>
+          <a:bodyPr xmlns:a="http://schemas.openxmlformats.org/drawingml/2006/main" wrap="square" lIns="0" tIns="0" rIns="0" bIns="0" anchor="t"/>
+          <a:lstStyle xmlns:a="http://schemas.openxmlformats.org/drawingml/2006/main"/>
+          <a:p xmlns:a="http://schemas.openxmlformats.org/drawingml/2006/main">
+            <a:pPr algn="ctr"/>
+            <a:r>
+              <a:rPr lang="en-US" sz="1050">
+                <a:solidFill>
+                  <a:srgbClr val="8A969F"/>
+                </a:solidFill>
+                <a:latin typeface="Inter"/>
+                <a:ea typeface="Inter"/>
+              </a:rPr>
+              <a:t>Name the question</a:t>
+            </a:r>
+            <a:endParaRPr lang="en-US"/>
+          </a:p>
+        </p:txBody>
+      </p:sp>
+      <p:sp>
+        <p:nvSpPr>
+          <p:cNvPr id="15" name="timeline-node-1"/>
+          <p:cNvSpPr/>
+          <p:nvPr/>
+        </p:nvSpPr>
+        <p:spPr>
+          <a:xfrm xmlns:a="http://schemas.openxmlformats.org/drawingml/2006/main">
+            <a:off x="3638550" y="4610100"/>
+            <a:ext cx="304800" cy="304800"/>
+          </a:xfrm>
+          <a:prstGeom xmlns:a="http://schemas.openxmlformats.org/drawingml/2006/main" prst="ellipse">
+            <a:avLst/>
+          </a:prstGeom>
+          <a:solidFill xmlns:a="http://schemas.openxmlformats.org/drawingml/2006/main">
+            <a:srgbClr val="F8FAFC"/>
+          </a:solidFill>
+          <a:ln xmlns:a="http://schemas.openxmlformats.org/drawingml/2006/main" w="25400">
+            <a:solidFill>
+              <a:srgbClr val="132A3A"/>
+            </a:solidFill>
+            <a:prstDash val="solid"/>
+          </a:ln>
+        </p:spPr>
+        <p:txBody>
+          <a:bodyPr xmlns:a="http://schemas.openxmlformats.org/drawingml/2006/main" wrap="square" lIns="0" tIns="0" rIns="0" bIns="0" anchor="t"/>
+          <a:lstStyle xmlns:a="http://schemas.openxmlformats.org/drawingml/2006/main"/>
+          <a:p xmlns:a="http://schemas.openxmlformats.org/drawingml/2006/main">
+            <a:r>
+              <a:rPr lang="en-US"/>
+              <a:t/>
+            </a:r>
+            <a:endParaRPr lang="en-US"/>
+          </a:p>
+        </p:txBody>
+      </p:sp>
+      <p:sp>
+        <p:nvSpPr>
+          <p:cNvPr id="16" name="timeline-number-1"/>
+          <p:cNvSpPr txBox="1"/>
+          <p:nvPr/>
+        </p:nvSpPr>
+        <p:spPr>
+          <a:xfrm xmlns:a="http://schemas.openxmlformats.org/drawingml/2006/main">
+            <a:off x="3524250" y="4076700"/>
+            <a:ext cx="533400" cy="190500"/>
+          </a:xfrm>
+          <a:prstGeom xmlns:a="http://schemas.openxmlformats.org/drawingml/2006/main" prst="rect">
+            <a:avLst/>
+          </a:prstGeom>
+          <a:noFill xmlns:a="http://schemas.openxmlformats.org/drawingml/2006/main"/>
+          <a:ln xmlns:a="http://schemas.openxmlformats.org/drawingml/2006/main" w="0">
+            <a:noFill/>
+          </a:ln>
+        </p:spPr>
+        <p:txBody>
+          <a:bodyPr xmlns:a="http://schemas.openxmlformats.org/drawingml/2006/main" wrap="square" lIns="0" tIns="0" rIns="0" bIns="0" anchor="t"/>
+          <a:lstStyle xmlns:a="http://schemas.openxmlformats.org/drawingml/2006/main"/>
+          <a:p xmlns:a="http://schemas.openxmlformats.org/drawingml/2006/main">
+            <a:pPr algn="ctr"/>
+            <a:r>
+              <a:rPr lang="en-US" sz="975" b="1">
+                <a:solidFill>
+                  <a:srgbClr val="1769D2"/>
+                </a:solidFill>
+                <a:latin typeface="Inter"/>
+                <a:ea typeface="Inter"/>
+              </a:rPr>
+              <a:t>02</a:t>
+            </a:r>
+            <a:endParaRPr lang="en-US"/>
+          </a:p>
+        </p:txBody>
+      </p:sp>
+      <p:sp>
+        <p:nvSpPr>
+          <p:cNvPr id="17" name="timeline-label-1"/>
+          <p:cNvSpPr txBox="1"/>
+          <p:nvPr/>
+        </p:nvSpPr>
+        <p:spPr>
+          <a:xfrm xmlns:a="http://schemas.openxmlformats.org/drawingml/2006/main">
+            <a:off x="3105150" y="5086350"/>
+            <a:ext cx="1371600" cy="228600"/>
+          </a:xfrm>
+          <a:prstGeom xmlns:a="http://schemas.openxmlformats.org/drawingml/2006/main" prst="rect">
+            <a:avLst/>
+          </a:prstGeom>
+          <a:noFill xmlns:a="http://schemas.openxmlformats.org/drawingml/2006/main"/>
+          <a:ln xmlns:a="http://schemas.openxmlformats.org/drawingml/2006/main" w="0">
+            <a:noFill/>
+          </a:ln>
+        </p:spPr>
+        <p:txBody>
+          <a:bodyPr xmlns:a="http://schemas.openxmlformats.org/drawingml/2006/main" wrap="square" lIns="0" tIns="0" rIns="0" bIns="0" anchor="t"/>
+          <a:lstStyle xmlns:a="http://schemas.openxmlformats.org/drawingml/2006/main"/>
+          <a:p xmlns:a="http://schemas.openxmlformats.org/drawingml/2006/main">
+            <a:pPr algn="ctr"/>
             <a:r>
               <a:rPr lang="en-US" sz="1350" b="1">
                 <a:solidFill>
@@ -2552,11 +2533,148 @@
                 <a:latin typeface="Inter"/>
                 <a:ea typeface="Inter"/>
               </a:rPr>
-              <a:t>compatible with the registered</a:t>
-            </a:r>
-            <a:endParaRPr lang="en-US"/>
-          </a:p>
-          <a:p xmlns:a="http://schemas.openxmlformats.org/drawingml/2006/main">
+              <a:t>Test</a:t>
+            </a:r>
+            <a:endParaRPr lang="en-US"/>
+          </a:p>
+        </p:txBody>
+      </p:sp>
+      <p:sp>
+        <p:nvSpPr>
+          <p:cNvPr id="18" name="timeline-text-1"/>
+          <p:cNvSpPr txBox="1"/>
+          <p:nvPr/>
+        </p:nvSpPr>
+        <p:spPr>
+          <a:xfrm xmlns:a="http://schemas.openxmlformats.org/drawingml/2006/main">
+            <a:off x="2895600" y="5391150"/>
+            <a:ext cx="1790700" cy="361950"/>
+          </a:xfrm>
+          <a:prstGeom xmlns:a="http://schemas.openxmlformats.org/drawingml/2006/main" prst="rect">
+            <a:avLst/>
+          </a:prstGeom>
+          <a:noFill xmlns:a="http://schemas.openxmlformats.org/drawingml/2006/main"/>
+          <a:ln xmlns:a="http://schemas.openxmlformats.org/drawingml/2006/main" w="0">
+            <a:noFill/>
+          </a:ln>
+        </p:spPr>
+        <p:txBody>
+          <a:bodyPr xmlns:a="http://schemas.openxmlformats.org/drawingml/2006/main" wrap="square" lIns="0" tIns="0" rIns="0" bIns="0" anchor="t"/>
+          <a:lstStyle xmlns:a="http://schemas.openxmlformats.org/drawingml/2006/main"/>
+          <a:p xmlns:a="http://schemas.openxmlformats.org/drawingml/2006/main">
+            <a:pPr algn="ctr"/>
+            <a:r>
+              <a:rPr lang="en-US" sz="1050">
+                <a:solidFill>
+                  <a:srgbClr val="8A969F"/>
+                </a:solidFill>
+                <a:latin typeface="Inter"/>
+                <a:ea typeface="Inter"/>
+              </a:rPr>
+              <a:t>Hold the rule</a:t>
+            </a:r>
+            <a:endParaRPr lang="en-US"/>
+          </a:p>
+        </p:txBody>
+      </p:sp>
+      <p:sp>
+        <p:nvSpPr>
+          <p:cNvPr id="19" name="timeline-node-2"/>
+          <p:cNvSpPr/>
+          <p:nvPr/>
+        </p:nvSpPr>
+        <p:spPr>
+          <a:xfrm xmlns:a="http://schemas.openxmlformats.org/drawingml/2006/main">
+            <a:off x="6210300" y="4610100"/>
+            <a:ext cx="304800" cy="304800"/>
+          </a:xfrm>
+          <a:prstGeom xmlns:a="http://schemas.openxmlformats.org/drawingml/2006/main" prst="ellipse">
+            <a:avLst/>
+          </a:prstGeom>
+          <a:solidFill xmlns:a="http://schemas.openxmlformats.org/drawingml/2006/main">
+            <a:srgbClr val="F8FAFC"/>
+          </a:solidFill>
+          <a:ln xmlns:a="http://schemas.openxmlformats.org/drawingml/2006/main" w="25400">
+            <a:solidFill>
+              <a:srgbClr val="132A3A"/>
+            </a:solidFill>
+            <a:prstDash val="solid"/>
+          </a:ln>
+        </p:spPr>
+        <p:txBody>
+          <a:bodyPr xmlns:a="http://schemas.openxmlformats.org/drawingml/2006/main" wrap="square" lIns="0" tIns="0" rIns="0" bIns="0" anchor="t"/>
+          <a:lstStyle xmlns:a="http://schemas.openxmlformats.org/drawingml/2006/main"/>
+          <a:p xmlns:a="http://schemas.openxmlformats.org/drawingml/2006/main">
+            <a:r>
+              <a:rPr lang="en-US"/>
+              <a:t/>
+            </a:r>
+            <a:endParaRPr lang="en-US"/>
+          </a:p>
+        </p:txBody>
+      </p:sp>
+      <p:sp>
+        <p:nvSpPr>
+          <p:cNvPr id="20" name="timeline-number-2"/>
+          <p:cNvSpPr txBox="1"/>
+          <p:nvPr/>
+        </p:nvSpPr>
+        <p:spPr>
+          <a:xfrm xmlns:a="http://schemas.openxmlformats.org/drawingml/2006/main">
+            <a:off x="6096000" y="4076700"/>
+            <a:ext cx="533400" cy="190500"/>
+          </a:xfrm>
+          <a:prstGeom xmlns:a="http://schemas.openxmlformats.org/drawingml/2006/main" prst="rect">
+            <a:avLst/>
+          </a:prstGeom>
+          <a:noFill xmlns:a="http://schemas.openxmlformats.org/drawingml/2006/main"/>
+          <a:ln xmlns:a="http://schemas.openxmlformats.org/drawingml/2006/main" w="0">
+            <a:noFill/>
+          </a:ln>
+        </p:spPr>
+        <p:txBody>
+          <a:bodyPr xmlns:a="http://schemas.openxmlformats.org/drawingml/2006/main" wrap="square" lIns="0" tIns="0" rIns="0" bIns="0" anchor="t"/>
+          <a:lstStyle xmlns:a="http://schemas.openxmlformats.org/drawingml/2006/main"/>
+          <a:p xmlns:a="http://schemas.openxmlformats.org/drawingml/2006/main">
+            <a:pPr algn="ctr"/>
+            <a:r>
+              <a:rPr lang="en-US" sz="975" b="1">
+                <a:solidFill>
+                  <a:srgbClr val="1769D2"/>
+                </a:solidFill>
+                <a:latin typeface="Inter"/>
+                <a:ea typeface="Inter"/>
+              </a:rPr>
+              <a:t>03</a:t>
+            </a:r>
+            <a:endParaRPr lang="en-US"/>
+          </a:p>
+        </p:txBody>
+      </p:sp>
+      <p:sp>
+        <p:nvSpPr>
+          <p:cNvPr id="21" name="timeline-label-2"/>
+          <p:cNvSpPr txBox="1"/>
+          <p:nvPr/>
+        </p:nvSpPr>
+        <p:spPr>
+          <a:xfrm xmlns:a="http://schemas.openxmlformats.org/drawingml/2006/main">
+            <a:off x="5676900" y="5086350"/>
+            <a:ext cx="1371600" cy="228600"/>
+          </a:xfrm>
+          <a:prstGeom xmlns:a="http://schemas.openxmlformats.org/drawingml/2006/main" prst="rect">
+            <a:avLst/>
+          </a:prstGeom>
+          <a:noFill xmlns:a="http://schemas.openxmlformats.org/drawingml/2006/main"/>
+          <a:ln xmlns:a="http://schemas.openxmlformats.org/drawingml/2006/main" w="0">
+            <a:noFill/>
+          </a:ln>
+        </p:spPr>
+        <p:txBody>
+          <a:bodyPr xmlns:a="http://schemas.openxmlformats.org/drawingml/2006/main" wrap="square" lIns="0" tIns="0" rIns="0" bIns="0" anchor="t"/>
+          <a:lstStyle xmlns:a="http://schemas.openxmlformats.org/drawingml/2006/main"/>
+          <a:p xmlns:a="http://schemas.openxmlformats.org/drawingml/2006/main">
+            <a:pPr algn="ctr"/>
             <a:r>
               <a:rPr lang="en-US" sz="1350" b="1">
                 <a:solidFill>
@@ -2565,11 +2683,148 @@
                 <a:latin typeface="Inter"/>
                 <a:ea typeface="Inter"/>
               </a:rPr>
-              <a:t>mechanism, not proof of</a:t>
-            </a:r>
-            <a:endParaRPr lang="en-US"/>
-          </a:p>
-          <a:p xmlns:a="http://schemas.openxmlformats.org/drawingml/2006/main">
+              <a:t>Read</a:t>
+            </a:r>
+            <a:endParaRPr lang="en-US"/>
+          </a:p>
+        </p:txBody>
+      </p:sp>
+      <p:sp>
+        <p:nvSpPr>
+          <p:cNvPr id="22" name="timeline-text-2"/>
+          <p:cNvSpPr txBox="1"/>
+          <p:nvPr/>
+        </p:nvSpPr>
+        <p:spPr>
+          <a:xfrm xmlns:a="http://schemas.openxmlformats.org/drawingml/2006/main">
+            <a:off x="5467350" y="5391150"/>
+            <a:ext cx="1790700" cy="361950"/>
+          </a:xfrm>
+          <a:prstGeom xmlns:a="http://schemas.openxmlformats.org/drawingml/2006/main" prst="rect">
+            <a:avLst/>
+          </a:prstGeom>
+          <a:noFill xmlns:a="http://schemas.openxmlformats.org/drawingml/2006/main"/>
+          <a:ln xmlns:a="http://schemas.openxmlformats.org/drawingml/2006/main" w="0">
+            <a:noFill/>
+          </a:ln>
+        </p:spPr>
+        <p:txBody>
+          <a:bodyPr xmlns:a="http://schemas.openxmlformats.org/drawingml/2006/main" wrap="square" lIns="0" tIns="0" rIns="0" bIns="0" anchor="t"/>
+          <a:lstStyle xmlns:a="http://schemas.openxmlformats.org/drawingml/2006/main"/>
+          <a:p xmlns:a="http://schemas.openxmlformats.org/drawingml/2006/main">
+            <a:pPr algn="ctr"/>
+            <a:r>
+              <a:rPr lang="en-US" sz="1050">
+                <a:solidFill>
+                  <a:srgbClr val="8A969F"/>
+                </a:solidFill>
+                <a:latin typeface="Inter"/>
+                <a:ea typeface="Inter"/>
+              </a:rPr>
+              <a:t>Separate signal</a:t>
+            </a:r>
+            <a:endParaRPr lang="en-US"/>
+          </a:p>
+        </p:txBody>
+      </p:sp>
+      <p:sp>
+        <p:nvSpPr>
+          <p:cNvPr id="23" name="timeline-node-3"/>
+          <p:cNvSpPr/>
+          <p:nvPr/>
+        </p:nvSpPr>
+        <p:spPr>
+          <a:xfrm xmlns:a="http://schemas.openxmlformats.org/drawingml/2006/main">
+            <a:off x="8782050" y="4610100"/>
+            <a:ext cx="304800" cy="304800"/>
+          </a:xfrm>
+          <a:prstGeom xmlns:a="http://schemas.openxmlformats.org/drawingml/2006/main" prst="ellipse">
+            <a:avLst/>
+          </a:prstGeom>
+          <a:solidFill xmlns:a="http://schemas.openxmlformats.org/drawingml/2006/main">
+            <a:srgbClr val="F8FAFC"/>
+          </a:solidFill>
+          <a:ln xmlns:a="http://schemas.openxmlformats.org/drawingml/2006/main" w="25400">
+            <a:solidFill>
+              <a:srgbClr val="132A3A"/>
+            </a:solidFill>
+            <a:prstDash val="solid"/>
+          </a:ln>
+        </p:spPr>
+        <p:txBody>
+          <a:bodyPr xmlns:a="http://schemas.openxmlformats.org/drawingml/2006/main" wrap="square" lIns="0" tIns="0" rIns="0" bIns="0" anchor="t"/>
+          <a:lstStyle xmlns:a="http://schemas.openxmlformats.org/drawingml/2006/main"/>
+          <a:p xmlns:a="http://schemas.openxmlformats.org/drawingml/2006/main">
+            <a:r>
+              <a:rPr lang="en-US"/>
+              <a:t/>
+            </a:r>
+            <a:endParaRPr lang="en-US"/>
+          </a:p>
+        </p:txBody>
+      </p:sp>
+      <p:sp>
+        <p:nvSpPr>
+          <p:cNvPr id="24" name="timeline-number-3"/>
+          <p:cNvSpPr txBox="1"/>
+          <p:nvPr/>
+        </p:nvSpPr>
+        <p:spPr>
+          <a:xfrm xmlns:a="http://schemas.openxmlformats.org/drawingml/2006/main">
+            <a:off x="8667750" y="4076700"/>
+            <a:ext cx="533400" cy="190500"/>
+          </a:xfrm>
+          <a:prstGeom xmlns:a="http://schemas.openxmlformats.org/drawingml/2006/main" prst="rect">
+            <a:avLst/>
+          </a:prstGeom>
+          <a:noFill xmlns:a="http://schemas.openxmlformats.org/drawingml/2006/main"/>
+          <a:ln xmlns:a="http://schemas.openxmlformats.org/drawingml/2006/main" w="0">
+            <a:noFill/>
+          </a:ln>
+        </p:spPr>
+        <p:txBody>
+          <a:bodyPr xmlns:a="http://schemas.openxmlformats.org/drawingml/2006/main" wrap="square" lIns="0" tIns="0" rIns="0" bIns="0" anchor="t"/>
+          <a:lstStyle xmlns:a="http://schemas.openxmlformats.org/drawingml/2006/main"/>
+          <a:p xmlns:a="http://schemas.openxmlformats.org/drawingml/2006/main">
+            <a:pPr algn="ctr"/>
+            <a:r>
+              <a:rPr lang="en-US" sz="975" b="1">
+                <a:solidFill>
+                  <a:srgbClr val="1769D2"/>
+                </a:solidFill>
+                <a:latin typeface="Inter"/>
+                <a:ea typeface="Inter"/>
+              </a:rPr>
+              <a:t>04</a:t>
+            </a:r>
+            <a:endParaRPr lang="en-US"/>
+          </a:p>
+        </p:txBody>
+      </p:sp>
+      <p:sp>
+        <p:nvSpPr>
+          <p:cNvPr id="25" name="timeline-label-3"/>
+          <p:cNvSpPr txBox="1"/>
+          <p:nvPr/>
+        </p:nvSpPr>
+        <p:spPr>
+          <a:xfrm xmlns:a="http://schemas.openxmlformats.org/drawingml/2006/main">
+            <a:off x="8248650" y="5086350"/>
+            <a:ext cx="1371600" cy="228600"/>
+          </a:xfrm>
+          <a:prstGeom xmlns:a="http://schemas.openxmlformats.org/drawingml/2006/main" prst="rect">
+            <a:avLst/>
+          </a:prstGeom>
+          <a:noFill xmlns:a="http://schemas.openxmlformats.org/drawingml/2006/main"/>
+          <a:ln xmlns:a="http://schemas.openxmlformats.org/drawingml/2006/main" w="0">
+            <a:noFill/>
+          </a:ln>
+        </p:spPr>
+        <p:txBody>
+          <a:bodyPr xmlns:a="http://schemas.openxmlformats.org/drawingml/2006/main" wrap="square" lIns="0" tIns="0" rIns="0" bIns="0" anchor="t"/>
+          <a:lstStyle xmlns:a="http://schemas.openxmlformats.org/drawingml/2006/main"/>
+          <a:p xmlns:a="http://schemas.openxmlformats.org/drawingml/2006/main">
+            <a:pPr algn="ctr"/>
             <a:r>
               <a:rPr lang="en-US" sz="1350" b="1">
                 <a:solidFill>
@@ -2578,15 +2833,277 @@
                 <a:latin typeface="Inter"/>
                 <a:ea typeface="Inter"/>
               </a:rPr>
-              <a:t>generalization.</a:t>
-            </a:r>
-            <a:endParaRPr lang="en-US"/>
-          </a:p>
-        </p:txBody>
-      </p:sp>
-      <p:sp>
-        <p:nvSpPr>
-          <p:cNvPr id="14" name="evidence-band"/>
+              <a:t>Move</a:t>
+            </a:r>
+            <a:endParaRPr lang="en-US"/>
+          </a:p>
+        </p:txBody>
+      </p:sp>
+      <p:sp>
+        <p:nvSpPr>
+          <p:cNvPr id="26" name="timeline-text-3"/>
+          <p:cNvSpPr txBox="1"/>
+          <p:nvPr/>
+        </p:nvSpPr>
+        <p:spPr>
+          <a:xfrm xmlns:a="http://schemas.openxmlformats.org/drawingml/2006/main">
+            <a:off x="8039100" y="5391150"/>
+            <a:ext cx="1790700" cy="361950"/>
+          </a:xfrm>
+          <a:prstGeom xmlns:a="http://schemas.openxmlformats.org/drawingml/2006/main" prst="rect">
+            <a:avLst/>
+          </a:prstGeom>
+          <a:noFill xmlns:a="http://schemas.openxmlformats.org/drawingml/2006/main"/>
+          <a:ln xmlns:a="http://schemas.openxmlformats.org/drawingml/2006/main" w="0">
+            <a:noFill/>
+          </a:ln>
+        </p:spPr>
+        <p:txBody>
+          <a:bodyPr xmlns:a="http://schemas.openxmlformats.org/drawingml/2006/main" wrap="square" lIns="0" tIns="0" rIns="0" bIns="0" anchor="t"/>
+          <a:lstStyle xmlns:a="http://schemas.openxmlformats.org/drawingml/2006/main"/>
+          <a:p xmlns:a="http://schemas.openxmlformats.org/drawingml/2006/main">
+            <a:pPr algn="ctr"/>
+            <a:r>
+              <a:rPr lang="en-US" sz="1050">
+                <a:solidFill>
+                  <a:srgbClr val="8A969F"/>
+                </a:solidFill>
+                <a:latin typeface="Inter"/>
+                <a:ea typeface="Inter"/>
+              </a:rPr>
+              <a:t>Set the next gate</a:t>
+            </a:r>
+            <a:endParaRPr lang="en-US"/>
+          </a:p>
+        </p:txBody>
+      </p:sp>
+      <p:sp>
+        <p:nvSpPr>
+          <p:cNvPr id="27" name="timeline-node-4"/>
+          <p:cNvSpPr/>
+          <p:nvPr/>
+        </p:nvSpPr>
+        <p:spPr>
+          <a:xfrm xmlns:a="http://schemas.openxmlformats.org/drawingml/2006/main">
+            <a:off x="11353800" y="4610100"/>
+            <a:ext cx="304800" cy="304800"/>
+          </a:xfrm>
+          <a:prstGeom xmlns:a="http://schemas.openxmlformats.org/drawingml/2006/main" prst="ellipse">
+            <a:avLst/>
+          </a:prstGeom>
+          <a:solidFill xmlns:a="http://schemas.openxmlformats.org/drawingml/2006/main">
+            <a:srgbClr val="1769D2"/>
+          </a:solidFill>
+          <a:ln xmlns:a="http://schemas.openxmlformats.org/drawingml/2006/main" w="25400">
+            <a:solidFill>
+              <a:srgbClr val="1769D2"/>
+            </a:solidFill>
+            <a:prstDash val="solid"/>
+          </a:ln>
+        </p:spPr>
+        <p:txBody>
+          <a:bodyPr xmlns:a="http://schemas.openxmlformats.org/drawingml/2006/main" wrap="square" lIns="0" tIns="0" rIns="0" bIns="0" anchor="t"/>
+          <a:lstStyle xmlns:a="http://schemas.openxmlformats.org/drawingml/2006/main"/>
+          <a:p xmlns:a="http://schemas.openxmlformats.org/drawingml/2006/main">
+            <a:r>
+              <a:rPr lang="en-US"/>
+              <a:t/>
+            </a:r>
+            <a:endParaRPr lang="en-US"/>
+          </a:p>
+        </p:txBody>
+      </p:sp>
+      <p:sp>
+        <p:nvSpPr>
+          <p:cNvPr id="28" name="timeline-number-4"/>
+          <p:cNvSpPr txBox="1"/>
+          <p:nvPr/>
+        </p:nvSpPr>
+        <p:spPr>
+          <a:xfrm xmlns:a="http://schemas.openxmlformats.org/drawingml/2006/main">
+            <a:off x="11239500" y="4076700"/>
+            <a:ext cx="533400" cy="190500"/>
+          </a:xfrm>
+          <a:prstGeom xmlns:a="http://schemas.openxmlformats.org/drawingml/2006/main" prst="rect">
+            <a:avLst/>
+          </a:prstGeom>
+          <a:noFill xmlns:a="http://schemas.openxmlformats.org/drawingml/2006/main"/>
+          <a:ln xmlns:a="http://schemas.openxmlformats.org/drawingml/2006/main" w="0">
+            <a:noFill/>
+          </a:ln>
+        </p:spPr>
+        <p:txBody>
+          <a:bodyPr xmlns:a="http://schemas.openxmlformats.org/drawingml/2006/main" wrap="square" lIns="0" tIns="0" rIns="0" bIns="0" anchor="t"/>
+          <a:lstStyle xmlns:a="http://schemas.openxmlformats.org/drawingml/2006/main"/>
+          <a:p xmlns:a="http://schemas.openxmlformats.org/drawingml/2006/main">
+            <a:pPr algn="ctr"/>
+            <a:r>
+              <a:rPr lang="en-US" sz="975" b="1">
+                <a:solidFill>
+                  <a:srgbClr val="1769D2"/>
+                </a:solidFill>
+                <a:latin typeface="Inter"/>
+                <a:ea typeface="Inter"/>
+              </a:rPr>
+              <a:t>05</a:t>
+            </a:r>
+            <a:endParaRPr lang="en-US"/>
+          </a:p>
+        </p:txBody>
+      </p:sp>
+      <p:sp>
+        <p:nvSpPr>
+          <p:cNvPr id="29" name="timeline-label-4"/>
+          <p:cNvSpPr txBox="1"/>
+          <p:nvPr/>
+        </p:nvSpPr>
+        <p:spPr>
+          <a:xfrm xmlns:a="http://schemas.openxmlformats.org/drawingml/2006/main">
+            <a:off x="10820400" y="5086350"/>
+            <a:ext cx="1371600" cy="228600"/>
+          </a:xfrm>
+          <a:prstGeom xmlns:a="http://schemas.openxmlformats.org/drawingml/2006/main" prst="rect">
+            <a:avLst/>
+          </a:prstGeom>
+          <a:noFill xmlns:a="http://schemas.openxmlformats.org/drawingml/2006/main"/>
+          <a:ln xmlns:a="http://schemas.openxmlformats.org/drawingml/2006/main" w="0">
+            <a:noFill/>
+          </a:ln>
+        </p:spPr>
+        <p:txBody>
+          <a:bodyPr xmlns:a="http://schemas.openxmlformats.org/drawingml/2006/main" wrap="square" lIns="0" tIns="0" rIns="0" bIns="0" anchor="t"/>
+          <a:lstStyle xmlns:a="http://schemas.openxmlformats.org/drawingml/2006/main"/>
+          <a:p xmlns:a="http://schemas.openxmlformats.org/drawingml/2006/main">
+            <a:pPr algn="ctr"/>
+            <a:r>
+              <a:rPr lang="en-US" sz="1350" b="1">
+                <a:solidFill>
+                  <a:srgbClr val="132A3A"/>
+                </a:solidFill>
+                <a:latin typeface="Inter"/>
+                <a:ea typeface="Inter"/>
+              </a:rPr>
+              <a:t>Scale</a:t>
+            </a:r>
+            <a:endParaRPr lang="en-US"/>
+          </a:p>
+        </p:txBody>
+      </p:sp>
+      <p:sp>
+        <p:nvSpPr>
+          <p:cNvPr id="30" name="timeline-text-4"/>
+          <p:cNvSpPr txBox="1"/>
+          <p:nvPr/>
+        </p:nvSpPr>
+        <p:spPr>
+          <a:xfrm xmlns:a="http://schemas.openxmlformats.org/drawingml/2006/main">
+            <a:off x="10610850" y="5391150"/>
+            <a:ext cx="1790700" cy="361950"/>
+          </a:xfrm>
+          <a:prstGeom xmlns:a="http://schemas.openxmlformats.org/drawingml/2006/main" prst="rect">
+            <a:avLst/>
+          </a:prstGeom>
+          <a:noFill xmlns:a="http://schemas.openxmlformats.org/drawingml/2006/main"/>
+          <a:ln xmlns:a="http://schemas.openxmlformats.org/drawingml/2006/main" w="0">
+            <a:noFill/>
+          </a:ln>
+        </p:spPr>
+        <p:txBody>
+          <a:bodyPr xmlns:a="http://schemas.openxmlformats.org/drawingml/2006/main" wrap="square" lIns="0" tIns="0" rIns="0" bIns="0" anchor="t"/>
+          <a:lstStyle xmlns:a="http://schemas.openxmlformats.org/drawingml/2006/main"/>
+          <a:p xmlns:a="http://schemas.openxmlformats.org/drawingml/2006/main">
+            <a:pPr algn="ctr"/>
+            <a:r>
+              <a:rPr lang="en-US" sz="1050">
+                <a:solidFill>
+                  <a:srgbClr val="8A969F"/>
+                </a:solidFill>
+                <a:latin typeface="Inter"/>
+                <a:ea typeface="Inter"/>
+              </a:rPr>
+              <a:t>Repeat what held</a:t>
+            </a:r>
+            <a:endParaRPr lang="en-US"/>
+          </a:p>
+        </p:txBody>
+      </p:sp>
+      <p:sp>
+        <p:nvSpPr>
+          <p:cNvPr id="31" name="timeline-read-label"/>
+          <p:cNvSpPr txBox="1"/>
+          <p:nvPr/>
+        </p:nvSpPr>
+        <p:spPr>
+          <a:xfrm xmlns:a="http://schemas.openxmlformats.org/drawingml/2006/main">
+            <a:off x="1066800" y="6667500"/>
+            <a:ext cx="2286000" cy="209550"/>
+          </a:xfrm>
+          <a:prstGeom xmlns:a="http://schemas.openxmlformats.org/drawingml/2006/main" prst="rect">
+            <a:avLst/>
+          </a:prstGeom>
+          <a:noFill xmlns:a="http://schemas.openxmlformats.org/drawingml/2006/main"/>
+          <a:ln xmlns:a="http://schemas.openxmlformats.org/drawingml/2006/main" w="0">
+            <a:noFill/>
+          </a:ln>
+        </p:spPr>
+        <p:txBody>
+          <a:bodyPr xmlns:a="http://schemas.openxmlformats.org/drawingml/2006/main" wrap="square" lIns="0" tIns="0" rIns="0" bIns="0" anchor="t"/>
+          <a:lstStyle xmlns:a="http://schemas.openxmlformats.org/drawingml/2006/main"/>
+          <a:p xmlns:a="http://schemas.openxmlformats.org/drawingml/2006/main">
+            <a:r>
+              <a:rPr lang="en-US" sz="1050" b="1">
+                <a:solidFill>
+                  <a:srgbClr val="1769D2"/>
+                </a:solidFill>
+                <a:latin typeface="Inter"/>
+                <a:ea typeface="Inter"/>
+              </a:rPr>
+              <a:t>READ-THROUGH</a:t>
+            </a:r>
+            <a:endParaRPr lang="en-US"/>
+          </a:p>
+        </p:txBody>
+      </p:sp>
+      <p:sp>
+        <p:nvSpPr>
+          <p:cNvPr id="32" name="timeline-read"/>
+          <p:cNvSpPr txBox="1"/>
+          <p:nvPr/>
+        </p:nvSpPr>
+        <p:spPr>
+          <a:xfrm xmlns:a="http://schemas.openxmlformats.org/drawingml/2006/main">
+            <a:off x="3333750" y="6629400"/>
+            <a:ext cx="8191500" cy="266700"/>
+          </a:xfrm>
+          <a:prstGeom xmlns:a="http://schemas.openxmlformats.org/drawingml/2006/main" prst="rect">
+            <a:avLst/>
+          </a:prstGeom>
+          <a:noFill xmlns:a="http://schemas.openxmlformats.org/drawingml/2006/main"/>
+          <a:ln xmlns:a="http://schemas.openxmlformats.org/drawingml/2006/main" w="0">
+            <a:noFill/>
+          </a:ln>
+        </p:spPr>
+        <p:txBody>
+          <a:bodyPr xmlns:a="http://schemas.openxmlformats.org/drawingml/2006/main" wrap="square" lIns="0" tIns="0" rIns="0" bIns="0" anchor="t"/>
+          <a:lstStyle xmlns:a="http://schemas.openxmlformats.org/drawingml/2006/main"/>
+          <a:p xmlns:a="http://schemas.openxmlformats.org/drawingml/2006/main">
+            <a:r>
+              <a:rPr lang="en-US" sz="1425" b="1">
+                <a:solidFill>
+                  <a:srgbClr val="132A3A"/>
+                </a:solidFill>
+                <a:latin typeface="Inter"/>
+                <a:ea typeface="Inter"/>
+              </a:rPr>
+              <a:t>A sequence is useful when each handoff changes what can happen next.</a:t>
+            </a:r>
+            <a:endParaRPr lang="en-US"/>
+          </a:p>
+        </p:txBody>
+      </p:sp>
+      <p:sp>
+        <p:nvSpPr>
+          <p:cNvPr id="33" name="evidence-band"/>
           <p:cNvSpPr/>
           <p:nvPr/>
         </p:nvSpPr>
@@ -2622,7 +3139,7 @@
       </p:sp>
       <p:sp>
         <p:nvSpPr>
-          <p:cNvPr id="15" name="evidence-band-text"/>
+          <p:cNvPr id="34" name="evidence-band-text"/>
           <p:cNvSpPr txBox="1"/>
           <p:nvPr/>
         </p:nvSpPr>
@@ -2659,7 +3176,7 @@
       </p:sp>
       <p:sp>
         <p:nvSpPr>
-          <p:cNvPr id="16" name="source"/>
+          <p:cNvPr id="35" name="source"/>
           <p:cNvSpPr txBox="1"/>
           <p:nvPr/>
         </p:nvSpPr>
@@ -2696,7 +3213,7 @@
       </p:sp>
       <p:sp>
         <p:nvSpPr>
-          <p:cNvPr id="17" name="page-number"/>
+          <p:cNvPr id="36" name="page-number"/>
           <p:cNvSpPr txBox="1"/>
           <p:nvPr/>
         </p:nvSpPr>
@@ -3900,7 +4417,7 @@
     <p:bg>
       <p:bgPr>
         <a:blipFill xmlns:a="http://schemas.openxmlformats.org/drawingml/2006/main">
-          <a:blip xmlns:r="http://schemas.openxmlformats.org/officeDocument/2006/relationships" r:embed="rIdOfficeKitImaged71bfa074cda59bb_1"/>
+          <a:blip xmlns:r="http://schemas.openxmlformats.org/officeDocument/2006/relationships" r:embed="rIdOfficeKitImage06e55191024fa458_1"/>
           <a:stretch>
             <a:fillRect/>
           </a:stretch>
@@ -4230,7 +4747,7 @@
     <p:bg>
       <p:bgPr>
         <a:blipFill xmlns:a="http://schemas.openxmlformats.org/drawingml/2006/main">
-          <a:blip xmlns:r="http://schemas.openxmlformats.org/officeDocument/2006/relationships" r:embed="rIdOfficeKitImage6af8c9b5dff6e3a3_1"/>
+          <a:blip xmlns:r="http://schemas.openxmlformats.org/officeDocument/2006/relationships" r:embed="rIdOfficeKitImagefff481b85b8743d2_1"/>
           <a:stretch>
             <a:fillRect/>
           </a:stretch>

--- a/skills/presentation-template-library/skills/artifact-template-blueprint-lecture/assets/reference.pptx
+++ b/skills/presentation-template-library/skills/artifact-template-blueprint-lecture/assets/reference.pptx
@@ -995,7 +995,7 @@
     <p:bg>
       <p:bgPr>
         <a:blipFill xmlns:a="http://schemas.openxmlformats.org/drawingml/2006/main">
-          <a:blip xmlns:r="http://schemas.openxmlformats.org/officeDocument/2006/relationships" r:embed="rIdOfficeKitImage260725ec97288f31_1"/>
+          <a:blip xmlns:r="http://schemas.openxmlformats.org/officeDocument/2006/relationships" r:embed="rIdOfficeKitImagee56ecbe4d29b219f_1"/>
           <a:stretch>
             <a:fillRect/>
           </a:stretch>
@@ -1917,7 +1917,7 @@
     <p:bg>
       <p:bgPr>
         <a:blipFill xmlns:a="http://schemas.openxmlformats.org/drawingml/2006/main">
-          <a:blip xmlns:r="http://schemas.openxmlformats.org/officeDocument/2006/relationships" r:embed="rIdOfficeKitImage5e425a7c66b022d4_1"/>
+          <a:blip xmlns:r="http://schemas.openxmlformats.org/officeDocument/2006/relationships" r:embed="rIdOfficeKitImage260725ec97288f31_1"/>
           <a:stretch>
             <a:fillRect/>
           </a:stretch>
@@ -4417,7 +4417,7 @@
     <p:bg>
       <p:bgPr>
         <a:blipFill xmlns:a="http://schemas.openxmlformats.org/drawingml/2006/main">
-          <a:blip xmlns:r="http://schemas.openxmlformats.org/officeDocument/2006/relationships" r:embed="rIdOfficeKitImage06e55191024fa458_1"/>
+          <a:blip xmlns:r="http://schemas.openxmlformats.org/officeDocument/2006/relationships" r:embed="rIdOfficeKitImage5e425a7c66b022d4_1"/>
           <a:stretch>
             <a:fillRect/>
           </a:stretch>
@@ -4747,7 +4747,7 @@
     <p:bg>
       <p:bgPr>
         <a:blipFill xmlns:a="http://schemas.openxmlformats.org/drawingml/2006/main">
-          <a:blip xmlns:r="http://schemas.openxmlformats.org/officeDocument/2006/relationships" r:embed="rIdOfficeKitImagefff481b85b8743d2_1"/>
+          <a:blip xmlns:r="http://schemas.openxmlformats.org/officeDocument/2006/relationships" r:embed="rIdOfficeKitImage1b6b179a3c4fe9dd_1"/>
           <a:stretch>
             <a:fillRect/>
           </a:stretch>
